--- a/Bases de Datos II/Clases/Clase 6 - Optimizacion de consultas/Presentacion.pptx
+++ b/Bases de Datos II/Clases/Clase 6 - Optimizacion de consultas/Presentacion.pptx
@@ -20,8 +20,6 @@
     <p:sldId id="268" r:id="rId19"/>
     <p:sldId id="269" r:id="rId20"/>
     <p:sldId id="270" r:id="rId21"/>
-    <p:sldId id="271" r:id="rId22"/>
-    <p:sldId id="272" r:id="rId23"/>
   </p:sldIdLst>
   <p:sldSz cx="12191695" cy="6858000" type="screen4x3"/>
   <p:notesSz cx="6858000" cy="9144000"/>
@@ -6112,1017 +6110,6 @@
         <p:spPr>
           <a:xfrm>
             <a:off x="0" y="0"/>
-            <a:ext cx="12191695" cy="1170432"/>
-          </a:xfrm>
-          <a:prstGeom prst="rect">
-            <a:avLst/>
-          </a:prstGeom>
-          <a:solidFill>
-            <a:srgbClr val="095292"/>
-          </a:solidFill>
-          <a:ln>
-            <a:noFill/>
-          </a:ln>
-        </p:spPr>
-        <p:style>
-          <a:lnRef idx="1">
-            <a:schemeClr val="accent1"/>
-          </a:lnRef>
-          <a:fillRef idx="3">
-            <a:schemeClr val="accent1"/>
-          </a:fillRef>
-          <a:effectRef idx="2">
-            <a:schemeClr val="accent1"/>
-          </a:effectRef>
-          <a:fontRef idx="minor">
-            <a:schemeClr val="lt1"/>
-          </a:fontRef>
-        </p:style>
-        <p:txBody>
-          <a:bodyPr rtlCol="0" anchor="ctr"/>
-          <a:lstStyle/>
-          <a:p>
-            <a:pPr algn="ctr"/>
-          </a:p>
-        </p:txBody>
-      </p:sp>
-      <p:sp>
-        <p:nvSpPr>
-          <p:cNvPr id="3" name="Rectangle 2"/>
-          <p:cNvSpPr/>
-          <p:nvPr/>
-        </p:nvSpPr>
-        <p:spPr>
-          <a:xfrm>
-            <a:off x="0" y="1170432"/>
-            <a:ext cx="12191695" cy="41148"/>
-          </a:xfrm>
-          <a:prstGeom prst="rect">
-            <a:avLst/>
-          </a:prstGeom>
-          <a:solidFill>
-            <a:srgbClr val="FFD000"/>
-          </a:solidFill>
-          <a:ln>
-            <a:noFill/>
-          </a:ln>
-        </p:spPr>
-        <p:style>
-          <a:lnRef idx="1">
-            <a:schemeClr val="accent1"/>
-          </a:lnRef>
-          <a:fillRef idx="3">
-            <a:schemeClr val="accent1"/>
-          </a:fillRef>
-          <a:effectRef idx="2">
-            <a:schemeClr val="accent1"/>
-          </a:effectRef>
-          <a:fontRef idx="minor">
-            <a:schemeClr val="lt1"/>
-          </a:fontRef>
-        </p:style>
-        <p:txBody>
-          <a:bodyPr rtlCol="0" anchor="ctr"/>
-          <a:lstStyle/>
-          <a:p>
-            <a:pPr algn="ctr"/>
-          </a:p>
-        </p:txBody>
-      </p:sp>
-      <p:sp>
-        <p:nvSpPr>
-          <p:cNvPr id="4" name="TextBox 3"/>
-          <p:cNvSpPr txBox="1"/>
-          <p:nvPr/>
-        </p:nvSpPr>
-        <p:spPr>
-          <a:xfrm>
-            <a:off x="457200" y="164592"/>
-            <a:ext cx="11277295" cy="384048"/>
-          </a:xfrm>
-          <a:prstGeom prst="rect">
-            <a:avLst/>
-          </a:prstGeom>
-          <a:noFill/>
-        </p:spPr>
-        <p:txBody>
-          <a:bodyPr wrap="square">
-            <a:spAutoFit/>
-          </a:bodyPr>
-          <a:lstStyle/>
-          <a:p>
-            <a:r>
-              <a:rPr sz="2600" b="1" i="0">
-                <a:solidFill>
-                  <a:srgbClr val="FFFFFF"/>
-                </a:solidFill>
-                <a:latin typeface="Calibri"/>
-              </a:rPr>
-              <a:t>Quiz rapido (cierre)</a:t>
-            </a:r>
-          </a:p>
-        </p:txBody>
-      </p:sp>
-      <p:sp>
-        <p:nvSpPr>
-          <p:cNvPr id="5" name="TextBox 4"/>
-          <p:cNvSpPr txBox="1"/>
-          <p:nvPr/>
-        </p:nvSpPr>
-        <p:spPr>
-          <a:xfrm>
-            <a:off x="457200" y="566928"/>
-            <a:ext cx="11277295" cy="411480"/>
-          </a:xfrm>
-          <a:prstGeom prst="rect">
-            <a:avLst/>
-          </a:prstGeom>
-          <a:noFill/>
-        </p:spPr>
-        <p:txBody>
-          <a:bodyPr wrap="square">
-            <a:spAutoFit/>
-          </a:bodyPr>
-          <a:lstStyle/>
-          <a:p>
-            <a:r>
-              <a:rPr sz="1400" b="0" i="0">
-                <a:solidFill>
-                  <a:srgbClr val="B8D8EE"/>
-                </a:solidFill>
-                <a:latin typeface="Calibri"/>
-              </a:rPr>
-              <a:t>Individual · 8–10 min</a:t>
-            </a:r>
-          </a:p>
-        </p:txBody>
-      </p:sp>
-      <p:sp>
-        <p:nvSpPr>
-          <p:cNvPr id="6" name="TextBox 5"/>
-          <p:cNvSpPr txBox="1"/>
-          <p:nvPr/>
-        </p:nvSpPr>
-        <p:spPr>
-          <a:xfrm>
-            <a:off x="457200" y="1380744"/>
-            <a:ext cx="11277295" cy="5020056"/>
-          </a:xfrm>
-          <a:prstGeom prst="rect">
-            <a:avLst/>
-          </a:prstGeom>
-          <a:noFill/>
-        </p:spPr>
-        <p:txBody>
-          <a:bodyPr wrap="square">
-            <a:spAutoFit/>
-          </a:bodyPr>
-          <a:lstStyle/>
-          <a:p>
-            <a:pPr>
-              <a:spcAft>
-                <a:spcPts val="800"/>
-              </a:spcAft>
-            </a:pPr>
-            <a:r>
-              <a:rPr sz="1200" b="1" i="0">
-                <a:solidFill>
-                  <a:srgbClr val="333333"/>
-                </a:solidFill>
-                <a:latin typeface="Calibri"/>
-              </a:rPr>
-              <a:t>1.</a:t>
-            </a:r>
-            <a:r>
-              <a:rPr sz="1200" b="0" i="0">
-                <a:solidFill>
-                  <a:srgbClr val="333333"/>
-                </a:solidFill>
-                <a:latin typeface="Calibri"/>
-              </a:rPr>
-              <a:t> Anti-patrón de consulta en VetCare:</a:t>
-            </a:r>
-          </a:p>
-          <a:p>
-            <a:pPr>
-              <a:spcAft>
-                <a:spcPts val="800"/>
-              </a:spcAft>
-            </a:pPr>
-            <a:r>
-              <a:rPr sz="1200" b="0" i="0">
-                <a:solidFill>
-                  <a:srgbClr val="333333"/>
-                </a:solidFill>
-                <a:latin typeface="Calibri"/>
-              </a:rPr>
-              <a:t>–   ('A) Filtrar por fecha', 1)</a:t>
-            </a:r>
-          </a:p>
-          <a:p>
-            <a:pPr>
-              <a:spcAft>
-                <a:spcPts val="800"/>
-              </a:spcAft>
-            </a:pPr>
-            <a:r>
-              <a:rPr sz="1200" b="0" i="0">
-                <a:solidFill>
-                  <a:srgbClr val="333333"/>
-                </a:solidFill>
-                <a:latin typeface="Calibri"/>
-              </a:rPr>
-              <a:t>–   ('B) SELECT * con producto cartesiano / sin filtro', 1)</a:t>
-            </a:r>
-          </a:p>
-          <a:p>
-            <a:pPr>
-              <a:spcAft>
-                <a:spcPts val="800"/>
-              </a:spcAft>
-            </a:pPr>
-            <a:r>
-              <a:rPr sz="1200" b="0" i="0">
-                <a:solidFill>
-                  <a:srgbClr val="333333"/>
-                </a:solidFill>
-                <a:latin typeface="Calibri"/>
-              </a:rPr>
-              <a:t>–   ('C) Proyectar columnas', 1)</a:t>
-            </a:r>
-          </a:p>
-          <a:p>
-            <a:pPr>
-              <a:spcAft>
-                <a:spcPts val="800"/>
-              </a:spcAft>
-            </a:pPr>
-            <a:r>
-              <a:rPr sz="1200" b="0" i="0">
-                <a:solidFill>
-                  <a:srgbClr val="333333"/>
-                </a:solidFill>
-                <a:latin typeface="Calibri"/>
-              </a:rPr>
-              <a:t>–   ('D) Usar índice selectivo', 1)</a:t>
-            </a:r>
-          </a:p>
-          <a:p>
-            <a:pPr>
-              <a:spcAft>
-                <a:spcPts val="800"/>
-              </a:spcAft>
-            </a:pPr>
-            <a:r>
-              <a:rPr sz="1200" b="0" i="0">
-                <a:solidFill>
-                  <a:srgbClr val="333333"/>
-                </a:solidFill>
-                <a:latin typeface="Calibri"/>
-              </a:rPr>
-              <a:t>–   </a:t>
-            </a:r>
-            <a:r>
-              <a:rPr sz="1200" b="1" i="0">
-                <a:solidFill>
-                  <a:srgbClr val="333333"/>
-                </a:solidFill>
-                <a:latin typeface="Calibri"/>
-              </a:rPr>
-              <a:t>2.</a:t>
-            </a:r>
-            <a:r>
-              <a:rPr sz="1200" b="0" i="0">
-                <a:solidFill>
-                  <a:srgbClr val="333333"/>
-                </a:solidFill>
-                <a:latin typeface="Calibri"/>
-              </a:rPr>
-              <a:t> Evidencia de optimización pedida en el PI:</a:t>
-            </a:r>
-          </a:p>
-          <a:p>
-            <a:pPr>
-              <a:spcAft>
-                <a:spcPts val="800"/>
-              </a:spcAft>
-            </a:pPr>
-            <a:r>
-              <a:rPr sz="1200" b="0" i="0">
-                <a:solidFill>
-                  <a:srgbClr val="333333"/>
-                </a:solidFill>
-                <a:latin typeface="Calibri"/>
-              </a:rPr>
-              <a:t>–   ('A) Ninguna', 1)</a:t>
-            </a:r>
-          </a:p>
-          <a:p>
-            <a:pPr>
-              <a:spcAft>
-                <a:spcPts val="800"/>
-              </a:spcAft>
-            </a:pPr>
-            <a:r>
-              <a:rPr sz="1200" b="0" i="0">
-                <a:solidFill>
-                  <a:srgbClr val="333333"/>
-                </a:solidFill>
-                <a:latin typeface="Calibri"/>
-              </a:rPr>
-              <a:t>–   ('B) ≥2 consultas antes/después con justificación', 1)</a:t>
-            </a:r>
-          </a:p>
-          <a:p>
-            <a:pPr>
-              <a:spcAft>
-                <a:spcPts val="800"/>
-              </a:spcAft>
-            </a:pPr>
-            <a:r>
-              <a:rPr sz="1200" b="0" i="0">
-                <a:solidFill>
-                  <a:srgbClr val="333333"/>
-                </a:solidFill>
-                <a:latin typeface="Calibri"/>
-              </a:rPr>
-              <a:t>–   ('C) Solo cambiar el color del ER', 1)</a:t>
-            </a:r>
-          </a:p>
-          <a:p>
-            <a:pPr>
-              <a:spcAft>
-                <a:spcPts val="800"/>
-              </a:spcAft>
-            </a:pPr>
-            <a:r>
-              <a:rPr sz="1200" b="0" i="0">
-                <a:solidFill>
-                  <a:srgbClr val="333333"/>
-                </a:solidFill>
-                <a:latin typeface="Calibri"/>
-              </a:rPr>
-              <a:t>–   ('D) Borrar la BD', 1)</a:t>
-            </a:r>
-          </a:p>
-          <a:p>
-            <a:pPr>
-              <a:spcAft>
-                <a:spcPts val="800"/>
-              </a:spcAft>
-            </a:pPr>
-            <a:r>
-              <a:rPr sz="1200" b="0" i="0">
-                <a:solidFill>
-                  <a:srgbClr val="333333"/>
-                </a:solidFill>
-                <a:latin typeface="Calibri"/>
-              </a:rPr>
-              <a:t>–   </a:t>
-            </a:r>
-            <a:r>
-              <a:rPr sz="1200" b="1" i="0">
-                <a:solidFill>
-                  <a:srgbClr val="333333"/>
-                </a:solidFill>
-                <a:latin typeface="Calibri"/>
-              </a:rPr>
-              <a:t>3.</a:t>
-            </a:r>
-            <a:r>
-              <a:rPr sz="1200" b="0" i="0">
-                <a:solidFill>
-                  <a:srgbClr val="333333"/>
-                </a:solidFill>
-                <a:latin typeface="Calibri"/>
-              </a:rPr>
-              <a:t> Proyectar solo columnas necesarias reduce I/O y aclara el plan.</a:t>
-            </a:r>
-          </a:p>
-          <a:p>
-            <a:pPr>
-              <a:spcAft>
-                <a:spcPts val="800"/>
-              </a:spcAft>
-            </a:pPr>
-            <a:r>
-              <a:rPr sz="1200" b="0" i="0">
-                <a:solidFill>
-                  <a:srgbClr val="333333"/>
-                </a:solidFill>
-                <a:latin typeface="Calibri"/>
-              </a:rPr>
-              <a:t>–   ('( ) Verdadero    ( ) Falso', 1)</a:t>
-            </a:r>
-          </a:p>
-          <a:p>
-            <a:pPr>
-              <a:spcAft>
-                <a:spcPts val="800"/>
-              </a:spcAft>
-            </a:pPr>
-            <a:r>
-              <a:rPr sz="1200" b="0" i="0">
-                <a:solidFill>
-                  <a:srgbClr val="333333"/>
-                </a:solidFill>
-                <a:latin typeface="Calibri"/>
-              </a:rPr>
-              <a:t>–   </a:t>
-            </a:r>
-            <a:r>
-              <a:rPr sz="1200" b="1" i="0">
-                <a:solidFill>
-                  <a:srgbClr val="333333"/>
-                </a:solidFill>
-                <a:latin typeface="Calibri"/>
-              </a:rPr>
-              <a:t>4.</a:t>
-            </a:r>
-            <a:r>
-              <a:rPr sz="1200" b="0" i="0">
-                <a:solidFill>
-                  <a:srgbClr val="333333"/>
-                </a:solidFill>
-                <a:latin typeface="Calibri"/>
-              </a:rPr>
-              <a:t> EXPLAIN/plan de ejecución no aporta nada al entregable de optimización.</a:t>
-            </a:r>
-          </a:p>
-          <a:p>
-            <a:pPr>
-              <a:spcAft>
-                <a:spcPts val="800"/>
-              </a:spcAft>
-            </a:pPr>
-            <a:r>
-              <a:rPr sz="1200" b="0" i="0">
-                <a:solidFill>
-                  <a:srgbClr val="333333"/>
-                </a:solidFill>
-                <a:latin typeface="Calibri"/>
-              </a:rPr>
-              <a:t>–   ('( ) Verdadero    ( ) Falso', 1)</a:t>
-            </a:r>
-          </a:p>
-        </p:txBody>
-      </p:sp>
-      <p:sp>
-        <p:nvSpPr>
-          <p:cNvPr id="7" name="TextBox 6"/>
-          <p:cNvSpPr txBox="1"/>
-          <p:nvPr/>
-        </p:nvSpPr>
-        <p:spPr>
-          <a:xfrm>
-            <a:off x="11185855" y="6473952"/>
-            <a:ext cx="640080" cy="274320"/>
-          </a:xfrm>
-          <a:prstGeom prst="rect">
-            <a:avLst/>
-          </a:prstGeom>
-          <a:noFill/>
-        </p:spPr>
-        <p:txBody>
-          <a:bodyPr wrap="square">
-            <a:spAutoFit/>
-          </a:bodyPr>
-          <a:lstStyle/>
-          <a:p>
-            <a:pPr algn="r"/>
-            <a:r>
-              <a:rPr sz="1100" b="0" i="0">
-                <a:solidFill>
-                  <a:srgbClr val="666666"/>
-                </a:solidFill>
-                <a:latin typeface="Calibri"/>
-              </a:rPr>
-              <a:t>15</a:t>
-            </a:r>
-          </a:p>
-        </p:txBody>
-      </p:sp>
-    </p:spTree>
-  </p:cSld>
-  <p:clrMapOvr>
-    <a:masterClrMapping/>
-  </p:clrMapOvr>
-</p:sld>
-</file>
-
-<file path=ppt/slides/slide16.xml><?xml version="1.0" encoding="utf-8"?>
-<p:sld xmlns:a="http://schemas.openxmlformats.org/drawingml/2006/main" xmlns:p="http://schemas.openxmlformats.org/presentationml/2006/main" xmlns:r="http://schemas.openxmlformats.org/officeDocument/2006/relationships">
-  <p:cSld>
-    <p:bg>
-      <p:bgPr>
-        <a:solidFill>
-          <a:srgbClr val="FFFFFF"/>
-        </a:solidFill>
-        <a:effectLst/>
-      </p:bgPr>
-    </p:bg>
-    <p:spTree>
-      <p:nvGrpSpPr>
-        <p:cNvPr id="1" name=""/>
-        <p:cNvGrpSpPr/>
-        <p:nvPr/>
-      </p:nvGrpSpPr>
-      <p:grpSpPr/>
-      <p:sp>
-        <p:nvSpPr>
-          <p:cNvPr id="2" name="Rectangle 1"/>
-          <p:cNvSpPr/>
-          <p:nvPr/>
-        </p:nvSpPr>
-        <p:spPr>
-          <a:xfrm>
-            <a:off x="0" y="0"/>
-            <a:ext cx="12191695" cy="1170432"/>
-          </a:xfrm>
-          <a:prstGeom prst="rect">
-            <a:avLst/>
-          </a:prstGeom>
-          <a:solidFill>
-            <a:srgbClr val="095292"/>
-          </a:solidFill>
-          <a:ln>
-            <a:noFill/>
-          </a:ln>
-        </p:spPr>
-        <p:style>
-          <a:lnRef idx="1">
-            <a:schemeClr val="accent1"/>
-          </a:lnRef>
-          <a:fillRef idx="3">
-            <a:schemeClr val="accent1"/>
-          </a:fillRef>
-          <a:effectRef idx="2">
-            <a:schemeClr val="accent1"/>
-          </a:effectRef>
-          <a:fontRef idx="minor">
-            <a:schemeClr val="lt1"/>
-          </a:fontRef>
-        </p:style>
-        <p:txBody>
-          <a:bodyPr rtlCol="0" anchor="ctr"/>
-          <a:lstStyle/>
-          <a:p>
-            <a:pPr algn="ctr"/>
-          </a:p>
-        </p:txBody>
-      </p:sp>
-      <p:sp>
-        <p:nvSpPr>
-          <p:cNvPr id="3" name="Rectangle 2"/>
-          <p:cNvSpPr/>
-          <p:nvPr/>
-        </p:nvSpPr>
-        <p:spPr>
-          <a:xfrm>
-            <a:off x="0" y="1170432"/>
-            <a:ext cx="12191695" cy="41148"/>
-          </a:xfrm>
-          <a:prstGeom prst="rect">
-            <a:avLst/>
-          </a:prstGeom>
-          <a:solidFill>
-            <a:srgbClr val="FFD000"/>
-          </a:solidFill>
-          <a:ln>
-            <a:noFill/>
-          </a:ln>
-        </p:spPr>
-        <p:style>
-          <a:lnRef idx="1">
-            <a:schemeClr val="accent1"/>
-          </a:lnRef>
-          <a:fillRef idx="3">
-            <a:schemeClr val="accent1"/>
-          </a:fillRef>
-          <a:effectRef idx="2">
-            <a:schemeClr val="accent1"/>
-          </a:effectRef>
-          <a:fontRef idx="minor">
-            <a:schemeClr val="lt1"/>
-          </a:fontRef>
-        </p:style>
-        <p:txBody>
-          <a:bodyPr rtlCol="0" anchor="ctr"/>
-          <a:lstStyle/>
-          <a:p>
-            <a:pPr algn="ctr"/>
-          </a:p>
-        </p:txBody>
-      </p:sp>
-      <p:sp>
-        <p:nvSpPr>
-          <p:cNvPr id="4" name="TextBox 3"/>
-          <p:cNvSpPr txBox="1"/>
-          <p:nvPr/>
-        </p:nvSpPr>
-        <p:spPr>
-          <a:xfrm>
-            <a:off x="457200" y="164592"/>
-            <a:ext cx="11277295" cy="384048"/>
-          </a:xfrm>
-          <a:prstGeom prst="rect">
-            <a:avLst/>
-          </a:prstGeom>
-          <a:noFill/>
-        </p:spPr>
-        <p:txBody>
-          <a:bodyPr wrap="square">
-            <a:spAutoFit/>
-          </a:bodyPr>
-          <a:lstStyle/>
-          <a:p>
-            <a:r>
-              <a:rPr sz="2600" b="1" i="0">
-                <a:solidFill>
-                  <a:srgbClr val="FFFFFF"/>
-                </a:solidFill>
-                <a:latin typeface="Calibri"/>
-              </a:rPr>
-              <a:t>Quiz rapido (cierre) · cont. 2</a:t>
-            </a:r>
-          </a:p>
-        </p:txBody>
-      </p:sp>
-      <p:sp>
-        <p:nvSpPr>
-          <p:cNvPr id="5" name="TextBox 4"/>
-          <p:cNvSpPr txBox="1"/>
-          <p:nvPr/>
-        </p:nvSpPr>
-        <p:spPr>
-          <a:xfrm>
-            <a:off x="457200" y="566928"/>
-            <a:ext cx="11277295" cy="411480"/>
-          </a:xfrm>
-          <a:prstGeom prst="rect">
-            <a:avLst/>
-          </a:prstGeom>
-          <a:noFill/>
-        </p:spPr>
-        <p:txBody>
-          <a:bodyPr wrap="square">
-            <a:spAutoFit/>
-          </a:bodyPr>
-          <a:lstStyle/>
-          <a:p>
-            <a:r>
-              <a:rPr sz="1400" b="0" i="0">
-                <a:solidFill>
-                  <a:srgbClr val="B8D8EE"/>
-                </a:solidFill>
-                <a:latin typeface="Calibri"/>
-              </a:rPr>
-              <a:t>Individual · 8–10 min</a:t>
-            </a:r>
-          </a:p>
-        </p:txBody>
-      </p:sp>
-      <p:sp>
-        <p:nvSpPr>
-          <p:cNvPr id="6" name="TextBox 5"/>
-          <p:cNvSpPr txBox="1"/>
-          <p:nvPr/>
-        </p:nvSpPr>
-        <p:spPr>
-          <a:xfrm>
-            <a:off x="457200" y="1380744"/>
-            <a:ext cx="11277295" cy="5020056"/>
-          </a:xfrm>
-          <a:prstGeom prst="rect">
-            <a:avLst/>
-          </a:prstGeom>
-          <a:noFill/>
-        </p:spPr>
-        <p:txBody>
-          <a:bodyPr wrap="square">
-            <a:spAutoFit/>
-          </a:bodyPr>
-          <a:lstStyle/>
-          <a:p>
-            <a:pPr>
-              <a:spcAft>
-                <a:spcPts val="800"/>
-              </a:spcAft>
-            </a:pPr>
-            <a:r>
-              <a:rPr sz="1200" b="0" i="0">
-                <a:solidFill>
-                  <a:srgbClr val="333333"/>
-                </a:solidFill>
-                <a:latin typeface="Calibri"/>
-              </a:rPr>
-              <a:t>–   </a:t>
-            </a:r>
-            <a:r>
-              <a:rPr sz="1200" b="1" i="0">
-                <a:solidFill>
-                  <a:srgbClr val="333333"/>
-                </a:solidFill>
-                <a:latin typeface="Calibri"/>
-              </a:rPr>
-              <a:t>5.</a:t>
-            </a:r>
-            <a:r>
-              <a:rPr sz="1200" b="0" i="0">
-                <a:solidFill>
-                  <a:srgbClr val="333333"/>
-                </a:solidFill>
-                <a:latin typeface="Calibri"/>
-              </a:rPr>
-              <a:t> Consulta típica a optimizar en agenda VetCare:</a:t>
-            </a:r>
-          </a:p>
-          <a:p>
-            <a:pPr>
-              <a:spcAft>
-                <a:spcPts val="800"/>
-              </a:spcAft>
-            </a:pPr>
-            <a:r>
-              <a:rPr sz="1200" b="0" i="0">
-                <a:solidFill>
-                  <a:srgbClr val="333333"/>
-                </a:solidFill>
-                <a:latin typeface="Calibri"/>
-              </a:rPr>
-              <a:t>–   ('A) Citas del día con joins necesarios y filtro de fecha', 1)</a:t>
-            </a:r>
-          </a:p>
-          <a:p>
-            <a:pPr>
-              <a:spcAft>
-                <a:spcPts val="800"/>
-              </a:spcAft>
-            </a:pPr>
-            <a:r>
-              <a:rPr sz="1200" b="0" i="0">
-                <a:solidFill>
-                  <a:srgbClr val="333333"/>
-                </a:solidFill>
-                <a:latin typeface="Calibri"/>
-              </a:rPr>
-              <a:t>–   ('B) SELECT * FROM todas las tablas', 1)</a:t>
-            </a:r>
-          </a:p>
-          <a:p>
-            <a:pPr>
-              <a:spcAft>
-                <a:spcPts val="800"/>
-              </a:spcAft>
-            </a:pPr>
-            <a:r>
-              <a:rPr sz="1200" b="0" i="0">
-                <a:solidFill>
-                  <a:srgbClr val="333333"/>
-                </a:solidFill>
-                <a:latin typeface="Calibri"/>
-              </a:rPr>
-              <a:t>–   ('C) Cross join sin WHERE', 1)</a:t>
-            </a:r>
-          </a:p>
-          <a:p>
-            <a:pPr>
-              <a:spcAft>
-                <a:spcPts val="800"/>
-              </a:spcAft>
-            </a:pPr>
-            <a:r>
-              <a:rPr sz="1200" b="0" i="0">
-                <a:solidFill>
-                  <a:srgbClr val="333333"/>
-                </a:solidFill>
-                <a:latin typeface="Calibri"/>
-              </a:rPr>
-              <a:t>–   ('D) Actualizar sin WHERE a propósito', 1)</a:t>
-            </a:r>
-          </a:p>
-          <a:p>
-            <a:pPr>
-              <a:spcAft>
-                <a:spcPts val="800"/>
-              </a:spcAft>
-            </a:pPr>
-            <a:r>
-              <a:rPr sz="1200" b="0" i="0">
-                <a:solidFill>
-                  <a:srgbClr val="333333"/>
-                </a:solidFill>
-                <a:latin typeface="Calibri"/>
-              </a:rPr>
-              <a:t>–   </a:t>
-            </a:r>
-            <a:r>
-              <a:rPr sz="1200" b="1" i="0">
-                <a:solidFill>
-                  <a:srgbClr val="333333"/>
-                </a:solidFill>
-                <a:latin typeface="Calibri"/>
-              </a:rPr>
-              <a:t>6.</a:t>
-            </a:r>
-            <a:r>
-              <a:rPr sz="1200" b="0" i="0">
-                <a:solidFill>
-                  <a:srgbClr val="333333"/>
-                </a:solidFill>
-                <a:latin typeface="Calibri"/>
-              </a:rPr>
-              <a:t> «Antes/después» debe mostrar qué cambió (predicado, proyección, índice) y por qué mejora.</a:t>
-            </a:r>
-          </a:p>
-          <a:p>
-            <a:pPr>
-              <a:spcAft>
-                <a:spcPts val="800"/>
-              </a:spcAft>
-            </a:pPr>
-            <a:r>
-              <a:rPr sz="1200" b="0" i="0">
-                <a:solidFill>
-                  <a:srgbClr val="333333"/>
-                </a:solidFill>
-                <a:latin typeface="Calibri"/>
-              </a:rPr>
-              <a:t>–   ('( ) Verdadero    ( ) Falso', 1)</a:t>
-            </a:r>
-          </a:p>
-          <a:p>
-            <a:pPr>
-              <a:spcAft>
-                <a:spcPts val="800"/>
-              </a:spcAft>
-            </a:pPr>
-            <a:r>
-              <a:rPr sz="1200" b="0" i="0">
-                <a:solidFill>
-                  <a:srgbClr val="333333"/>
-                </a:solidFill>
-                <a:latin typeface="Calibri"/>
-              </a:rPr>
-              <a:t>–   </a:t>
-            </a:r>
-            <a:r>
-              <a:rPr sz="1200" b="1" i="0">
-                <a:solidFill>
-                  <a:srgbClr val="333333"/>
-                </a:solidFill>
-                <a:latin typeface="Calibri"/>
-              </a:rPr>
-              <a:t>7.</a:t>
-            </a:r>
-            <a:r>
-              <a:rPr sz="1200" b="0" i="0">
-                <a:solidFill>
-                  <a:srgbClr val="333333"/>
-                </a:solidFill>
-                <a:latin typeface="Calibri"/>
-              </a:rPr>
-              <a:t> Escriba una consulta VetCare «mala» (anti-patrón) en una línea.</a:t>
-            </a:r>
-          </a:p>
-          <a:p>
-            <a:pPr>
-              <a:spcAft>
-                <a:spcPts val="800"/>
-              </a:spcAft>
-            </a:pPr>
-            <a:r>
-              <a:rPr sz="1200" b="0" i="0">
-                <a:solidFill>
-                  <a:srgbClr val="333333"/>
-                </a:solidFill>
-                <a:latin typeface="Calibri"/>
-              </a:rPr>
-              <a:t>–   ('Respuesta corta: ____________________________', 1)</a:t>
-            </a:r>
-          </a:p>
-          <a:p>
-            <a:pPr>
-              <a:spcAft>
-                <a:spcPts val="800"/>
-              </a:spcAft>
-            </a:pPr>
-            <a:r>
-              <a:rPr sz="1200" b="0" i="0">
-                <a:solidFill>
-                  <a:srgbClr val="333333"/>
-                </a:solidFill>
-                <a:latin typeface="Calibri"/>
-              </a:rPr>
-              <a:t>–   </a:t>
-            </a:r>
-            <a:r>
-              <a:rPr sz="1200" b="1" i="0">
-                <a:solidFill>
-                  <a:srgbClr val="333333"/>
-                </a:solidFill>
-                <a:latin typeface="Calibri"/>
-              </a:rPr>
-              <a:t>8.</a:t>
-            </a:r>
-            <a:r>
-              <a:rPr sz="1200" b="0" i="0">
-                <a:solidFill>
-                  <a:srgbClr val="333333"/>
-                </a:solidFill>
-                <a:latin typeface="Calibri"/>
-              </a:rPr>
-              <a:t> ¿Qué cambio concreto haría en esa consulta y qué evidencia guardaría?</a:t>
-            </a:r>
-          </a:p>
-          <a:p>
-            <a:pPr>
-              <a:spcAft>
-                <a:spcPts val="800"/>
-              </a:spcAft>
-            </a:pPr>
-            <a:r>
-              <a:rPr sz="1200" b="0" i="0">
-                <a:solidFill>
-                  <a:srgbClr val="333333"/>
-                </a:solidFill>
-                <a:latin typeface="Calibri"/>
-              </a:rPr>
-              <a:t>–   ('Respuesta corta: ____________________________', 1)</a:t>
-            </a:r>
-          </a:p>
-        </p:txBody>
-      </p:sp>
-      <p:sp>
-        <p:nvSpPr>
-          <p:cNvPr id="7" name="TextBox 6"/>
-          <p:cNvSpPr txBox="1"/>
-          <p:nvPr/>
-        </p:nvSpPr>
-        <p:spPr>
-          <a:xfrm>
-            <a:off x="11185855" y="6473952"/>
-            <a:ext cx="640080" cy="274320"/>
-          </a:xfrm>
-          <a:prstGeom prst="rect">
-            <a:avLst/>
-          </a:prstGeom>
-          <a:noFill/>
-        </p:spPr>
-        <p:txBody>
-          <a:bodyPr wrap="square">
-            <a:spAutoFit/>
-          </a:bodyPr>
-          <a:lstStyle/>
-          <a:p>
-            <a:pPr algn="r"/>
-            <a:r>
-              <a:rPr sz="1100" b="0" i="0">
-                <a:solidFill>
-                  <a:srgbClr val="666666"/>
-                </a:solidFill>
-                <a:latin typeface="Calibri"/>
-              </a:rPr>
-              <a:t>16</a:t>
-            </a:r>
-          </a:p>
-        </p:txBody>
-      </p:sp>
-    </p:spTree>
-  </p:cSld>
-  <p:clrMapOvr>
-    <a:masterClrMapping/>
-  </p:clrMapOvr>
-</p:sld>
-</file>
-
-<file path=ppt/slides/slide17.xml><?xml version="1.0" encoding="utf-8"?>
-<p:sld xmlns:a="http://schemas.openxmlformats.org/drawingml/2006/main" xmlns:p="http://schemas.openxmlformats.org/presentationml/2006/main" xmlns:r="http://schemas.openxmlformats.org/officeDocument/2006/relationships">
-  <p:cSld>
-    <p:bg>
-      <p:bgPr>
-        <a:solidFill>
-          <a:srgbClr val="FFFFFF"/>
-        </a:solidFill>
-        <a:effectLst/>
-      </p:bgPr>
-    </p:bg>
-    <p:spTree>
-      <p:nvGrpSpPr>
-        <p:cNvPr id="1" name=""/>
-        <p:cNvGrpSpPr/>
-        <p:nvPr/>
-      </p:nvGrpSpPr>
-      <p:grpSpPr/>
-      <p:sp>
-        <p:nvSpPr>
-          <p:cNvPr id="2" name="Rectangle 1"/>
-          <p:cNvSpPr/>
-          <p:nvPr/>
-        </p:nvSpPr>
-        <p:spPr>
-          <a:xfrm>
-            <a:off x="0" y="0"/>
             <a:ext cx="12191695" cy="164592"/>
           </a:xfrm>
           <a:prstGeom prst="rect">
@@ -8451,7 +7438,7 @@
                 </a:solidFill>
                 <a:latin typeface="Calibri"/>
               </a:rPr>
-              <a:t>Criterios · quiz/cierre · duda PI</a:t>
+              <a:t>Criterios de exito · cierre · dudas del PI</a:t>
             </a:r>
           </a:p>
         </p:txBody>

--- a/Bases de Datos II/Clases/Clase 6 - Optimizacion de consultas/Presentacion.pptx
+++ b/Bases de Datos II/Clases/Clase 6 - Optimizacion de consultas/Presentacion.pptx
@@ -5440,7 +5440,7 @@
                 </a:solidFill>
                 <a:latin typeface="Calibri"/>
               </a:rPr>
-              <a:t> (Talleres) — domingo 23:59 cuando aplique taller.</a:t>
+              <a:t> (https://examlab.lovable.app/) — domingo 23:59 cuando aplique taller.</a:t>
             </a:r>
           </a:p>
         </p:txBody>
@@ -6035,7 +6035,7 @@
                 </a:solidFill>
                 <a:latin typeface="Calibri"/>
               </a:rPr>
-              <a:t>Taller de la semana en ExamLab: domingo 23:59 (regla del Acuerdo) cuando aplique.</a:t>
+              <a:t>Taller de la semana en ExamLab (https://examlab.lovable.app/): domingo 23:59 (regla del Acuerdo) cuando aplique.</a:t>
             </a:r>
           </a:p>
         </p:txBody>

--- a/Bases de Datos II/Clases/Clase 6 - Optimizacion de consultas/Presentacion.pptx
+++ b/Bases de Datos II/Clases/Clase 6 - Optimizacion de consultas/Presentacion.pptx
@@ -7776,22 +7776,6 @@
                 <a:latin typeface="Calibri"/>
               </a:rPr>
               <a:t>–   Conexion con Clase 7: optimizar consultas y crear indices son las dos caras de la misma moneda — una consulta…</a:t>
-            </a:r>
-          </a:p>
-          <a:p>
-            <a:pPr>
-              <a:spcAft>
-                <a:spcPts val="800"/>
-              </a:spcAft>
-            </a:pPr>
-            <a:r>
-              <a:rPr sz="1500" b="0" i="0">
-                <a:solidFill>
-                  <a:srgbClr val="333333"/>
-                </a:solidFill>
-                <a:latin typeface="Calibri"/>
-              </a:rPr>
-              <a:t>–   Error de docente que no domina el tema: pedir 'la consulta más rápida' sin definir contra que se compara…</a:t>
             </a:r>
           </a:p>
         </p:txBody>

--- a/Bases de Datos II/Clases/Clase 6 - Optimizacion de consultas/Presentacion.pptx
+++ b/Bases de Datos II/Clases/Clase 6 - Optimizacion de consultas/Presentacion.pptx
@@ -4460,7 +4460,7 @@
                 </a:solidFill>
                 <a:latin typeface="Calibri"/>
               </a:rPr>
-              <a:t>Guardar 06_opt_antes.sql / 06_opt_despues.sql en carpeta del equipo.</a:t>
+              <a:t>Guardar 06_opt_antes.sql / 06_opt_despues.sql en la carpeta del PI.</a:t>
             </a:r>
           </a:p>
         </p:txBody>
@@ -5390,7 +5390,7 @@
                 </a:solidFill>
                 <a:latin typeface="Calibri"/>
               </a:rPr>
-              <a:t>–   Evidencia en playground (enlace) o archivo SQL/PNG del equipo.</a:t>
+              <a:t>–   Evidencia en playground (enlace) o archivo SQL/PNG propio.</a:t>
             </a:r>
           </a:p>
           <a:p>
@@ -6639,7 +6639,7 @@
                 </a:solidFill>
                 <a:latin typeface="Calibri"/>
               </a:rPr>
-              <a:t>–   Al salir: avance concreto en el paquete VetCare del equipo.</a:t>
+              <a:t>–   Al salir: avance concreto en su paquete VetCare.</a:t>
             </a:r>
           </a:p>
         </p:txBody>
@@ -8712,7 +8712,7 @@
                 </a:solidFill>
                 <a:latin typeface="Calibri"/>
               </a:rPr>
-              <a:t>–   Al final de la demo: dejar enlace/script compartible al equipo.</a:t>
+              <a:t>–   Al final de la demo: dejar enlace/script compartible al grupo.</a:t>
             </a:r>
           </a:p>
         </p:txBody>

--- a/Bases de Datos II/Clases/Clase 6 - Optimizacion de consultas/Presentacion.pptx
+++ b/Bases de Datos II/Clases/Clase 6 - Optimizacion de consultas/Presentacion.pptx
@@ -5440,7 +5440,7 @@
                 </a:solidFill>
                 <a:latin typeface="Calibri"/>
               </a:rPr>
-              <a:t> (https://examlab.lovable.app/) — domingo 23:59 cuando aplique taller.</a:t>
+              <a:t> (https://uniaj.examlab.workers.dev/) — domingo 23:59 cuando aplique taller.</a:t>
             </a:r>
           </a:p>
         </p:txBody>
@@ -6035,7 +6035,7 @@
                 </a:solidFill>
                 <a:latin typeface="Calibri"/>
               </a:rPr>
-              <a:t>Taller de la semana en ExamLab (https://examlab.lovable.app/): domingo 23:59 (regla del Acuerdo) cuando aplique.</a:t>
+              <a:t>Taller de la semana en ExamLab (https://uniaj.examlab.workers.dev/): domingo 23:59 (regla del Acuerdo) cuando aplique.</a:t>
             </a:r>
           </a:p>
         </p:txBody>

--- a/Bases de Datos II/Clases/Clase 6 - Optimizacion de consultas/Presentacion.pptx
+++ b/Bases de Datos II/Clases/Clase 6 - Optimizacion de consultas/Presentacion.pptx
@@ -3853,8 +3853,8 @@
         </p:nvSpPr>
         <p:spPr>
           <a:xfrm>
-            <a:off x="457200" y="1234440"/>
-            <a:ext cx="11277295" cy="777240"/>
+            <a:off x="457200" y="1554480"/>
+            <a:ext cx="11277295" cy="1051560"/>
           </a:xfrm>
           <a:prstGeom prst="roundRect">
             <a:avLst>
@@ -3898,7 +3898,7 @@
         </p:nvSpPr>
         <p:spPr>
           <a:xfrm>
-            <a:off x="594360" y="1403604"/>
+            <a:off x="594360" y="1860804"/>
             <a:ext cx="438912" cy="438912"/>
           </a:xfrm>
           <a:prstGeom prst="roundRect">
@@ -3943,7 +3943,7 @@
         </p:nvSpPr>
         <p:spPr>
           <a:xfrm>
-            <a:off x="594360" y="1403604"/>
+            <a:off x="594360" y="1860804"/>
             <a:ext cx="438912" cy="438912"/>
           </a:xfrm>
           <a:prstGeom prst="rect">
@@ -3976,8 +3976,8 @@
         </p:nvSpPr>
         <p:spPr>
           <a:xfrm>
-            <a:off x="1188720" y="1325880"/>
-            <a:ext cx="10271455" cy="612647"/>
+            <a:off x="1188720" y="1645920"/>
+            <a:ext cx="10271455" cy="886968"/>
           </a:xfrm>
           <a:prstGeom prst="rect">
             <a:avLst/>
@@ -4008,8 +4008,8 @@
         </p:nvSpPr>
         <p:spPr>
           <a:xfrm>
-            <a:off x="457200" y="2103120"/>
-            <a:ext cx="11277295" cy="777240"/>
+            <a:off x="457200" y="2697480"/>
+            <a:ext cx="11277295" cy="1051560"/>
           </a:xfrm>
           <a:prstGeom prst="roundRect">
             <a:avLst>
@@ -4053,7 +4053,7 @@
         </p:nvSpPr>
         <p:spPr>
           <a:xfrm>
-            <a:off x="594360" y="2272284"/>
+            <a:off x="594360" y="3003804"/>
             <a:ext cx="438912" cy="438912"/>
           </a:xfrm>
           <a:prstGeom prst="roundRect">
@@ -4098,7 +4098,7 @@
         </p:nvSpPr>
         <p:spPr>
           <a:xfrm>
-            <a:off x="594360" y="2272284"/>
+            <a:off x="594360" y="3003804"/>
             <a:ext cx="438912" cy="438912"/>
           </a:xfrm>
           <a:prstGeom prst="rect">
@@ -4131,8 +4131,8 @@
         </p:nvSpPr>
         <p:spPr>
           <a:xfrm>
-            <a:off x="1188720" y="2194560"/>
-            <a:ext cx="10271455" cy="612647"/>
+            <a:off x="1188720" y="2788920"/>
+            <a:ext cx="10271455" cy="886968"/>
           </a:xfrm>
           <a:prstGeom prst="rect">
             <a:avLst/>
@@ -4163,8 +4163,8 @@
         </p:nvSpPr>
         <p:spPr>
           <a:xfrm>
-            <a:off x="457200" y="2971800"/>
-            <a:ext cx="11277295" cy="777240"/>
+            <a:off x="457200" y="3840480"/>
+            <a:ext cx="11277295" cy="1051560"/>
           </a:xfrm>
           <a:prstGeom prst="roundRect">
             <a:avLst>
@@ -4208,7 +4208,7 @@
         </p:nvSpPr>
         <p:spPr>
           <a:xfrm>
-            <a:off x="594360" y="3140964"/>
+            <a:off x="594360" y="4146804"/>
             <a:ext cx="438912" cy="438912"/>
           </a:xfrm>
           <a:prstGeom prst="roundRect">
@@ -4253,7 +4253,7 @@
         </p:nvSpPr>
         <p:spPr>
           <a:xfrm>
-            <a:off x="594360" y="3140964"/>
+            <a:off x="594360" y="4146804"/>
             <a:ext cx="438912" cy="438912"/>
           </a:xfrm>
           <a:prstGeom prst="rect">
@@ -4286,8 +4286,8 @@
         </p:nvSpPr>
         <p:spPr>
           <a:xfrm>
-            <a:off x="1188720" y="3063240"/>
-            <a:ext cx="10271455" cy="612647"/>
+            <a:off x="1188720" y="3931920"/>
+            <a:ext cx="10271455" cy="886968"/>
           </a:xfrm>
           <a:prstGeom prst="rect">
             <a:avLst/>
@@ -4318,8 +4318,8 @@
         </p:nvSpPr>
         <p:spPr>
           <a:xfrm>
-            <a:off x="457200" y="3840479"/>
-            <a:ext cx="11277295" cy="777240"/>
+            <a:off x="457200" y="4983480"/>
+            <a:ext cx="11277295" cy="1051560"/>
           </a:xfrm>
           <a:prstGeom prst="roundRect">
             <a:avLst>
@@ -4363,7 +4363,7 @@
         </p:nvSpPr>
         <p:spPr>
           <a:xfrm>
-            <a:off x="594360" y="4009643"/>
+            <a:off x="594360" y="5289804"/>
             <a:ext cx="438912" cy="438912"/>
           </a:xfrm>
           <a:prstGeom prst="roundRect">
@@ -4408,7 +4408,7 @@
         </p:nvSpPr>
         <p:spPr>
           <a:xfrm>
-            <a:off x="594360" y="4009643"/>
+            <a:off x="594360" y="5289804"/>
             <a:ext cx="438912" cy="438912"/>
           </a:xfrm>
           <a:prstGeom prst="rect">
@@ -4441,8 +4441,8 @@
         </p:nvSpPr>
         <p:spPr>
           <a:xfrm>
-            <a:off x="1188720" y="3931919"/>
-            <a:ext cx="10271455" cy="612647"/>
+            <a:off x="1188720" y="5074920"/>
+            <a:ext cx="10271455" cy="886968"/>
           </a:xfrm>
           <a:prstGeom prst="rect">
             <a:avLst/>
@@ -9079,8 +9079,8 @@
         </p:blipFill>
         <p:spPr>
           <a:xfrm>
-            <a:off x="1743913" y="1792224"/>
-            <a:ext cx="1051560" cy="1051560"/>
+            <a:off x="1643329" y="1847087"/>
+            <a:ext cx="1252728" cy="1252728"/>
           </a:xfrm>
           <a:prstGeom prst="rect">
             <a:avLst/>
@@ -9095,8 +9095,8 @@
         </p:nvSpPr>
         <p:spPr>
           <a:xfrm>
-            <a:off x="530352" y="2916936"/>
-            <a:ext cx="3478682" cy="502920"/>
+            <a:off x="530352" y="3191256"/>
+            <a:ext cx="3478682" cy="621792"/>
           </a:xfrm>
           <a:prstGeom prst="rect">
             <a:avLst/>
@@ -9283,8 +9283,8 @@
         </p:blipFill>
         <p:spPr>
           <a:xfrm>
-            <a:off x="5570067" y="1792224"/>
-            <a:ext cx="1051560" cy="1051560"/>
+            <a:off x="5469483" y="1847087"/>
+            <a:ext cx="1252728" cy="1252728"/>
           </a:xfrm>
           <a:prstGeom prst="rect">
             <a:avLst/>
@@ -9299,8 +9299,8 @@
         </p:nvSpPr>
         <p:spPr>
           <a:xfrm>
-            <a:off x="4356506" y="2916936"/>
-            <a:ext cx="3478682" cy="502920"/>
+            <a:off x="4356506" y="3191256"/>
+            <a:ext cx="3478682" cy="621792"/>
           </a:xfrm>
           <a:prstGeom prst="rect">
             <a:avLst/>
@@ -9487,8 +9487,8 @@
         </p:blipFill>
         <p:spPr>
           <a:xfrm>
-            <a:off x="9396222" y="1792224"/>
-            <a:ext cx="1051560" cy="1051560"/>
+            <a:off x="9295638" y="1847087"/>
+            <a:ext cx="1252728" cy="1252728"/>
           </a:xfrm>
           <a:prstGeom prst="rect">
             <a:avLst/>
@@ -9503,8 +9503,8 @@
         </p:nvSpPr>
         <p:spPr>
           <a:xfrm>
-            <a:off x="8182660" y="2916936"/>
-            <a:ext cx="3478682" cy="502920"/>
+            <a:off x="8182660" y="3191256"/>
+            <a:ext cx="3478682" cy="621792"/>
           </a:xfrm>
           <a:prstGeom prst="rect">
             <a:avLst/>

--- a/Bases de Datos II/Clases/Clase 6 - Optimizacion de consultas/Presentacion.pptx
+++ b/Bases de Datos II/Clases/Clase 6 - Optimizacion de consultas/Presentacion.pptx
@@ -8116,7 +8116,7 @@
                 </a:solidFill>
                 <a:latin typeface="Calibri"/>
               </a:rPr>
-              <a:t>–   `SELECT *` trae columnas que nadie usa</a:t>
+              <a:t>–   «SELECT *» trae columnas que nadie usa</a:t>
             </a:r>
           </a:p>
           <a:p>

--- a/Bases de Datos II/Clases/Clase 6 - Optimizacion de consultas/Presentacion.pptx
+++ b/Bases de Datos II/Clases/Clase 6 - Optimizacion de consultas/Presentacion.pptx
@@ -20,6 +20,9 @@
     <p:sldId id="268" r:id="rId19"/>
     <p:sldId id="269" r:id="rId20"/>
     <p:sldId id="270" r:id="rId21"/>
+    <p:sldId id="271" r:id="rId22"/>
+    <p:sldId id="272" r:id="rId23"/>
+    <p:sldId id="273" r:id="rId24"/>
   </p:sldIdLst>
   <p:sldSz cx="12191695" cy="6858000" type="screen4x3"/>
   <p:notesSz cx="6858000" cy="9144000"/>
@@ -3514,7 +3517,7 @@
         <p:spPr>
           <a:xfrm>
             <a:off x="0" y="0"/>
-            <a:ext cx="12191695" cy="960120"/>
+            <a:ext cx="12191695" cy="1170432"/>
           </a:xfrm>
           <a:prstGeom prst="rect">
             <a:avLst/>
@@ -3556,7 +3559,7 @@
         </p:nvSpPr>
         <p:spPr>
           <a:xfrm>
-            <a:off x="0" y="960120"/>
+            <a:off x="0" y="1170432"/>
             <a:ext cx="12191695" cy="41148"/>
           </a:xfrm>
           <a:prstGeom prst="rect">
@@ -3600,7 +3603,7 @@
         <p:spPr>
           <a:xfrm>
             <a:off x="457200" y="164592"/>
-            <a:ext cx="11277295" cy="502920"/>
+            <a:ext cx="11277295" cy="384048"/>
           </a:xfrm>
           <a:prstGeom prst="rect">
             <a:avLst/>
@@ -3620,7 +3623,7 @@
                 </a:solidFill>
                 <a:latin typeface="Calibri"/>
               </a:rPr>
-              <a:t>Taller PI VetCare — escenario / datos de partida</a:t>
+              <a:t>Herramientas de hoy</a:t>
             </a:r>
           </a:p>
         </p:txBody>
@@ -3633,8 +3636,8 @@
         </p:nvSpPr>
         <p:spPr>
           <a:xfrm>
-            <a:off x="457200" y="1170432"/>
-            <a:ext cx="11277295" cy="5230368"/>
+            <a:off x="457200" y="566928"/>
+            <a:ext cx="11277295" cy="411480"/>
           </a:xfrm>
           <a:prstGeom prst="rect">
             <a:avLst/>
@@ -3647,26 +3650,429 @@
           </a:bodyPr>
           <a:lstStyle/>
           <a:p>
-            <a:pPr>
-              <a:spcAft>
-                <a:spcPts val="800"/>
-              </a:spcAft>
+            <a:r>
+              <a:rPr sz="1400" b="0" i="0">
+                <a:solidFill>
+                  <a:srgbClr val="B8D8EE"/>
+                </a:solidFill>
+                <a:latin typeface="Calibri"/>
+              </a:rPr>
+              <a:t>Gratis · navegador o free tier</a:t>
+            </a:r>
+          </a:p>
+        </p:txBody>
+      </p:sp>
+      <p:sp>
+        <p:nvSpPr>
+          <p:cNvPr id="6" name="Rounded Rectangle 5"/>
+          <p:cNvSpPr/>
+          <p:nvPr/>
+        </p:nvSpPr>
+        <p:spPr>
+          <a:xfrm>
+            <a:off x="457200" y="1591056"/>
+            <a:ext cx="5538063" cy="2331720"/>
+          </a:xfrm>
+          <a:prstGeom prst="roundRect">
+            <a:avLst>
+              <a:gd name="adj" fmla="val 12000"/>
+            </a:avLst>
+          </a:prstGeom>
+          <a:solidFill>
+            <a:srgbClr val="F2F2F2"/>
+          </a:solidFill>
+          <a:ln>
+            <a:noFill/>
+          </a:ln>
+        </p:spPr>
+        <p:style>
+          <a:lnRef idx="1">
+            <a:schemeClr val="accent1"/>
+          </a:lnRef>
+          <a:fillRef idx="3">
+            <a:schemeClr val="accent1"/>
+          </a:fillRef>
+          <a:effectRef idx="2">
+            <a:schemeClr val="accent1"/>
+          </a:effectRef>
+          <a:fontRef idx="minor">
+            <a:schemeClr val="lt1"/>
+          </a:fontRef>
+        </p:style>
+        <p:txBody>
+          <a:bodyPr rtlCol="0" anchor="ctr"/>
+          <a:lstStyle/>
+          <a:p>
+            <a:pPr algn="ctr"/>
+          </a:p>
+        </p:txBody>
+      </p:sp>
+      <p:sp>
+        <p:nvSpPr>
+          <p:cNvPr id="7" name="Rectangle 6"/>
+          <p:cNvSpPr/>
+          <p:nvPr/>
+        </p:nvSpPr>
+        <p:spPr>
+          <a:xfrm>
+            <a:off x="457200" y="1591056"/>
+            <a:ext cx="5538063" cy="64008"/>
+          </a:xfrm>
+          <a:prstGeom prst="rect">
+            <a:avLst/>
+          </a:prstGeom>
+          <a:solidFill>
+            <a:srgbClr val="095292"/>
+          </a:solidFill>
+          <a:ln>
+            <a:noFill/>
+          </a:ln>
+        </p:spPr>
+        <p:style>
+          <a:lnRef idx="1">
+            <a:schemeClr val="accent1"/>
+          </a:lnRef>
+          <a:fillRef idx="3">
+            <a:schemeClr val="accent1"/>
+          </a:fillRef>
+          <a:effectRef idx="2">
+            <a:schemeClr val="accent1"/>
+          </a:effectRef>
+          <a:fontRef idx="minor">
+            <a:schemeClr val="lt1"/>
+          </a:fontRef>
+        </p:style>
+        <p:txBody>
+          <a:bodyPr rtlCol="0" anchor="ctr"/>
+          <a:lstStyle/>
+          <a:p>
+            <a:pPr algn="ctr"/>
+          </a:p>
+        </p:txBody>
+      </p:sp>
+      <p:sp>
+        <p:nvSpPr>
+          <p:cNvPr id="8" name="Rectangle 7"/>
+          <p:cNvSpPr/>
+          <p:nvPr/>
+        </p:nvSpPr>
+        <p:spPr>
+          <a:xfrm>
+            <a:off x="457200" y="1655064"/>
+            <a:ext cx="5538063" cy="27432"/>
+          </a:xfrm>
+          <a:prstGeom prst="rect">
+            <a:avLst/>
+          </a:prstGeom>
+          <a:solidFill>
+            <a:srgbClr val="FFD000"/>
+          </a:solidFill>
+          <a:ln>
+            <a:noFill/>
+          </a:ln>
+        </p:spPr>
+        <p:style>
+          <a:lnRef idx="1">
+            <a:schemeClr val="accent1"/>
+          </a:lnRef>
+          <a:fillRef idx="3">
+            <a:schemeClr val="accent1"/>
+          </a:fillRef>
+          <a:effectRef idx="2">
+            <a:schemeClr val="accent1"/>
+          </a:effectRef>
+          <a:fontRef idx="minor">
+            <a:schemeClr val="lt1"/>
+          </a:fontRef>
+        </p:style>
+        <p:txBody>
+          <a:bodyPr rtlCol="0" anchor="ctr"/>
+          <a:lstStyle/>
+          <a:p>
+            <a:pPr algn="ctr"/>
+          </a:p>
+        </p:txBody>
+      </p:sp>
+      <p:pic>
+        <p:nvPicPr>
+          <p:cNvPr id="9" name="Picture 8" descr="examlab.png"/>
+          <p:cNvPicPr>
+            <a:picLocks noChangeAspect="1"/>
+          </p:cNvPicPr>
+          <p:nvPr/>
+        </p:nvPicPr>
+        <p:blipFill>
+          <a:blip r:embed="rId2"/>
+          <a:stretch>
+            <a:fillRect/>
+          </a:stretch>
+        </p:blipFill>
+        <p:spPr>
+          <a:xfrm>
+            <a:off x="2599867" y="1847087"/>
+            <a:ext cx="1252728" cy="1252728"/>
+          </a:xfrm>
+          <a:prstGeom prst="rect">
+            <a:avLst/>
+          </a:prstGeom>
+        </p:spPr>
+      </p:pic>
+      <p:sp>
+        <p:nvSpPr>
+          <p:cNvPr id="10" name="TextBox 9"/>
+          <p:cNvSpPr txBox="1"/>
+          <p:nvPr/>
+        </p:nvSpPr>
+        <p:spPr>
+          <a:xfrm>
+            <a:off x="530352" y="3191256"/>
+            <a:ext cx="5391759" cy="621792"/>
+          </a:xfrm>
+          <a:prstGeom prst="rect">
+            <a:avLst/>
+          </a:prstGeom>
+          <a:noFill/>
+        </p:spPr>
+        <p:txBody>
+          <a:bodyPr wrap="square" anchor="t"/>
+          <a:lstStyle/>
+          <a:p>
+            <a:pPr algn="ctr"/>
+            <a:r>
+              <a:rPr sz="1300" b="1" i="0">
+                <a:solidFill>
+                  <a:srgbClr val="095292"/>
+                </a:solidFill>
+                <a:latin typeface="Calibri"/>
+              </a:rPr>
+              <a:t>ExamLab</a:t>
+            </a:r>
+          </a:p>
+          <a:p>
+            <a:pPr algn="ctr">
+              <a:spcBef>
+                <a:spcPts val="200"/>
+              </a:spcBef>
             </a:pPr>
             <a:r>
-              <a:rPr sz="1600" b="0" i="0">
-                <a:solidFill>
-                  <a:srgbClr val="333333"/>
-                </a:solidFill>
-                <a:latin typeface="Calibri"/>
-              </a:rPr>
-              <a:t>–   Citas del dia / historial mascota.</a:t>
-            </a:r>
-          </a:p>
-        </p:txBody>
-      </p:sp>
-      <p:sp>
-        <p:nvSpPr>
-          <p:cNvPr id="6" name="TextBox 5"/>
+              <a:rPr sz="1000" b="0" i="0">
+                <a:solidFill>
+                  <a:srgbClr val="666666"/>
+                </a:solidFill>
+                <a:latin typeface="Calibri"/>
+              </a:rPr>
+              <a:t>PostgreSQL con volumen</a:t>
+            </a:r>
+          </a:p>
+        </p:txBody>
+      </p:sp>
+      <p:sp>
+        <p:nvSpPr>
+          <p:cNvPr id="11" name="Rounded Rectangle 10"/>
+          <p:cNvSpPr/>
+          <p:nvPr/>
+        </p:nvSpPr>
+        <p:spPr>
+          <a:xfrm>
+            <a:off x="6196431" y="1591056"/>
+            <a:ext cx="5538063" cy="2331720"/>
+          </a:xfrm>
+          <a:prstGeom prst="roundRect">
+            <a:avLst>
+              <a:gd name="adj" fmla="val 12000"/>
+            </a:avLst>
+          </a:prstGeom>
+          <a:solidFill>
+            <a:srgbClr val="F2F2F2"/>
+          </a:solidFill>
+          <a:ln>
+            <a:noFill/>
+          </a:ln>
+        </p:spPr>
+        <p:style>
+          <a:lnRef idx="1">
+            <a:schemeClr val="accent1"/>
+          </a:lnRef>
+          <a:fillRef idx="3">
+            <a:schemeClr val="accent1"/>
+          </a:fillRef>
+          <a:effectRef idx="2">
+            <a:schemeClr val="accent1"/>
+          </a:effectRef>
+          <a:fontRef idx="minor">
+            <a:schemeClr val="lt1"/>
+          </a:fontRef>
+        </p:style>
+        <p:txBody>
+          <a:bodyPr rtlCol="0" anchor="ctr"/>
+          <a:lstStyle/>
+          <a:p>
+            <a:pPr algn="ctr"/>
+          </a:p>
+        </p:txBody>
+      </p:sp>
+      <p:sp>
+        <p:nvSpPr>
+          <p:cNvPr id="12" name="Rectangle 11"/>
+          <p:cNvSpPr/>
+          <p:nvPr/>
+        </p:nvSpPr>
+        <p:spPr>
+          <a:xfrm>
+            <a:off x="6196431" y="1591056"/>
+            <a:ext cx="5538063" cy="64008"/>
+          </a:xfrm>
+          <a:prstGeom prst="rect">
+            <a:avLst/>
+          </a:prstGeom>
+          <a:solidFill>
+            <a:srgbClr val="095292"/>
+          </a:solidFill>
+          <a:ln>
+            <a:noFill/>
+          </a:ln>
+        </p:spPr>
+        <p:style>
+          <a:lnRef idx="1">
+            <a:schemeClr val="accent1"/>
+          </a:lnRef>
+          <a:fillRef idx="3">
+            <a:schemeClr val="accent1"/>
+          </a:fillRef>
+          <a:effectRef idx="2">
+            <a:schemeClr val="accent1"/>
+          </a:effectRef>
+          <a:fontRef idx="minor">
+            <a:schemeClr val="lt1"/>
+          </a:fontRef>
+        </p:style>
+        <p:txBody>
+          <a:bodyPr rtlCol="0" anchor="ctr"/>
+          <a:lstStyle/>
+          <a:p>
+            <a:pPr algn="ctr"/>
+          </a:p>
+        </p:txBody>
+      </p:sp>
+      <p:sp>
+        <p:nvSpPr>
+          <p:cNvPr id="13" name="Rectangle 12"/>
+          <p:cNvSpPr/>
+          <p:nvPr/>
+        </p:nvSpPr>
+        <p:spPr>
+          <a:xfrm>
+            <a:off x="6196431" y="1655064"/>
+            <a:ext cx="5538063" cy="27432"/>
+          </a:xfrm>
+          <a:prstGeom prst="rect">
+            <a:avLst/>
+          </a:prstGeom>
+          <a:solidFill>
+            <a:srgbClr val="FFD000"/>
+          </a:solidFill>
+          <a:ln>
+            <a:noFill/>
+          </a:ln>
+        </p:spPr>
+        <p:style>
+          <a:lnRef idx="1">
+            <a:schemeClr val="accent1"/>
+          </a:lnRef>
+          <a:fillRef idx="3">
+            <a:schemeClr val="accent1"/>
+          </a:fillRef>
+          <a:effectRef idx="2">
+            <a:schemeClr val="accent1"/>
+          </a:effectRef>
+          <a:fontRef idx="minor">
+            <a:schemeClr val="lt1"/>
+          </a:fontRef>
+        </p:style>
+        <p:txBody>
+          <a:bodyPr rtlCol="0" anchor="ctr"/>
+          <a:lstStyle/>
+          <a:p>
+            <a:pPr algn="ctr"/>
+          </a:p>
+        </p:txBody>
+      </p:sp>
+      <p:pic>
+        <p:nvPicPr>
+          <p:cNvPr id="14" name="Picture 13" descr="google_docs.png"/>
+          <p:cNvPicPr>
+            <a:picLocks noChangeAspect="1"/>
+          </p:cNvPicPr>
+          <p:nvPr/>
+        </p:nvPicPr>
+        <p:blipFill>
+          <a:blip r:embed="rId3"/>
+          <a:stretch>
+            <a:fillRect/>
+          </a:stretch>
+        </p:blipFill>
+        <p:spPr>
+          <a:xfrm>
+            <a:off x="8339099" y="1847087"/>
+            <a:ext cx="1252728" cy="1252728"/>
+          </a:xfrm>
+          <a:prstGeom prst="rect">
+            <a:avLst/>
+          </a:prstGeom>
+        </p:spPr>
+      </p:pic>
+      <p:sp>
+        <p:nvSpPr>
+          <p:cNvPr id="15" name="TextBox 14"/>
+          <p:cNvSpPr txBox="1"/>
+          <p:nvPr/>
+        </p:nvSpPr>
+        <p:spPr>
+          <a:xfrm>
+            <a:off x="6269583" y="3191256"/>
+            <a:ext cx="5391759" cy="621792"/>
+          </a:xfrm>
+          <a:prstGeom prst="rect">
+            <a:avLst/>
+          </a:prstGeom>
+          <a:noFill/>
+        </p:spPr>
+        <p:txBody>
+          <a:bodyPr wrap="square" anchor="t"/>
+          <a:lstStyle/>
+          <a:p>
+            <a:pPr algn="ctr"/>
+            <a:r>
+              <a:rPr sz="1300" b="1" i="0">
+                <a:solidFill>
+                  <a:srgbClr val="095292"/>
+                </a:solidFill>
+                <a:latin typeface="Calibri"/>
+              </a:rPr>
+              <a:t>Google Docs</a:t>
+            </a:r>
+          </a:p>
+          <a:p>
+            <a:pPr algn="ctr">
+              <a:spcBef>
+                <a:spcPts val="200"/>
+              </a:spcBef>
+            </a:pPr>
+            <a:r>
+              <a:rPr sz="1000" b="0" i="0">
+                <a:solidFill>
+                  <a:srgbClr val="666666"/>
+                </a:solidFill>
+                <a:latin typeface="Calibri"/>
+              </a:rPr>
+              <a:t>Justificacion</a:t>
+            </a:r>
+          </a:p>
+        </p:txBody>
+      </p:sp>
+      <p:sp>
+        <p:nvSpPr>
+          <p:cNvPr id="16" name="TextBox 15"/>
           <p:cNvSpPr txBox="1"/>
           <p:nvPr/>
         </p:nvSpPr>
@@ -3840,111 +4246,21 @@
                 </a:solidFill>
                 <a:latin typeface="Calibri"/>
               </a:rPr>
-              <a:t>Taller PI VetCare — pasos guiados</a:t>
-            </a:r>
-          </a:p>
-        </p:txBody>
-      </p:sp>
-      <p:sp>
-        <p:nvSpPr>
-          <p:cNvPr id="5" name="Rounded Rectangle 4"/>
-          <p:cNvSpPr/>
-          <p:nvPr/>
-        </p:nvSpPr>
-        <p:spPr>
-          <a:xfrm>
-            <a:off x="457200" y="1554480"/>
-            <a:ext cx="11277295" cy="1051560"/>
-          </a:xfrm>
-          <a:prstGeom prst="roundRect">
-            <a:avLst>
-              <a:gd name="adj" fmla="val 12000"/>
-            </a:avLst>
-          </a:prstGeom>
-          <a:solidFill>
-            <a:srgbClr val="F2F2F2"/>
-          </a:solidFill>
-          <a:ln>
-            <a:noFill/>
-          </a:ln>
-        </p:spPr>
-        <p:style>
-          <a:lnRef idx="1">
-            <a:schemeClr val="accent1"/>
-          </a:lnRef>
-          <a:fillRef idx="3">
-            <a:schemeClr val="accent1"/>
-          </a:fillRef>
-          <a:effectRef idx="2">
-            <a:schemeClr val="accent1"/>
-          </a:effectRef>
-          <a:fontRef idx="minor">
-            <a:schemeClr val="lt1"/>
-          </a:fontRef>
-        </p:style>
-        <p:txBody>
-          <a:bodyPr rtlCol="0" anchor="ctr"/>
-          <a:lstStyle/>
-          <a:p>
-            <a:pPr algn="ctr"/>
-          </a:p>
-        </p:txBody>
-      </p:sp>
-      <p:sp>
-        <p:nvSpPr>
-          <p:cNvPr id="6" name="Rounded Rectangle 5"/>
-          <p:cNvSpPr/>
-          <p:nvPr/>
-        </p:nvSpPr>
-        <p:spPr>
-          <a:xfrm>
-            <a:off x="594360" y="1860804"/>
-            <a:ext cx="438912" cy="438912"/>
-          </a:xfrm>
-          <a:prstGeom prst="roundRect">
-            <a:avLst>
-              <a:gd name="adj" fmla="val 12000"/>
-            </a:avLst>
-          </a:prstGeom>
-          <a:solidFill>
-            <a:srgbClr val="095292"/>
-          </a:solidFill>
-          <a:ln>
-            <a:noFill/>
-          </a:ln>
-        </p:spPr>
-        <p:style>
-          <a:lnRef idx="1">
-            <a:schemeClr val="accent1"/>
-          </a:lnRef>
-          <a:fillRef idx="3">
-            <a:schemeClr val="accent1"/>
-          </a:fillRef>
-          <a:effectRef idx="2">
-            <a:schemeClr val="accent1"/>
-          </a:effectRef>
-          <a:fontRef idx="minor">
-            <a:schemeClr val="lt1"/>
-          </a:fontRef>
-        </p:style>
-        <p:txBody>
-          <a:bodyPr rtlCol="0" anchor="ctr"/>
-          <a:lstStyle/>
-          <a:p>
-            <a:pPr algn="ctr"/>
-          </a:p>
-        </p:txBody>
-      </p:sp>
-      <p:sp>
-        <p:nvSpPr>
-          <p:cNvPr id="7" name="TextBox 6"/>
+              <a:t>Taller PI VetCare — contexto / por que importa</a:t>
+            </a:r>
+          </a:p>
+        </p:txBody>
+      </p:sp>
+      <p:sp>
+        <p:nvSpPr>
+          <p:cNvPr id="5" name="TextBox 4"/>
           <p:cNvSpPr txBox="1"/>
           <p:nvPr/>
         </p:nvSpPr>
         <p:spPr>
           <a:xfrm>
-            <a:off x="594360" y="1860804"/>
-            <a:ext cx="438912" cy="438912"/>
+            <a:off x="457200" y="1170432"/>
+            <a:ext cx="11277295" cy="5230368"/>
           </a:xfrm>
           <a:prstGeom prst="rect">
             <a:avLst/>
@@ -3952,522 +4268,153 @@
           <a:noFill/>
         </p:spPr>
         <p:txBody>
-          <a:bodyPr wrap="square" anchor="ctr"/>
-          <a:lstStyle/>
-          <a:p>
-            <a:pPr algn="ctr"/>
+          <a:bodyPr wrap="square">
+            <a:spAutoFit/>
+          </a:bodyPr>
+          <a:lstStyle/>
+          <a:p>
+            <a:pPr>
+              <a:spcAft>
+                <a:spcPts val="800"/>
+              </a:spcAft>
+            </a:pPr>
+            <a:r>
+              <a:rPr sz="1600" b="0" i="0">
+                <a:solidFill>
+                  <a:srgbClr val="333333"/>
+                </a:solidFill>
+                <a:latin typeface="Calibri"/>
+              </a:rPr>
+              <a:t>–   </a:t>
+            </a:r>
             <a:r>
               <a:rPr sz="1600" b="1" i="0">
                 <a:solidFill>
-                  <a:srgbClr val="FFFFFF"/>
-                </a:solidFill>
-                <a:latin typeface="Calibri"/>
-              </a:rPr>
-              <a:t>1</a:t>
-            </a:r>
-          </a:p>
-        </p:txBody>
-      </p:sp>
-      <p:sp>
-        <p:nvSpPr>
-          <p:cNvPr id="8" name="TextBox 7"/>
-          <p:cNvSpPr txBox="1"/>
-          <p:nvPr/>
-        </p:nvSpPr>
-        <p:spPr>
-          <a:xfrm>
-            <a:off x="1188720" y="1645920"/>
-            <a:ext cx="10271455" cy="886968"/>
-          </a:xfrm>
-          <a:prstGeom prst="rect">
-            <a:avLst/>
-          </a:prstGeom>
-          <a:noFill/>
-        </p:spPr>
-        <p:txBody>
-          <a:bodyPr wrap="square" anchor="ctr"/>
-          <a:lstStyle/>
-          <a:p>
-            <a:r>
-              <a:rPr sz="1500" b="1" i="0">
-                <a:solidFill>
-                  <a:srgbClr val="095292"/>
-                </a:solidFill>
-                <a:latin typeface="Calibri"/>
-              </a:rPr>
-              <a:t>Tomar 1 consulta real del PI (citas del dia / historial).</a:t>
-            </a:r>
-          </a:p>
-        </p:txBody>
-      </p:sp>
-      <p:sp>
-        <p:nvSpPr>
-          <p:cNvPr id="9" name="Rounded Rectangle 8"/>
-          <p:cNvSpPr/>
-          <p:nvPr/>
-        </p:nvSpPr>
-        <p:spPr>
-          <a:xfrm>
-            <a:off x="457200" y="2697480"/>
-            <a:ext cx="11277295" cy="1051560"/>
-          </a:xfrm>
-          <a:prstGeom prst="roundRect">
-            <a:avLst>
-              <a:gd name="adj" fmla="val 12000"/>
-            </a:avLst>
-          </a:prstGeom>
-          <a:solidFill>
-            <a:srgbClr val="E8F4FA"/>
-          </a:solidFill>
-          <a:ln>
-            <a:noFill/>
-          </a:ln>
-        </p:spPr>
-        <p:style>
-          <a:lnRef idx="1">
-            <a:schemeClr val="accent1"/>
-          </a:lnRef>
-          <a:fillRef idx="3">
-            <a:schemeClr val="accent1"/>
-          </a:fillRef>
-          <a:effectRef idx="2">
-            <a:schemeClr val="accent1"/>
-          </a:effectRef>
-          <a:fontRef idx="minor">
-            <a:schemeClr val="lt1"/>
-          </a:fontRef>
-        </p:style>
-        <p:txBody>
-          <a:bodyPr rtlCol="0" anchor="ctr"/>
-          <a:lstStyle/>
-          <a:p>
-            <a:pPr algn="ctr"/>
-          </a:p>
-        </p:txBody>
-      </p:sp>
-      <p:sp>
-        <p:nvSpPr>
-          <p:cNvPr id="10" name="Rounded Rectangle 9"/>
-          <p:cNvSpPr/>
-          <p:nvPr/>
-        </p:nvSpPr>
-        <p:spPr>
-          <a:xfrm>
-            <a:off x="594360" y="3003804"/>
-            <a:ext cx="438912" cy="438912"/>
-          </a:xfrm>
-          <a:prstGeom prst="roundRect">
-            <a:avLst>
-              <a:gd name="adj" fmla="val 12000"/>
-            </a:avLst>
-          </a:prstGeom>
-          <a:solidFill>
-            <a:srgbClr val="095292"/>
-          </a:solidFill>
-          <a:ln>
-            <a:noFill/>
-          </a:ln>
-        </p:spPr>
-        <p:style>
-          <a:lnRef idx="1">
-            <a:schemeClr val="accent1"/>
-          </a:lnRef>
-          <a:fillRef idx="3">
-            <a:schemeClr val="accent1"/>
-          </a:fillRef>
-          <a:effectRef idx="2">
-            <a:schemeClr val="accent1"/>
-          </a:effectRef>
-          <a:fontRef idx="minor">
-            <a:schemeClr val="lt1"/>
-          </a:fontRef>
-        </p:style>
-        <p:txBody>
-          <a:bodyPr rtlCol="0" anchor="ctr"/>
-          <a:lstStyle/>
-          <a:p>
-            <a:pPr algn="ctr"/>
-          </a:p>
-        </p:txBody>
-      </p:sp>
-      <p:sp>
-        <p:nvSpPr>
-          <p:cNvPr id="11" name="TextBox 10"/>
-          <p:cNvSpPr txBox="1"/>
-          <p:nvPr/>
-        </p:nvSpPr>
-        <p:spPr>
-          <a:xfrm>
-            <a:off x="594360" y="3003804"/>
-            <a:ext cx="438912" cy="438912"/>
-          </a:xfrm>
-          <a:prstGeom prst="rect">
-            <a:avLst/>
-          </a:prstGeom>
-          <a:noFill/>
-        </p:spPr>
-        <p:txBody>
-          <a:bodyPr wrap="square" anchor="ctr"/>
-          <a:lstStyle/>
-          <a:p>
-            <a:pPr algn="ctr"/>
+                  <a:srgbClr val="333333"/>
+                </a:solidFill>
+                <a:latin typeface="Calibri"/>
+              </a:rPr>
+              <a:t>Por qué importa al PI:</a:t>
+            </a:r>
+            <a:r>
+              <a:rPr sz="1600" b="0" i="0">
+                <a:solidFill>
+                  <a:srgbClr val="333333"/>
+                </a:solidFill>
+                <a:latin typeface="Calibri"/>
+              </a:rPr>
+              <a:t> la rúbrica pide un análisis de plan de ejecución, y un análisis es un </a:t>
+            </a:r>
             <a:r>
               <a:rPr sz="1600" b="1" i="0">
                 <a:solidFill>
-                  <a:srgbClr val="FFFFFF"/>
-                </a:solidFill>
-                <a:latin typeface="Calibri"/>
-              </a:rPr>
-              <a:t>2</a:t>
-            </a:r>
-          </a:p>
-        </p:txBody>
-      </p:sp>
-      <p:sp>
-        <p:nvSpPr>
-          <p:cNvPr id="12" name="TextBox 11"/>
-          <p:cNvSpPr txBox="1"/>
-          <p:nvPr/>
-        </p:nvSpPr>
-        <p:spPr>
-          <a:xfrm>
-            <a:off x="1188720" y="2788920"/>
-            <a:ext cx="10271455" cy="886968"/>
-          </a:xfrm>
-          <a:prstGeom prst="rect">
-            <a:avLst/>
-          </a:prstGeom>
-          <a:noFill/>
-        </p:spPr>
-        <p:txBody>
-          <a:bodyPr wrap="square" anchor="ctr"/>
-          <a:lstStyle/>
-          <a:p>
-            <a:r>
-              <a:rPr sz="1500" b="1" i="0">
-                <a:solidFill>
-                  <a:srgbClr val="095292"/>
-                </a:solidFill>
-                <a:latin typeface="Calibri"/>
-              </a:rPr>
-              <a:t>Escribir version antes e ineficiente o real.</a:t>
-            </a:r>
-          </a:p>
-        </p:txBody>
-      </p:sp>
-      <p:sp>
-        <p:nvSpPr>
-          <p:cNvPr id="13" name="Rounded Rectangle 12"/>
-          <p:cNvSpPr/>
-          <p:nvPr/>
-        </p:nvSpPr>
-        <p:spPr>
-          <a:xfrm>
-            <a:off x="457200" y="3840480"/>
-            <a:ext cx="11277295" cy="1051560"/>
-          </a:xfrm>
-          <a:prstGeom prst="roundRect">
-            <a:avLst>
-              <a:gd name="adj" fmla="val 12000"/>
-            </a:avLst>
-          </a:prstGeom>
-          <a:solidFill>
-            <a:srgbClr val="F2F2F2"/>
-          </a:solidFill>
-          <a:ln>
-            <a:noFill/>
-          </a:ln>
-        </p:spPr>
-        <p:style>
-          <a:lnRef idx="1">
-            <a:schemeClr val="accent1"/>
-          </a:lnRef>
-          <a:fillRef idx="3">
-            <a:schemeClr val="accent1"/>
-          </a:fillRef>
-          <a:effectRef idx="2">
-            <a:schemeClr val="accent1"/>
-          </a:effectRef>
-          <a:fontRef idx="minor">
-            <a:schemeClr val="lt1"/>
-          </a:fontRef>
-        </p:style>
-        <p:txBody>
-          <a:bodyPr rtlCol="0" anchor="ctr"/>
-          <a:lstStyle/>
-          <a:p>
-            <a:pPr algn="ctr"/>
-          </a:p>
-        </p:txBody>
-      </p:sp>
-      <p:sp>
-        <p:nvSpPr>
-          <p:cNvPr id="14" name="Rounded Rectangle 13"/>
-          <p:cNvSpPr/>
-          <p:nvPr/>
-        </p:nvSpPr>
-        <p:spPr>
-          <a:xfrm>
-            <a:off x="594360" y="4146804"/>
-            <a:ext cx="438912" cy="438912"/>
-          </a:xfrm>
-          <a:prstGeom prst="roundRect">
-            <a:avLst>
-              <a:gd name="adj" fmla="val 12000"/>
-            </a:avLst>
-          </a:prstGeom>
-          <a:solidFill>
-            <a:srgbClr val="095292"/>
-          </a:solidFill>
-          <a:ln>
-            <a:noFill/>
-          </a:ln>
-        </p:spPr>
-        <p:style>
-          <a:lnRef idx="1">
-            <a:schemeClr val="accent1"/>
-          </a:lnRef>
-          <a:fillRef idx="3">
-            <a:schemeClr val="accent1"/>
-          </a:fillRef>
-          <a:effectRef idx="2">
-            <a:schemeClr val="accent1"/>
-          </a:effectRef>
-          <a:fontRef idx="minor">
-            <a:schemeClr val="lt1"/>
-          </a:fontRef>
-        </p:style>
-        <p:txBody>
-          <a:bodyPr rtlCol="0" anchor="ctr"/>
-          <a:lstStyle/>
-          <a:p>
-            <a:pPr algn="ctr"/>
-          </a:p>
-        </p:txBody>
-      </p:sp>
-      <p:sp>
-        <p:nvSpPr>
-          <p:cNvPr id="15" name="TextBox 14"/>
-          <p:cNvSpPr txBox="1"/>
-          <p:nvPr/>
-        </p:nvSpPr>
-        <p:spPr>
-          <a:xfrm>
-            <a:off x="594360" y="4146804"/>
-            <a:ext cx="438912" cy="438912"/>
-          </a:xfrm>
-          <a:prstGeom prst="rect">
-            <a:avLst/>
-          </a:prstGeom>
-          <a:noFill/>
-        </p:spPr>
-        <p:txBody>
-          <a:bodyPr wrap="square" anchor="ctr"/>
-          <a:lstStyle/>
-          <a:p>
-            <a:pPr algn="ctr"/>
+                  <a:srgbClr val="333333"/>
+                </a:solidFill>
+                <a:latin typeface="Calibri"/>
+              </a:rPr>
+              <a:t>antes y un después medidos</a:t>
+            </a:r>
+            <a:r>
+              <a:rPr sz="1600" b="0" i="0">
+                <a:solidFill>
+                  <a:srgbClr val="333333"/>
+                </a:solidFill>
+                <a:latin typeface="Calibri"/>
+              </a:rPr>
+              <a:t> — no la frase «la optimicé».</a:t>
+            </a:r>
+          </a:p>
+          <a:p>
+            <a:pPr>
+              <a:spcAft>
+                <a:spcPts val="800"/>
+              </a:spcAft>
+            </a:pPr>
+            <a:r>
+              <a:rPr sz="1600" b="0" i="0">
+                <a:solidFill>
+                  <a:srgbClr val="333333"/>
+                </a:solidFill>
+                <a:latin typeface="Calibri"/>
+              </a:rPr>
+              <a:t>–   La pantalla de agenda de Huellitas se abre </a:t>
+            </a:r>
             <a:r>
               <a:rPr sz="1600" b="1" i="0">
                 <a:solidFill>
-                  <a:srgbClr val="FFFFFF"/>
-                </a:solidFill>
-                <a:latin typeface="Calibri"/>
-              </a:rPr>
-              <a:t>3</a:t>
-            </a:r>
-          </a:p>
-        </p:txBody>
-      </p:sp>
-      <p:sp>
-        <p:nvSpPr>
-          <p:cNvPr id="16" name="TextBox 15"/>
-          <p:cNvSpPr txBox="1"/>
-          <p:nvPr/>
-        </p:nvSpPr>
-        <p:spPr>
-          <a:xfrm>
-            <a:off x="1188720" y="3931920"/>
-            <a:ext cx="10271455" cy="886968"/>
-          </a:xfrm>
-          <a:prstGeom prst="rect">
-            <a:avLst/>
-          </a:prstGeom>
-          <a:noFill/>
-        </p:spPr>
-        <p:txBody>
-          <a:bodyPr wrap="square" anchor="ctr"/>
-          <a:lstStyle/>
-          <a:p>
-            <a:r>
-              <a:rPr sz="1500" b="1" i="0">
-                <a:solidFill>
-                  <a:srgbClr val="095292"/>
-                </a:solidFill>
-                <a:latin typeface="Calibri"/>
-              </a:rPr>
-              <a:t>Reescribir despues y justificar 3 cambios.</a:t>
-            </a:r>
-          </a:p>
-        </p:txBody>
-      </p:sp>
-      <p:sp>
-        <p:nvSpPr>
-          <p:cNvPr id="17" name="Rounded Rectangle 16"/>
-          <p:cNvSpPr/>
-          <p:nvPr/>
-        </p:nvSpPr>
-        <p:spPr>
-          <a:xfrm>
-            <a:off x="457200" y="4983480"/>
-            <a:ext cx="11277295" cy="1051560"/>
-          </a:xfrm>
-          <a:prstGeom prst="roundRect">
-            <a:avLst>
-              <a:gd name="adj" fmla="val 12000"/>
-            </a:avLst>
-          </a:prstGeom>
-          <a:solidFill>
-            <a:srgbClr val="E8F4FA"/>
-          </a:solidFill>
-          <a:ln>
-            <a:noFill/>
-          </a:ln>
-        </p:spPr>
-        <p:style>
-          <a:lnRef idx="1">
-            <a:schemeClr val="accent1"/>
-          </a:lnRef>
-          <a:fillRef idx="3">
-            <a:schemeClr val="accent1"/>
-          </a:fillRef>
-          <a:effectRef idx="2">
-            <a:schemeClr val="accent1"/>
-          </a:effectRef>
-          <a:fontRef idx="minor">
-            <a:schemeClr val="lt1"/>
-          </a:fontRef>
-        </p:style>
-        <p:txBody>
-          <a:bodyPr rtlCol="0" anchor="ctr"/>
-          <a:lstStyle/>
-          <a:p>
-            <a:pPr algn="ctr"/>
-          </a:p>
-        </p:txBody>
-      </p:sp>
-      <p:sp>
-        <p:nvSpPr>
-          <p:cNvPr id="18" name="Rounded Rectangle 17"/>
-          <p:cNvSpPr/>
-          <p:nvPr/>
-        </p:nvSpPr>
-        <p:spPr>
-          <a:xfrm>
-            <a:off x="594360" y="5289804"/>
-            <a:ext cx="438912" cy="438912"/>
-          </a:xfrm>
-          <a:prstGeom prst="roundRect">
-            <a:avLst>
-              <a:gd name="adj" fmla="val 12000"/>
-            </a:avLst>
-          </a:prstGeom>
-          <a:solidFill>
-            <a:srgbClr val="095292"/>
-          </a:solidFill>
-          <a:ln>
-            <a:noFill/>
-          </a:ln>
-        </p:spPr>
-        <p:style>
-          <a:lnRef idx="1">
-            <a:schemeClr val="accent1"/>
-          </a:lnRef>
-          <a:fillRef idx="3">
-            <a:schemeClr val="accent1"/>
-          </a:fillRef>
-          <a:effectRef idx="2">
-            <a:schemeClr val="accent1"/>
-          </a:effectRef>
-          <a:fontRef idx="minor">
-            <a:schemeClr val="lt1"/>
-          </a:fontRef>
-        </p:style>
-        <p:txBody>
-          <a:bodyPr rtlCol="0" anchor="ctr"/>
-          <a:lstStyle/>
-          <a:p>
-            <a:pPr algn="ctr"/>
-          </a:p>
-        </p:txBody>
-      </p:sp>
-      <p:sp>
-        <p:nvSpPr>
-          <p:cNvPr id="19" name="TextBox 18"/>
-          <p:cNvSpPr txBox="1"/>
-          <p:nvPr/>
-        </p:nvSpPr>
-        <p:spPr>
-          <a:xfrm>
-            <a:off x="594360" y="5289804"/>
-            <a:ext cx="438912" cy="438912"/>
-          </a:xfrm>
-          <a:prstGeom prst="rect">
-            <a:avLst/>
-          </a:prstGeom>
-          <a:noFill/>
-        </p:spPr>
-        <p:txBody>
-          <a:bodyPr wrap="square" anchor="ctr"/>
-          <a:lstStyle/>
-          <a:p>
-            <a:pPr algn="ctr"/>
+                  <a:srgbClr val="333333"/>
+                </a:solidFill>
+                <a:latin typeface="Calibri"/>
+              </a:rPr>
+              <a:t>decenas de veces al día</a:t>
+            </a:r>
+            <a:r>
+              <a:rPr sz="1600" b="0" i="0">
+                <a:solidFill>
+                  <a:srgbClr val="333333"/>
+                </a:solidFill>
+                <a:latin typeface="Calibri"/>
+              </a:rPr>
+              <a:t>: es la consulta que más veces paga cualquier descuido.</a:t>
+            </a:r>
+          </a:p>
+          <a:p>
+            <a:pPr>
+              <a:spcAft>
+                <a:spcPts val="800"/>
+              </a:spcAft>
+            </a:pPr>
+            <a:r>
+              <a:rPr sz="1600" b="0" i="0">
+                <a:solidFill>
+                  <a:srgbClr val="333333"/>
+                </a:solidFill>
+                <a:latin typeface="Calibri"/>
+              </a:rPr>
+              <a:t>–   Optimizar y </a:t>
+            </a:r>
             <a:r>
               <a:rPr sz="1600" b="1" i="0">
                 <a:solidFill>
-                  <a:srgbClr val="FFFFFF"/>
-                </a:solidFill>
-                <a:latin typeface="Calibri"/>
-              </a:rPr>
-              <a:t>4</a:t>
-            </a:r>
-          </a:p>
-        </p:txBody>
-      </p:sp>
-      <p:sp>
-        <p:nvSpPr>
-          <p:cNvPr id="20" name="TextBox 19"/>
-          <p:cNvSpPr txBox="1"/>
-          <p:nvPr/>
-        </p:nvSpPr>
-        <p:spPr>
-          <a:xfrm>
-            <a:off x="1188720" y="5074920"/>
-            <a:ext cx="10271455" cy="886968"/>
-          </a:xfrm>
-          <a:prstGeom prst="rect">
-            <a:avLst/>
-          </a:prstGeom>
-          <a:noFill/>
-        </p:spPr>
-        <p:txBody>
-          <a:bodyPr wrap="square" anchor="ctr"/>
-          <a:lstStyle/>
-          <a:p>
-            <a:r>
-              <a:rPr sz="1500" b="1" i="0">
-                <a:solidFill>
-                  <a:srgbClr val="095292"/>
-                </a:solidFill>
-                <a:latin typeface="Calibri"/>
-              </a:rPr>
-              <a:t>Guardar 06_opt_antes.sql / 06_opt_despues.sql en la carpeta del PI.</a:t>
-            </a:r>
-          </a:p>
-        </p:txBody>
-      </p:sp>
-      <p:sp>
-        <p:nvSpPr>
-          <p:cNvPr id="21" name="TextBox 20"/>
+                  <a:srgbClr val="333333"/>
+                </a:solidFill>
+                <a:latin typeface="Calibri"/>
+              </a:rPr>
+              <a:t>romper</a:t>
+            </a:r>
+            <a:r>
+              <a:rPr sz="1600" b="0" i="0">
+                <a:solidFill>
+                  <a:srgbClr val="333333"/>
+                </a:solidFill>
+                <a:latin typeface="Calibri"/>
+              </a:rPr>
+              <a:t> se parecen mucho: las dos versiones se ven bien y una devuelve otra cosa. Por eso hoy la </a:t>
+            </a:r>
+            <a:r>
+              <a:rPr sz="1600" b="1" i="0">
+                <a:solidFill>
+                  <a:srgbClr val="333333"/>
+                </a:solidFill>
+                <a:latin typeface="Calibri"/>
+              </a:rPr>
+              <a:t>prueba de equivalencia</a:t>
+            </a:r>
+            <a:r>
+              <a:rPr sz="1600" b="0" i="0">
+                <a:solidFill>
+                  <a:srgbClr val="333333"/>
+                </a:solidFill>
+                <a:latin typeface="Calibri"/>
+              </a:rPr>
+              <a:t> también vale puntos.</a:t>
+            </a:r>
+          </a:p>
+        </p:txBody>
+      </p:sp>
+      <p:sp>
+        <p:nvSpPr>
+          <p:cNvPr id="6" name="TextBox 5"/>
           <p:cNvSpPr txBox="1"/>
           <p:nvPr/>
         </p:nvSpPr>
@@ -4641,154 +4588,21 @@
                 </a:solidFill>
                 <a:latin typeface="Calibri"/>
               </a:rPr>
-              <a:t>Taller PI VetCare — pistas (checklist vacio)</a:t>
-            </a:r>
-          </a:p>
-        </p:txBody>
-      </p:sp>
-      <p:sp>
-        <p:nvSpPr>
-          <p:cNvPr id="5" name="Rounded Rectangle 4"/>
-          <p:cNvSpPr/>
-          <p:nvPr/>
-        </p:nvSpPr>
-        <p:spPr>
-          <a:xfrm>
-            <a:off x="457200" y="1261872"/>
-            <a:ext cx="11277295" cy="566928"/>
-          </a:xfrm>
-          <a:prstGeom prst="roundRect">
-            <a:avLst>
-              <a:gd name="adj" fmla="val 12000"/>
-            </a:avLst>
-          </a:prstGeom>
-          <a:solidFill>
-            <a:srgbClr val="F2F2F2"/>
-          </a:solidFill>
-          <a:ln>
-            <a:noFill/>
-          </a:ln>
-        </p:spPr>
-        <p:style>
-          <a:lnRef idx="1">
-            <a:schemeClr val="accent1"/>
-          </a:lnRef>
-          <a:fillRef idx="3">
-            <a:schemeClr val="accent1"/>
-          </a:fillRef>
-          <a:effectRef idx="2">
-            <a:schemeClr val="accent1"/>
-          </a:effectRef>
-          <a:fontRef idx="minor">
-            <a:schemeClr val="lt1"/>
-          </a:fontRef>
-        </p:style>
-        <p:txBody>
-          <a:bodyPr rtlCol="0" anchor="ctr"/>
-          <a:lstStyle/>
-          <a:p>
-            <a:pPr algn="ctr"/>
-          </a:p>
-        </p:txBody>
-      </p:sp>
-      <p:sp>
-        <p:nvSpPr>
-          <p:cNvPr id="6" name="Rectangle 5"/>
-          <p:cNvSpPr/>
-          <p:nvPr/>
-        </p:nvSpPr>
-        <p:spPr>
-          <a:xfrm>
-            <a:off x="640080" y="1408175"/>
-            <a:ext cx="274320" cy="274320"/>
-          </a:xfrm>
-          <a:prstGeom prst="rect">
-            <a:avLst/>
-          </a:prstGeom>
-          <a:solidFill>
-            <a:srgbClr val="FFFFFF"/>
-          </a:solidFill>
-          <a:ln>
-            <a:solidFill>
-              <a:srgbClr val="333333"/>
-            </a:solidFill>
-          </a:ln>
-        </p:spPr>
-        <p:style>
-          <a:lnRef idx="1">
-            <a:schemeClr val="accent1"/>
-          </a:lnRef>
-          <a:fillRef idx="3">
-            <a:schemeClr val="accent1"/>
-          </a:fillRef>
-          <a:effectRef idx="2">
-            <a:schemeClr val="accent1"/>
-          </a:effectRef>
-          <a:fontRef idx="minor">
-            <a:schemeClr val="lt1"/>
-          </a:fontRef>
-        </p:style>
-        <p:txBody>
-          <a:bodyPr rtlCol="0" anchor="ctr"/>
-          <a:lstStyle/>
-          <a:p>
-            <a:pPr algn="ctr"/>
-          </a:p>
-        </p:txBody>
-      </p:sp>
-      <p:sp>
-        <p:nvSpPr>
-          <p:cNvPr id="7" name="Rectangle 6"/>
-          <p:cNvSpPr/>
-          <p:nvPr/>
-        </p:nvSpPr>
-        <p:spPr>
-          <a:xfrm>
-            <a:off x="640080" y="1408175"/>
-            <a:ext cx="73152" cy="274320"/>
-          </a:xfrm>
-          <a:prstGeom prst="rect">
-            <a:avLst/>
-          </a:prstGeom>
-          <a:solidFill>
-            <a:srgbClr val="269CCB"/>
-          </a:solidFill>
-          <a:ln>
-            <a:noFill/>
-          </a:ln>
-        </p:spPr>
-        <p:style>
-          <a:lnRef idx="1">
-            <a:schemeClr val="accent1"/>
-          </a:lnRef>
-          <a:fillRef idx="3">
-            <a:schemeClr val="accent1"/>
-          </a:fillRef>
-          <a:effectRef idx="2">
-            <a:schemeClr val="accent1"/>
-          </a:effectRef>
-          <a:fontRef idx="minor">
-            <a:schemeClr val="lt1"/>
-          </a:fontRef>
-        </p:style>
-        <p:txBody>
-          <a:bodyPr rtlCol="0" anchor="ctr"/>
-          <a:lstStyle/>
-          <a:p>
-            <a:pPr algn="ctr"/>
-          </a:p>
-        </p:txBody>
-      </p:sp>
-      <p:sp>
-        <p:nvSpPr>
-          <p:cNvPr id="8" name="TextBox 7"/>
+              <a:t>Taller PI VetCare — objetivo y criterios</a:t>
+            </a:r>
+          </a:p>
+        </p:txBody>
+      </p:sp>
+      <p:sp>
+        <p:nvSpPr>
+          <p:cNvPr id="5" name="TextBox 4"/>
           <p:cNvSpPr txBox="1"/>
           <p:nvPr/>
         </p:nvSpPr>
         <p:spPr>
           <a:xfrm>
-            <a:off x="1097280" y="1353312"/>
-            <a:ext cx="10362895" cy="402336"/>
+            <a:off x="457200" y="1170432"/>
+            <a:ext cx="11277295" cy="5230368"/>
           </a:xfrm>
           <a:prstGeom prst="rect">
             <a:avLst/>
@@ -4796,9 +4610,16 @@
           <a:noFill/>
         </p:spPr>
         <p:txBody>
-          <a:bodyPr wrap="square" anchor="ctr"/>
-          <a:lstStyle/>
-          <a:p>
+          <a:bodyPr wrap="square">
+            <a:spAutoFit/>
+          </a:bodyPr>
+          <a:lstStyle/>
+          <a:p>
+            <a:pPr>
+              <a:spcAft>
+                <a:spcPts val="800"/>
+              </a:spcAft>
+            </a:pPr>
             <a:r>
               <a:rPr sz="1500" b="0" i="0">
                 <a:solidFill>
@@ -4806,164 +4627,17 @@
                 </a:solidFill>
                 <a:latin typeface="Calibri"/>
               </a:rPr>
-              <a:t>□ Sin SELECT *?</a:t>
-            </a:r>
-          </a:p>
-        </p:txBody>
-      </p:sp>
-      <p:sp>
-        <p:nvSpPr>
-          <p:cNvPr id="9" name="Rounded Rectangle 8"/>
-          <p:cNvSpPr/>
-          <p:nvPr/>
-        </p:nvSpPr>
-        <p:spPr>
-          <a:xfrm>
-            <a:off x="457200" y="1938528"/>
-            <a:ext cx="11277295" cy="566928"/>
-          </a:xfrm>
-          <a:prstGeom prst="roundRect">
-            <a:avLst>
-              <a:gd name="adj" fmla="val 12000"/>
-            </a:avLst>
-          </a:prstGeom>
-          <a:solidFill>
-            <a:srgbClr val="F2F2F2"/>
-          </a:solidFill>
-          <a:ln>
-            <a:noFill/>
-          </a:ln>
-        </p:spPr>
-        <p:style>
-          <a:lnRef idx="1">
-            <a:schemeClr val="accent1"/>
-          </a:lnRef>
-          <a:fillRef idx="3">
-            <a:schemeClr val="accent1"/>
-          </a:fillRef>
-          <a:effectRef idx="2">
-            <a:schemeClr val="accent1"/>
-          </a:effectRef>
-          <a:fontRef idx="minor">
-            <a:schemeClr val="lt1"/>
-          </a:fontRef>
-        </p:style>
-        <p:txBody>
-          <a:bodyPr rtlCol="0" anchor="ctr"/>
-          <a:lstStyle/>
-          <a:p>
-            <a:pPr algn="ctr"/>
-          </a:p>
-        </p:txBody>
-      </p:sp>
-      <p:sp>
-        <p:nvSpPr>
-          <p:cNvPr id="10" name="Rectangle 9"/>
-          <p:cNvSpPr/>
-          <p:nvPr/>
-        </p:nvSpPr>
-        <p:spPr>
-          <a:xfrm>
-            <a:off x="640080" y="2084832"/>
-            <a:ext cx="274320" cy="274320"/>
-          </a:xfrm>
-          <a:prstGeom prst="rect">
-            <a:avLst/>
-          </a:prstGeom>
-          <a:solidFill>
-            <a:srgbClr val="FFFFFF"/>
-          </a:solidFill>
-          <a:ln>
-            <a:solidFill>
-              <a:srgbClr val="333333"/>
-            </a:solidFill>
-          </a:ln>
-        </p:spPr>
-        <p:style>
-          <a:lnRef idx="1">
-            <a:schemeClr val="accent1"/>
-          </a:lnRef>
-          <a:fillRef idx="3">
-            <a:schemeClr val="accent1"/>
-          </a:fillRef>
-          <a:effectRef idx="2">
-            <a:schemeClr val="accent1"/>
-          </a:effectRef>
-          <a:fontRef idx="minor">
-            <a:schemeClr val="lt1"/>
-          </a:fontRef>
-        </p:style>
-        <p:txBody>
-          <a:bodyPr rtlCol="0" anchor="ctr"/>
-          <a:lstStyle/>
-          <a:p>
-            <a:pPr algn="ctr"/>
-          </a:p>
-        </p:txBody>
-      </p:sp>
-      <p:sp>
-        <p:nvSpPr>
-          <p:cNvPr id="11" name="Rectangle 10"/>
-          <p:cNvSpPr/>
-          <p:nvPr/>
-        </p:nvSpPr>
-        <p:spPr>
-          <a:xfrm>
-            <a:off x="640080" y="2084832"/>
-            <a:ext cx="73152" cy="274320"/>
-          </a:xfrm>
-          <a:prstGeom prst="rect">
-            <a:avLst/>
-          </a:prstGeom>
-          <a:solidFill>
-            <a:srgbClr val="269CCB"/>
-          </a:solidFill>
-          <a:ln>
-            <a:noFill/>
-          </a:ln>
-        </p:spPr>
-        <p:style>
-          <a:lnRef idx="1">
-            <a:schemeClr val="accent1"/>
-          </a:lnRef>
-          <a:fillRef idx="3">
-            <a:schemeClr val="accent1"/>
-          </a:fillRef>
-          <a:effectRef idx="2">
-            <a:schemeClr val="accent1"/>
-          </a:effectRef>
-          <a:fontRef idx="minor">
-            <a:schemeClr val="lt1"/>
-          </a:fontRef>
-        </p:style>
-        <p:txBody>
-          <a:bodyPr rtlCol="0" anchor="ctr"/>
-          <a:lstStyle/>
-          <a:p>
-            <a:pPr algn="ctr"/>
-          </a:p>
-        </p:txBody>
-      </p:sp>
-      <p:sp>
-        <p:nvSpPr>
-          <p:cNvPr id="12" name="TextBox 11"/>
-          <p:cNvSpPr txBox="1"/>
-          <p:nvPr/>
-        </p:nvSpPr>
-        <p:spPr>
-          <a:xfrm>
-            <a:off x="1097280" y="2029968"/>
-            <a:ext cx="10362895" cy="402336"/>
-          </a:xfrm>
-          <a:prstGeom prst="rect">
-            <a:avLst/>
-          </a:prstGeom>
-          <a:noFill/>
-        </p:spPr>
-        <p:txBody>
-          <a:bodyPr wrap="square" anchor="ctr"/>
-          <a:lstStyle/>
-          <a:p>
+              <a:t>–   </a:t>
+            </a:r>
+            <a:r>
+              <a:rPr sz="1500" b="1" i="0">
+                <a:solidFill>
+                  <a:srgbClr val="333333"/>
+                </a:solidFill>
+                <a:latin typeface="Calibri"/>
+              </a:rPr>
+              <a:t>Objetivo:</a:t>
+            </a:r>
             <a:r>
               <a:rPr sz="1500" b="0" i="0">
                 <a:solidFill>
@@ -4971,164 +4645,15 @@
                 </a:solidFill>
                 <a:latin typeface="Calibri"/>
               </a:rPr>
-              <a:t>□ Filtro temprano?</a:t>
-            </a:r>
-          </a:p>
-        </p:txBody>
-      </p:sp>
-      <p:sp>
-        <p:nvSpPr>
-          <p:cNvPr id="13" name="Rounded Rectangle 12"/>
-          <p:cNvSpPr/>
-          <p:nvPr/>
-        </p:nvSpPr>
-        <p:spPr>
-          <a:xfrm>
-            <a:off x="457200" y="2615184"/>
-            <a:ext cx="11277295" cy="566928"/>
-          </a:xfrm>
-          <a:prstGeom prst="roundRect">
-            <a:avLst>
-              <a:gd name="adj" fmla="val 12000"/>
-            </a:avLst>
-          </a:prstGeom>
-          <a:solidFill>
-            <a:srgbClr val="F2F2F2"/>
-          </a:solidFill>
-          <a:ln>
-            <a:noFill/>
-          </a:ln>
-        </p:spPr>
-        <p:style>
-          <a:lnRef idx="1">
-            <a:schemeClr val="accent1"/>
-          </a:lnRef>
-          <a:fillRef idx="3">
-            <a:schemeClr val="accent1"/>
-          </a:fillRef>
-          <a:effectRef idx="2">
-            <a:schemeClr val="accent1"/>
-          </a:effectRef>
-          <a:fontRef idx="minor">
-            <a:schemeClr val="lt1"/>
-          </a:fontRef>
-        </p:style>
-        <p:txBody>
-          <a:bodyPr rtlCol="0" anchor="ctr"/>
-          <a:lstStyle/>
-          <a:p>
-            <a:pPr algn="ctr"/>
-          </a:p>
-        </p:txBody>
-      </p:sp>
-      <p:sp>
-        <p:nvSpPr>
-          <p:cNvPr id="14" name="Rectangle 13"/>
-          <p:cNvSpPr/>
-          <p:nvPr/>
-        </p:nvSpPr>
-        <p:spPr>
-          <a:xfrm>
-            <a:off x="640080" y="2761488"/>
-            <a:ext cx="274320" cy="274320"/>
-          </a:xfrm>
-          <a:prstGeom prst="rect">
-            <a:avLst/>
-          </a:prstGeom>
-          <a:solidFill>
-            <a:srgbClr val="FFFFFF"/>
-          </a:solidFill>
-          <a:ln>
-            <a:solidFill>
-              <a:srgbClr val="333333"/>
-            </a:solidFill>
-          </a:ln>
-        </p:spPr>
-        <p:style>
-          <a:lnRef idx="1">
-            <a:schemeClr val="accent1"/>
-          </a:lnRef>
-          <a:fillRef idx="3">
-            <a:schemeClr val="accent1"/>
-          </a:fillRef>
-          <a:effectRef idx="2">
-            <a:schemeClr val="accent1"/>
-          </a:effectRef>
-          <a:fontRef idx="minor">
-            <a:schemeClr val="lt1"/>
-          </a:fontRef>
-        </p:style>
-        <p:txBody>
-          <a:bodyPr rtlCol="0" anchor="ctr"/>
-          <a:lstStyle/>
-          <a:p>
-            <a:pPr algn="ctr"/>
-          </a:p>
-        </p:txBody>
-      </p:sp>
-      <p:sp>
-        <p:nvSpPr>
-          <p:cNvPr id="15" name="Rectangle 14"/>
-          <p:cNvSpPr/>
-          <p:nvPr/>
-        </p:nvSpPr>
-        <p:spPr>
-          <a:xfrm>
-            <a:off x="640080" y="2761488"/>
-            <a:ext cx="73152" cy="274320"/>
-          </a:xfrm>
-          <a:prstGeom prst="rect">
-            <a:avLst/>
-          </a:prstGeom>
-          <a:solidFill>
-            <a:srgbClr val="269CCB"/>
-          </a:solidFill>
-          <a:ln>
-            <a:noFill/>
-          </a:ln>
-        </p:spPr>
-        <p:style>
-          <a:lnRef idx="1">
-            <a:schemeClr val="accent1"/>
-          </a:lnRef>
-          <a:fillRef idx="3">
-            <a:schemeClr val="accent1"/>
-          </a:fillRef>
-          <a:effectRef idx="2">
-            <a:schemeClr val="accent1"/>
-          </a:effectRef>
-          <a:fontRef idx="minor">
-            <a:schemeClr val="lt1"/>
-          </a:fontRef>
-        </p:style>
-        <p:txBody>
-          <a:bodyPr rtlCol="0" anchor="ctr"/>
-          <a:lstStyle/>
-          <a:p>
-            <a:pPr algn="ctr"/>
-          </a:p>
-        </p:txBody>
-      </p:sp>
-      <p:sp>
-        <p:nvSpPr>
-          <p:cNvPr id="16" name="TextBox 15"/>
-          <p:cNvSpPr txBox="1"/>
-          <p:nvPr/>
-        </p:nvSpPr>
-        <p:spPr>
-          <a:xfrm>
-            <a:off x="1097280" y="2706624"/>
-            <a:ext cx="10362895" cy="402336"/>
-          </a:xfrm>
-          <a:prstGeom prst="rect">
-            <a:avLst/>
-          </a:prstGeom>
-          <a:noFill/>
-        </p:spPr>
-        <p:txBody>
-          <a:bodyPr wrap="square" anchor="ctr"/>
-          <a:lstStyle/>
-          <a:p>
+              <a:t> Dos consultas del PI reescritas y medidas con EXPLAIN ANALYZE sobre una base con volumen, con la prueba de que el resultado no cambió, y la justificación técnica que va al informe.</a:t>
+            </a:r>
+          </a:p>
+          <a:p>
+            <a:pPr>
+              <a:spcAft>
+                <a:spcPts val="800"/>
+              </a:spcAft>
+            </a:pPr>
             <a:r>
               <a:rPr sz="1500" b="0" i="0">
                 <a:solidFill>
@@ -5136,14 +4661,344 @@
                 </a:solidFill>
                 <a:latin typeface="Calibri"/>
               </a:rPr>
-              <a:t>□ Cuello de botella nombrado?</a:t>
-            </a:r>
-          </a:p>
-        </p:txBody>
-      </p:sp>
-      <p:sp>
-        <p:nvSpPr>
-          <p:cNvPr id="17" name="TextBox 16"/>
+              <a:t>–   </a:t>
+            </a:r>
+            <a:r>
+              <a:rPr sz="1500" b="1" i="0">
+                <a:solidFill>
+                  <a:srgbClr val="333333"/>
+                </a:solidFill>
+                <a:latin typeface="Calibri"/>
+              </a:rPr>
+              <a:t>Exito:</a:t>
+            </a:r>
+            <a:r>
+              <a:rPr sz="1500" b="0" i="0">
+                <a:solidFill>
+                  <a:srgbClr val="333333"/>
+                </a:solidFill>
+                <a:latin typeface="Calibri"/>
+              </a:rPr>
+              <a:t> La agenda del día con sus </a:t>
+            </a:r>
+            <a:r>
+              <a:rPr sz="1500" b="1" i="0">
+                <a:solidFill>
+                  <a:srgbClr val="333333"/>
+                </a:solidFill>
+                <a:latin typeface="Calibri"/>
+              </a:rPr>
+              <a:t>4 antipatrones</a:t>
+            </a:r>
+            <a:r>
+              <a:rPr sz="1500" b="0" i="0">
+                <a:solidFill>
+                  <a:srgbClr val="333333"/>
+                </a:solidFill>
+                <a:latin typeface="Calibri"/>
+              </a:rPr>
+              <a:t> corregidos: proyección, «JOIN … ON», predicado de rango sargable y comparación directa del estado.</a:t>
+            </a:r>
+          </a:p>
+          <a:p>
+            <a:pPr>
+              <a:spcAft>
+                <a:spcPts val="800"/>
+              </a:spcAft>
+            </a:pPr>
+            <a:r>
+              <a:rPr sz="1500" b="0" i="0">
+                <a:solidFill>
+                  <a:srgbClr val="333333"/>
+                </a:solidFill>
+                <a:latin typeface="Calibri"/>
+              </a:rPr>
+              <a:t>–   </a:t>
+            </a:r>
+            <a:r>
+              <a:rPr sz="1500" b="1" i="0">
+                <a:solidFill>
+                  <a:srgbClr val="333333"/>
+                </a:solidFill>
+                <a:latin typeface="Calibri"/>
+              </a:rPr>
+              <a:t>Exito:</a:t>
+            </a:r>
+            <a:r>
+              <a:rPr sz="1500" b="0" i="0">
+                <a:solidFill>
+                  <a:srgbClr val="333333"/>
+                </a:solidFill>
+                <a:latin typeface="Calibri"/>
+              </a:rPr>
+              <a:t> Las dos versiones devuelven las mismas </a:t>
+            </a:r>
+            <a:r>
+              <a:rPr sz="1500" b="1" i="0">
+                <a:solidFill>
+                  <a:srgbClr val="333333"/>
+                </a:solidFill>
+                <a:latin typeface="Calibri"/>
+              </a:rPr>
+              <a:t>91 filas</a:t>
+            </a:r>
+            <a:r>
+              <a:rPr sz="1500" b="0" i="0">
+                <a:solidFill>
+                  <a:srgbClr val="333333"/>
+                </a:solidFill>
+                <a:latin typeface="Calibri"/>
+              </a:rPr>
+              <a:t>, probado con «COUNT(*)» de cada una en la misma corrida.</a:t>
+            </a:r>
+          </a:p>
+          <a:p>
+            <a:pPr>
+              <a:spcAft>
+                <a:spcPts val="800"/>
+              </a:spcAft>
+            </a:pPr>
+            <a:r>
+              <a:rPr sz="1500" b="0" i="0">
+                <a:solidFill>
+                  <a:srgbClr val="333333"/>
+                </a:solidFill>
+                <a:latin typeface="Calibri"/>
+              </a:rPr>
+              <a:t>–   </a:t>
+            </a:r>
+            <a:r>
+              <a:rPr sz="1500" b="1" i="0">
+                <a:solidFill>
+                  <a:srgbClr val="333333"/>
+                </a:solidFill>
+                <a:latin typeface="Calibri"/>
+              </a:rPr>
+              <a:t>Exito:</a:t>
+            </a:r>
+            <a:r>
+              <a:rPr sz="1500" b="0" i="0">
+                <a:solidFill>
+                  <a:srgbClr val="333333"/>
+                </a:solidFill>
+                <a:latin typeface="Calibri"/>
+              </a:rPr>
+              <a:t> Tres planes leídos: «EXPLAIN (ANALYZE, BUFFERS)» del antes y del después, y «EXPLAIN ANALYZE» del después con «LIMIT 50». Las </a:t>
+            </a:r>
+            <a:r>
+              <a:rPr sz="1500" b="1" i="0">
+                <a:solidFill>
+                  <a:srgbClr val="333333"/>
+                </a:solidFill>
+                <a:latin typeface="Calibri"/>
+              </a:rPr>
+              <a:t>tres</a:t>
+            </a:r>
+            <a:r>
+              <a:rPr sz="1500" b="0" i="0">
+                <a:solidFill>
+                  <a:srgbClr val="333333"/>
+                </a:solidFill>
+                <a:latin typeface="Calibri"/>
+              </a:rPr>
+              <a:t> versiones van en la mini tabla de comentarios: nodo más costoso, filas estimadas vs reales, tiempo.</a:t>
+            </a:r>
+          </a:p>
+          <a:p>
+            <a:pPr>
+              <a:spcAft>
+                <a:spcPts val="800"/>
+              </a:spcAft>
+            </a:pPr>
+            <a:r>
+              <a:rPr sz="1500" b="0" i="0">
+                <a:solidFill>
+                  <a:srgbClr val="333333"/>
+                </a:solidFill>
+                <a:latin typeface="Calibri"/>
+              </a:rPr>
+              <a:t>–   </a:t>
+            </a:r>
+            <a:r>
+              <a:rPr sz="1500" b="1" i="0">
+                <a:solidFill>
+                  <a:srgbClr val="333333"/>
+                </a:solidFill>
+                <a:latin typeface="Calibri"/>
+              </a:rPr>
+              <a:t>Exito:</a:t>
+            </a:r>
+            <a:r>
+              <a:rPr sz="1500" b="0" i="0">
+                <a:solidFill>
+                  <a:srgbClr val="333333"/>
+                </a:solidFill>
+                <a:latin typeface="Calibri"/>
+              </a:rPr>
+              <a:t> La subconsulta correlacionada convertida en </a:t>
+            </a:r>
+            <a:r>
+              <a:rPr sz="1500" b="1" i="0">
+                <a:solidFill>
+                  <a:srgbClr val="333333"/>
+                </a:solidFill>
+                <a:latin typeface="Calibri"/>
+              </a:rPr>
+              <a:t>una sola pasada</a:t>
+            </a:r>
+            <a:r>
+              <a:rPr sz="1500" b="0" i="0">
+                <a:solidFill>
+                  <a:srgbClr val="333333"/>
+                </a:solidFill>
+                <a:latin typeface="Calibri"/>
+              </a:rPr>
+              <a:t>: «LEFT JOIN» + «GROUP BY» + </a:t>
+            </a:r>
+            <a:r>
+              <a:rPr sz="1500" b="1" i="0">
+                <a:solidFill>
+                  <a:srgbClr val="333333"/>
+                </a:solidFill>
+                <a:latin typeface="Calibri"/>
+              </a:rPr>
+              <a:t>«COUNT(c.id_cita)»</a:t>
+            </a:r>
+            <a:r>
+              <a:rPr sz="1500" b="0" i="0">
+                <a:solidFill>
+                  <a:srgbClr val="333333"/>
+                </a:solidFill>
+                <a:latin typeface="Calibri"/>
+              </a:rPr>
+              <a:t>, con los duenos sin citas todavía en 0.</a:t>
+            </a:r>
+          </a:p>
+          <a:p>
+            <a:pPr>
+              <a:spcAft>
+                <a:spcPts val="800"/>
+              </a:spcAft>
+            </a:pPr>
+            <a:r>
+              <a:rPr sz="1500" b="0" i="0">
+                <a:solidFill>
+                  <a:srgbClr val="333333"/>
+                </a:solidFill>
+                <a:latin typeface="Calibri"/>
+              </a:rPr>
+              <a:t>–   </a:t>
+            </a:r>
+            <a:r>
+              <a:rPr sz="1500" b="1" i="0">
+                <a:solidFill>
+                  <a:srgbClr val="333333"/>
+                </a:solidFill>
+                <a:latin typeface="Calibri"/>
+              </a:rPr>
+              <a:t>Exito:</a:t>
+            </a:r>
+            <a:r>
+              <a:rPr sz="1500" b="0" i="0">
+                <a:solidFill>
+                  <a:srgbClr val="333333"/>
+                </a:solidFill>
+                <a:latin typeface="Calibri"/>
+              </a:rPr>
+              <a:t> La equivalencia del ranking probada con «EXCEPT» en los </a:t>
+            </a:r>
+            <a:r>
+              <a:rPr sz="1500" b="1" i="0">
+                <a:solidFill>
+                  <a:srgbClr val="333333"/>
+                </a:solidFill>
+                <a:latin typeface="Calibri"/>
+              </a:rPr>
+              <a:t>dos sentidos</a:t>
+            </a:r>
+            <a:r>
+              <a:rPr sz="1500" b="0" i="0">
+                <a:solidFill>
+                  <a:srgbClr val="333333"/>
+                </a:solidFill>
+                <a:latin typeface="Calibri"/>
+              </a:rPr>
+              <a:t>: cero filas.</a:t>
+            </a:r>
+          </a:p>
+          <a:p>
+            <a:pPr>
+              <a:spcAft>
+                <a:spcPts val="800"/>
+              </a:spcAft>
+            </a:pPr>
+            <a:r>
+              <a:rPr sz="1500" b="0" i="0">
+                <a:solidFill>
+                  <a:srgbClr val="333333"/>
+                </a:solidFill>
+                <a:latin typeface="Calibri"/>
+              </a:rPr>
+              <a:t>–   </a:t>
+            </a:r>
+            <a:r>
+              <a:rPr sz="1500" b="1" i="0">
+                <a:solidFill>
+                  <a:srgbClr val="333333"/>
+                </a:solidFill>
+                <a:latin typeface="Calibri"/>
+              </a:rPr>
+              <a:t>Exito:</a:t>
+            </a:r>
+            <a:r>
+              <a:rPr sz="1500" b="0" i="0">
+                <a:solidFill>
+                  <a:srgbClr val="333333"/>
+                </a:solidFill>
+                <a:latin typeface="Calibri"/>
+              </a:rPr>
+              <a:t> La justificación de media página con sus 5 secciones, y «06_opt_antes.sql» / «06_opt_despues.sql» en la carpeta del PI.</a:t>
+            </a:r>
+          </a:p>
+          <a:p>
+            <a:pPr>
+              <a:spcAft>
+                <a:spcPts val="800"/>
+              </a:spcAft>
+            </a:pPr>
+            <a:r>
+              <a:rPr sz="1500" b="0" i="0">
+                <a:solidFill>
+                  <a:srgbClr val="333333"/>
+                </a:solidFill>
+                <a:latin typeface="Calibri"/>
+              </a:rPr>
+              <a:t>–   </a:t>
+            </a:r>
+            <a:r>
+              <a:rPr sz="1500" b="1" i="0">
+                <a:solidFill>
+                  <a:srgbClr val="333333"/>
+                </a:solidFill>
+                <a:latin typeface="Calibri"/>
+              </a:rPr>
+              <a:t>Exito:</a:t>
+            </a:r>
+            <a:r>
+              <a:rPr sz="1500" b="0" i="0">
+                <a:solidFill>
+                  <a:srgbClr val="333333"/>
+                </a:solidFill>
+                <a:latin typeface="Calibri"/>
+              </a:rPr>
+              <a:t> Entrega domingo 23:59.</a:t>
+            </a:r>
+          </a:p>
+        </p:txBody>
+      </p:sp>
+      <p:sp>
+        <p:nvSpPr>
+          <p:cNvPr id="6" name="TextBox 5"/>
           <p:cNvSpPr txBox="1"/>
           <p:nvPr/>
         </p:nvSpPr>
@@ -5317,7 +5172,7 @@
                 </a:solidFill>
                 <a:latin typeface="Calibri"/>
               </a:rPr>
-              <a:t>Criterios de exito / entregable</a:t>
+              <a:t>Taller PI VetCare — escenario / datos de partida</a:t>
             </a:r>
           </a:p>
         </p:txBody>
@@ -5356,7 +5211,7 @@
                 </a:solidFill>
                 <a:latin typeface="Calibri"/>
               </a:rPr>
-              <a:t>–   </a:t>
+              <a:t>–   La base de este taller </a:t>
             </a:r>
             <a:r>
               <a:rPr sz="1600" b="1" i="0">
@@ -5365,7 +5220,7 @@
                 </a:solidFill>
                 <a:latin typeface="Calibri"/>
               </a:rPr>
-              <a:t>Entregable:</a:t>
+              <a:t>sí tiene volumen</a:t>
             </a:r>
             <a:r>
               <a:rPr sz="1600" b="0" i="0">
@@ -5374,7 +5229,25 @@
                 </a:solidFill>
                 <a:latin typeface="Calibri"/>
               </a:rPr>
-              <a:t> 2 consultas (antes/despues) + justificacion (media pag.)</a:t>
+              <a:t>: 2.006 duenos, 5.008 mascotas, 16 veterinarios y </a:t>
+            </a:r>
+            <a:r>
+              <a:rPr sz="1600" b="1" i="0">
+                <a:solidFill>
+                  <a:srgbClr val="333333"/>
+                </a:solidFill>
+                <a:latin typeface="Calibri"/>
+              </a:rPr>
+              <a:t>30.010 citas</a:t>
+            </a:r>
+            <a:r>
+              <a:rPr sz="1600" b="0" i="0">
+                <a:solidFill>
+                  <a:srgbClr val="333333"/>
+                </a:solidFill>
+                <a:latin typeface="Calibri"/>
+              </a:rPr>
+              <a:t> entre el 2026-01-05 y el 2026-07-23, unas 150 por día.</a:t>
             </a:r>
           </a:p>
           <a:p>
@@ -5390,7 +5263,25 @@
                 </a:solidFill>
                 <a:latin typeface="Calibri"/>
               </a:rPr>
-              <a:t>–   Evidencia en playground (enlace) o archivo SQL/PNG propio.</a:t>
+              <a:t>–   «ANALYZE» ya está corrido y </a:t>
+            </a:r>
+            <a:r>
+              <a:rPr sz="1600" b="1" i="0">
+                <a:solidFill>
+                  <a:srgbClr val="333333"/>
+                </a:solidFill>
+                <a:latin typeface="Calibri"/>
+              </a:rPr>
+              <a:t>no hay ningún índice</a:t>
+            </a:r>
+            <a:r>
+              <a:rPr sz="1600" b="0" i="0">
+                <a:solidFill>
+                  <a:srgbClr val="333333"/>
+                </a:solidFill>
+                <a:latin typeface="Calibri"/>
+              </a:rPr>
+              <a:t> más allá de las llaves primarias: es a propósito, para que la mejora venga de la consulta y no de una estructura que aún no se ha visto.</a:t>
             </a:r>
           </a:p>
           <a:p>
@@ -5406,7 +5297,25 @@
                 </a:solidFill>
                 <a:latin typeface="Calibri"/>
               </a:rPr>
-              <a:t>–   Actualizar checklist PI (que criterio de rubrica avanzo).</a:t>
+              <a:t>–   </a:t>
+            </a:r>
+            <a:r>
+              <a:rPr sz="1600" b="1" i="0">
+                <a:solidFill>
+                  <a:srgbClr val="333333"/>
+                </a:solidFill>
+                <a:latin typeface="Calibri"/>
+              </a:rPr>
+              <a:t>Motor:</a:t>
+            </a:r>
+            <a:r>
+              <a:rPr sz="1600" b="0" i="0">
+                <a:solidFill>
+                  <a:srgbClr val="333333"/>
+                </a:solidFill>
+                <a:latin typeface="Calibri"/>
+              </a:rPr>
+              <a:t> PostgreSQL dentro de ExamLab, en el navegador. «EXPLAIN», «EXPLAIN ANALYZE» y la opción «BUFFERS» corren de verdad; ahí se califica.</a:t>
             </a:r>
           </a:p>
           <a:p>
@@ -5422,6 +5331,40 @@
                 </a:solidFill>
                 <a:latin typeface="Calibri"/>
               </a:rPr>
+              <a:t>–   Los </a:t>
+            </a:r>
+            <a:r>
+              <a:rPr sz="1600" b="1" i="0">
+                <a:solidFill>
+                  <a:srgbClr val="333333"/>
+                </a:solidFill>
+                <a:latin typeface="Calibri"/>
+              </a:rPr>
+              <a:t>seis duenos con cero citas</a:t>
+            </a:r>
+            <a:r>
+              <a:rPr sz="1600" b="0" i="0">
+                <a:solidFill>
+                  <a:srgbClr val="333333"/>
+                </a:solidFill>
+                <a:latin typeface="Calibri"/>
+              </a:rPr>
+              <a:t> (ids 2001 a 2006) están puestos a propósito: son los que delatan un «COUNT(*)» o un «INNER JOIN» mal elegidos.</a:t>
+            </a:r>
+          </a:p>
+          <a:p>
+            <a:pPr>
+              <a:spcAft>
+                <a:spcPts val="800"/>
+              </a:spcAft>
+            </a:pPr>
+            <a:r>
+              <a:rPr sz="1600" b="0" i="0">
+                <a:solidFill>
+                  <a:srgbClr val="333333"/>
+                </a:solidFill>
+                <a:latin typeface="Calibri"/>
+              </a:rPr>
               <a:t>–   </a:t>
             </a:r>
             <a:r>
@@ -5431,7 +5374,7 @@
                 </a:solidFill>
                 <a:latin typeface="Calibri"/>
               </a:rPr>
-              <a:t>Entrega en ExamLab</a:t>
+              <a:t>Aviso:</a:t>
             </a:r>
             <a:r>
               <a:rPr sz="1600" b="0" i="0">
@@ -5440,7 +5383,16 @@
                 </a:solidFill>
                 <a:latin typeface="Calibri"/>
               </a:rPr>
-              <a:t> (https://uniaj.examlab.workers.dev/) — domingo 23:59 cuando aplique taller.</a:t>
+              <a:t> la versión ANTES de la pregunta 3 se ejecuta 2.006 veces y puede tardar de varios segundos a más de un minuto. </a:t>
+            </a:r>
+            <a:r>
+              <a:rPr sz="1600" b="1" i="0">
+                <a:solidFill>
+                  <a:srgbClr val="333333"/>
+                </a:solidFill>
+                <a:latin typeface="Calibri"/>
+              </a:rPr>
+              <a:t>No está colgada.</a:t>
             </a:r>
           </a:p>
         </p:txBody>
@@ -5621,7 +5573,7 @@
                 </a:solidFill>
                 <a:latin typeface="Calibri"/>
               </a:rPr>
-              <a:t>Para el PI esta semana</a:t>
+              <a:t>Taller PI VetCare — pasos guiados</a:t>
             </a:r>
           </a:p>
         </p:txBody>
@@ -5634,8 +5586,163 @@
         </p:nvSpPr>
         <p:spPr>
           <a:xfrm>
-            <a:off x="457200" y="1261872"/>
-            <a:ext cx="11277295" cy="1051560"/>
+            <a:off x="457200" y="1234440"/>
+            <a:ext cx="11277295" cy="950976"/>
+          </a:xfrm>
+          <a:prstGeom prst="roundRect">
+            <a:avLst>
+              <a:gd name="adj" fmla="val 12000"/>
+            </a:avLst>
+          </a:prstGeom>
+          <a:solidFill>
+            <a:srgbClr val="F2F2F2"/>
+          </a:solidFill>
+          <a:ln>
+            <a:noFill/>
+          </a:ln>
+        </p:spPr>
+        <p:style>
+          <a:lnRef idx="1">
+            <a:schemeClr val="accent1"/>
+          </a:lnRef>
+          <a:fillRef idx="3">
+            <a:schemeClr val="accent1"/>
+          </a:fillRef>
+          <a:effectRef idx="2">
+            <a:schemeClr val="accent1"/>
+          </a:effectRef>
+          <a:fontRef idx="minor">
+            <a:schemeClr val="lt1"/>
+          </a:fontRef>
+        </p:style>
+        <p:txBody>
+          <a:bodyPr rtlCol="0" anchor="ctr"/>
+          <a:lstStyle/>
+          <a:p>
+            <a:pPr algn="ctr"/>
+          </a:p>
+        </p:txBody>
+      </p:sp>
+      <p:sp>
+        <p:nvSpPr>
+          <p:cNvPr id="6" name="Rounded Rectangle 5"/>
+          <p:cNvSpPr/>
+          <p:nvPr/>
+        </p:nvSpPr>
+        <p:spPr>
+          <a:xfrm>
+            <a:off x="594360" y="1490472"/>
+            <a:ext cx="438912" cy="438912"/>
+          </a:xfrm>
+          <a:prstGeom prst="roundRect">
+            <a:avLst>
+              <a:gd name="adj" fmla="val 12000"/>
+            </a:avLst>
+          </a:prstGeom>
+          <a:solidFill>
+            <a:srgbClr val="095292"/>
+          </a:solidFill>
+          <a:ln>
+            <a:noFill/>
+          </a:ln>
+        </p:spPr>
+        <p:style>
+          <a:lnRef idx="1">
+            <a:schemeClr val="accent1"/>
+          </a:lnRef>
+          <a:fillRef idx="3">
+            <a:schemeClr val="accent1"/>
+          </a:fillRef>
+          <a:effectRef idx="2">
+            <a:schemeClr val="accent1"/>
+          </a:effectRef>
+          <a:fontRef idx="minor">
+            <a:schemeClr val="lt1"/>
+          </a:fontRef>
+        </p:style>
+        <p:txBody>
+          <a:bodyPr rtlCol="0" anchor="ctr"/>
+          <a:lstStyle/>
+          <a:p>
+            <a:pPr algn="ctr"/>
+          </a:p>
+        </p:txBody>
+      </p:sp>
+      <p:sp>
+        <p:nvSpPr>
+          <p:cNvPr id="7" name="TextBox 6"/>
+          <p:cNvSpPr txBox="1"/>
+          <p:nvPr/>
+        </p:nvSpPr>
+        <p:spPr>
+          <a:xfrm>
+            <a:off x="594360" y="1490472"/>
+            <a:ext cx="438912" cy="438912"/>
+          </a:xfrm>
+          <a:prstGeom prst="rect">
+            <a:avLst/>
+          </a:prstGeom>
+          <a:noFill/>
+        </p:spPr>
+        <p:txBody>
+          <a:bodyPr wrap="square" anchor="ctr"/>
+          <a:lstStyle/>
+          <a:p>
+            <a:pPr algn="ctr"/>
+            <a:r>
+              <a:rPr sz="1600" b="1" i="0">
+                <a:solidFill>
+                  <a:srgbClr val="FFFFFF"/>
+                </a:solidFill>
+                <a:latin typeface="Calibri"/>
+              </a:rPr>
+              <a:t>1</a:t>
+            </a:r>
+          </a:p>
+        </p:txBody>
+      </p:sp>
+      <p:sp>
+        <p:nvSpPr>
+          <p:cNvPr id="8" name="TextBox 7"/>
+          <p:cNvSpPr txBox="1"/>
+          <p:nvPr/>
+        </p:nvSpPr>
+        <p:spPr>
+          <a:xfrm>
+            <a:off x="1188720" y="1325880"/>
+            <a:ext cx="10271455" cy="786384"/>
+          </a:xfrm>
+          <a:prstGeom prst="rect">
+            <a:avLst/>
+          </a:prstGeom>
+          <a:noFill/>
+        </p:spPr>
+        <p:txBody>
+          <a:bodyPr wrap="square" anchor="ctr"/>
+          <a:lstStyle/>
+          <a:p>
+            <a:r>
+              <a:rPr sz="1500" b="1" i="0">
+                <a:solidFill>
+                  <a:srgbClr val="095292"/>
+                </a:solidFill>
+                <a:latin typeface="Calibri"/>
+              </a:rPr>
+              <a:t>Reescribir la agenda del dia corrigiendo sus 4 antipatrones (SELECT *, joins con coma, to_char sobre la fecha, UPPER sobre el estado) y probar con COUNT(*) que las dos versiones devuelven las mismas 91 filas.</a:t>
+            </a:r>
+          </a:p>
+        </p:txBody>
+      </p:sp>
+      <p:sp>
+        <p:nvSpPr>
+          <p:cNvPr id="9" name="Rounded Rectangle 8"/>
+          <p:cNvSpPr/>
+          <p:nvPr/>
+        </p:nvSpPr>
+        <p:spPr>
+          <a:xfrm>
+            <a:off x="457200" y="2276856"/>
+            <a:ext cx="11277295" cy="950976"/>
           </a:xfrm>
           <a:prstGeom prst="roundRect">
             <a:avLst>
@@ -5673,20 +5780,22 @@
       </p:sp>
       <p:sp>
         <p:nvSpPr>
-          <p:cNvPr id="6" name="Rectangle 5"/>
+          <p:cNvPr id="10" name="Rounded Rectangle 9"/>
           <p:cNvSpPr/>
           <p:nvPr/>
         </p:nvSpPr>
         <p:spPr>
           <a:xfrm>
-            <a:off x="457200" y="1261872"/>
-            <a:ext cx="128016" cy="1051560"/>
-          </a:xfrm>
-          <a:prstGeom prst="rect">
-            <a:avLst/>
+            <a:off x="594360" y="2532888"/>
+            <a:ext cx="438912" cy="438912"/>
+          </a:xfrm>
+          <a:prstGeom prst="roundRect">
+            <a:avLst>
+              <a:gd name="adj" fmla="val 12000"/>
+            </a:avLst>
           </a:prstGeom>
           <a:solidFill>
-            <a:srgbClr val="269CCB"/>
+            <a:srgbClr val="095292"/>
           </a:solidFill>
           <a:ln>
             <a:noFill/>
@@ -5716,14 +5825,14 @@
       </p:sp>
       <p:sp>
         <p:nvSpPr>
-          <p:cNvPr id="7" name="TextBox 6"/>
+          <p:cNvPr id="11" name="TextBox 10"/>
           <p:cNvSpPr txBox="1"/>
           <p:nvPr/>
         </p:nvSpPr>
         <p:spPr>
           <a:xfrm>
-            <a:off x="777240" y="1399031"/>
-            <a:ext cx="10774375" cy="822959"/>
+            <a:off x="594360" y="2532888"/>
+            <a:ext cx="438912" cy="438912"/>
           </a:xfrm>
           <a:prstGeom prst="rect">
             <a:avLst/>
@@ -5731,49 +5840,64 @@
           <a:noFill/>
         </p:spPr>
         <p:txBody>
-          <a:bodyPr wrap="square">
-            <a:spAutoFit/>
-          </a:bodyPr>
-          <a:lstStyle/>
-          <a:p>
-            <a:r>
-              <a:rPr sz="1200" b="1" i="0">
-                <a:solidFill>
-                  <a:srgbClr val="269CCB"/>
-                </a:solidFill>
-                <a:latin typeface="Calibri"/>
-              </a:rPr>
-              <a:t>Info</a:t>
-            </a:r>
-          </a:p>
-          <a:p>
-            <a:pPr>
-              <a:spcBef>
-                <a:spcPts val="400"/>
-              </a:spcBef>
-            </a:pPr>
-            <a:r>
-              <a:rPr sz="1400" b="0" i="0">
-                <a:solidFill>
-                  <a:srgbClr val="333333"/>
-                </a:solidFill>
-                <a:latin typeface="Calibri"/>
-              </a:rPr>
-              <a:t>Hito: Primera pareja de consultas antes/despues del PI</a:t>
-            </a:r>
-          </a:p>
-        </p:txBody>
-      </p:sp>
-      <p:sp>
-        <p:nvSpPr>
-          <p:cNvPr id="8" name="Rounded Rectangle 7"/>
+          <a:bodyPr wrap="square" anchor="ctr"/>
+          <a:lstStyle/>
+          <a:p>
+            <a:pPr algn="ctr"/>
+            <a:r>
+              <a:rPr sz="1600" b="1" i="0">
+                <a:solidFill>
+                  <a:srgbClr val="FFFFFF"/>
+                </a:solidFill>
+                <a:latin typeface="Calibri"/>
+              </a:rPr>
+              <a:t>2</a:t>
+            </a:r>
+          </a:p>
+        </p:txBody>
+      </p:sp>
+      <p:sp>
+        <p:nvSpPr>
+          <p:cNvPr id="12" name="TextBox 11"/>
+          <p:cNvSpPr txBox="1"/>
+          <p:nvPr/>
+        </p:nvSpPr>
+        <p:spPr>
+          <a:xfrm>
+            <a:off x="1188720" y="2368296"/>
+            <a:ext cx="10271455" cy="786384"/>
+          </a:xfrm>
+          <a:prstGeom prst="rect">
+            <a:avLst/>
+          </a:prstGeom>
+          <a:noFill/>
+        </p:spPr>
+        <p:txBody>
+          <a:bodyPr wrap="square" anchor="ctr"/>
+          <a:lstStyle/>
+          <a:p>
+            <a:r>
+              <a:rPr sz="1500" b="1" i="0">
+                <a:solidFill>
+                  <a:srgbClr val="095292"/>
+                </a:solidFill>
+                <a:latin typeface="Calibri"/>
+              </a:rPr>
+              <a:t>Medir con EXPLAIN (ANALYZE, BUFFERS) las dos versiones, y con EXPLAIN ANALYZE una tercera que le anada LIMIT 50, y anotar las tres en comentarios: nodo mas costoso, filas estimadas vs reales y tiempo.</a:t>
+            </a:r>
+          </a:p>
+        </p:txBody>
+      </p:sp>
+      <p:sp>
+        <p:nvSpPr>
+          <p:cNvPr id="13" name="Rounded Rectangle 12"/>
           <p:cNvSpPr/>
           <p:nvPr/>
         </p:nvSpPr>
         <p:spPr>
           <a:xfrm>
-            <a:off x="457200" y="2478024"/>
-            <a:ext cx="11277295" cy="1051560"/>
+            <a:off x="457200" y="3319272"/>
+            <a:ext cx="11277295" cy="950976"/>
           </a:xfrm>
           <a:prstGeom prst="roundRect">
             <a:avLst>
@@ -5781,7 +5905,7 @@
             </a:avLst>
           </a:prstGeom>
           <a:solidFill>
-            <a:srgbClr val="FFF8E1"/>
+            <a:srgbClr val="F2F2F2"/>
           </a:solidFill>
           <a:ln>
             <a:noFill/>
@@ -5811,20 +5935,22 @@
       </p:sp>
       <p:sp>
         <p:nvSpPr>
-          <p:cNvPr id="9" name="Rectangle 8"/>
+          <p:cNvPr id="14" name="Rounded Rectangle 13"/>
           <p:cNvSpPr/>
           <p:nvPr/>
         </p:nvSpPr>
         <p:spPr>
           <a:xfrm>
-            <a:off x="457200" y="2478024"/>
-            <a:ext cx="128016" cy="1051560"/>
-          </a:xfrm>
-          <a:prstGeom prst="rect">
-            <a:avLst/>
+            <a:off x="594360" y="3575304"/>
+            <a:ext cx="438912" cy="438912"/>
+          </a:xfrm>
+          <a:prstGeom prst="roundRect">
+            <a:avLst>
+              <a:gd name="adj" fmla="val 12000"/>
+            </a:avLst>
           </a:prstGeom>
           <a:solidFill>
-            <a:srgbClr val="FFD000"/>
+            <a:srgbClr val="095292"/>
           </a:solidFill>
           <a:ln>
             <a:noFill/>
@@ -5854,14 +5980,14 @@
       </p:sp>
       <p:sp>
         <p:nvSpPr>
-          <p:cNvPr id="10" name="TextBox 9"/>
+          <p:cNvPr id="15" name="TextBox 14"/>
           <p:cNvSpPr txBox="1"/>
           <p:nvPr/>
         </p:nvSpPr>
         <p:spPr>
           <a:xfrm>
-            <a:off x="777240" y="2615184"/>
-            <a:ext cx="10774375" cy="822959"/>
+            <a:off x="594360" y="3575304"/>
+            <a:ext cx="438912" cy="438912"/>
           </a:xfrm>
           <a:prstGeom prst="rect">
             <a:avLst/>
@@ -5869,49 +5995,64 @@
           <a:noFill/>
         </p:spPr>
         <p:txBody>
-          <a:bodyPr wrap="square">
-            <a:spAutoFit/>
-          </a:bodyPr>
-          <a:lstStyle/>
-          <a:p>
-            <a:r>
-              <a:rPr sz="1200" b="1" i="0">
-                <a:solidFill>
-                  <a:srgbClr val="FFD000"/>
-                </a:solidFill>
-                <a:latin typeface="Calibri"/>
-              </a:rPr>
-              <a:t>Aclaración</a:t>
-            </a:r>
-          </a:p>
-          <a:p>
-            <a:pPr>
-              <a:spcBef>
-                <a:spcPts val="400"/>
-              </a:spcBef>
-            </a:pPr>
-            <a:r>
-              <a:rPr sz="1400" b="0" i="0">
-                <a:solidFill>
-                  <a:srgbClr val="333333"/>
-                </a:solidFill>
-                <a:latin typeface="Calibri"/>
-              </a:rPr>
-              <a:t>Enunciado completo: Clases/Proyecto Integrador/ (VetCare DB).</a:t>
-            </a:r>
-          </a:p>
-        </p:txBody>
-      </p:sp>
-      <p:sp>
-        <p:nvSpPr>
-          <p:cNvPr id="11" name="Rounded Rectangle 10"/>
+          <a:bodyPr wrap="square" anchor="ctr"/>
+          <a:lstStyle/>
+          <a:p>
+            <a:pPr algn="ctr"/>
+            <a:r>
+              <a:rPr sz="1600" b="1" i="0">
+                <a:solidFill>
+                  <a:srgbClr val="FFFFFF"/>
+                </a:solidFill>
+                <a:latin typeface="Calibri"/>
+              </a:rPr>
+              <a:t>3</a:t>
+            </a:r>
+          </a:p>
+        </p:txBody>
+      </p:sp>
+      <p:sp>
+        <p:nvSpPr>
+          <p:cNvPr id="16" name="TextBox 15"/>
+          <p:cNvSpPr txBox="1"/>
+          <p:nvPr/>
+        </p:nvSpPr>
+        <p:spPr>
+          <a:xfrm>
+            <a:off x="1188720" y="3410712"/>
+            <a:ext cx="10271455" cy="786384"/>
+          </a:xfrm>
+          <a:prstGeom prst="rect">
+            <a:avLst/>
+          </a:prstGeom>
+          <a:noFill/>
+        </p:spPr>
+        <p:txBody>
+          <a:bodyPr wrap="square" anchor="ctr"/>
+          <a:lstStyle/>
+          <a:p>
+            <a:r>
+              <a:rPr sz="1500" b="1" i="0">
+                <a:solidFill>
+                  <a:srgbClr val="095292"/>
+                </a:solidFill>
+                <a:latin typeface="Calibri"/>
+              </a:rPr>
+              <a:t>Matar la subconsulta correlacionada del ranking de duenos: LEFT JOIN + GROUP BY + COUNT(c.id_cita), y demostrar la equivalencia con EXCEPT en los dos sentidos.</a:t>
+            </a:r>
+          </a:p>
+        </p:txBody>
+      </p:sp>
+      <p:sp>
+        <p:nvSpPr>
+          <p:cNvPr id="17" name="Rounded Rectangle 16"/>
           <p:cNvSpPr/>
           <p:nvPr/>
         </p:nvSpPr>
         <p:spPr>
           <a:xfrm>
-            <a:off x="457200" y="3694176"/>
-            <a:ext cx="11277295" cy="1051560"/>
+            <a:off x="457200" y="4361688"/>
+            <a:ext cx="11277295" cy="950976"/>
           </a:xfrm>
           <a:prstGeom prst="roundRect">
             <a:avLst>
@@ -5919,7 +6060,7 @@
             </a:avLst>
           </a:prstGeom>
           <a:solidFill>
-            <a:srgbClr val="FBE4E4"/>
+            <a:srgbClr val="E8F4FA"/>
           </a:solidFill>
           <a:ln>
             <a:noFill/>
@@ -5949,20 +6090,22 @@
       </p:sp>
       <p:sp>
         <p:nvSpPr>
-          <p:cNvPr id="12" name="Rectangle 11"/>
+          <p:cNvPr id="18" name="Rounded Rectangle 17"/>
           <p:cNvSpPr/>
           <p:nvPr/>
         </p:nvSpPr>
         <p:spPr>
           <a:xfrm>
-            <a:off x="457200" y="3694176"/>
-            <a:ext cx="128016" cy="1051560"/>
-          </a:xfrm>
-          <a:prstGeom prst="rect">
-            <a:avLst/>
+            <a:off x="594360" y="4617720"/>
+            <a:ext cx="438912" cy="438912"/>
+          </a:xfrm>
+          <a:prstGeom prst="roundRect">
+            <a:avLst>
+              <a:gd name="adj" fmla="val 12000"/>
+            </a:avLst>
           </a:prstGeom>
           <a:solidFill>
-            <a:srgbClr val="A02030"/>
+            <a:srgbClr val="095292"/>
           </a:solidFill>
           <a:ln>
             <a:noFill/>
@@ -5992,14 +6135,14 @@
       </p:sp>
       <p:sp>
         <p:nvSpPr>
-          <p:cNvPr id="13" name="TextBox 12"/>
+          <p:cNvPr id="19" name="TextBox 18"/>
           <p:cNvSpPr txBox="1"/>
           <p:nvPr/>
         </p:nvSpPr>
         <p:spPr>
           <a:xfrm>
-            <a:off x="777240" y="3831336"/>
-            <a:ext cx="10774375" cy="822959"/>
+            <a:off x="594360" y="4617720"/>
+            <a:ext cx="438912" cy="438912"/>
           </a:xfrm>
           <a:prstGeom prst="rect">
             <a:avLst/>
@@ -6007,42 +6150,212 @@
           <a:noFill/>
         </p:spPr>
         <p:txBody>
-          <a:bodyPr wrap="square">
-            <a:spAutoFit/>
-          </a:bodyPr>
-          <a:lstStyle/>
-          <a:p>
-            <a:r>
-              <a:rPr sz="1200" b="1" i="0">
-                <a:solidFill>
-                  <a:srgbClr val="A02030"/>
-                </a:solidFill>
-                <a:latin typeface="Calibri"/>
-              </a:rPr>
-              <a:t>Atención</a:t>
-            </a:r>
-          </a:p>
-          <a:p>
-            <a:pPr>
-              <a:spcBef>
-                <a:spcPts val="400"/>
-              </a:spcBef>
-            </a:pPr>
-            <a:r>
-              <a:rPr sz="1400" b="0" i="0">
-                <a:solidFill>
-                  <a:srgbClr val="333333"/>
-                </a:solidFill>
-                <a:latin typeface="Calibri"/>
-              </a:rPr>
-              <a:t>Taller de la semana en ExamLab (https://uniaj.examlab.workers.dev/): domingo 23:59 (regla del Acuerdo) cuando aplique.</a:t>
-            </a:r>
-          </a:p>
-        </p:txBody>
-      </p:sp>
-      <p:sp>
-        <p:nvSpPr>
-          <p:cNvPr id="14" name="TextBox 13"/>
+          <a:bodyPr wrap="square" anchor="ctr"/>
+          <a:lstStyle/>
+          <a:p>
+            <a:pPr algn="ctr"/>
+            <a:r>
+              <a:rPr sz="1600" b="1" i="0">
+                <a:solidFill>
+                  <a:srgbClr val="FFFFFF"/>
+                </a:solidFill>
+                <a:latin typeface="Calibri"/>
+              </a:rPr>
+              <a:t>4</a:t>
+            </a:r>
+          </a:p>
+        </p:txBody>
+      </p:sp>
+      <p:sp>
+        <p:nvSpPr>
+          <p:cNvPr id="20" name="TextBox 19"/>
+          <p:cNvSpPr txBox="1"/>
+          <p:nvPr/>
+        </p:nvSpPr>
+        <p:spPr>
+          <a:xfrm>
+            <a:off x="1188720" y="4453128"/>
+            <a:ext cx="10271455" cy="786384"/>
+          </a:xfrm>
+          <a:prstGeom prst="rect">
+            <a:avLst/>
+          </a:prstGeom>
+          <a:noFill/>
+        </p:spPr>
+        <p:txBody>
+          <a:bodyPr wrap="square" anchor="ctr"/>
+          <a:lstStyle/>
+          <a:p>
+            <a:r>
+              <a:rPr sz="1500" b="1" i="0">
+                <a:solidFill>
+                  <a:srgbClr val="095292"/>
+                </a:solidFill>
+                <a:latin typeface="Calibri"/>
+              </a:rPr>
+              <a:t>Responder la de seleccion multiple sobre antipatrones (6 afirmaciones, 4 correctas).</a:t>
+            </a:r>
+          </a:p>
+        </p:txBody>
+      </p:sp>
+      <p:sp>
+        <p:nvSpPr>
+          <p:cNvPr id="21" name="Rounded Rectangle 20"/>
+          <p:cNvSpPr/>
+          <p:nvPr/>
+        </p:nvSpPr>
+        <p:spPr>
+          <a:xfrm>
+            <a:off x="457200" y="5404104"/>
+            <a:ext cx="11277295" cy="950976"/>
+          </a:xfrm>
+          <a:prstGeom prst="roundRect">
+            <a:avLst>
+              <a:gd name="adj" fmla="val 12000"/>
+            </a:avLst>
+          </a:prstGeom>
+          <a:solidFill>
+            <a:srgbClr val="F2F2F2"/>
+          </a:solidFill>
+          <a:ln>
+            <a:noFill/>
+          </a:ln>
+        </p:spPr>
+        <p:style>
+          <a:lnRef idx="1">
+            <a:schemeClr val="accent1"/>
+          </a:lnRef>
+          <a:fillRef idx="3">
+            <a:schemeClr val="accent1"/>
+          </a:fillRef>
+          <a:effectRef idx="2">
+            <a:schemeClr val="accent1"/>
+          </a:effectRef>
+          <a:fontRef idx="minor">
+            <a:schemeClr val="lt1"/>
+          </a:fontRef>
+        </p:style>
+        <p:txBody>
+          <a:bodyPr rtlCol="0" anchor="ctr"/>
+          <a:lstStyle/>
+          <a:p>
+            <a:pPr algn="ctr"/>
+          </a:p>
+        </p:txBody>
+      </p:sp>
+      <p:sp>
+        <p:nvSpPr>
+          <p:cNvPr id="22" name="Rounded Rectangle 21"/>
+          <p:cNvSpPr/>
+          <p:nvPr/>
+        </p:nvSpPr>
+        <p:spPr>
+          <a:xfrm>
+            <a:off x="594360" y="5660136"/>
+            <a:ext cx="438912" cy="438912"/>
+          </a:xfrm>
+          <a:prstGeom prst="roundRect">
+            <a:avLst>
+              <a:gd name="adj" fmla="val 12000"/>
+            </a:avLst>
+          </a:prstGeom>
+          <a:solidFill>
+            <a:srgbClr val="095292"/>
+          </a:solidFill>
+          <a:ln>
+            <a:noFill/>
+          </a:ln>
+        </p:spPr>
+        <p:style>
+          <a:lnRef idx="1">
+            <a:schemeClr val="accent1"/>
+          </a:lnRef>
+          <a:fillRef idx="3">
+            <a:schemeClr val="accent1"/>
+          </a:fillRef>
+          <a:effectRef idx="2">
+            <a:schemeClr val="accent1"/>
+          </a:effectRef>
+          <a:fontRef idx="minor">
+            <a:schemeClr val="lt1"/>
+          </a:fontRef>
+        </p:style>
+        <p:txBody>
+          <a:bodyPr rtlCol="0" anchor="ctr"/>
+          <a:lstStyle/>
+          <a:p>
+            <a:pPr algn="ctr"/>
+          </a:p>
+        </p:txBody>
+      </p:sp>
+      <p:sp>
+        <p:nvSpPr>
+          <p:cNvPr id="23" name="TextBox 22"/>
+          <p:cNvSpPr txBox="1"/>
+          <p:nvPr/>
+        </p:nvSpPr>
+        <p:spPr>
+          <a:xfrm>
+            <a:off x="594360" y="5660136"/>
+            <a:ext cx="438912" cy="438912"/>
+          </a:xfrm>
+          <a:prstGeom prst="rect">
+            <a:avLst/>
+          </a:prstGeom>
+          <a:noFill/>
+        </p:spPr>
+        <p:txBody>
+          <a:bodyPr wrap="square" anchor="ctr"/>
+          <a:lstStyle/>
+          <a:p>
+            <a:pPr algn="ctr"/>
+            <a:r>
+              <a:rPr sz="1600" b="1" i="0">
+                <a:solidFill>
+                  <a:srgbClr val="FFFFFF"/>
+                </a:solidFill>
+                <a:latin typeface="Calibri"/>
+              </a:rPr>
+              <a:t>5</a:t>
+            </a:r>
+          </a:p>
+        </p:txBody>
+      </p:sp>
+      <p:sp>
+        <p:nvSpPr>
+          <p:cNvPr id="24" name="TextBox 23"/>
+          <p:cNvSpPr txBox="1"/>
+          <p:nvPr/>
+        </p:nvSpPr>
+        <p:spPr>
+          <a:xfrm>
+            <a:off x="1188720" y="5495544"/>
+            <a:ext cx="10271455" cy="786384"/>
+          </a:xfrm>
+          <a:prstGeom prst="rect">
+            <a:avLst/>
+          </a:prstGeom>
+          <a:noFill/>
+        </p:spPr>
+        <p:txBody>
+          <a:bodyPr wrap="square" anchor="ctr"/>
+          <a:lstStyle/>
+          <a:p>
+            <a:r>
+              <a:rPr sz="1500" b="1" i="0">
+                <a:solidFill>
+                  <a:srgbClr val="095292"/>
+                </a:solidFill>
+                <a:latin typeface="Calibri"/>
+              </a:rPr>
+              <a:t>Escribir la justificacion tecnica de media pagina y guardar 06_opt_antes.sql / 06_opt_despues.sql en la carpeta del PI.</a:t>
+            </a:r>
+          </a:p>
+        </p:txBody>
+      </p:sp>
+      <p:sp>
+        <p:nvSpPr>
+          <p:cNvPr id="25" name="TextBox 24"/>
           <p:cNvSpPr txBox="1"/>
           <p:nvPr/>
         </p:nvSpPr>
@@ -6110,6 +6423,2620 @@
         <p:spPr>
           <a:xfrm>
             <a:off x="0" y="0"/>
+            <a:ext cx="12191695" cy="960120"/>
+          </a:xfrm>
+          <a:prstGeom prst="rect">
+            <a:avLst/>
+          </a:prstGeom>
+          <a:solidFill>
+            <a:srgbClr val="095292"/>
+          </a:solidFill>
+          <a:ln>
+            <a:noFill/>
+          </a:ln>
+        </p:spPr>
+        <p:style>
+          <a:lnRef idx="1">
+            <a:schemeClr val="accent1"/>
+          </a:lnRef>
+          <a:fillRef idx="3">
+            <a:schemeClr val="accent1"/>
+          </a:fillRef>
+          <a:effectRef idx="2">
+            <a:schemeClr val="accent1"/>
+          </a:effectRef>
+          <a:fontRef idx="minor">
+            <a:schemeClr val="lt1"/>
+          </a:fontRef>
+        </p:style>
+        <p:txBody>
+          <a:bodyPr rtlCol="0" anchor="ctr"/>
+          <a:lstStyle/>
+          <a:p>
+            <a:pPr algn="ctr"/>
+          </a:p>
+        </p:txBody>
+      </p:sp>
+      <p:sp>
+        <p:nvSpPr>
+          <p:cNvPr id="3" name="Rectangle 2"/>
+          <p:cNvSpPr/>
+          <p:nvPr/>
+        </p:nvSpPr>
+        <p:spPr>
+          <a:xfrm>
+            <a:off x="0" y="960120"/>
+            <a:ext cx="12191695" cy="41148"/>
+          </a:xfrm>
+          <a:prstGeom prst="rect">
+            <a:avLst/>
+          </a:prstGeom>
+          <a:solidFill>
+            <a:srgbClr val="FFD000"/>
+          </a:solidFill>
+          <a:ln>
+            <a:noFill/>
+          </a:ln>
+        </p:spPr>
+        <p:style>
+          <a:lnRef idx="1">
+            <a:schemeClr val="accent1"/>
+          </a:lnRef>
+          <a:fillRef idx="3">
+            <a:schemeClr val="accent1"/>
+          </a:fillRef>
+          <a:effectRef idx="2">
+            <a:schemeClr val="accent1"/>
+          </a:effectRef>
+          <a:fontRef idx="minor">
+            <a:schemeClr val="lt1"/>
+          </a:fontRef>
+        </p:style>
+        <p:txBody>
+          <a:bodyPr rtlCol="0" anchor="ctr"/>
+          <a:lstStyle/>
+          <a:p>
+            <a:pPr algn="ctr"/>
+          </a:p>
+        </p:txBody>
+      </p:sp>
+      <p:sp>
+        <p:nvSpPr>
+          <p:cNvPr id="4" name="TextBox 3"/>
+          <p:cNvSpPr txBox="1"/>
+          <p:nvPr/>
+        </p:nvSpPr>
+        <p:spPr>
+          <a:xfrm>
+            <a:off x="457200" y="164592"/>
+            <a:ext cx="11277295" cy="502920"/>
+          </a:xfrm>
+          <a:prstGeom prst="rect">
+            <a:avLst/>
+          </a:prstGeom>
+          <a:noFill/>
+        </p:spPr>
+        <p:txBody>
+          <a:bodyPr wrap="square">
+            <a:spAutoFit/>
+          </a:bodyPr>
+          <a:lstStyle/>
+          <a:p>
+            <a:r>
+              <a:rPr sz="2600" b="1" i="0">
+                <a:solidFill>
+                  <a:srgbClr val="FFFFFF"/>
+                </a:solidFill>
+                <a:latin typeface="Calibri"/>
+              </a:rPr>
+              <a:t>Taller PI VetCare — pistas (checklist vacio)</a:t>
+            </a:r>
+          </a:p>
+        </p:txBody>
+      </p:sp>
+      <p:sp>
+        <p:nvSpPr>
+          <p:cNvPr id="5" name="Rounded Rectangle 4"/>
+          <p:cNvSpPr/>
+          <p:nvPr/>
+        </p:nvSpPr>
+        <p:spPr>
+          <a:xfrm>
+            <a:off x="457200" y="1261872"/>
+            <a:ext cx="11277295" cy="566928"/>
+          </a:xfrm>
+          <a:prstGeom prst="roundRect">
+            <a:avLst>
+              <a:gd name="adj" fmla="val 12000"/>
+            </a:avLst>
+          </a:prstGeom>
+          <a:solidFill>
+            <a:srgbClr val="F2F2F2"/>
+          </a:solidFill>
+          <a:ln>
+            <a:noFill/>
+          </a:ln>
+        </p:spPr>
+        <p:style>
+          <a:lnRef idx="1">
+            <a:schemeClr val="accent1"/>
+          </a:lnRef>
+          <a:fillRef idx="3">
+            <a:schemeClr val="accent1"/>
+          </a:fillRef>
+          <a:effectRef idx="2">
+            <a:schemeClr val="accent1"/>
+          </a:effectRef>
+          <a:fontRef idx="minor">
+            <a:schemeClr val="lt1"/>
+          </a:fontRef>
+        </p:style>
+        <p:txBody>
+          <a:bodyPr rtlCol="0" anchor="ctr"/>
+          <a:lstStyle/>
+          <a:p>
+            <a:pPr algn="ctr"/>
+          </a:p>
+        </p:txBody>
+      </p:sp>
+      <p:sp>
+        <p:nvSpPr>
+          <p:cNvPr id="6" name="Rectangle 5"/>
+          <p:cNvSpPr/>
+          <p:nvPr/>
+        </p:nvSpPr>
+        <p:spPr>
+          <a:xfrm>
+            <a:off x="640080" y="1408175"/>
+            <a:ext cx="274320" cy="274320"/>
+          </a:xfrm>
+          <a:prstGeom prst="rect">
+            <a:avLst/>
+          </a:prstGeom>
+          <a:solidFill>
+            <a:srgbClr val="FFFFFF"/>
+          </a:solidFill>
+          <a:ln>
+            <a:solidFill>
+              <a:srgbClr val="333333"/>
+            </a:solidFill>
+          </a:ln>
+        </p:spPr>
+        <p:style>
+          <a:lnRef idx="1">
+            <a:schemeClr val="accent1"/>
+          </a:lnRef>
+          <a:fillRef idx="3">
+            <a:schemeClr val="accent1"/>
+          </a:fillRef>
+          <a:effectRef idx="2">
+            <a:schemeClr val="accent1"/>
+          </a:effectRef>
+          <a:fontRef idx="minor">
+            <a:schemeClr val="lt1"/>
+          </a:fontRef>
+        </p:style>
+        <p:txBody>
+          <a:bodyPr rtlCol="0" anchor="ctr"/>
+          <a:lstStyle/>
+          <a:p>
+            <a:pPr algn="ctr"/>
+          </a:p>
+        </p:txBody>
+      </p:sp>
+      <p:sp>
+        <p:nvSpPr>
+          <p:cNvPr id="7" name="Rectangle 6"/>
+          <p:cNvSpPr/>
+          <p:nvPr/>
+        </p:nvSpPr>
+        <p:spPr>
+          <a:xfrm>
+            <a:off x="640080" y="1408175"/>
+            <a:ext cx="73152" cy="274320"/>
+          </a:xfrm>
+          <a:prstGeom prst="rect">
+            <a:avLst/>
+          </a:prstGeom>
+          <a:solidFill>
+            <a:srgbClr val="269CCB"/>
+          </a:solidFill>
+          <a:ln>
+            <a:noFill/>
+          </a:ln>
+        </p:spPr>
+        <p:style>
+          <a:lnRef idx="1">
+            <a:schemeClr val="accent1"/>
+          </a:lnRef>
+          <a:fillRef idx="3">
+            <a:schemeClr val="accent1"/>
+          </a:fillRef>
+          <a:effectRef idx="2">
+            <a:schemeClr val="accent1"/>
+          </a:effectRef>
+          <a:fontRef idx="minor">
+            <a:schemeClr val="lt1"/>
+          </a:fontRef>
+        </p:style>
+        <p:txBody>
+          <a:bodyPr rtlCol="0" anchor="ctr"/>
+          <a:lstStyle/>
+          <a:p>
+            <a:pPr algn="ctr"/>
+          </a:p>
+        </p:txBody>
+      </p:sp>
+      <p:sp>
+        <p:nvSpPr>
+          <p:cNvPr id="8" name="TextBox 7"/>
+          <p:cNvSpPr txBox="1"/>
+          <p:nvPr/>
+        </p:nvSpPr>
+        <p:spPr>
+          <a:xfrm>
+            <a:off x="1097280" y="1353312"/>
+            <a:ext cx="10362895" cy="402336"/>
+          </a:xfrm>
+          <a:prstGeom prst="rect">
+            <a:avLst/>
+          </a:prstGeom>
+          <a:noFill/>
+        </p:spPr>
+        <p:txBody>
+          <a:bodyPr wrap="square" anchor="ctr"/>
+          <a:lstStyle/>
+          <a:p>
+            <a:r>
+              <a:rPr sz="1500" b="0" i="0">
+                <a:solidFill>
+                  <a:srgbClr val="333333"/>
+                </a:solidFill>
+                <a:latin typeface="Calibri"/>
+              </a:rPr>
+              <a:t>□ ¿Quedó algún «SELECT *», o proyectaste las </a:t>
+            </a:r>
+            <a:r>
+              <a:rPr sz="1500" b="1" i="0">
+                <a:solidFill>
+                  <a:srgbClr val="333333"/>
+                </a:solidFill>
+                <a:latin typeface="Calibri"/>
+              </a:rPr>
+              <a:t>6</a:t>
+            </a:r>
+            <a:r>
+              <a:rPr sz="1500" b="0" i="0">
+                <a:solidFill>
+                  <a:srgbClr val="333333"/>
+                </a:solidFill>
+                <a:latin typeface="Calibri"/>
+              </a:rPr>
+              <a:t> columnas que pide el enunciado?</a:t>
+            </a:r>
+          </a:p>
+        </p:txBody>
+      </p:sp>
+      <p:sp>
+        <p:nvSpPr>
+          <p:cNvPr id="9" name="Rounded Rectangle 8"/>
+          <p:cNvSpPr/>
+          <p:nvPr/>
+        </p:nvSpPr>
+        <p:spPr>
+          <a:xfrm>
+            <a:off x="457200" y="1938528"/>
+            <a:ext cx="11277295" cy="566928"/>
+          </a:xfrm>
+          <a:prstGeom prst="roundRect">
+            <a:avLst>
+              <a:gd name="adj" fmla="val 12000"/>
+            </a:avLst>
+          </a:prstGeom>
+          <a:solidFill>
+            <a:srgbClr val="F2F2F2"/>
+          </a:solidFill>
+          <a:ln>
+            <a:noFill/>
+          </a:ln>
+        </p:spPr>
+        <p:style>
+          <a:lnRef idx="1">
+            <a:schemeClr val="accent1"/>
+          </a:lnRef>
+          <a:fillRef idx="3">
+            <a:schemeClr val="accent1"/>
+          </a:fillRef>
+          <a:effectRef idx="2">
+            <a:schemeClr val="accent1"/>
+          </a:effectRef>
+          <a:fontRef idx="minor">
+            <a:schemeClr val="lt1"/>
+          </a:fontRef>
+        </p:style>
+        <p:txBody>
+          <a:bodyPr rtlCol="0" anchor="ctr"/>
+          <a:lstStyle/>
+          <a:p>
+            <a:pPr algn="ctr"/>
+          </a:p>
+        </p:txBody>
+      </p:sp>
+      <p:sp>
+        <p:nvSpPr>
+          <p:cNvPr id="10" name="Rectangle 9"/>
+          <p:cNvSpPr/>
+          <p:nvPr/>
+        </p:nvSpPr>
+        <p:spPr>
+          <a:xfrm>
+            <a:off x="640080" y="2084832"/>
+            <a:ext cx="274320" cy="274320"/>
+          </a:xfrm>
+          <a:prstGeom prst="rect">
+            <a:avLst/>
+          </a:prstGeom>
+          <a:solidFill>
+            <a:srgbClr val="FFFFFF"/>
+          </a:solidFill>
+          <a:ln>
+            <a:solidFill>
+              <a:srgbClr val="333333"/>
+            </a:solidFill>
+          </a:ln>
+        </p:spPr>
+        <p:style>
+          <a:lnRef idx="1">
+            <a:schemeClr val="accent1"/>
+          </a:lnRef>
+          <a:fillRef idx="3">
+            <a:schemeClr val="accent1"/>
+          </a:fillRef>
+          <a:effectRef idx="2">
+            <a:schemeClr val="accent1"/>
+          </a:effectRef>
+          <a:fontRef idx="minor">
+            <a:schemeClr val="lt1"/>
+          </a:fontRef>
+        </p:style>
+        <p:txBody>
+          <a:bodyPr rtlCol="0" anchor="ctr"/>
+          <a:lstStyle/>
+          <a:p>
+            <a:pPr algn="ctr"/>
+          </a:p>
+        </p:txBody>
+      </p:sp>
+      <p:sp>
+        <p:nvSpPr>
+          <p:cNvPr id="11" name="Rectangle 10"/>
+          <p:cNvSpPr/>
+          <p:nvPr/>
+        </p:nvSpPr>
+        <p:spPr>
+          <a:xfrm>
+            <a:off x="640080" y="2084832"/>
+            <a:ext cx="73152" cy="274320"/>
+          </a:xfrm>
+          <a:prstGeom prst="rect">
+            <a:avLst/>
+          </a:prstGeom>
+          <a:solidFill>
+            <a:srgbClr val="269CCB"/>
+          </a:solidFill>
+          <a:ln>
+            <a:noFill/>
+          </a:ln>
+        </p:spPr>
+        <p:style>
+          <a:lnRef idx="1">
+            <a:schemeClr val="accent1"/>
+          </a:lnRef>
+          <a:fillRef idx="3">
+            <a:schemeClr val="accent1"/>
+          </a:fillRef>
+          <a:effectRef idx="2">
+            <a:schemeClr val="accent1"/>
+          </a:effectRef>
+          <a:fontRef idx="minor">
+            <a:schemeClr val="lt1"/>
+          </a:fontRef>
+        </p:style>
+        <p:txBody>
+          <a:bodyPr rtlCol="0" anchor="ctr"/>
+          <a:lstStyle/>
+          <a:p>
+            <a:pPr algn="ctr"/>
+          </a:p>
+        </p:txBody>
+      </p:sp>
+      <p:sp>
+        <p:nvSpPr>
+          <p:cNvPr id="12" name="TextBox 11"/>
+          <p:cNvSpPr txBox="1"/>
+          <p:nvPr/>
+        </p:nvSpPr>
+        <p:spPr>
+          <a:xfrm>
+            <a:off x="1097280" y="2029968"/>
+            <a:ext cx="10362895" cy="402336"/>
+          </a:xfrm>
+          <a:prstGeom prst="rect">
+            <a:avLst/>
+          </a:prstGeom>
+          <a:noFill/>
+        </p:spPr>
+        <p:txBody>
+          <a:bodyPr wrap="square" anchor="ctr"/>
+          <a:lstStyle/>
+          <a:p>
+            <a:r>
+              <a:rPr sz="1500" b="0" i="0">
+                <a:solidFill>
+                  <a:srgbClr val="333333"/>
+                </a:solidFill>
+                <a:latin typeface="Calibri"/>
+              </a:rPr>
+              <a:t>□ ¿La fecha se filtra con un </a:t>
+            </a:r>
+            <a:r>
+              <a:rPr sz="1500" b="1" i="0">
+                <a:solidFill>
+                  <a:srgbClr val="333333"/>
+                </a:solidFill>
+                <a:latin typeface="Calibri"/>
+              </a:rPr>
+              <a:t>rango</a:t>
+            </a:r>
+            <a:r>
+              <a:rPr sz="1500" b="0" i="0">
+                <a:solidFill>
+                  <a:srgbClr val="333333"/>
+                </a:solidFill>
+                <a:latin typeface="Calibri"/>
+              </a:rPr>
+              <a:t> sobre la columna, sin «to_char» ni «EXTRACT» encima de ella?</a:t>
+            </a:r>
+          </a:p>
+        </p:txBody>
+      </p:sp>
+      <p:sp>
+        <p:nvSpPr>
+          <p:cNvPr id="13" name="Rounded Rectangle 12"/>
+          <p:cNvSpPr/>
+          <p:nvPr/>
+        </p:nvSpPr>
+        <p:spPr>
+          <a:xfrm>
+            <a:off x="457200" y="2615184"/>
+            <a:ext cx="11277295" cy="566928"/>
+          </a:xfrm>
+          <a:prstGeom prst="roundRect">
+            <a:avLst>
+              <a:gd name="adj" fmla="val 12000"/>
+            </a:avLst>
+          </a:prstGeom>
+          <a:solidFill>
+            <a:srgbClr val="F2F2F2"/>
+          </a:solidFill>
+          <a:ln>
+            <a:noFill/>
+          </a:ln>
+        </p:spPr>
+        <p:style>
+          <a:lnRef idx="1">
+            <a:schemeClr val="accent1"/>
+          </a:lnRef>
+          <a:fillRef idx="3">
+            <a:schemeClr val="accent1"/>
+          </a:fillRef>
+          <a:effectRef idx="2">
+            <a:schemeClr val="accent1"/>
+          </a:effectRef>
+          <a:fontRef idx="minor">
+            <a:schemeClr val="lt1"/>
+          </a:fontRef>
+        </p:style>
+        <p:txBody>
+          <a:bodyPr rtlCol="0" anchor="ctr"/>
+          <a:lstStyle/>
+          <a:p>
+            <a:pPr algn="ctr"/>
+          </a:p>
+        </p:txBody>
+      </p:sp>
+      <p:sp>
+        <p:nvSpPr>
+          <p:cNvPr id="14" name="Rectangle 13"/>
+          <p:cNvSpPr/>
+          <p:nvPr/>
+        </p:nvSpPr>
+        <p:spPr>
+          <a:xfrm>
+            <a:off x="640080" y="2761488"/>
+            <a:ext cx="274320" cy="274320"/>
+          </a:xfrm>
+          <a:prstGeom prst="rect">
+            <a:avLst/>
+          </a:prstGeom>
+          <a:solidFill>
+            <a:srgbClr val="FFFFFF"/>
+          </a:solidFill>
+          <a:ln>
+            <a:solidFill>
+              <a:srgbClr val="333333"/>
+            </a:solidFill>
+          </a:ln>
+        </p:spPr>
+        <p:style>
+          <a:lnRef idx="1">
+            <a:schemeClr val="accent1"/>
+          </a:lnRef>
+          <a:fillRef idx="3">
+            <a:schemeClr val="accent1"/>
+          </a:fillRef>
+          <a:effectRef idx="2">
+            <a:schemeClr val="accent1"/>
+          </a:effectRef>
+          <a:fontRef idx="minor">
+            <a:schemeClr val="lt1"/>
+          </a:fontRef>
+        </p:style>
+        <p:txBody>
+          <a:bodyPr rtlCol="0" anchor="ctr"/>
+          <a:lstStyle/>
+          <a:p>
+            <a:pPr algn="ctr"/>
+          </a:p>
+        </p:txBody>
+      </p:sp>
+      <p:sp>
+        <p:nvSpPr>
+          <p:cNvPr id="15" name="Rectangle 14"/>
+          <p:cNvSpPr/>
+          <p:nvPr/>
+        </p:nvSpPr>
+        <p:spPr>
+          <a:xfrm>
+            <a:off x="640080" y="2761488"/>
+            <a:ext cx="73152" cy="274320"/>
+          </a:xfrm>
+          <a:prstGeom prst="rect">
+            <a:avLst/>
+          </a:prstGeom>
+          <a:solidFill>
+            <a:srgbClr val="269CCB"/>
+          </a:solidFill>
+          <a:ln>
+            <a:noFill/>
+          </a:ln>
+        </p:spPr>
+        <p:style>
+          <a:lnRef idx="1">
+            <a:schemeClr val="accent1"/>
+          </a:lnRef>
+          <a:fillRef idx="3">
+            <a:schemeClr val="accent1"/>
+          </a:fillRef>
+          <a:effectRef idx="2">
+            <a:schemeClr val="accent1"/>
+          </a:effectRef>
+          <a:fontRef idx="minor">
+            <a:schemeClr val="lt1"/>
+          </a:fontRef>
+        </p:style>
+        <p:txBody>
+          <a:bodyPr rtlCol="0" anchor="ctr"/>
+          <a:lstStyle/>
+          <a:p>
+            <a:pPr algn="ctr"/>
+          </a:p>
+        </p:txBody>
+      </p:sp>
+      <p:sp>
+        <p:nvSpPr>
+          <p:cNvPr id="16" name="TextBox 15"/>
+          <p:cNvSpPr txBox="1"/>
+          <p:nvPr/>
+        </p:nvSpPr>
+        <p:spPr>
+          <a:xfrm>
+            <a:off x="1097280" y="2706624"/>
+            <a:ext cx="10362895" cy="402336"/>
+          </a:xfrm>
+          <a:prstGeom prst="rect">
+            <a:avLst/>
+          </a:prstGeom>
+          <a:noFill/>
+        </p:spPr>
+        <p:txBody>
+          <a:bodyPr wrap="square" anchor="ctr"/>
+          <a:lstStyle/>
+          <a:p>
+            <a:r>
+              <a:rPr sz="1500" b="0" i="0">
+                <a:solidFill>
+                  <a:srgbClr val="333333"/>
+                </a:solidFill>
+                <a:latin typeface="Calibri"/>
+              </a:rPr>
+              <a:t>□ ¿Los dos «COUNT(*)» de la pregunta 1 dan el </a:t>
+            </a:r>
+            <a:r>
+              <a:rPr sz="1500" b="1" i="0">
+                <a:solidFill>
+                  <a:srgbClr val="333333"/>
+                </a:solidFill>
+                <a:latin typeface="Calibri"/>
+              </a:rPr>
+              <a:t>mismo</a:t>
+            </a:r>
+            <a:r>
+              <a:rPr sz="1500" b="0" i="0">
+                <a:solidFill>
+                  <a:srgbClr val="333333"/>
+                </a:solidFill>
+                <a:latin typeface="Calibri"/>
+              </a:rPr>
+              <a:t> número?</a:t>
+            </a:r>
+          </a:p>
+        </p:txBody>
+      </p:sp>
+      <p:sp>
+        <p:nvSpPr>
+          <p:cNvPr id="17" name="Rounded Rectangle 16"/>
+          <p:cNvSpPr/>
+          <p:nvPr/>
+        </p:nvSpPr>
+        <p:spPr>
+          <a:xfrm>
+            <a:off x="457200" y="3291840"/>
+            <a:ext cx="11277295" cy="566928"/>
+          </a:xfrm>
+          <a:prstGeom prst="roundRect">
+            <a:avLst>
+              <a:gd name="adj" fmla="val 12000"/>
+            </a:avLst>
+          </a:prstGeom>
+          <a:solidFill>
+            <a:srgbClr val="F2F2F2"/>
+          </a:solidFill>
+          <a:ln>
+            <a:noFill/>
+          </a:ln>
+        </p:spPr>
+        <p:style>
+          <a:lnRef idx="1">
+            <a:schemeClr val="accent1"/>
+          </a:lnRef>
+          <a:fillRef idx="3">
+            <a:schemeClr val="accent1"/>
+          </a:fillRef>
+          <a:effectRef idx="2">
+            <a:schemeClr val="accent1"/>
+          </a:effectRef>
+          <a:fontRef idx="minor">
+            <a:schemeClr val="lt1"/>
+          </a:fontRef>
+        </p:style>
+        <p:txBody>
+          <a:bodyPr rtlCol="0" anchor="ctr"/>
+          <a:lstStyle/>
+          <a:p>
+            <a:pPr algn="ctr"/>
+          </a:p>
+        </p:txBody>
+      </p:sp>
+      <p:sp>
+        <p:nvSpPr>
+          <p:cNvPr id="18" name="Rectangle 17"/>
+          <p:cNvSpPr/>
+          <p:nvPr/>
+        </p:nvSpPr>
+        <p:spPr>
+          <a:xfrm>
+            <a:off x="640080" y="3438144"/>
+            <a:ext cx="274320" cy="274320"/>
+          </a:xfrm>
+          <a:prstGeom prst="rect">
+            <a:avLst/>
+          </a:prstGeom>
+          <a:solidFill>
+            <a:srgbClr val="FFFFFF"/>
+          </a:solidFill>
+          <a:ln>
+            <a:solidFill>
+              <a:srgbClr val="333333"/>
+            </a:solidFill>
+          </a:ln>
+        </p:spPr>
+        <p:style>
+          <a:lnRef idx="1">
+            <a:schemeClr val="accent1"/>
+          </a:lnRef>
+          <a:fillRef idx="3">
+            <a:schemeClr val="accent1"/>
+          </a:fillRef>
+          <a:effectRef idx="2">
+            <a:schemeClr val="accent1"/>
+          </a:effectRef>
+          <a:fontRef idx="minor">
+            <a:schemeClr val="lt1"/>
+          </a:fontRef>
+        </p:style>
+        <p:txBody>
+          <a:bodyPr rtlCol="0" anchor="ctr"/>
+          <a:lstStyle/>
+          <a:p>
+            <a:pPr algn="ctr"/>
+          </a:p>
+        </p:txBody>
+      </p:sp>
+      <p:sp>
+        <p:nvSpPr>
+          <p:cNvPr id="19" name="Rectangle 18"/>
+          <p:cNvSpPr/>
+          <p:nvPr/>
+        </p:nvSpPr>
+        <p:spPr>
+          <a:xfrm>
+            <a:off x="640080" y="3438144"/>
+            <a:ext cx="73152" cy="274320"/>
+          </a:xfrm>
+          <a:prstGeom prst="rect">
+            <a:avLst/>
+          </a:prstGeom>
+          <a:solidFill>
+            <a:srgbClr val="269CCB"/>
+          </a:solidFill>
+          <a:ln>
+            <a:noFill/>
+          </a:ln>
+        </p:spPr>
+        <p:style>
+          <a:lnRef idx="1">
+            <a:schemeClr val="accent1"/>
+          </a:lnRef>
+          <a:fillRef idx="3">
+            <a:schemeClr val="accent1"/>
+          </a:fillRef>
+          <a:effectRef idx="2">
+            <a:schemeClr val="accent1"/>
+          </a:effectRef>
+          <a:fontRef idx="minor">
+            <a:schemeClr val="lt1"/>
+          </a:fontRef>
+        </p:style>
+        <p:txBody>
+          <a:bodyPr rtlCol="0" anchor="ctr"/>
+          <a:lstStyle/>
+          <a:p>
+            <a:pPr algn="ctr"/>
+          </a:p>
+        </p:txBody>
+      </p:sp>
+      <p:sp>
+        <p:nvSpPr>
+          <p:cNvPr id="20" name="TextBox 19"/>
+          <p:cNvSpPr txBox="1"/>
+          <p:nvPr/>
+        </p:nvSpPr>
+        <p:spPr>
+          <a:xfrm>
+            <a:off x="1097280" y="3383280"/>
+            <a:ext cx="10362895" cy="402336"/>
+          </a:xfrm>
+          <a:prstGeom prst="rect">
+            <a:avLst/>
+          </a:prstGeom>
+          <a:noFill/>
+        </p:spPr>
+        <p:txBody>
+          <a:bodyPr wrap="square" anchor="ctr"/>
+          <a:lstStyle/>
+          <a:p>
+            <a:r>
+              <a:rPr sz="1500" b="0" i="0">
+                <a:solidFill>
+                  <a:srgbClr val="333333"/>
+                </a:solidFill>
+                <a:latin typeface="Calibri"/>
+              </a:rPr>
+              <a:t>□ ¿Están los </a:t>
+            </a:r>
+            <a:r>
+              <a:rPr sz="1500" b="1" i="0">
+                <a:solidFill>
+                  <a:srgbClr val="333333"/>
+                </a:solidFill>
+                <a:latin typeface="Calibri"/>
+              </a:rPr>
+              <a:t>tres</a:t>
+            </a:r>
+            <a:r>
+              <a:rPr sz="1500" b="0" i="0">
+                <a:solidFill>
+                  <a:srgbClr val="333333"/>
+                </a:solidFill>
+                <a:latin typeface="Calibri"/>
+              </a:rPr>
+              <a:t> «EXPLAIN», incluido el de «LIMIT 50», y la tabla de comentarios con sus </a:t>
+            </a:r>
+            <a:r>
+              <a:rPr sz="1500" b="1" i="0">
+                <a:solidFill>
+                  <a:srgbClr val="333333"/>
+                </a:solidFill>
+                <a:latin typeface="Calibri"/>
+              </a:rPr>
+              <a:t>tres filas</a:t>
+            </a:r>
+            <a:r>
+              <a:rPr sz="1500" b="0" i="0">
+                <a:solidFill>
+                  <a:srgbClr val="333333"/>
+                </a:solidFill>
+                <a:latin typeface="Calibri"/>
+              </a:rPr>
+              <a:t> (ANTES, DESPUES, DESPUES+LIM50) y sus tres columnas?</a:t>
+            </a:r>
+          </a:p>
+        </p:txBody>
+      </p:sp>
+      <p:sp>
+        <p:nvSpPr>
+          <p:cNvPr id="21" name="Rounded Rectangle 20"/>
+          <p:cNvSpPr/>
+          <p:nvPr/>
+        </p:nvSpPr>
+        <p:spPr>
+          <a:xfrm>
+            <a:off x="457200" y="3968496"/>
+            <a:ext cx="11277295" cy="566928"/>
+          </a:xfrm>
+          <a:prstGeom prst="roundRect">
+            <a:avLst>
+              <a:gd name="adj" fmla="val 12000"/>
+            </a:avLst>
+          </a:prstGeom>
+          <a:solidFill>
+            <a:srgbClr val="F2F2F2"/>
+          </a:solidFill>
+          <a:ln>
+            <a:noFill/>
+          </a:ln>
+        </p:spPr>
+        <p:style>
+          <a:lnRef idx="1">
+            <a:schemeClr val="accent1"/>
+          </a:lnRef>
+          <a:fillRef idx="3">
+            <a:schemeClr val="accent1"/>
+          </a:fillRef>
+          <a:effectRef idx="2">
+            <a:schemeClr val="accent1"/>
+          </a:effectRef>
+          <a:fontRef idx="minor">
+            <a:schemeClr val="lt1"/>
+          </a:fontRef>
+        </p:style>
+        <p:txBody>
+          <a:bodyPr rtlCol="0" anchor="ctr"/>
+          <a:lstStyle/>
+          <a:p>
+            <a:pPr algn="ctr"/>
+          </a:p>
+        </p:txBody>
+      </p:sp>
+      <p:sp>
+        <p:nvSpPr>
+          <p:cNvPr id="22" name="Rectangle 21"/>
+          <p:cNvSpPr/>
+          <p:nvPr/>
+        </p:nvSpPr>
+        <p:spPr>
+          <a:xfrm>
+            <a:off x="640080" y="4114800"/>
+            <a:ext cx="274320" cy="274320"/>
+          </a:xfrm>
+          <a:prstGeom prst="rect">
+            <a:avLst/>
+          </a:prstGeom>
+          <a:solidFill>
+            <a:srgbClr val="FFFFFF"/>
+          </a:solidFill>
+          <a:ln>
+            <a:solidFill>
+              <a:srgbClr val="333333"/>
+            </a:solidFill>
+          </a:ln>
+        </p:spPr>
+        <p:style>
+          <a:lnRef idx="1">
+            <a:schemeClr val="accent1"/>
+          </a:lnRef>
+          <a:fillRef idx="3">
+            <a:schemeClr val="accent1"/>
+          </a:fillRef>
+          <a:effectRef idx="2">
+            <a:schemeClr val="accent1"/>
+          </a:effectRef>
+          <a:fontRef idx="minor">
+            <a:schemeClr val="lt1"/>
+          </a:fontRef>
+        </p:style>
+        <p:txBody>
+          <a:bodyPr rtlCol="0" anchor="ctr"/>
+          <a:lstStyle/>
+          <a:p>
+            <a:pPr algn="ctr"/>
+          </a:p>
+        </p:txBody>
+      </p:sp>
+      <p:sp>
+        <p:nvSpPr>
+          <p:cNvPr id="23" name="Rectangle 22"/>
+          <p:cNvSpPr/>
+          <p:nvPr/>
+        </p:nvSpPr>
+        <p:spPr>
+          <a:xfrm>
+            <a:off x="640080" y="4114800"/>
+            <a:ext cx="73152" cy="274320"/>
+          </a:xfrm>
+          <a:prstGeom prst="rect">
+            <a:avLst/>
+          </a:prstGeom>
+          <a:solidFill>
+            <a:srgbClr val="269CCB"/>
+          </a:solidFill>
+          <a:ln>
+            <a:noFill/>
+          </a:ln>
+        </p:spPr>
+        <p:style>
+          <a:lnRef idx="1">
+            <a:schemeClr val="accent1"/>
+          </a:lnRef>
+          <a:fillRef idx="3">
+            <a:schemeClr val="accent1"/>
+          </a:fillRef>
+          <a:effectRef idx="2">
+            <a:schemeClr val="accent1"/>
+          </a:effectRef>
+          <a:fontRef idx="minor">
+            <a:schemeClr val="lt1"/>
+          </a:fontRef>
+        </p:style>
+        <p:txBody>
+          <a:bodyPr rtlCol="0" anchor="ctr"/>
+          <a:lstStyle/>
+          <a:p>
+            <a:pPr algn="ctr"/>
+          </a:p>
+        </p:txBody>
+      </p:sp>
+      <p:sp>
+        <p:nvSpPr>
+          <p:cNvPr id="24" name="TextBox 23"/>
+          <p:cNvSpPr txBox="1"/>
+          <p:nvPr/>
+        </p:nvSpPr>
+        <p:spPr>
+          <a:xfrm>
+            <a:off x="1097280" y="4059936"/>
+            <a:ext cx="10362895" cy="402336"/>
+          </a:xfrm>
+          <a:prstGeom prst="rect">
+            <a:avLst/>
+          </a:prstGeom>
+          <a:noFill/>
+        </p:spPr>
+        <p:txBody>
+          <a:bodyPr wrap="square" anchor="ctr"/>
+          <a:lstStyle/>
+          <a:p>
+            <a:r>
+              <a:rPr sz="1500" b="0" i="0">
+                <a:solidFill>
+                  <a:srgbClr val="333333"/>
+                </a:solidFill>
+                <a:latin typeface="Calibri"/>
+              </a:rPr>
+              <a:t>□ ¿Los números de la tabla los </a:t>
+            </a:r>
+            <a:r>
+              <a:rPr sz="1500" b="1" i="0">
+                <a:solidFill>
+                  <a:srgbClr val="333333"/>
+                </a:solidFill>
+                <a:latin typeface="Calibri"/>
+              </a:rPr>
+              <a:t>leíste del plan</a:t>
+            </a:r>
+            <a:r>
+              <a:rPr sz="1500" b="0" i="0">
+                <a:solidFill>
+                  <a:srgbClr val="333333"/>
+                </a:solidFill>
+                <a:latin typeface="Calibri"/>
+              </a:rPr>
+              <a:t>, o los estimaste? Se compara con «rows=» frente a «actual rows=».</a:t>
+            </a:r>
+          </a:p>
+        </p:txBody>
+      </p:sp>
+      <p:sp>
+        <p:nvSpPr>
+          <p:cNvPr id="25" name="Rounded Rectangle 24"/>
+          <p:cNvSpPr/>
+          <p:nvPr/>
+        </p:nvSpPr>
+        <p:spPr>
+          <a:xfrm>
+            <a:off x="457200" y="4645152"/>
+            <a:ext cx="11277295" cy="566928"/>
+          </a:xfrm>
+          <a:prstGeom prst="roundRect">
+            <a:avLst>
+              <a:gd name="adj" fmla="val 12000"/>
+            </a:avLst>
+          </a:prstGeom>
+          <a:solidFill>
+            <a:srgbClr val="F2F2F2"/>
+          </a:solidFill>
+          <a:ln>
+            <a:noFill/>
+          </a:ln>
+        </p:spPr>
+        <p:style>
+          <a:lnRef idx="1">
+            <a:schemeClr val="accent1"/>
+          </a:lnRef>
+          <a:fillRef idx="3">
+            <a:schemeClr val="accent1"/>
+          </a:fillRef>
+          <a:effectRef idx="2">
+            <a:schemeClr val="accent1"/>
+          </a:effectRef>
+          <a:fontRef idx="minor">
+            <a:schemeClr val="lt1"/>
+          </a:fontRef>
+        </p:style>
+        <p:txBody>
+          <a:bodyPr rtlCol="0" anchor="ctr"/>
+          <a:lstStyle/>
+          <a:p>
+            <a:pPr algn="ctr"/>
+          </a:p>
+        </p:txBody>
+      </p:sp>
+      <p:sp>
+        <p:nvSpPr>
+          <p:cNvPr id="26" name="Rectangle 25"/>
+          <p:cNvSpPr/>
+          <p:nvPr/>
+        </p:nvSpPr>
+        <p:spPr>
+          <a:xfrm>
+            <a:off x="640080" y="4791456"/>
+            <a:ext cx="274320" cy="274320"/>
+          </a:xfrm>
+          <a:prstGeom prst="rect">
+            <a:avLst/>
+          </a:prstGeom>
+          <a:solidFill>
+            <a:srgbClr val="FFFFFF"/>
+          </a:solidFill>
+          <a:ln>
+            <a:solidFill>
+              <a:srgbClr val="333333"/>
+            </a:solidFill>
+          </a:ln>
+        </p:spPr>
+        <p:style>
+          <a:lnRef idx="1">
+            <a:schemeClr val="accent1"/>
+          </a:lnRef>
+          <a:fillRef idx="3">
+            <a:schemeClr val="accent1"/>
+          </a:fillRef>
+          <a:effectRef idx="2">
+            <a:schemeClr val="accent1"/>
+          </a:effectRef>
+          <a:fontRef idx="minor">
+            <a:schemeClr val="lt1"/>
+          </a:fontRef>
+        </p:style>
+        <p:txBody>
+          <a:bodyPr rtlCol="0" anchor="ctr"/>
+          <a:lstStyle/>
+          <a:p>
+            <a:pPr algn="ctr"/>
+          </a:p>
+        </p:txBody>
+      </p:sp>
+      <p:sp>
+        <p:nvSpPr>
+          <p:cNvPr id="27" name="Rectangle 26"/>
+          <p:cNvSpPr/>
+          <p:nvPr/>
+        </p:nvSpPr>
+        <p:spPr>
+          <a:xfrm>
+            <a:off x="640080" y="4791456"/>
+            <a:ext cx="73152" cy="274320"/>
+          </a:xfrm>
+          <a:prstGeom prst="rect">
+            <a:avLst/>
+          </a:prstGeom>
+          <a:solidFill>
+            <a:srgbClr val="269CCB"/>
+          </a:solidFill>
+          <a:ln>
+            <a:noFill/>
+          </a:ln>
+        </p:spPr>
+        <p:style>
+          <a:lnRef idx="1">
+            <a:schemeClr val="accent1"/>
+          </a:lnRef>
+          <a:fillRef idx="3">
+            <a:schemeClr val="accent1"/>
+          </a:fillRef>
+          <a:effectRef idx="2">
+            <a:schemeClr val="accent1"/>
+          </a:effectRef>
+          <a:fontRef idx="minor">
+            <a:schemeClr val="lt1"/>
+          </a:fontRef>
+        </p:style>
+        <p:txBody>
+          <a:bodyPr rtlCol="0" anchor="ctr"/>
+          <a:lstStyle/>
+          <a:p>
+            <a:pPr algn="ctr"/>
+          </a:p>
+        </p:txBody>
+      </p:sp>
+      <p:sp>
+        <p:nvSpPr>
+          <p:cNvPr id="28" name="TextBox 27"/>
+          <p:cNvSpPr txBox="1"/>
+          <p:nvPr/>
+        </p:nvSpPr>
+        <p:spPr>
+          <a:xfrm>
+            <a:off x="1097280" y="4736592"/>
+            <a:ext cx="10362895" cy="402336"/>
+          </a:xfrm>
+          <a:prstGeom prst="rect">
+            <a:avLst/>
+          </a:prstGeom>
+          <a:noFill/>
+        </p:spPr>
+        <p:txBody>
+          <a:bodyPr wrap="square" anchor="ctr"/>
+          <a:lstStyle/>
+          <a:p>
+            <a:r>
+              <a:rPr sz="1500" b="0" i="0">
+                <a:solidFill>
+                  <a:srgbClr val="333333"/>
+                </a:solidFill>
+                <a:latin typeface="Calibri"/>
+              </a:rPr>
+              <a:t>□ ¿Contaste «COUNT(c.id_cita)» y no «COUNT(*)»? Mira los duenos </a:t>
+            </a:r>
+            <a:r>
+              <a:rPr sz="1500" b="1" i="0">
+                <a:solidFill>
+                  <a:srgbClr val="333333"/>
+                </a:solidFill>
+                <a:latin typeface="Calibri"/>
+              </a:rPr>
+              <a:t>2001 a 2006</a:t>
+            </a:r>
+            <a:r>
+              <a:rPr sz="1500" b="0" i="0">
+                <a:solidFill>
+                  <a:srgbClr val="333333"/>
+                </a:solidFill>
+                <a:latin typeface="Calibri"/>
+              </a:rPr>
+              <a:t>: tienen que decir </a:t>
+            </a:r>
+            <a:r>
+              <a:rPr sz="1500" b="1" i="0">
+                <a:solidFill>
+                  <a:srgbClr val="333333"/>
+                </a:solidFill>
+                <a:latin typeface="Calibri"/>
+              </a:rPr>
+              <a:t>0</a:t>
+            </a:r>
+            <a:r>
+              <a:rPr sz="1500" b="0" i="0">
+                <a:solidFill>
+                  <a:srgbClr val="333333"/>
+                </a:solidFill>
+                <a:latin typeface="Calibri"/>
+              </a:rPr>
+              <a:t>.</a:t>
+            </a:r>
+          </a:p>
+        </p:txBody>
+      </p:sp>
+      <p:sp>
+        <p:nvSpPr>
+          <p:cNvPr id="29" name="Rounded Rectangle 28"/>
+          <p:cNvSpPr/>
+          <p:nvPr/>
+        </p:nvSpPr>
+        <p:spPr>
+          <a:xfrm>
+            <a:off x="457200" y="5321808"/>
+            <a:ext cx="11277295" cy="566928"/>
+          </a:xfrm>
+          <a:prstGeom prst="roundRect">
+            <a:avLst>
+              <a:gd name="adj" fmla="val 12000"/>
+            </a:avLst>
+          </a:prstGeom>
+          <a:solidFill>
+            <a:srgbClr val="F2F2F2"/>
+          </a:solidFill>
+          <a:ln>
+            <a:noFill/>
+          </a:ln>
+        </p:spPr>
+        <p:style>
+          <a:lnRef idx="1">
+            <a:schemeClr val="accent1"/>
+          </a:lnRef>
+          <a:fillRef idx="3">
+            <a:schemeClr val="accent1"/>
+          </a:fillRef>
+          <a:effectRef idx="2">
+            <a:schemeClr val="accent1"/>
+          </a:effectRef>
+          <a:fontRef idx="minor">
+            <a:schemeClr val="lt1"/>
+          </a:fontRef>
+        </p:style>
+        <p:txBody>
+          <a:bodyPr rtlCol="0" anchor="ctr"/>
+          <a:lstStyle/>
+          <a:p>
+            <a:pPr algn="ctr"/>
+          </a:p>
+        </p:txBody>
+      </p:sp>
+      <p:sp>
+        <p:nvSpPr>
+          <p:cNvPr id="30" name="Rectangle 29"/>
+          <p:cNvSpPr/>
+          <p:nvPr/>
+        </p:nvSpPr>
+        <p:spPr>
+          <a:xfrm>
+            <a:off x="640080" y="5468112"/>
+            <a:ext cx="274320" cy="274320"/>
+          </a:xfrm>
+          <a:prstGeom prst="rect">
+            <a:avLst/>
+          </a:prstGeom>
+          <a:solidFill>
+            <a:srgbClr val="FFFFFF"/>
+          </a:solidFill>
+          <a:ln>
+            <a:solidFill>
+              <a:srgbClr val="333333"/>
+            </a:solidFill>
+          </a:ln>
+        </p:spPr>
+        <p:style>
+          <a:lnRef idx="1">
+            <a:schemeClr val="accent1"/>
+          </a:lnRef>
+          <a:fillRef idx="3">
+            <a:schemeClr val="accent1"/>
+          </a:fillRef>
+          <a:effectRef idx="2">
+            <a:schemeClr val="accent1"/>
+          </a:effectRef>
+          <a:fontRef idx="minor">
+            <a:schemeClr val="lt1"/>
+          </a:fontRef>
+        </p:style>
+        <p:txBody>
+          <a:bodyPr rtlCol="0" anchor="ctr"/>
+          <a:lstStyle/>
+          <a:p>
+            <a:pPr algn="ctr"/>
+          </a:p>
+        </p:txBody>
+      </p:sp>
+      <p:sp>
+        <p:nvSpPr>
+          <p:cNvPr id="31" name="Rectangle 30"/>
+          <p:cNvSpPr/>
+          <p:nvPr/>
+        </p:nvSpPr>
+        <p:spPr>
+          <a:xfrm>
+            <a:off x="640080" y="5468112"/>
+            <a:ext cx="73152" cy="274320"/>
+          </a:xfrm>
+          <a:prstGeom prst="rect">
+            <a:avLst/>
+          </a:prstGeom>
+          <a:solidFill>
+            <a:srgbClr val="269CCB"/>
+          </a:solidFill>
+          <a:ln>
+            <a:noFill/>
+          </a:ln>
+        </p:spPr>
+        <p:style>
+          <a:lnRef idx="1">
+            <a:schemeClr val="accent1"/>
+          </a:lnRef>
+          <a:fillRef idx="3">
+            <a:schemeClr val="accent1"/>
+          </a:fillRef>
+          <a:effectRef idx="2">
+            <a:schemeClr val="accent1"/>
+          </a:effectRef>
+          <a:fontRef idx="minor">
+            <a:schemeClr val="lt1"/>
+          </a:fontRef>
+        </p:style>
+        <p:txBody>
+          <a:bodyPr rtlCol="0" anchor="ctr"/>
+          <a:lstStyle/>
+          <a:p>
+            <a:pPr algn="ctr"/>
+          </a:p>
+        </p:txBody>
+      </p:sp>
+      <p:sp>
+        <p:nvSpPr>
+          <p:cNvPr id="32" name="TextBox 31"/>
+          <p:cNvSpPr txBox="1"/>
+          <p:nvPr/>
+        </p:nvSpPr>
+        <p:spPr>
+          <a:xfrm>
+            <a:off x="1097280" y="5413248"/>
+            <a:ext cx="10362895" cy="402336"/>
+          </a:xfrm>
+          <a:prstGeom prst="rect">
+            <a:avLst/>
+          </a:prstGeom>
+          <a:noFill/>
+        </p:spPr>
+        <p:txBody>
+          <a:bodyPr wrap="square" anchor="ctr"/>
+          <a:lstStyle/>
+          <a:p>
+            <a:r>
+              <a:rPr sz="1500" b="0" i="0">
+                <a:solidFill>
+                  <a:srgbClr val="333333"/>
+                </a:solidFill>
+                <a:latin typeface="Calibri"/>
+              </a:rPr>
+              <a:t>□ ¿El «EXCEPT» va en los </a:t>
+            </a:r>
+            <a:r>
+              <a:rPr sz="1500" b="1" i="0">
+                <a:solidFill>
+                  <a:srgbClr val="333333"/>
+                </a:solidFill>
+                <a:latin typeface="Calibri"/>
+              </a:rPr>
+              <a:t>dos</a:t>
+            </a:r>
+            <a:r>
+              <a:rPr sz="1500" b="0" i="0">
+                <a:solidFill>
+                  <a:srgbClr val="333333"/>
+                </a:solidFill>
+                <a:latin typeface="Calibri"/>
+              </a:rPr>
+              <a:t> sentidos y </a:t>
+            </a:r>
+            <a:r>
+              <a:rPr sz="1500" b="1" i="0">
+                <a:solidFill>
+                  <a:srgbClr val="333333"/>
+                </a:solidFill>
+                <a:latin typeface="Calibri"/>
+              </a:rPr>
+              <a:t>sin</a:t>
+            </a:r>
+            <a:r>
+              <a:rPr sz="1500" b="0" i="0">
+                <a:solidFill>
+                  <a:srgbClr val="333333"/>
+                </a:solidFill>
+                <a:latin typeface="Calibri"/>
+              </a:rPr>
+              <a:t> «LIMIT»?</a:t>
+            </a:r>
+          </a:p>
+        </p:txBody>
+      </p:sp>
+      <p:sp>
+        <p:nvSpPr>
+          <p:cNvPr id="33" name="Rounded Rectangle 32"/>
+          <p:cNvSpPr/>
+          <p:nvPr/>
+        </p:nvSpPr>
+        <p:spPr>
+          <a:xfrm>
+            <a:off x="457200" y="5998464"/>
+            <a:ext cx="11277295" cy="566928"/>
+          </a:xfrm>
+          <a:prstGeom prst="roundRect">
+            <a:avLst>
+              <a:gd name="adj" fmla="val 12000"/>
+            </a:avLst>
+          </a:prstGeom>
+          <a:solidFill>
+            <a:srgbClr val="F2F2F2"/>
+          </a:solidFill>
+          <a:ln>
+            <a:noFill/>
+          </a:ln>
+        </p:spPr>
+        <p:style>
+          <a:lnRef idx="1">
+            <a:schemeClr val="accent1"/>
+          </a:lnRef>
+          <a:fillRef idx="3">
+            <a:schemeClr val="accent1"/>
+          </a:fillRef>
+          <a:effectRef idx="2">
+            <a:schemeClr val="accent1"/>
+          </a:effectRef>
+          <a:fontRef idx="minor">
+            <a:schemeClr val="lt1"/>
+          </a:fontRef>
+        </p:style>
+        <p:txBody>
+          <a:bodyPr rtlCol="0" anchor="ctr"/>
+          <a:lstStyle/>
+          <a:p>
+            <a:pPr algn="ctr"/>
+          </a:p>
+        </p:txBody>
+      </p:sp>
+      <p:sp>
+        <p:nvSpPr>
+          <p:cNvPr id="34" name="Rectangle 33"/>
+          <p:cNvSpPr/>
+          <p:nvPr/>
+        </p:nvSpPr>
+        <p:spPr>
+          <a:xfrm>
+            <a:off x="640080" y="6144768"/>
+            <a:ext cx="274320" cy="274320"/>
+          </a:xfrm>
+          <a:prstGeom prst="rect">
+            <a:avLst/>
+          </a:prstGeom>
+          <a:solidFill>
+            <a:srgbClr val="FFFFFF"/>
+          </a:solidFill>
+          <a:ln>
+            <a:solidFill>
+              <a:srgbClr val="333333"/>
+            </a:solidFill>
+          </a:ln>
+        </p:spPr>
+        <p:style>
+          <a:lnRef idx="1">
+            <a:schemeClr val="accent1"/>
+          </a:lnRef>
+          <a:fillRef idx="3">
+            <a:schemeClr val="accent1"/>
+          </a:fillRef>
+          <a:effectRef idx="2">
+            <a:schemeClr val="accent1"/>
+          </a:effectRef>
+          <a:fontRef idx="minor">
+            <a:schemeClr val="lt1"/>
+          </a:fontRef>
+        </p:style>
+        <p:txBody>
+          <a:bodyPr rtlCol="0" anchor="ctr"/>
+          <a:lstStyle/>
+          <a:p>
+            <a:pPr algn="ctr"/>
+          </a:p>
+        </p:txBody>
+      </p:sp>
+      <p:sp>
+        <p:nvSpPr>
+          <p:cNvPr id="35" name="Rectangle 34"/>
+          <p:cNvSpPr/>
+          <p:nvPr/>
+        </p:nvSpPr>
+        <p:spPr>
+          <a:xfrm>
+            <a:off x="640080" y="6144768"/>
+            <a:ext cx="73152" cy="274320"/>
+          </a:xfrm>
+          <a:prstGeom prst="rect">
+            <a:avLst/>
+          </a:prstGeom>
+          <a:solidFill>
+            <a:srgbClr val="269CCB"/>
+          </a:solidFill>
+          <a:ln>
+            <a:noFill/>
+          </a:ln>
+        </p:spPr>
+        <p:style>
+          <a:lnRef idx="1">
+            <a:schemeClr val="accent1"/>
+          </a:lnRef>
+          <a:fillRef idx="3">
+            <a:schemeClr val="accent1"/>
+          </a:fillRef>
+          <a:effectRef idx="2">
+            <a:schemeClr val="accent1"/>
+          </a:effectRef>
+          <a:fontRef idx="minor">
+            <a:schemeClr val="lt1"/>
+          </a:fontRef>
+        </p:style>
+        <p:txBody>
+          <a:bodyPr rtlCol="0" anchor="ctr"/>
+          <a:lstStyle/>
+          <a:p>
+            <a:pPr algn="ctr"/>
+          </a:p>
+        </p:txBody>
+      </p:sp>
+      <p:sp>
+        <p:nvSpPr>
+          <p:cNvPr id="36" name="TextBox 35"/>
+          <p:cNvSpPr txBox="1"/>
+          <p:nvPr/>
+        </p:nvSpPr>
+        <p:spPr>
+          <a:xfrm>
+            <a:off x="1097280" y="6089904"/>
+            <a:ext cx="10362895" cy="402336"/>
+          </a:xfrm>
+          <a:prstGeom prst="rect">
+            <a:avLst/>
+          </a:prstGeom>
+          <a:noFill/>
+        </p:spPr>
+        <p:txBody>
+          <a:bodyPr wrap="square" anchor="ctr"/>
+          <a:lstStyle/>
+          <a:p>
+            <a:r>
+              <a:rPr sz="1500" b="0" i="0">
+                <a:solidFill>
+                  <a:srgbClr val="333333"/>
+                </a:solidFill>
+                <a:latin typeface="Calibri"/>
+              </a:rPr>
+              <a:t>□ ¿En la de selección múltiple revisaste </a:t>
+            </a:r>
+            <a:r>
+              <a:rPr sz="1500" b="1" i="0">
+                <a:solidFill>
+                  <a:srgbClr val="333333"/>
+                </a:solidFill>
+                <a:latin typeface="Calibri"/>
+              </a:rPr>
+              <a:t>las seis</a:t>
+            </a:r>
+            <a:r>
+              <a:rPr sz="1500" b="0" i="0">
+                <a:solidFill>
+                  <a:srgbClr val="333333"/>
+                </a:solidFill>
+                <a:latin typeface="Calibri"/>
+              </a:rPr>
+              <a:t> afirmaciones, incluida la que dice que optimizar puede cambiar el número de filas?</a:t>
+            </a:r>
+          </a:p>
+        </p:txBody>
+      </p:sp>
+      <p:sp>
+        <p:nvSpPr>
+          <p:cNvPr id="37" name="TextBox 36"/>
+          <p:cNvSpPr txBox="1"/>
+          <p:nvPr/>
+        </p:nvSpPr>
+        <p:spPr>
+          <a:xfrm>
+            <a:off x="11185855" y="6473952"/>
+            <a:ext cx="640080" cy="274320"/>
+          </a:xfrm>
+          <a:prstGeom prst="rect">
+            <a:avLst/>
+          </a:prstGeom>
+          <a:noFill/>
+        </p:spPr>
+        <p:txBody>
+          <a:bodyPr wrap="square">
+            <a:spAutoFit/>
+          </a:bodyPr>
+          <a:lstStyle/>
+          <a:p>
+            <a:pPr algn="r"/>
+            <a:r>
+              <a:rPr sz="1100" b="0" i="0">
+                <a:solidFill>
+                  <a:srgbClr val="666666"/>
+                </a:solidFill>
+                <a:latin typeface="Calibri"/>
+              </a:rPr>
+              <a:t>15</a:t>
+            </a:r>
+          </a:p>
+        </p:txBody>
+      </p:sp>
+    </p:spTree>
+  </p:cSld>
+  <p:clrMapOvr>
+    <a:masterClrMapping/>
+  </p:clrMapOvr>
+</p:sld>
+</file>
+
+<file path=ppt/slides/slide16.xml><?xml version="1.0" encoding="utf-8"?>
+<p:sld xmlns:a="http://schemas.openxmlformats.org/drawingml/2006/main" xmlns:p="http://schemas.openxmlformats.org/presentationml/2006/main" xmlns:r="http://schemas.openxmlformats.org/officeDocument/2006/relationships">
+  <p:cSld>
+    <p:bg>
+      <p:bgPr>
+        <a:solidFill>
+          <a:srgbClr val="FFFFFF"/>
+        </a:solidFill>
+        <a:effectLst/>
+      </p:bgPr>
+    </p:bg>
+    <p:spTree>
+      <p:nvGrpSpPr>
+        <p:cNvPr id="1" name=""/>
+        <p:cNvGrpSpPr/>
+        <p:nvPr/>
+      </p:nvGrpSpPr>
+      <p:grpSpPr/>
+      <p:sp>
+        <p:nvSpPr>
+          <p:cNvPr id="2" name="Rectangle 1"/>
+          <p:cNvSpPr/>
+          <p:nvPr/>
+        </p:nvSpPr>
+        <p:spPr>
+          <a:xfrm>
+            <a:off x="0" y="0"/>
+            <a:ext cx="12191695" cy="960120"/>
+          </a:xfrm>
+          <a:prstGeom prst="rect">
+            <a:avLst/>
+          </a:prstGeom>
+          <a:solidFill>
+            <a:srgbClr val="095292"/>
+          </a:solidFill>
+          <a:ln>
+            <a:noFill/>
+          </a:ln>
+        </p:spPr>
+        <p:style>
+          <a:lnRef idx="1">
+            <a:schemeClr val="accent1"/>
+          </a:lnRef>
+          <a:fillRef idx="3">
+            <a:schemeClr val="accent1"/>
+          </a:fillRef>
+          <a:effectRef idx="2">
+            <a:schemeClr val="accent1"/>
+          </a:effectRef>
+          <a:fontRef idx="minor">
+            <a:schemeClr val="lt1"/>
+          </a:fontRef>
+        </p:style>
+        <p:txBody>
+          <a:bodyPr rtlCol="0" anchor="ctr"/>
+          <a:lstStyle/>
+          <a:p>
+            <a:pPr algn="ctr"/>
+          </a:p>
+        </p:txBody>
+      </p:sp>
+      <p:sp>
+        <p:nvSpPr>
+          <p:cNvPr id="3" name="Rectangle 2"/>
+          <p:cNvSpPr/>
+          <p:nvPr/>
+        </p:nvSpPr>
+        <p:spPr>
+          <a:xfrm>
+            <a:off x="0" y="960120"/>
+            <a:ext cx="12191695" cy="41148"/>
+          </a:xfrm>
+          <a:prstGeom prst="rect">
+            <a:avLst/>
+          </a:prstGeom>
+          <a:solidFill>
+            <a:srgbClr val="FFD000"/>
+          </a:solidFill>
+          <a:ln>
+            <a:noFill/>
+          </a:ln>
+        </p:spPr>
+        <p:style>
+          <a:lnRef idx="1">
+            <a:schemeClr val="accent1"/>
+          </a:lnRef>
+          <a:fillRef idx="3">
+            <a:schemeClr val="accent1"/>
+          </a:fillRef>
+          <a:effectRef idx="2">
+            <a:schemeClr val="accent1"/>
+          </a:effectRef>
+          <a:fontRef idx="minor">
+            <a:schemeClr val="lt1"/>
+          </a:fontRef>
+        </p:style>
+        <p:txBody>
+          <a:bodyPr rtlCol="0" anchor="ctr"/>
+          <a:lstStyle/>
+          <a:p>
+            <a:pPr algn="ctr"/>
+          </a:p>
+        </p:txBody>
+      </p:sp>
+      <p:sp>
+        <p:nvSpPr>
+          <p:cNvPr id="4" name="TextBox 3"/>
+          <p:cNvSpPr txBox="1"/>
+          <p:nvPr/>
+        </p:nvSpPr>
+        <p:spPr>
+          <a:xfrm>
+            <a:off x="457200" y="164592"/>
+            <a:ext cx="11277295" cy="502920"/>
+          </a:xfrm>
+          <a:prstGeom prst="rect">
+            <a:avLst/>
+          </a:prstGeom>
+          <a:noFill/>
+        </p:spPr>
+        <p:txBody>
+          <a:bodyPr wrap="square">
+            <a:spAutoFit/>
+          </a:bodyPr>
+          <a:lstStyle/>
+          <a:p>
+            <a:r>
+              <a:rPr sz="2600" b="1" i="0">
+                <a:solidFill>
+                  <a:srgbClr val="FFFFFF"/>
+                </a:solidFill>
+                <a:latin typeface="Calibri"/>
+              </a:rPr>
+              <a:t>Criterios de exito / entregable</a:t>
+            </a:r>
+          </a:p>
+        </p:txBody>
+      </p:sp>
+      <p:sp>
+        <p:nvSpPr>
+          <p:cNvPr id="5" name="TextBox 4"/>
+          <p:cNvSpPr txBox="1"/>
+          <p:nvPr/>
+        </p:nvSpPr>
+        <p:spPr>
+          <a:xfrm>
+            <a:off x="457200" y="1170432"/>
+            <a:ext cx="11277295" cy="5230368"/>
+          </a:xfrm>
+          <a:prstGeom prst="rect">
+            <a:avLst/>
+          </a:prstGeom>
+          <a:noFill/>
+        </p:spPr>
+        <p:txBody>
+          <a:bodyPr wrap="square">
+            <a:spAutoFit/>
+          </a:bodyPr>
+          <a:lstStyle/>
+          <a:p>
+            <a:pPr>
+              <a:spcAft>
+                <a:spcPts val="800"/>
+              </a:spcAft>
+            </a:pPr>
+            <a:r>
+              <a:rPr sz="1600" b="0" i="0">
+                <a:solidFill>
+                  <a:srgbClr val="333333"/>
+                </a:solidFill>
+                <a:latin typeface="Calibri"/>
+              </a:rPr>
+              <a:t>–   </a:t>
+            </a:r>
+            <a:r>
+              <a:rPr sz="1600" b="1" i="0">
+                <a:solidFill>
+                  <a:srgbClr val="333333"/>
+                </a:solidFill>
+                <a:latin typeface="Calibri"/>
+              </a:rPr>
+              <a:t>Entregable:</a:t>
+            </a:r>
+            <a:r>
+              <a:rPr sz="1600" b="0" i="0">
+                <a:solidFill>
+                  <a:srgbClr val="333333"/>
+                </a:solidFill>
+                <a:latin typeface="Calibri"/>
+              </a:rPr>
+              <a:t> 2 consultas (antes/despues) + justificacion (media pag.)</a:t>
+            </a:r>
+          </a:p>
+          <a:p>
+            <a:pPr>
+              <a:spcAft>
+                <a:spcPts val="800"/>
+              </a:spcAft>
+            </a:pPr>
+            <a:r>
+              <a:rPr sz="1600" b="0" i="0">
+                <a:solidFill>
+                  <a:srgbClr val="333333"/>
+                </a:solidFill>
+                <a:latin typeface="Calibri"/>
+              </a:rPr>
+              <a:t>–   Evidencia: el SQL y su salida quedan guardados en cada pregunta de ExamLab.</a:t>
+            </a:r>
+          </a:p>
+          <a:p>
+            <a:pPr>
+              <a:spcAft>
+                <a:spcPts val="800"/>
+              </a:spcAft>
+            </a:pPr>
+            <a:r>
+              <a:rPr sz="1600" b="0" i="0">
+                <a:solidFill>
+                  <a:srgbClr val="333333"/>
+                </a:solidFill>
+                <a:latin typeface="Calibri"/>
+              </a:rPr>
+              <a:t>–   Conserva copia en tu carpeta del PI (los .sql que pide el entregable).</a:t>
+            </a:r>
+          </a:p>
+          <a:p>
+            <a:pPr>
+              <a:spcAft>
+                <a:spcPts val="800"/>
+              </a:spcAft>
+            </a:pPr>
+            <a:r>
+              <a:rPr sz="1600" b="0" i="0">
+                <a:solidFill>
+                  <a:srgbClr val="333333"/>
+                </a:solidFill>
+                <a:latin typeface="Calibri"/>
+              </a:rPr>
+              <a:t>–   Actualizar checklist PI (que criterio de rubrica avanzo).</a:t>
+            </a:r>
+          </a:p>
+          <a:p>
+            <a:pPr>
+              <a:spcAft>
+                <a:spcPts val="800"/>
+              </a:spcAft>
+            </a:pPr>
+            <a:r>
+              <a:rPr sz="1600" b="0" i="0">
+                <a:solidFill>
+                  <a:srgbClr val="333333"/>
+                </a:solidFill>
+                <a:latin typeface="Calibri"/>
+              </a:rPr>
+              <a:t>–   </a:t>
+            </a:r>
+            <a:r>
+              <a:rPr sz="1600" b="1" i="0">
+                <a:solidFill>
+                  <a:srgbClr val="333333"/>
+                </a:solidFill>
+                <a:latin typeface="Calibri"/>
+              </a:rPr>
+              <a:t>Entrega en ExamLab</a:t>
+            </a:r>
+            <a:r>
+              <a:rPr sz="1600" b="0" i="0">
+                <a:solidFill>
+                  <a:srgbClr val="333333"/>
+                </a:solidFill>
+                <a:latin typeface="Calibri"/>
+              </a:rPr>
+              <a:t> (https://uniaj.examlab.workers.dev/) — domingo 23:59 cuando aplique taller.</a:t>
+            </a:r>
+          </a:p>
+        </p:txBody>
+      </p:sp>
+      <p:sp>
+        <p:nvSpPr>
+          <p:cNvPr id="6" name="TextBox 5"/>
+          <p:cNvSpPr txBox="1"/>
+          <p:nvPr/>
+        </p:nvSpPr>
+        <p:spPr>
+          <a:xfrm>
+            <a:off x="11185855" y="6473952"/>
+            <a:ext cx="640080" cy="274320"/>
+          </a:xfrm>
+          <a:prstGeom prst="rect">
+            <a:avLst/>
+          </a:prstGeom>
+          <a:noFill/>
+        </p:spPr>
+        <p:txBody>
+          <a:bodyPr wrap="square">
+            <a:spAutoFit/>
+          </a:bodyPr>
+          <a:lstStyle/>
+          <a:p>
+            <a:pPr algn="r"/>
+            <a:r>
+              <a:rPr sz="1100" b="0" i="0">
+                <a:solidFill>
+                  <a:srgbClr val="666666"/>
+                </a:solidFill>
+                <a:latin typeface="Calibri"/>
+              </a:rPr>
+              <a:t>16</a:t>
+            </a:r>
+          </a:p>
+        </p:txBody>
+      </p:sp>
+    </p:spTree>
+  </p:cSld>
+  <p:clrMapOvr>
+    <a:masterClrMapping/>
+  </p:clrMapOvr>
+</p:sld>
+</file>
+
+<file path=ppt/slides/slide17.xml><?xml version="1.0" encoding="utf-8"?>
+<p:sld xmlns:a="http://schemas.openxmlformats.org/drawingml/2006/main" xmlns:p="http://schemas.openxmlformats.org/presentationml/2006/main" xmlns:r="http://schemas.openxmlformats.org/officeDocument/2006/relationships">
+  <p:cSld>
+    <p:bg>
+      <p:bgPr>
+        <a:solidFill>
+          <a:srgbClr val="FFFFFF"/>
+        </a:solidFill>
+        <a:effectLst/>
+      </p:bgPr>
+    </p:bg>
+    <p:spTree>
+      <p:nvGrpSpPr>
+        <p:cNvPr id="1" name=""/>
+        <p:cNvGrpSpPr/>
+        <p:nvPr/>
+      </p:nvGrpSpPr>
+      <p:grpSpPr/>
+      <p:sp>
+        <p:nvSpPr>
+          <p:cNvPr id="2" name="Rectangle 1"/>
+          <p:cNvSpPr/>
+          <p:nvPr/>
+        </p:nvSpPr>
+        <p:spPr>
+          <a:xfrm>
+            <a:off x="0" y="0"/>
+            <a:ext cx="12191695" cy="960120"/>
+          </a:xfrm>
+          <a:prstGeom prst="rect">
+            <a:avLst/>
+          </a:prstGeom>
+          <a:solidFill>
+            <a:srgbClr val="095292"/>
+          </a:solidFill>
+          <a:ln>
+            <a:noFill/>
+          </a:ln>
+        </p:spPr>
+        <p:style>
+          <a:lnRef idx="1">
+            <a:schemeClr val="accent1"/>
+          </a:lnRef>
+          <a:fillRef idx="3">
+            <a:schemeClr val="accent1"/>
+          </a:fillRef>
+          <a:effectRef idx="2">
+            <a:schemeClr val="accent1"/>
+          </a:effectRef>
+          <a:fontRef idx="minor">
+            <a:schemeClr val="lt1"/>
+          </a:fontRef>
+        </p:style>
+        <p:txBody>
+          <a:bodyPr rtlCol="0" anchor="ctr"/>
+          <a:lstStyle/>
+          <a:p>
+            <a:pPr algn="ctr"/>
+          </a:p>
+        </p:txBody>
+      </p:sp>
+      <p:sp>
+        <p:nvSpPr>
+          <p:cNvPr id="3" name="Rectangle 2"/>
+          <p:cNvSpPr/>
+          <p:nvPr/>
+        </p:nvSpPr>
+        <p:spPr>
+          <a:xfrm>
+            <a:off x="0" y="960120"/>
+            <a:ext cx="12191695" cy="41148"/>
+          </a:xfrm>
+          <a:prstGeom prst="rect">
+            <a:avLst/>
+          </a:prstGeom>
+          <a:solidFill>
+            <a:srgbClr val="FFD000"/>
+          </a:solidFill>
+          <a:ln>
+            <a:noFill/>
+          </a:ln>
+        </p:spPr>
+        <p:style>
+          <a:lnRef idx="1">
+            <a:schemeClr val="accent1"/>
+          </a:lnRef>
+          <a:fillRef idx="3">
+            <a:schemeClr val="accent1"/>
+          </a:fillRef>
+          <a:effectRef idx="2">
+            <a:schemeClr val="accent1"/>
+          </a:effectRef>
+          <a:fontRef idx="minor">
+            <a:schemeClr val="lt1"/>
+          </a:fontRef>
+        </p:style>
+        <p:txBody>
+          <a:bodyPr rtlCol="0" anchor="ctr"/>
+          <a:lstStyle/>
+          <a:p>
+            <a:pPr algn="ctr"/>
+          </a:p>
+        </p:txBody>
+      </p:sp>
+      <p:sp>
+        <p:nvSpPr>
+          <p:cNvPr id="4" name="TextBox 3"/>
+          <p:cNvSpPr txBox="1"/>
+          <p:nvPr/>
+        </p:nvSpPr>
+        <p:spPr>
+          <a:xfrm>
+            <a:off x="457200" y="164592"/>
+            <a:ext cx="11277295" cy="502920"/>
+          </a:xfrm>
+          <a:prstGeom prst="rect">
+            <a:avLst/>
+          </a:prstGeom>
+          <a:noFill/>
+        </p:spPr>
+        <p:txBody>
+          <a:bodyPr wrap="square">
+            <a:spAutoFit/>
+          </a:bodyPr>
+          <a:lstStyle/>
+          <a:p>
+            <a:r>
+              <a:rPr sz="2600" b="1" i="0">
+                <a:solidFill>
+                  <a:srgbClr val="FFFFFF"/>
+                </a:solidFill>
+                <a:latin typeface="Calibri"/>
+              </a:rPr>
+              <a:t>Para el PI esta semana</a:t>
+            </a:r>
+          </a:p>
+        </p:txBody>
+      </p:sp>
+      <p:sp>
+        <p:nvSpPr>
+          <p:cNvPr id="5" name="Rounded Rectangle 4"/>
+          <p:cNvSpPr/>
+          <p:nvPr/>
+        </p:nvSpPr>
+        <p:spPr>
+          <a:xfrm>
+            <a:off x="457200" y="1261872"/>
+            <a:ext cx="11277295" cy="1051560"/>
+          </a:xfrm>
+          <a:prstGeom prst="roundRect">
+            <a:avLst>
+              <a:gd name="adj" fmla="val 12000"/>
+            </a:avLst>
+          </a:prstGeom>
+          <a:solidFill>
+            <a:srgbClr val="E8F4FA"/>
+          </a:solidFill>
+          <a:ln>
+            <a:noFill/>
+          </a:ln>
+        </p:spPr>
+        <p:style>
+          <a:lnRef idx="1">
+            <a:schemeClr val="accent1"/>
+          </a:lnRef>
+          <a:fillRef idx="3">
+            <a:schemeClr val="accent1"/>
+          </a:fillRef>
+          <a:effectRef idx="2">
+            <a:schemeClr val="accent1"/>
+          </a:effectRef>
+          <a:fontRef idx="minor">
+            <a:schemeClr val="lt1"/>
+          </a:fontRef>
+        </p:style>
+        <p:txBody>
+          <a:bodyPr rtlCol="0" anchor="ctr"/>
+          <a:lstStyle/>
+          <a:p>
+            <a:pPr algn="ctr"/>
+          </a:p>
+        </p:txBody>
+      </p:sp>
+      <p:sp>
+        <p:nvSpPr>
+          <p:cNvPr id="6" name="Rectangle 5"/>
+          <p:cNvSpPr/>
+          <p:nvPr/>
+        </p:nvSpPr>
+        <p:spPr>
+          <a:xfrm>
+            <a:off x="457200" y="1261872"/>
+            <a:ext cx="128016" cy="1051560"/>
+          </a:xfrm>
+          <a:prstGeom prst="rect">
+            <a:avLst/>
+          </a:prstGeom>
+          <a:solidFill>
+            <a:srgbClr val="269CCB"/>
+          </a:solidFill>
+          <a:ln>
+            <a:noFill/>
+          </a:ln>
+        </p:spPr>
+        <p:style>
+          <a:lnRef idx="1">
+            <a:schemeClr val="accent1"/>
+          </a:lnRef>
+          <a:fillRef idx="3">
+            <a:schemeClr val="accent1"/>
+          </a:fillRef>
+          <a:effectRef idx="2">
+            <a:schemeClr val="accent1"/>
+          </a:effectRef>
+          <a:fontRef idx="minor">
+            <a:schemeClr val="lt1"/>
+          </a:fontRef>
+        </p:style>
+        <p:txBody>
+          <a:bodyPr rtlCol="0" anchor="ctr"/>
+          <a:lstStyle/>
+          <a:p>
+            <a:pPr algn="ctr"/>
+          </a:p>
+        </p:txBody>
+      </p:sp>
+      <p:sp>
+        <p:nvSpPr>
+          <p:cNvPr id="7" name="TextBox 6"/>
+          <p:cNvSpPr txBox="1"/>
+          <p:nvPr/>
+        </p:nvSpPr>
+        <p:spPr>
+          <a:xfrm>
+            <a:off x="777240" y="1399031"/>
+            <a:ext cx="10774375" cy="822959"/>
+          </a:xfrm>
+          <a:prstGeom prst="rect">
+            <a:avLst/>
+          </a:prstGeom>
+          <a:noFill/>
+        </p:spPr>
+        <p:txBody>
+          <a:bodyPr wrap="square">
+            <a:spAutoFit/>
+          </a:bodyPr>
+          <a:lstStyle/>
+          <a:p>
+            <a:r>
+              <a:rPr sz="1200" b="1" i="0">
+                <a:solidFill>
+                  <a:srgbClr val="269CCB"/>
+                </a:solidFill>
+                <a:latin typeface="Calibri"/>
+              </a:rPr>
+              <a:t>Info</a:t>
+            </a:r>
+          </a:p>
+          <a:p>
+            <a:pPr>
+              <a:spcBef>
+                <a:spcPts val="400"/>
+              </a:spcBef>
+            </a:pPr>
+            <a:r>
+              <a:rPr sz="1400" b="0" i="0">
+                <a:solidFill>
+                  <a:srgbClr val="333333"/>
+                </a:solidFill>
+                <a:latin typeface="Calibri"/>
+              </a:rPr>
+              <a:t>Hito: Primera pareja de consultas antes/despues del PI</a:t>
+            </a:r>
+          </a:p>
+        </p:txBody>
+      </p:sp>
+      <p:sp>
+        <p:nvSpPr>
+          <p:cNvPr id="8" name="Rounded Rectangle 7"/>
+          <p:cNvSpPr/>
+          <p:nvPr/>
+        </p:nvSpPr>
+        <p:spPr>
+          <a:xfrm>
+            <a:off x="457200" y="2478024"/>
+            <a:ext cx="11277295" cy="1051560"/>
+          </a:xfrm>
+          <a:prstGeom prst="roundRect">
+            <a:avLst>
+              <a:gd name="adj" fmla="val 12000"/>
+            </a:avLst>
+          </a:prstGeom>
+          <a:solidFill>
+            <a:srgbClr val="FFF8E1"/>
+          </a:solidFill>
+          <a:ln>
+            <a:noFill/>
+          </a:ln>
+        </p:spPr>
+        <p:style>
+          <a:lnRef idx="1">
+            <a:schemeClr val="accent1"/>
+          </a:lnRef>
+          <a:fillRef idx="3">
+            <a:schemeClr val="accent1"/>
+          </a:fillRef>
+          <a:effectRef idx="2">
+            <a:schemeClr val="accent1"/>
+          </a:effectRef>
+          <a:fontRef idx="minor">
+            <a:schemeClr val="lt1"/>
+          </a:fontRef>
+        </p:style>
+        <p:txBody>
+          <a:bodyPr rtlCol="0" anchor="ctr"/>
+          <a:lstStyle/>
+          <a:p>
+            <a:pPr algn="ctr"/>
+          </a:p>
+        </p:txBody>
+      </p:sp>
+      <p:sp>
+        <p:nvSpPr>
+          <p:cNvPr id="9" name="Rectangle 8"/>
+          <p:cNvSpPr/>
+          <p:nvPr/>
+        </p:nvSpPr>
+        <p:spPr>
+          <a:xfrm>
+            <a:off x="457200" y="2478024"/>
+            <a:ext cx="128016" cy="1051560"/>
+          </a:xfrm>
+          <a:prstGeom prst="rect">
+            <a:avLst/>
+          </a:prstGeom>
+          <a:solidFill>
+            <a:srgbClr val="FFD000"/>
+          </a:solidFill>
+          <a:ln>
+            <a:noFill/>
+          </a:ln>
+        </p:spPr>
+        <p:style>
+          <a:lnRef idx="1">
+            <a:schemeClr val="accent1"/>
+          </a:lnRef>
+          <a:fillRef idx="3">
+            <a:schemeClr val="accent1"/>
+          </a:fillRef>
+          <a:effectRef idx="2">
+            <a:schemeClr val="accent1"/>
+          </a:effectRef>
+          <a:fontRef idx="minor">
+            <a:schemeClr val="lt1"/>
+          </a:fontRef>
+        </p:style>
+        <p:txBody>
+          <a:bodyPr rtlCol="0" anchor="ctr"/>
+          <a:lstStyle/>
+          <a:p>
+            <a:pPr algn="ctr"/>
+          </a:p>
+        </p:txBody>
+      </p:sp>
+      <p:sp>
+        <p:nvSpPr>
+          <p:cNvPr id="10" name="TextBox 9"/>
+          <p:cNvSpPr txBox="1"/>
+          <p:nvPr/>
+        </p:nvSpPr>
+        <p:spPr>
+          <a:xfrm>
+            <a:off x="777240" y="2615184"/>
+            <a:ext cx="10774375" cy="822959"/>
+          </a:xfrm>
+          <a:prstGeom prst="rect">
+            <a:avLst/>
+          </a:prstGeom>
+          <a:noFill/>
+        </p:spPr>
+        <p:txBody>
+          <a:bodyPr wrap="square">
+            <a:spAutoFit/>
+          </a:bodyPr>
+          <a:lstStyle/>
+          <a:p>
+            <a:r>
+              <a:rPr sz="1200" b="1" i="0">
+                <a:solidFill>
+                  <a:srgbClr val="FFD000"/>
+                </a:solidFill>
+                <a:latin typeface="Calibri"/>
+              </a:rPr>
+              <a:t>Aclaración</a:t>
+            </a:r>
+          </a:p>
+          <a:p>
+            <a:pPr>
+              <a:spcBef>
+                <a:spcPts val="400"/>
+              </a:spcBef>
+            </a:pPr>
+            <a:r>
+              <a:rPr sz="1400" b="0" i="0">
+                <a:solidFill>
+                  <a:srgbClr val="333333"/>
+                </a:solidFill>
+                <a:latin typeface="Calibri"/>
+              </a:rPr>
+              <a:t>Enunciado completo: Clases/Proyecto Integrador/ (VetCare DB).</a:t>
+            </a:r>
+          </a:p>
+        </p:txBody>
+      </p:sp>
+      <p:sp>
+        <p:nvSpPr>
+          <p:cNvPr id="11" name="Rounded Rectangle 10"/>
+          <p:cNvSpPr/>
+          <p:nvPr/>
+        </p:nvSpPr>
+        <p:spPr>
+          <a:xfrm>
+            <a:off x="457200" y="3694176"/>
+            <a:ext cx="11277295" cy="1051560"/>
+          </a:xfrm>
+          <a:prstGeom prst="roundRect">
+            <a:avLst>
+              <a:gd name="adj" fmla="val 12000"/>
+            </a:avLst>
+          </a:prstGeom>
+          <a:solidFill>
+            <a:srgbClr val="FBE4E4"/>
+          </a:solidFill>
+          <a:ln>
+            <a:noFill/>
+          </a:ln>
+        </p:spPr>
+        <p:style>
+          <a:lnRef idx="1">
+            <a:schemeClr val="accent1"/>
+          </a:lnRef>
+          <a:fillRef idx="3">
+            <a:schemeClr val="accent1"/>
+          </a:fillRef>
+          <a:effectRef idx="2">
+            <a:schemeClr val="accent1"/>
+          </a:effectRef>
+          <a:fontRef idx="minor">
+            <a:schemeClr val="lt1"/>
+          </a:fontRef>
+        </p:style>
+        <p:txBody>
+          <a:bodyPr rtlCol="0" anchor="ctr"/>
+          <a:lstStyle/>
+          <a:p>
+            <a:pPr algn="ctr"/>
+          </a:p>
+        </p:txBody>
+      </p:sp>
+      <p:sp>
+        <p:nvSpPr>
+          <p:cNvPr id="12" name="Rectangle 11"/>
+          <p:cNvSpPr/>
+          <p:nvPr/>
+        </p:nvSpPr>
+        <p:spPr>
+          <a:xfrm>
+            <a:off x="457200" y="3694176"/>
+            <a:ext cx="128016" cy="1051560"/>
+          </a:xfrm>
+          <a:prstGeom prst="rect">
+            <a:avLst/>
+          </a:prstGeom>
+          <a:solidFill>
+            <a:srgbClr val="A02030"/>
+          </a:solidFill>
+          <a:ln>
+            <a:noFill/>
+          </a:ln>
+        </p:spPr>
+        <p:style>
+          <a:lnRef idx="1">
+            <a:schemeClr val="accent1"/>
+          </a:lnRef>
+          <a:fillRef idx="3">
+            <a:schemeClr val="accent1"/>
+          </a:fillRef>
+          <a:effectRef idx="2">
+            <a:schemeClr val="accent1"/>
+          </a:effectRef>
+          <a:fontRef idx="minor">
+            <a:schemeClr val="lt1"/>
+          </a:fontRef>
+        </p:style>
+        <p:txBody>
+          <a:bodyPr rtlCol="0" anchor="ctr"/>
+          <a:lstStyle/>
+          <a:p>
+            <a:pPr algn="ctr"/>
+          </a:p>
+        </p:txBody>
+      </p:sp>
+      <p:sp>
+        <p:nvSpPr>
+          <p:cNvPr id="13" name="TextBox 12"/>
+          <p:cNvSpPr txBox="1"/>
+          <p:nvPr/>
+        </p:nvSpPr>
+        <p:spPr>
+          <a:xfrm>
+            <a:off x="777240" y="3831336"/>
+            <a:ext cx="10774375" cy="822959"/>
+          </a:xfrm>
+          <a:prstGeom prst="rect">
+            <a:avLst/>
+          </a:prstGeom>
+          <a:noFill/>
+        </p:spPr>
+        <p:txBody>
+          <a:bodyPr wrap="square">
+            <a:spAutoFit/>
+          </a:bodyPr>
+          <a:lstStyle/>
+          <a:p>
+            <a:r>
+              <a:rPr sz="1200" b="1" i="0">
+                <a:solidFill>
+                  <a:srgbClr val="A02030"/>
+                </a:solidFill>
+                <a:latin typeface="Calibri"/>
+              </a:rPr>
+              <a:t>Atención</a:t>
+            </a:r>
+          </a:p>
+          <a:p>
+            <a:pPr>
+              <a:spcBef>
+                <a:spcPts val="400"/>
+              </a:spcBef>
+            </a:pPr>
+            <a:r>
+              <a:rPr sz="1400" b="0" i="0">
+                <a:solidFill>
+                  <a:srgbClr val="333333"/>
+                </a:solidFill>
+                <a:latin typeface="Calibri"/>
+              </a:rPr>
+              <a:t>Taller de la semana en ExamLab (https://uniaj.examlab.workers.dev/): domingo 23:59 (regla del Acuerdo) cuando aplique.</a:t>
+            </a:r>
+          </a:p>
+        </p:txBody>
+      </p:sp>
+      <p:sp>
+        <p:nvSpPr>
+          <p:cNvPr id="14" name="TextBox 13"/>
+          <p:cNvSpPr txBox="1"/>
+          <p:nvPr/>
+        </p:nvSpPr>
+        <p:spPr>
+          <a:xfrm>
+            <a:off x="11185855" y="6473952"/>
+            <a:ext cx="640080" cy="274320"/>
+          </a:xfrm>
+          <a:prstGeom prst="rect">
+            <a:avLst/>
+          </a:prstGeom>
+          <a:noFill/>
+        </p:spPr>
+        <p:txBody>
+          <a:bodyPr wrap="square">
+            <a:spAutoFit/>
+          </a:bodyPr>
+          <a:lstStyle/>
+          <a:p>
+            <a:pPr algn="r"/>
+            <a:r>
+              <a:rPr sz="1100" b="0" i="0">
+                <a:solidFill>
+                  <a:srgbClr val="666666"/>
+                </a:solidFill>
+                <a:latin typeface="Calibri"/>
+              </a:rPr>
+              <a:t>17</a:t>
+            </a:r>
+          </a:p>
+        </p:txBody>
+      </p:sp>
+    </p:spTree>
+  </p:cSld>
+  <p:clrMapOvr>
+    <a:masterClrMapping/>
+  </p:clrMapOvr>
+</p:sld>
+</file>
+
+<file path=ppt/slides/slide18.xml><?xml version="1.0" encoding="utf-8"?>
+<p:sld xmlns:a="http://schemas.openxmlformats.org/drawingml/2006/main" xmlns:p="http://schemas.openxmlformats.org/presentationml/2006/main" xmlns:r="http://schemas.openxmlformats.org/officeDocument/2006/relationships">
+  <p:cSld>
+    <p:bg>
+      <p:bgPr>
+        <a:solidFill>
+          <a:srgbClr val="FFFFFF"/>
+        </a:solidFill>
+        <a:effectLst/>
+      </p:bgPr>
+    </p:bg>
+    <p:spTree>
+      <p:nvGrpSpPr>
+        <p:cNvPr id="1" name=""/>
+        <p:cNvGrpSpPr/>
+        <p:nvPr/>
+      </p:nvGrpSpPr>
+      <p:grpSpPr/>
+      <p:sp>
+        <p:nvSpPr>
+          <p:cNvPr id="2" name="Rectangle 1"/>
+          <p:cNvSpPr/>
+          <p:nvPr/>
+        </p:nvSpPr>
+        <p:spPr>
+          <a:xfrm>
+            <a:off x="0" y="0"/>
             <a:ext cx="12191695" cy="164592"/>
           </a:xfrm>
           <a:prstGeom prst="rect">
@@ -6530,7 +9457,7 @@
                 </a:solidFill>
                 <a:latin typeface="Calibri"/>
               </a:rPr>
-              <a:t>DB Fiddle / SQLTest.online</a:t>
+              <a:t>ExamLab (PostgreSQL) + Google Docs</a:t>
             </a:r>
             <a:r>
               <a:rPr sz="1600" b="0" i="0">
@@ -7759,7 +10686,7 @@
                 </a:solidFill>
                 <a:latin typeface="Calibri"/>
               </a:rPr>
-              <a:t>–   EXPLAIN (o EXPLAIN PLAN segun el motor) muestra COMO el motor piensa ejecutar la consulta: si dice 'Seq…</a:t>
+              <a:t>–   El cuarto cuello de botella, y el mas caro: una subconsulta correlacionada en la lista de columnas se evalua…</a:t>
             </a:r>
           </a:p>
           <a:p>
@@ -7775,7 +10702,7 @@
                 </a:solidFill>
                 <a:latin typeface="Calibri"/>
               </a:rPr>
-              <a:t>–   Conexion con Clase 7: optimizar consultas y crear indices son las dos caras de la misma moneda — una consulta…</a:t>
+              <a:t>–   Optimizar NO puede cambiar el resultado, y eso se demuestra, no se afirma: un COUNT(*) de cada version que…</a:t>
             </a:r>
           </a:p>
         </p:txBody>
@@ -7850,7 +10777,7 @@
         <p:spPr>
           <a:xfrm>
             <a:off x="0" y="0"/>
-            <a:ext cx="12191695" cy="960120"/>
+            <a:ext cx="12191695" cy="1170432"/>
           </a:xfrm>
           <a:prstGeom prst="rect">
             <a:avLst/>
@@ -7892,7 +10819,7 @@
         </p:nvSpPr>
         <p:spPr>
           <a:xfrm>
-            <a:off x="0" y="960120"/>
+            <a:off x="0" y="1170432"/>
             <a:ext cx="12191695" cy="41148"/>
           </a:xfrm>
           <a:prstGeom prst="rect">
@@ -7936,7 +10863,7 @@
         <p:spPr>
           <a:xfrm>
             <a:off x="457200" y="164592"/>
-            <a:ext cx="11277295" cy="502920"/>
+            <a:ext cx="11277295" cy="384048"/>
           </a:xfrm>
           <a:prstGeom prst="rect">
             <a:avLst/>
@@ -7963,14 +10890,66 @@
       </p:sp>
       <p:sp>
         <p:nvSpPr>
-          <p:cNvPr id="5" name="Rounded Rectangle 4"/>
+          <p:cNvPr id="5" name="TextBox 4"/>
+          <p:cNvSpPr txBox="1"/>
+          <p:nvPr/>
+        </p:nvSpPr>
+        <p:spPr>
+          <a:xfrm>
+            <a:off x="457200" y="566928"/>
+            <a:ext cx="11277295" cy="411480"/>
+          </a:xfrm>
+          <a:prstGeom prst="rect">
+            <a:avLst/>
+          </a:prstGeom>
+          <a:noFill/>
+        </p:spPr>
+        <p:txBody>
+          <a:bodyPr wrap="square">
+            <a:spAutoFit/>
+          </a:bodyPr>
+          <a:lstStyle/>
+          <a:p>
+            <a:r>
+              <a:rPr sz="1400" b="0" i="0">
+                <a:solidFill>
+                  <a:srgbClr val="B8D8EE"/>
+                </a:solidFill>
+                <a:latin typeface="Calibri"/>
+              </a:rPr>
+              <a:t>Mismas </a:t>
+            </a:r>
+            <a:r>
+              <a:rPr sz="1400" b="1" i="0">
+                <a:solidFill>
+                  <a:srgbClr val="B8D8EE"/>
+                </a:solidFill>
+                <a:latin typeface="Calibri"/>
+              </a:rPr>
+              <a:t>91 filas</a:t>
+            </a:r>
+            <a:r>
+              <a:rPr sz="1400" b="0" i="0">
+                <a:solidFill>
+                  <a:srgbClr val="B8D8EE"/>
+                </a:solidFill>
+                <a:latin typeface="Calibri"/>
+              </a:rPr>
+              <a:t> en las dos versiones. Y sin indices no hay Index Scan —eso es la Clase 7—: hoy se miden filas procesadas y pasadas sobre la tabla</a:t>
+            </a:r>
+          </a:p>
+        </p:txBody>
+      </p:sp>
+      <p:sp>
+        <p:nvSpPr>
+          <p:cNvPr id="6" name="Rounded Rectangle 5"/>
           <p:cNvSpPr/>
           <p:nvPr/>
         </p:nvSpPr>
         <p:spPr>
           <a:xfrm>
-            <a:off x="457200" y="1261872"/>
-            <a:ext cx="5478627" cy="5093208"/>
+            <a:off x="457200" y="1472184"/>
+            <a:ext cx="5478627" cy="4882896"/>
           </a:xfrm>
           <a:prstGeom prst="roundRect">
             <a:avLst>
@@ -8008,13 +10987,13 @@
       </p:sp>
       <p:sp>
         <p:nvSpPr>
-          <p:cNvPr id="6" name="Rectangle 5"/>
+          <p:cNvPr id="7" name="Rectangle 6"/>
           <p:cNvSpPr/>
           <p:nvPr/>
         </p:nvSpPr>
         <p:spPr>
           <a:xfrm>
-            <a:off x="457200" y="1261872"/>
+            <a:off x="457200" y="1472184"/>
             <a:ext cx="5478627" cy="502920"/>
           </a:xfrm>
           <a:prstGeom prst="rect">
@@ -8051,47 +11030,47 @@
       </p:sp>
       <p:sp>
         <p:nvSpPr>
-          <p:cNvPr id="7" name="TextBox 6"/>
-          <p:cNvSpPr txBox="1"/>
-          <p:nvPr/>
-        </p:nvSpPr>
-        <p:spPr>
-          <a:xfrm>
-            <a:off x="594360" y="1353312"/>
-            <a:ext cx="5204307" cy="365760"/>
-          </a:xfrm>
-          <a:prstGeom prst="rect">
-            <a:avLst/>
-          </a:prstGeom>
-          <a:noFill/>
-        </p:spPr>
-        <p:txBody>
-          <a:bodyPr wrap="square" anchor="ctr"/>
-          <a:lstStyle/>
-          <a:p>
-            <a:pPr algn="ctr"/>
-            <a:r>
-              <a:rPr sz="1600" b="1" i="0">
-                <a:solidFill>
-                  <a:srgbClr val="FFFFFF"/>
-                </a:solidFill>
-                <a:latin typeface="Calibri"/>
-              </a:rPr>
-              <a:t>Antes</a:t>
-            </a:r>
-          </a:p>
-        </p:txBody>
-      </p:sp>
-      <p:sp>
-        <p:nvSpPr>
           <p:cNvPr id="8" name="TextBox 7"/>
           <p:cNvSpPr txBox="1"/>
           <p:nvPr/>
         </p:nvSpPr>
         <p:spPr>
           <a:xfrm>
-            <a:off x="621792" y="1901952"/>
-            <a:ext cx="5158587" cy="4498848"/>
+            <a:off x="594360" y="1563624"/>
+            <a:ext cx="5204307" cy="365760"/>
+          </a:xfrm>
+          <a:prstGeom prst="rect">
+            <a:avLst/>
+          </a:prstGeom>
+          <a:noFill/>
+        </p:spPr>
+        <p:txBody>
+          <a:bodyPr wrap="square" anchor="ctr"/>
+          <a:lstStyle/>
+          <a:p>
+            <a:pPr algn="ctr"/>
+            <a:r>
+              <a:rPr sz="1600" b="1" i="0">
+                <a:solidFill>
+                  <a:srgbClr val="FFFFFF"/>
+                </a:solidFill>
+                <a:latin typeface="Calibri"/>
+              </a:rPr>
+              <a:t>Antes</a:t>
+            </a:r>
+          </a:p>
+        </p:txBody>
+      </p:sp>
+      <p:sp>
+        <p:nvSpPr>
+          <p:cNvPr id="9" name="TextBox 8"/>
+          <p:cNvSpPr txBox="1"/>
+          <p:nvPr/>
+        </p:nvSpPr>
+        <p:spPr>
+          <a:xfrm>
+            <a:off x="621792" y="2112263"/>
+            <a:ext cx="5158587" cy="4288536"/>
           </a:xfrm>
           <a:prstGeom prst="rect">
             <a:avLst/>
@@ -8116,7 +11095,7 @@
                 </a:solidFill>
                 <a:latin typeface="Calibri"/>
               </a:rPr>
-              <a:t>–   «SELECT *» trae columnas que nadie usa</a:t>
+              <a:t>–   «SELECT *» arrastra las columnas de 4 tablas por el join</a:t>
             </a:r>
           </a:p>
           <a:p>
@@ -8132,7 +11111,16 @@
                 </a:solidFill>
                 <a:latin typeface="Calibri"/>
               </a:rPr>
-              <a:t>–   JOIN sin filtro: cruza el historico completo</a:t>
+              <a:t>–   «to_char(fecha_hora,…)» y «UPPER(estado)»: </a:t>
+            </a:r>
+            <a:r>
+              <a:rPr sz="1500" b="1" i="0">
+                <a:solidFill>
+                  <a:srgbClr val="333333"/>
+                </a:solidFill>
+                <a:latin typeface="Calibri"/>
+              </a:rPr>
+              <a:t>funcion sobre la columna</a:t>
             </a:r>
           </a:p>
           <a:p>
@@ -8148,7 +11136,16 @@
                 </a:solidFill>
                 <a:latin typeface="Calibri"/>
               </a:rPr>
-              <a:t>–   Funcion sobre la columna del WHERE bloquea el indice</a:t>
+              <a:t>–   Joins con coma: si falta una condicion, </a:t>
+            </a:r>
+            <a:r>
+              <a:rPr sz="1500" b="1" i="0">
+                <a:solidFill>
+                  <a:srgbClr val="333333"/>
+                </a:solidFill>
+                <a:latin typeface="Calibri"/>
+              </a:rPr>
+              <a:t>producto cartesiano</a:t>
             </a:r>
           </a:p>
           <a:p>
@@ -8164,7 +11161,7 @@
                 </a:solidFill>
                 <a:latin typeface="Calibri"/>
               </a:rPr>
-              <a:t>–   Plan: </a:t>
+              <a:t>–   Subconsulta por fila: el plan dice </a:t>
             </a:r>
             <a:r>
               <a:rPr sz="1500" b="1" i="0">
@@ -8173,30 +11170,21 @@
                 </a:solidFill>
                 <a:latin typeface="Calibri"/>
               </a:rPr>
-              <a:t>TABLE ACCESS FULL</a:t>
-            </a:r>
-            <a:r>
-              <a:rPr sz="1500" b="0" i="0">
-                <a:solidFill>
-                  <a:srgbClr val="333333"/>
-                </a:solidFill>
-                <a:latin typeface="Calibri"/>
-              </a:rPr>
-              <a:t> (~120.000 filas)</a:t>
-            </a:r>
-          </a:p>
-        </p:txBody>
-      </p:sp>
-      <p:sp>
-        <p:nvSpPr>
-          <p:cNvPr id="9" name="Rounded Rectangle 8"/>
+              <a:t>loops=2006</a:t>
+            </a:r>
+          </a:p>
+        </p:txBody>
+      </p:sp>
+      <p:sp>
+        <p:nvSpPr>
+          <p:cNvPr id="10" name="Rounded Rectangle 9"/>
           <p:cNvSpPr/>
           <p:nvPr/>
         </p:nvSpPr>
         <p:spPr>
           <a:xfrm>
-            <a:off x="6255867" y="1261872"/>
-            <a:ext cx="5478627" cy="5093208"/>
+            <a:off x="6255867" y="1472184"/>
+            <a:ext cx="5478627" cy="4882896"/>
           </a:xfrm>
           <a:prstGeom prst="roundRect">
             <a:avLst>
@@ -8234,13 +11222,13 @@
       </p:sp>
       <p:sp>
         <p:nvSpPr>
-          <p:cNvPr id="10" name="Rectangle 9"/>
+          <p:cNvPr id="11" name="Rectangle 10"/>
           <p:cNvSpPr/>
           <p:nvPr/>
         </p:nvSpPr>
         <p:spPr>
           <a:xfrm>
-            <a:off x="6255867" y="1261872"/>
+            <a:off x="6255867" y="1472184"/>
             <a:ext cx="5478627" cy="502920"/>
           </a:xfrm>
           <a:prstGeom prst="rect">
@@ -8277,47 +11265,47 @@
       </p:sp>
       <p:sp>
         <p:nvSpPr>
-          <p:cNvPr id="11" name="TextBox 10"/>
-          <p:cNvSpPr txBox="1"/>
-          <p:nvPr/>
-        </p:nvSpPr>
-        <p:spPr>
-          <a:xfrm>
-            <a:off x="6393027" y="1353312"/>
-            <a:ext cx="5204307" cy="365760"/>
-          </a:xfrm>
-          <a:prstGeom prst="rect">
-            <a:avLst/>
-          </a:prstGeom>
-          <a:noFill/>
-        </p:spPr>
-        <p:txBody>
-          <a:bodyPr wrap="square" anchor="ctr"/>
-          <a:lstStyle/>
-          <a:p>
-            <a:pPr algn="ctr"/>
-            <a:r>
-              <a:rPr sz="1600" b="1" i="0">
-                <a:solidFill>
-                  <a:srgbClr val="FFFFFF"/>
-                </a:solidFill>
-                <a:latin typeface="Calibri"/>
-              </a:rPr>
-              <a:t>Despues</a:t>
-            </a:r>
-          </a:p>
-        </p:txBody>
-      </p:sp>
-      <p:sp>
-        <p:nvSpPr>
           <p:cNvPr id="12" name="TextBox 11"/>
           <p:cNvSpPr txBox="1"/>
           <p:nvPr/>
         </p:nvSpPr>
         <p:spPr>
           <a:xfrm>
-            <a:off x="6420459" y="1901952"/>
-            <a:ext cx="5158587" cy="4498848"/>
+            <a:off x="6393027" y="1563624"/>
+            <a:ext cx="5204307" cy="365760"/>
+          </a:xfrm>
+          <a:prstGeom prst="rect">
+            <a:avLst/>
+          </a:prstGeom>
+          <a:noFill/>
+        </p:spPr>
+        <p:txBody>
+          <a:bodyPr wrap="square" anchor="ctr"/>
+          <a:lstStyle/>
+          <a:p>
+            <a:pPr algn="ctr"/>
+            <a:r>
+              <a:rPr sz="1600" b="1" i="0">
+                <a:solidFill>
+                  <a:srgbClr val="FFFFFF"/>
+                </a:solidFill>
+                <a:latin typeface="Calibri"/>
+              </a:rPr>
+              <a:t>Despues</a:t>
+            </a:r>
+          </a:p>
+        </p:txBody>
+      </p:sp>
+      <p:sp>
+        <p:nvSpPr>
+          <p:cNvPr id="13" name="TextBox 12"/>
+          <p:cNvSpPr txBox="1"/>
+          <p:nvPr/>
+        </p:nvSpPr>
+        <p:spPr>
+          <a:xfrm>
+            <a:off x="6420459" y="2112263"/>
+            <a:ext cx="5158587" cy="4288536"/>
           </a:xfrm>
           <a:prstGeom prst="rect">
             <a:avLst/>
@@ -8342,7 +11330,7 @@
                 </a:solidFill>
                 <a:latin typeface="Calibri"/>
               </a:rPr>
-              <a:t>–   Solo las columnas necesarias</a:t>
+              <a:t>–   Las 6 columnas que la pantalla de agenda usa</a:t>
             </a:r>
           </a:p>
           <a:p>
@@ -8358,7 +11346,16 @@
                 </a:solidFill>
                 <a:latin typeface="Calibri"/>
               </a:rPr>
-              <a:t>–   Filtro por fecha ANTES del JOIN</a:t>
+              <a:t>–   «&gt;= TIMESTAMP '2026-03-10' … &lt;» y «estado = '…'»: </a:t>
+            </a:r>
+            <a:r>
+              <a:rPr sz="1500" b="1" i="0">
+                <a:solidFill>
+                  <a:srgbClr val="333333"/>
+                </a:solidFill>
+                <a:latin typeface="Calibri"/>
+              </a:rPr>
+              <a:t>sargable</a:t>
             </a:r>
           </a:p>
           <a:p>
@@ -8374,7 +11371,25 @@
                 </a:solidFill>
                 <a:latin typeface="Calibri"/>
               </a:rPr>
-              <a:t>–   Comparacion directa sobre la columna indexada</a:t>
+              <a:t>–   «JOIN … ON»: </a:t>
+            </a:r>
+            <a:r>
+              <a:rPr sz="1500" b="1" i="0">
+                <a:solidFill>
+                  <a:srgbClr val="333333"/>
+                </a:solidFill>
+                <a:latin typeface="Calibri"/>
+              </a:rPr>
+              <a:t>no acelera</a:t>
+            </a:r>
+            <a:r>
+              <a:rPr sz="1500" b="0" i="0">
+                <a:solidFill>
+                  <a:srgbClr val="333333"/>
+                </a:solidFill>
+                <a:latin typeface="Calibri"/>
+              </a:rPr>
+              <a:t>, impide el cartesiano</a:t>
             </a:r>
           </a:p>
           <a:p>
@@ -8390,7 +11405,7 @@
                 </a:solidFill>
                 <a:latin typeface="Calibri"/>
               </a:rPr>
-              <a:t>–   Plan: </a:t>
+              <a:t>–   «LEFT JOIN» + «GROUP BY»: de 2.006 pasadas a </a:t>
             </a:r>
             <a:r>
               <a:rPr sz="1500" b="1" i="0">
@@ -8399,23 +11414,14 @@
                 </a:solidFill>
                 <a:latin typeface="Calibri"/>
               </a:rPr>
-              <a:t>INDEX RANGE SCAN</a:t>
-            </a:r>
-            <a:r>
-              <a:rPr sz="1500" b="0" i="0">
-                <a:solidFill>
-                  <a:srgbClr val="333333"/>
-                </a:solidFill>
-                <a:latin typeface="Calibri"/>
-              </a:rPr>
-              <a:t> (~340 filas)</a:t>
-            </a:r>
-          </a:p>
-        </p:txBody>
-      </p:sp>
-      <p:sp>
-        <p:nvSpPr>
-          <p:cNvPr id="13" name="TextBox 12"/>
+              <a:t>una</a:t>
+            </a:r>
+          </a:p>
+        </p:txBody>
+      </p:sp>
+      <p:sp>
+        <p:nvSpPr>
+          <p:cNvPr id="14" name="TextBox 13"/>
           <p:cNvSpPr txBox="1"/>
           <p:nvPr/>
         </p:nvSpPr>
@@ -8483,7 +11489,7 @@
         <p:spPr>
           <a:xfrm>
             <a:off x="0" y="0"/>
-            <a:ext cx="12191695" cy="960120"/>
+            <a:ext cx="12191695" cy="1170432"/>
           </a:xfrm>
           <a:prstGeom prst="rect">
             <a:avLst/>
@@ -8525,7 +11531,7 @@
         </p:nvSpPr>
         <p:spPr>
           <a:xfrm>
-            <a:off x="0" y="960120"/>
+            <a:off x="0" y="1170432"/>
             <a:ext cx="12191695" cy="41148"/>
           </a:xfrm>
           <a:prstGeom prst="rect">
@@ -8569,7 +11575,7 @@
         <p:spPr>
           <a:xfrm>
             <a:off x="457200" y="164592"/>
-            <a:ext cx="11277295" cy="502920"/>
+            <a:ext cx="11277295" cy="384048"/>
           </a:xfrm>
           <a:prstGeom prst="rect">
             <a:avLst/>
@@ -8589,7 +11595,7 @@
                 </a:solidFill>
                 <a:latin typeface="Calibri"/>
               </a:rPr>
-              <a:t>Demo del dia</a:t>
+              <a:t>Leer un plan: es un arbol y se lee de adentro hacia afuera</a:t>
             </a:r>
           </a:p>
         </p:txBody>
@@ -8602,8 +11608,42 @@
         </p:nvSpPr>
         <p:spPr>
           <a:xfrm>
-            <a:off x="457200" y="1170432"/>
-            <a:ext cx="11277295" cy="5230368"/>
+            <a:off x="457200" y="566928"/>
+            <a:ext cx="11277295" cy="411480"/>
+          </a:xfrm>
+          <a:prstGeom prst="rect">
+            <a:avLst/>
+          </a:prstGeom>
+          <a:noFill/>
+        </p:spPr>
+        <p:txBody>
+          <a:bodyPr wrap="square">
+            <a:spAutoFit/>
+          </a:bodyPr>
+          <a:lstStyle/>
+          <a:p>
+            <a:r>
+              <a:rPr sz="1400" b="0" i="0">
+                <a:solidFill>
+                  <a:srgbClr val="B8D8EE"/>
+                </a:solidFill>
+                <a:latin typeface="Calibri"/>
+              </a:rPr>
+              <a:t>Es la pregunta 2 completa — 20 de los 100 puntos — y se responde leyendo estos campos, no pegando el plano tal cual</a:t>
+            </a:r>
+          </a:p>
+        </p:txBody>
+      </p:sp>
+      <p:sp>
+        <p:nvSpPr>
+          <p:cNvPr id="6" name="TextBox 5"/>
+          <p:cNvSpPr txBox="1"/>
+          <p:nvPr/>
+        </p:nvSpPr>
+        <p:spPr>
+          <a:xfrm>
+            <a:off x="457200" y="1380744"/>
+            <a:ext cx="11277295" cy="5020056"/>
           </a:xfrm>
           <a:prstGeom prst="rect">
             <a:avLst/>
@@ -8622,7 +11662,7 @@
               </a:spcAft>
             </a:pPr>
             <a:r>
-              <a:rPr sz="1600" b="0" i="0">
+              <a:rPr sz="1300" b="0" i="0">
                 <a:solidFill>
                   <a:srgbClr val="333333"/>
                 </a:solidFill>
@@ -8631,22 +11671,76 @@
               <a:t>–   </a:t>
             </a:r>
             <a:r>
-              <a:rPr sz="1600" b="1" i="0">
-                <a:solidFill>
-                  <a:srgbClr val="333333"/>
-                </a:solidFill>
-                <a:latin typeface="Calibri"/>
-              </a:rPr>
-              <a:t>Herramienta:</a:t>
-            </a:r>
-            <a:r>
-              <a:rPr sz="1600" b="0" i="0">
-                <a:solidFill>
-                  <a:srgbClr val="333333"/>
-                </a:solidFill>
-                <a:latin typeface="Calibri"/>
-              </a:rPr>
-              <a:t> DB Fiddle / SQLTest.online</a:t>
+              <a:rPr sz="1300" b="1" i="0">
+                <a:solidFill>
+                  <a:srgbClr val="333333"/>
+                </a:solidFill>
+                <a:latin typeface="Calibri"/>
+              </a:rPr>
+              <a:t>El orden de lectura.</a:t>
+            </a:r>
+            <a:r>
+              <a:rPr sz="1300" b="0" i="0">
+                <a:solidFill>
+                  <a:srgbClr val="333333"/>
+                </a:solidFill>
+                <a:latin typeface="Calibri"/>
+              </a:rPr>
+              <a:t> El plan </a:t>
+            </a:r>
+            <a:r>
+              <a:rPr sz="1300" b="1" i="0">
+                <a:solidFill>
+                  <a:srgbClr val="333333"/>
+                </a:solidFill>
+                <a:latin typeface="Calibri"/>
+              </a:rPr>
+              <a:t>no</a:t>
+            </a:r>
+            <a:r>
+              <a:rPr sz="1300" b="0" i="0">
+                <a:solidFill>
+                  <a:srgbClr val="333333"/>
+                </a:solidFill>
+                <a:latin typeface="Calibri"/>
+              </a:rPr>
+              <a:t> es una lista de pasos de arriba hacia abajo: es un arbol. Los nodos </a:t>
+            </a:r>
+            <a:r>
+              <a:rPr sz="1300" b="1" i="0">
+                <a:solidFill>
+                  <a:srgbClr val="333333"/>
+                </a:solidFill>
+                <a:latin typeface="Calibri"/>
+              </a:rPr>
+              <a:t>mas indentados son las hojas</a:t>
+            </a:r>
+            <a:r>
+              <a:rPr sz="1300" b="0" i="0">
+                <a:solidFill>
+                  <a:srgbClr val="333333"/>
+                </a:solidFill>
+                <a:latin typeface="Calibri"/>
+              </a:rPr>
+              <a:t> y se ejecutan primero; cada nodo consume las filas de sus hijos. La </a:t>
+            </a:r>
+            <a:r>
+              <a:rPr sz="1300" b="1" i="0">
+                <a:solidFill>
+                  <a:srgbClr val="333333"/>
+                </a:solidFill>
+                <a:latin typeface="Calibri"/>
+              </a:rPr>
+              <a:t>primera linea impresa es la ULTIMA operacion</a:t>
+            </a:r>
+            <a:r>
+              <a:rPr sz="1300" b="0" i="0">
+                <a:solidFill>
+                  <a:srgbClr val="333333"/>
+                </a:solidFill>
+                <a:latin typeface="Calibri"/>
+              </a:rPr>
+              <a:t>.</a:t>
             </a:r>
           </a:p>
           <a:p>
@@ -8656,7 +11750,7 @@
               </a:spcAft>
             </a:pPr>
             <a:r>
-              <a:rPr sz="1600" b="0" i="0">
+              <a:rPr sz="1300" b="0" i="0">
                 <a:solidFill>
                   <a:srgbClr val="333333"/>
                 </a:solidFill>
@@ -8665,22 +11759,94 @@
               <a:t>–   </a:t>
             </a:r>
             <a:r>
-              <a:rPr sz="1600" b="1" i="0">
-                <a:solidFill>
-                  <a:srgbClr val="333333"/>
-                </a:solidFill>
-                <a:latin typeface="Calibri"/>
-              </a:rPr>
-              <a:t>Demo:</a:t>
-            </a:r>
-            <a:r>
-              <a:rPr sz="1600" b="0" i="0">
-                <a:solidFill>
-                  <a:srgbClr val="333333"/>
-                </a:solidFill>
-                <a:latin typeface="Calibri"/>
-              </a:rPr>
-              <a:t> Consulta pesada citas+mascotas+duenos -&gt; version filtrada y proyectada.</a:t>
+              <a:rPr sz="1300" b="1" i="0">
+                <a:solidFill>
+                  <a:srgbClr val="333333"/>
+                </a:solidFill>
+                <a:latin typeface="Calibri"/>
+              </a:rPr>
+              <a:t>Los cuatro campos.</a:t>
+            </a:r>
+            <a:r>
+              <a:rPr sz="1300" b="0" i="0">
+                <a:solidFill>
+                  <a:srgbClr val="333333"/>
+                </a:solidFill>
+                <a:latin typeface="Calibri"/>
+              </a:rPr>
+              <a:t> «cost=270.00..4821.50» son arranque y total en una unidad </a:t>
+            </a:r>
+            <a:r>
+              <a:rPr sz="1300" b="1" i="0">
+                <a:solidFill>
+                  <a:srgbClr val="333333"/>
+                </a:solidFill>
+                <a:latin typeface="Calibri"/>
+              </a:rPr>
+              <a:t>relativa</a:t>
+            </a:r>
+            <a:r>
+              <a:rPr sz="1300" b="0" i="0">
+                <a:solidFill>
+                  <a:srgbClr val="333333"/>
+                </a:solidFill>
+                <a:latin typeface="Calibri"/>
+              </a:rPr>
+              <a:t> (1.0 = leer una pagina de 8 KB), </a:t>
+            </a:r>
+            <a:r>
+              <a:rPr sz="1300" b="1" i="0">
+                <a:solidFill>
+                  <a:srgbClr val="333333"/>
+                </a:solidFill>
+                <a:latin typeface="Calibri"/>
+              </a:rPr>
+              <a:t>no</a:t>
+            </a:r>
+            <a:r>
+              <a:rPr sz="1300" b="0" i="0">
+                <a:solidFill>
+                  <a:srgbClr val="333333"/>
+                </a:solidFill>
+                <a:latin typeface="Calibri"/>
+              </a:rPr>
+              <a:t> milisegundos; «rows=» son las filas que el motor </a:t>
+            </a:r>
+            <a:r>
+              <a:rPr sz="1300" b="1" i="0">
+                <a:solidFill>
+                  <a:srgbClr val="333333"/>
+                </a:solidFill>
+                <a:latin typeface="Calibri"/>
+              </a:rPr>
+              <a:t>estima</a:t>
+            </a:r>
+            <a:r>
+              <a:rPr sz="1300" b="0" i="0">
+                <a:solidFill>
+                  <a:srgbClr val="333333"/>
+                </a:solidFill>
+                <a:latin typeface="Calibri"/>
+              </a:rPr>
+              <a:t>; «width=» el ancho de la fila en bytes; «loops=» cuantas </a:t>
+            </a:r>
+            <a:r>
+              <a:rPr sz="1300" b="1" i="0">
+                <a:solidFill>
+                  <a:srgbClr val="333333"/>
+                </a:solidFill>
+                <a:latin typeface="Calibri"/>
+              </a:rPr>
+              <a:t>veces se repitio</a:t>
+            </a:r>
+            <a:r>
+              <a:rPr sz="1300" b="0" i="0">
+                <a:solidFill>
+                  <a:srgbClr val="333333"/>
+                </a:solidFill>
+                <a:latin typeface="Calibri"/>
+              </a:rPr>
+              <a:t> ese nodo.</a:t>
             </a:r>
           </a:p>
           <a:p>
@@ -8690,13 +11856,49 @@
               </a:spcAft>
             </a:pPr>
             <a:r>
-              <a:rPr sz="1600" b="0" i="0">
-                <a:solidFill>
-                  <a:srgbClr val="333333"/>
-                </a:solidFill>
-                <a:latin typeface="Calibri"/>
-              </a:rPr>
-              <a:t>–   Sigan el mismo dominio VetCare (no inventen otro caso).</a:t>
+              <a:rPr sz="1300" b="0" i="0">
+                <a:solidFill>
+                  <a:srgbClr val="333333"/>
+                </a:solidFill>
+                <a:latin typeface="Calibri"/>
+              </a:rPr>
+              <a:t>–   </a:t>
+            </a:r>
+            <a:r>
+              <a:rPr sz="1300" b="1" i="0">
+                <a:solidFill>
+                  <a:srgbClr val="333333"/>
+                </a:solidFill>
+                <a:latin typeface="Calibri"/>
+              </a:rPr>
+              <a:t>«EXPLAIN» estima, «EXPLAIN ANALYZE» ejecuta.</a:t>
+            </a:r>
+            <a:r>
+              <a:rPr sz="1300" b="0" i="0">
+                <a:solidFill>
+                  <a:srgbClr val="333333"/>
+                </a:solidFill>
+                <a:latin typeface="Calibri"/>
+              </a:rPr>
+              <a:t> El segundo agrega «actual time=», «actual rows=» y el «Execution Time» final. Y ejecuta </a:t>
+            </a:r>
+            <a:r>
+              <a:rPr sz="1300" b="1" i="0">
+                <a:solidFill>
+                  <a:srgbClr val="333333"/>
+                </a:solidFill>
+                <a:latin typeface="Calibri"/>
+              </a:rPr>
+              <a:t>de verdad</a:t>
+            </a:r>
+            <a:r>
+              <a:rPr sz="1300" b="0" i="0">
+                <a:solidFill>
+                  <a:srgbClr val="333333"/>
+                </a:solidFill>
+                <a:latin typeface="Calibri"/>
+              </a:rPr>
+              <a:t>: sobre un «UPDATE» o «DELETE» hay que envolverlo en «BEGIN» … «ROLLBACK» (eso es la Clase 8). Con «SELECT» no hay riesgo.</a:t>
             </a:r>
           </a:p>
           <a:p>
@@ -8706,20 +11908,126 @@
               </a:spcAft>
             </a:pPr>
             <a:r>
-              <a:rPr sz="1600" b="0" i="0">
-                <a:solidFill>
-                  <a:srgbClr val="333333"/>
-                </a:solidFill>
-                <a:latin typeface="Calibri"/>
-              </a:rPr>
-              <a:t>–   Al final de la demo: dejar enlace/script compartible al grupo.</a:t>
-            </a:r>
-          </a:p>
-        </p:txBody>
-      </p:sp>
-      <p:sp>
-        <p:nvSpPr>
-          <p:cNvPr id="6" name="TextBox 5"/>
+              <a:rPr sz="1300" b="0" i="0">
+                <a:solidFill>
+                  <a:srgbClr val="333333"/>
+                </a:solidFill>
+                <a:latin typeface="Calibri"/>
+              </a:rPr>
+              <a:t>–   </a:t>
+            </a:r>
+            <a:r>
+              <a:rPr sz="1300" b="1" i="0">
+                <a:solidFill>
+                  <a:srgbClr val="333333"/>
+                </a:solidFill>
+                <a:latin typeface="Calibri"/>
+              </a:rPr>
+              <a:t>Estimado contra real: la senal.</a:t>
+            </a:r>
+            <a:r>
+              <a:rPr sz="1300" b="0" i="0">
+                <a:solidFill>
+                  <a:srgbClr val="333333"/>
+                </a:solidFill>
+                <a:latin typeface="Calibri"/>
+              </a:rPr>
+              <a:t> Una divergencia de 2 veces es normal; de </a:t>
+            </a:r>
+            <a:r>
+              <a:rPr sz="1300" b="1" i="0">
+                <a:solidFill>
+                  <a:srgbClr val="333333"/>
+                </a:solidFill>
+                <a:latin typeface="Calibri"/>
+              </a:rPr>
+              <a:t>10 veces o mas</a:t>
+            </a:r>
+            <a:r>
+              <a:rPr sz="1300" b="0" i="0">
+                <a:solidFill>
+                  <a:srgbClr val="333333"/>
+                </a:solidFill>
+                <a:latin typeface="Calibri"/>
+              </a:rPr>
+              <a:t> delata estadisticas viejas o predicados que el motor cree independientes y no lo son. Es lo que se anota en la tabla de la pregunta 2.</a:t>
+            </a:r>
+          </a:p>
+          <a:p>
+            <a:pPr>
+              <a:spcAft>
+                <a:spcPts val="800"/>
+              </a:spcAft>
+            </a:pPr>
+            <a:r>
+              <a:rPr sz="1300" b="0" i="0">
+                <a:solidFill>
+                  <a:srgbClr val="333333"/>
+                </a:solidFill>
+                <a:latin typeface="Calibri"/>
+              </a:rPr>
+              <a:t>–   </a:t>
+            </a:r>
+            <a:r>
+              <a:rPr sz="1300" b="1" i="0">
+                <a:solidFill>
+                  <a:srgbClr val="333333"/>
+                </a:solidFill>
+                <a:latin typeface="Calibri"/>
+              </a:rPr>
+              <a:t>El nodo mas costoso, sin trampa.</a:t>
+            </a:r>
+            <a:r>
+              <a:rPr sz="1300" b="0" i="0">
+                <a:solidFill>
+                  <a:srgbClr val="333333"/>
+                </a:solidFill>
+                <a:latin typeface="Calibri"/>
+              </a:rPr>
+              <a:t> El tiempo de un nodo </a:t>
+            </a:r>
+            <a:r>
+              <a:rPr sz="1300" b="1" i="0">
+                <a:solidFill>
+                  <a:srgbClr val="333333"/>
+                </a:solidFill>
+                <a:latin typeface="Calibri"/>
+              </a:rPr>
+              <a:t>incluye el de sus hijos</a:t>
+            </a:r>
+            <a:r>
+              <a:rPr sz="1300" b="0" i="0">
+                <a:solidFill>
+                  <a:srgbClr val="333333"/>
+                </a:solidFill>
+                <a:latin typeface="Calibri"/>
+              </a:rPr>
+              <a:t>, y «actual time» es </a:t>
+            </a:r>
+            <a:r>
+              <a:rPr sz="1300" b="1" i="0">
+                <a:solidFill>
+                  <a:srgbClr val="333333"/>
+                </a:solidFill>
+                <a:latin typeface="Calibri"/>
+              </a:rPr>
+              <a:t>por vuelta</a:t>
+            </a:r>
+            <a:r>
+              <a:rPr sz="1300" b="0" i="0">
+                <a:solidFill>
+                  <a:srgbClr val="333333"/>
+                </a:solidFill>
+                <a:latin typeface="Calibri"/>
+              </a:rPr>
+              <a:t>: hay que multiplicarlo por «loops». Un nodo de 0,5 ms con «loops=2006» cuesta un segundo — mas que el «Seq Scan» de arriba que parece el culpable.</a:t>
+            </a:r>
+          </a:p>
+        </p:txBody>
+      </p:sp>
+      <p:sp>
+        <p:nvSpPr>
+          <p:cNvPr id="7" name="TextBox 6"/>
           <p:cNvSpPr txBox="1"/>
           <p:nvPr/>
         </p:nvSpPr>
@@ -8893,7 +12201,7 @@
                 </a:solidFill>
                 <a:latin typeface="Calibri"/>
               </a:rPr>
-              <a:t>Herramientas de hoy</a:t>
+              <a:t>La subconsulta correlacionada: 2.006 pasadas o una sola</a:t>
             </a:r>
           </a:p>
         </p:txBody>
@@ -8927,176 +12235,21 @@
                 </a:solidFill>
                 <a:latin typeface="Calibri"/>
               </a:rPr>
-              <a:t>Gratis · navegador o free tier</a:t>
-            </a:r>
-          </a:p>
-        </p:txBody>
-      </p:sp>
-      <p:sp>
-        <p:nvSpPr>
-          <p:cNvPr id="6" name="Rounded Rectangle 5"/>
-          <p:cNvSpPr/>
-          <p:nvPr/>
-        </p:nvSpPr>
-        <p:spPr>
-          <a:xfrm>
-            <a:off x="457200" y="1591056"/>
-            <a:ext cx="3624986" cy="2331720"/>
-          </a:xfrm>
-          <a:prstGeom prst="roundRect">
-            <a:avLst>
-              <a:gd name="adj" fmla="val 12000"/>
-            </a:avLst>
-          </a:prstGeom>
-          <a:solidFill>
-            <a:srgbClr val="F2F2F2"/>
-          </a:solidFill>
-          <a:ln>
-            <a:noFill/>
-          </a:ln>
-        </p:spPr>
-        <p:style>
-          <a:lnRef idx="1">
-            <a:schemeClr val="accent1"/>
-          </a:lnRef>
-          <a:fillRef idx="3">
-            <a:schemeClr val="accent1"/>
-          </a:fillRef>
-          <a:effectRef idx="2">
-            <a:schemeClr val="accent1"/>
-          </a:effectRef>
-          <a:fontRef idx="minor">
-            <a:schemeClr val="lt1"/>
-          </a:fontRef>
-        </p:style>
-        <p:txBody>
-          <a:bodyPr rtlCol="0" anchor="ctr"/>
-          <a:lstStyle/>
-          <a:p>
-            <a:pPr algn="ctr"/>
-          </a:p>
-        </p:txBody>
-      </p:sp>
-      <p:sp>
-        <p:nvSpPr>
-          <p:cNvPr id="7" name="Rectangle 6"/>
-          <p:cNvSpPr/>
-          <p:nvPr/>
-        </p:nvSpPr>
-        <p:spPr>
-          <a:xfrm>
-            <a:off x="457200" y="1591056"/>
-            <a:ext cx="3624986" cy="64008"/>
-          </a:xfrm>
-          <a:prstGeom prst="rect">
-            <a:avLst/>
-          </a:prstGeom>
-          <a:solidFill>
-            <a:srgbClr val="095292"/>
-          </a:solidFill>
-          <a:ln>
-            <a:noFill/>
-          </a:ln>
-        </p:spPr>
-        <p:style>
-          <a:lnRef idx="1">
-            <a:schemeClr val="accent1"/>
-          </a:lnRef>
-          <a:fillRef idx="3">
-            <a:schemeClr val="accent1"/>
-          </a:fillRef>
-          <a:effectRef idx="2">
-            <a:schemeClr val="accent1"/>
-          </a:effectRef>
-          <a:fontRef idx="minor">
-            <a:schemeClr val="lt1"/>
-          </a:fontRef>
-        </p:style>
-        <p:txBody>
-          <a:bodyPr rtlCol="0" anchor="ctr"/>
-          <a:lstStyle/>
-          <a:p>
-            <a:pPr algn="ctr"/>
-          </a:p>
-        </p:txBody>
-      </p:sp>
-      <p:sp>
-        <p:nvSpPr>
-          <p:cNvPr id="8" name="Rectangle 7"/>
-          <p:cNvSpPr/>
-          <p:nvPr/>
-        </p:nvSpPr>
-        <p:spPr>
-          <a:xfrm>
-            <a:off x="457200" y="1655064"/>
-            <a:ext cx="3624986" cy="27432"/>
-          </a:xfrm>
-          <a:prstGeom prst="rect">
-            <a:avLst/>
-          </a:prstGeom>
-          <a:solidFill>
-            <a:srgbClr val="FFD000"/>
-          </a:solidFill>
-          <a:ln>
-            <a:noFill/>
-          </a:ln>
-        </p:spPr>
-        <p:style>
-          <a:lnRef idx="1">
-            <a:schemeClr val="accent1"/>
-          </a:lnRef>
-          <a:fillRef idx="3">
-            <a:schemeClr val="accent1"/>
-          </a:fillRef>
-          <a:effectRef idx="2">
-            <a:schemeClr val="accent1"/>
-          </a:effectRef>
-          <a:fontRef idx="minor">
-            <a:schemeClr val="lt1"/>
-          </a:fontRef>
-        </p:style>
-        <p:txBody>
-          <a:bodyPr rtlCol="0" anchor="ctr"/>
-          <a:lstStyle/>
-          <a:p>
-            <a:pPr algn="ctr"/>
-          </a:p>
-        </p:txBody>
-      </p:sp>
-      <p:pic>
-        <p:nvPicPr>
-          <p:cNvPr id="9" name="Picture 8" descr="dbfiddle.png"/>
-          <p:cNvPicPr>
-            <a:picLocks noChangeAspect="1"/>
-          </p:cNvPicPr>
-          <p:nvPr/>
-        </p:nvPicPr>
-        <p:blipFill>
-          <a:blip r:embed="rId2"/>
-          <a:stretch>
-            <a:fillRect/>
-          </a:stretch>
-        </p:blipFill>
-        <p:spPr>
-          <a:xfrm>
-            <a:off x="1643329" y="1847087"/>
-            <a:ext cx="1252728" cy="1252728"/>
-          </a:xfrm>
-          <a:prstGeom prst="rect">
-            <a:avLst/>
-          </a:prstGeom>
-        </p:spPr>
-      </p:pic>
-      <p:sp>
-        <p:nvSpPr>
-          <p:cNvPr id="10" name="TextBox 9"/>
+              <a:t>Es la pregunta 3 del taller — 20 de los 100 puntos — y la afirmacion de la pregunta 4 que mas se falla</a:t>
+            </a:r>
+          </a:p>
+        </p:txBody>
+      </p:sp>
+      <p:sp>
+        <p:nvSpPr>
+          <p:cNvPr id="6" name="TextBox 5"/>
           <p:cNvSpPr txBox="1"/>
           <p:nvPr/>
         </p:nvSpPr>
         <p:spPr>
           <a:xfrm>
-            <a:off x="530352" y="3191256"/>
-            <a:ext cx="3478682" cy="621792"/>
+            <a:off x="457200" y="1380744"/>
+            <a:ext cx="11277295" cy="5020056"/>
           </a:xfrm>
           <a:prstGeom prst="rect">
             <a:avLst/>
@@ -9104,449 +12257,329 @@
           <a:noFill/>
         </p:spPr>
         <p:txBody>
-          <a:bodyPr wrap="square" anchor="t"/>
-          <a:lstStyle/>
-          <a:p>
-            <a:pPr algn="ctr"/>
+          <a:bodyPr wrap="square">
+            <a:spAutoFit/>
+          </a:bodyPr>
+          <a:lstStyle/>
+          <a:p>
+            <a:pPr>
+              <a:spcAft>
+                <a:spcPts val="800"/>
+              </a:spcAft>
+            </a:pPr>
+            <a:r>
+              <a:rPr sz="1300" b="0" i="0">
+                <a:solidFill>
+                  <a:srgbClr val="333333"/>
+                </a:solidFill>
+                <a:latin typeface="Calibri"/>
+              </a:rPr>
+              <a:t>–   </a:t>
+            </a:r>
             <a:r>
               <a:rPr sz="1300" b="1" i="0">
                 <a:solidFill>
-                  <a:srgbClr val="095292"/>
-                </a:solidFill>
-                <a:latin typeface="Calibri"/>
-              </a:rPr>
-              <a:t>DB Fiddle</a:t>
-            </a:r>
-          </a:p>
-          <a:p>
-            <a:pPr algn="ctr">
-              <a:spcBef>
-                <a:spcPts val="200"/>
-              </a:spcBef>
+                  <a:srgbClr val="333333"/>
+                </a:solidFill>
+                <a:latin typeface="Calibri"/>
+              </a:rPr>
+              <a:t>Que la hace correlacionada.</a:t>
+            </a:r>
+            <a:r>
+              <a:rPr sz="1300" b="0" i="0">
+                <a:solidFill>
+                  <a:srgbClr val="333333"/>
+                </a:solidFill>
+                <a:latin typeface="Calibri"/>
+              </a:rPr>
+              <a:t> La subconsulta esta en la </a:t>
+            </a:r>
+            <a:r>
+              <a:rPr sz="1300" b="1" i="0">
+                <a:solidFill>
+                  <a:srgbClr val="333333"/>
+                </a:solidFill>
+                <a:latin typeface="Calibri"/>
+              </a:rPr>
+              <a:t>lista de columnas</a:t>
+            </a:r>
+            <a:r>
+              <a:rPr sz="1300" b="0" i="0">
+                <a:solidFill>
+                  <a:srgbClr val="333333"/>
+                </a:solidFill>
+                <a:latin typeface="Calibri"/>
+              </a:rPr>
+              <a:t> y menciona una columna del exterior («WHERE m.id_dueno = d.id_dueno»). No se puede calcular una vez y reusar: depende de la fila que se este mirando, asi que el motor </a:t>
+            </a:r>
+            <a:r>
+              <a:rPr sz="1300" b="1" i="0">
+                <a:solidFill>
+                  <a:srgbClr val="333333"/>
+                </a:solidFill>
+                <a:latin typeface="Calibri"/>
+              </a:rPr>
+              <a:t>la ejecuta una vez por fila</a:t>
+            </a:r>
+            <a:r>
+              <a:rPr sz="1300" b="0" i="0">
+                <a:solidFill>
+                  <a:srgbClr val="333333"/>
+                </a:solidFill>
+                <a:latin typeface="Calibri"/>
+              </a:rPr>
+              <a:t> del exterior.</a:t>
+            </a:r>
+          </a:p>
+          <a:p>
+            <a:pPr>
+              <a:spcAft>
+                <a:spcPts val="800"/>
+              </a:spcAft>
             </a:pPr>
             <a:r>
-              <a:rPr sz="1000" b="0" i="0">
-                <a:solidFill>
-                  <a:srgbClr val="666666"/>
-                </a:solidFill>
-                <a:latin typeface="Calibri"/>
-              </a:rPr>
-              <a:t>Antes/despues</a:t>
-            </a:r>
-          </a:p>
-        </p:txBody>
-      </p:sp>
-      <p:sp>
-        <p:nvSpPr>
-          <p:cNvPr id="11" name="Rounded Rectangle 10"/>
-          <p:cNvSpPr/>
-          <p:nvPr/>
-        </p:nvSpPr>
-        <p:spPr>
-          <a:xfrm>
-            <a:off x="4283354" y="1591056"/>
-            <a:ext cx="3624986" cy="2331720"/>
-          </a:xfrm>
-          <a:prstGeom prst="roundRect">
-            <a:avLst>
-              <a:gd name="adj" fmla="val 12000"/>
-            </a:avLst>
-          </a:prstGeom>
-          <a:solidFill>
-            <a:srgbClr val="F2F2F2"/>
-          </a:solidFill>
-          <a:ln>
-            <a:noFill/>
-          </a:ln>
-        </p:spPr>
-        <p:style>
-          <a:lnRef idx="1">
-            <a:schemeClr val="accent1"/>
-          </a:lnRef>
-          <a:fillRef idx="3">
-            <a:schemeClr val="accent1"/>
-          </a:fillRef>
-          <a:effectRef idx="2">
-            <a:schemeClr val="accent1"/>
-          </a:effectRef>
-          <a:fontRef idx="minor">
-            <a:schemeClr val="lt1"/>
-          </a:fontRef>
-        </p:style>
-        <p:txBody>
-          <a:bodyPr rtlCol="0" anchor="ctr"/>
-          <a:lstStyle/>
-          <a:p>
-            <a:pPr algn="ctr"/>
-          </a:p>
-        </p:txBody>
-      </p:sp>
-      <p:sp>
-        <p:nvSpPr>
-          <p:cNvPr id="12" name="Rectangle 11"/>
-          <p:cNvSpPr/>
-          <p:nvPr/>
-        </p:nvSpPr>
-        <p:spPr>
-          <a:xfrm>
-            <a:off x="4283354" y="1591056"/>
-            <a:ext cx="3624986" cy="64008"/>
-          </a:xfrm>
-          <a:prstGeom prst="rect">
-            <a:avLst/>
-          </a:prstGeom>
-          <a:solidFill>
-            <a:srgbClr val="095292"/>
-          </a:solidFill>
-          <a:ln>
-            <a:noFill/>
-          </a:ln>
-        </p:spPr>
-        <p:style>
-          <a:lnRef idx="1">
-            <a:schemeClr val="accent1"/>
-          </a:lnRef>
-          <a:fillRef idx="3">
-            <a:schemeClr val="accent1"/>
-          </a:fillRef>
-          <a:effectRef idx="2">
-            <a:schemeClr val="accent1"/>
-          </a:effectRef>
-          <a:fontRef idx="minor">
-            <a:schemeClr val="lt1"/>
-          </a:fontRef>
-        </p:style>
-        <p:txBody>
-          <a:bodyPr rtlCol="0" anchor="ctr"/>
-          <a:lstStyle/>
-          <a:p>
-            <a:pPr algn="ctr"/>
-          </a:p>
-        </p:txBody>
-      </p:sp>
-      <p:sp>
-        <p:nvSpPr>
-          <p:cNvPr id="13" name="Rectangle 12"/>
-          <p:cNvSpPr/>
-          <p:nvPr/>
-        </p:nvSpPr>
-        <p:spPr>
-          <a:xfrm>
-            <a:off x="4283354" y="1655064"/>
-            <a:ext cx="3624986" cy="27432"/>
-          </a:xfrm>
-          <a:prstGeom prst="rect">
-            <a:avLst/>
-          </a:prstGeom>
-          <a:solidFill>
-            <a:srgbClr val="FFD000"/>
-          </a:solidFill>
-          <a:ln>
-            <a:noFill/>
-          </a:ln>
-        </p:spPr>
-        <p:style>
-          <a:lnRef idx="1">
-            <a:schemeClr val="accent1"/>
-          </a:lnRef>
-          <a:fillRef idx="3">
-            <a:schemeClr val="accent1"/>
-          </a:fillRef>
-          <a:effectRef idx="2">
-            <a:schemeClr val="accent1"/>
-          </a:effectRef>
-          <a:fontRef idx="minor">
-            <a:schemeClr val="lt1"/>
-          </a:fontRef>
-        </p:style>
-        <p:txBody>
-          <a:bodyPr rtlCol="0" anchor="ctr"/>
-          <a:lstStyle/>
-          <a:p>
-            <a:pPr algn="ctr"/>
-          </a:p>
-        </p:txBody>
-      </p:sp>
-      <p:pic>
-        <p:nvPicPr>
-          <p:cNvPr id="14" name="Picture 13" descr="sqltest.png"/>
-          <p:cNvPicPr>
-            <a:picLocks noChangeAspect="1"/>
-          </p:cNvPicPr>
-          <p:nvPr/>
-        </p:nvPicPr>
-        <p:blipFill>
-          <a:blip r:embed="rId3"/>
-          <a:stretch>
-            <a:fillRect/>
-          </a:stretch>
-        </p:blipFill>
-        <p:spPr>
-          <a:xfrm>
-            <a:off x="5469483" y="1847087"/>
-            <a:ext cx="1252728" cy="1252728"/>
-          </a:xfrm>
-          <a:prstGeom prst="rect">
-            <a:avLst/>
-          </a:prstGeom>
-        </p:spPr>
-      </p:pic>
-      <p:sp>
-        <p:nvSpPr>
-          <p:cNvPr id="15" name="TextBox 14"/>
-          <p:cNvSpPr txBox="1"/>
-          <p:nvPr/>
-        </p:nvSpPr>
-        <p:spPr>
-          <a:xfrm>
-            <a:off x="4356506" y="3191256"/>
-            <a:ext cx="3478682" cy="621792"/>
-          </a:xfrm>
-          <a:prstGeom prst="rect">
-            <a:avLst/>
-          </a:prstGeom>
-          <a:noFill/>
-        </p:spPr>
-        <p:txBody>
-          <a:bodyPr wrap="square" anchor="t"/>
-          <a:lstStyle/>
-          <a:p>
-            <a:pPr algn="ctr"/>
+              <a:rPr sz="1300" b="0" i="0">
+                <a:solidFill>
+                  <a:srgbClr val="333333"/>
+                </a:solidFill>
+                <a:latin typeface="Calibri"/>
+              </a:rPr>
+              <a:t>–   </a:t>
+            </a:r>
             <a:r>
               <a:rPr sz="1300" b="1" i="0">
                 <a:solidFill>
-                  <a:srgbClr val="095292"/>
-                </a:solidFill>
-                <a:latin typeface="Calibri"/>
-              </a:rPr>
-              <a:t>SQLTest.online</a:t>
-            </a:r>
-          </a:p>
-          <a:p>
-            <a:pPr algn="ctr">
-              <a:spcBef>
-                <a:spcPts val="200"/>
-              </a:spcBef>
+                  <a:srgbClr val="333333"/>
+                </a:solidFill>
+                <a:latin typeface="Calibri"/>
+              </a:rPr>
+              <a:t>El numero que lo delata en el plan.</a:t>
+            </a:r>
+            <a:r>
+              <a:rPr sz="1300" b="0" i="0">
+                <a:solidFill>
+                  <a:srgbClr val="333333"/>
+                </a:solidFill>
+                <a:latin typeface="Calibri"/>
+              </a:rPr>
+              <a:t> «EXPLAIN ANALYZE» muestra un nodo «SubPlan» con </a:t>
+            </a:r>
+            <a:r>
+              <a:rPr sz="1300" b="1" i="0">
+                <a:solidFill>
+                  <a:srgbClr val="333333"/>
+                </a:solidFill>
+                <a:latin typeface="Calibri"/>
+              </a:rPr>
+              <a:t>«loops=2006»</a:t>
+            </a:r>
+            <a:r>
+              <a:rPr sz="1300" b="0" i="0">
+                <a:solidFill>
+                  <a:srgbClr val="333333"/>
+                </a:solidFill>
+                <a:latin typeface="Calibri"/>
+              </a:rPr>
+              <a:t> — un dueno, una ejecucion. Y cada ejecucion recorre las 30.010 citas. «loops» es el campo que hay que buscar: es el unico lugar donde el plan dice «esto se repitio».</a:t>
+            </a:r>
+          </a:p>
+          <a:p>
+            <a:pPr>
+              <a:spcAft>
+                <a:spcPts val="800"/>
+              </a:spcAft>
             </a:pPr>
             <a:r>
-              <a:rPr sz="1000" b="0" i="0">
-                <a:solidFill>
-                  <a:srgbClr val="666666"/>
-                </a:solidFill>
-                <a:latin typeface="Calibri"/>
-              </a:rPr>
-              <a:t>Multi-motor</a:t>
-            </a:r>
-          </a:p>
-        </p:txBody>
-      </p:sp>
-      <p:sp>
-        <p:nvSpPr>
-          <p:cNvPr id="16" name="Rounded Rectangle 15"/>
-          <p:cNvSpPr/>
-          <p:nvPr/>
-        </p:nvSpPr>
-        <p:spPr>
-          <a:xfrm>
-            <a:off x="8109508" y="1591056"/>
-            <a:ext cx="3624986" cy="2331720"/>
-          </a:xfrm>
-          <a:prstGeom prst="roundRect">
-            <a:avLst>
-              <a:gd name="adj" fmla="val 12000"/>
-            </a:avLst>
-          </a:prstGeom>
-          <a:solidFill>
-            <a:srgbClr val="F2F2F2"/>
-          </a:solidFill>
-          <a:ln>
-            <a:noFill/>
-          </a:ln>
-        </p:spPr>
-        <p:style>
-          <a:lnRef idx="1">
-            <a:schemeClr val="accent1"/>
-          </a:lnRef>
-          <a:fillRef idx="3">
-            <a:schemeClr val="accent1"/>
-          </a:fillRef>
-          <a:effectRef idx="2">
-            <a:schemeClr val="accent1"/>
-          </a:effectRef>
-          <a:fontRef idx="minor">
-            <a:schemeClr val="lt1"/>
-          </a:fontRef>
-        </p:style>
-        <p:txBody>
-          <a:bodyPr rtlCol="0" anchor="ctr"/>
-          <a:lstStyle/>
-          <a:p>
-            <a:pPr algn="ctr"/>
-          </a:p>
-        </p:txBody>
-      </p:sp>
-      <p:sp>
-        <p:nvSpPr>
-          <p:cNvPr id="17" name="Rectangle 16"/>
-          <p:cNvSpPr/>
-          <p:nvPr/>
-        </p:nvSpPr>
-        <p:spPr>
-          <a:xfrm>
-            <a:off x="8109508" y="1591056"/>
-            <a:ext cx="3624986" cy="64008"/>
-          </a:xfrm>
-          <a:prstGeom prst="rect">
-            <a:avLst/>
-          </a:prstGeom>
-          <a:solidFill>
-            <a:srgbClr val="095292"/>
-          </a:solidFill>
-          <a:ln>
-            <a:noFill/>
-          </a:ln>
-        </p:spPr>
-        <p:style>
-          <a:lnRef idx="1">
-            <a:schemeClr val="accent1"/>
-          </a:lnRef>
-          <a:fillRef idx="3">
-            <a:schemeClr val="accent1"/>
-          </a:fillRef>
-          <a:effectRef idx="2">
-            <a:schemeClr val="accent1"/>
-          </a:effectRef>
-          <a:fontRef idx="minor">
-            <a:schemeClr val="lt1"/>
-          </a:fontRef>
-        </p:style>
-        <p:txBody>
-          <a:bodyPr rtlCol="0" anchor="ctr"/>
-          <a:lstStyle/>
-          <a:p>
-            <a:pPr algn="ctr"/>
-          </a:p>
-        </p:txBody>
-      </p:sp>
-      <p:sp>
-        <p:nvSpPr>
-          <p:cNvPr id="18" name="Rectangle 17"/>
-          <p:cNvSpPr/>
-          <p:nvPr/>
-        </p:nvSpPr>
-        <p:spPr>
-          <a:xfrm>
-            <a:off x="8109508" y="1655064"/>
-            <a:ext cx="3624986" cy="27432"/>
-          </a:xfrm>
-          <a:prstGeom prst="rect">
-            <a:avLst/>
-          </a:prstGeom>
-          <a:solidFill>
-            <a:srgbClr val="FFD000"/>
-          </a:solidFill>
-          <a:ln>
-            <a:noFill/>
-          </a:ln>
-        </p:spPr>
-        <p:style>
-          <a:lnRef idx="1">
-            <a:schemeClr val="accent1"/>
-          </a:lnRef>
-          <a:fillRef idx="3">
-            <a:schemeClr val="accent1"/>
-          </a:fillRef>
-          <a:effectRef idx="2">
-            <a:schemeClr val="accent1"/>
-          </a:effectRef>
-          <a:fontRef idx="minor">
-            <a:schemeClr val="lt1"/>
-          </a:fontRef>
-        </p:style>
-        <p:txBody>
-          <a:bodyPr rtlCol="0" anchor="ctr"/>
-          <a:lstStyle/>
-          <a:p>
-            <a:pPr algn="ctr"/>
-          </a:p>
-        </p:txBody>
-      </p:sp>
-      <p:pic>
-        <p:nvPicPr>
-          <p:cNvPr id="19" name="Picture 18" descr="google_docs.png"/>
-          <p:cNvPicPr>
-            <a:picLocks noChangeAspect="1"/>
-          </p:cNvPicPr>
-          <p:nvPr/>
-        </p:nvPicPr>
-        <p:blipFill>
-          <a:blip r:embed="rId4"/>
-          <a:stretch>
-            <a:fillRect/>
-          </a:stretch>
-        </p:blipFill>
-        <p:spPr>
-          <a:xfrm>
-            <a:off x="9295638" y="1847087"/>
-            <a:ext cx="1252728" cy="1252728"/>
-          </a:xfrm>
-          <a:prstGeom prst="rect">
-            <a:avLst/>
-          </a:prstGeom>
-        </p:spPr>
-      </p:pic>
-      <p:sp>
-        <p:nvSpPr>
-          <p:cNvPr id="20" name="TextBox 19"/>
-          <p:cNvSpPr txBox="1"/>
-          <p:nvPr/>
-        </p:nvSpPr>
-        <p:spPr>
-          <a:xfrm>
-            <a:off x="8182660" y="3191256"/>
-            <a:ext cx="3478682" cy="621792"/>
-          </a:xfrm>
-          <a:prstGeom prst="rect">
-            <a:avLst/>
-          </a:prstGeom>
-          <a:noFill/>
-        </p:spPr>
-        <p:txBody>
-          <a:bodyPr wrap="square" anchor="t"/>
-          <a:lstStyle/>
-          <a:p>
-            <a:pPr algn="ctr"/>
+              <a:rPr sz="1300" b="0" i="0">
+                <a:solidFill>
+                  <a:srgbClr val="333333"/>
+                </a:solidFill>
+                <a:latin typeface="Calibri"/>
+              </a:rPr>
+              <a:t>–   </a:t>
+            </a:r>
             <a:r>
               <a:rPr sz="1300" b="1" i="0">
                 <a:solidFill>
-                  <a:srgbClr val="095292"/>
-                </a:solidFill>
-                <a:latin typeface="Calibri"/>
-              </a:rPr>
-              <a:t>Google Docs</a:t>
-            </a:r>
-          </a:p>
-          <a:p>
-            <a:pPr algn="ctr">
-              <a:spcBef>
-                <a:spcPts val="200"/>
-              </a:spcBef>
+                  <a:srgbClr val="333333"/>
+                </a:solidFill>
+                <a:latin typeface="Calibri"/>
+              </a:rPr>
+              <a:t>La reescritura.</a:t>
+            </a:r>
+            <a:r>
+              <a:rPr sz="1300" b="0" i="0">
+                <a:solidFill>
+                  <a:srgbClr val="333333"/>
+                </a:solidFill>
+                <a:latin typeface="Calibri"/>
+              </a:rPr>
+              <a:t> «dueno LEFT JOIN mascota LEFT JOIN cita» + «GROUP BY d.id_dueno, d.nombre» + «COUNT(...)». El «SubPlan» desaparece y en su lugar queda un solo «HashAggregate»: </a:t>
+            </a:r>
+            <a:r>
+              <a:rPr sz="1300" b="1" i="0">
+                <a:solidFill>
+                  <a:srgbClr val="333333"/>
+                </a:solidFill>
+                <a:latin typeface="Calibri"/>
+              </a:rPr>
+              <a:t>una pasada</a:t>
+            </a:r>
+            <a:r>
+              <a:rPr sz="1300" b="0" i="0">
+                <a:solidFill>
+                  <a:srgbClr val="333333"/>
+                </a:solidFill>
+                <a:latin typeface="Calibri"/>
+              </a:rPr>
+              <a:t>. Es la unica mejora del dia que es de ordenes de magnitud, y no necesita ningun indice — lo que se elimino no fue un escaneo, fueron 2.005 escaneos.</a:t>
+            </a:r>
+          </a:p>
+          <a:p>
+            <a:pPr>
+              <a:spcAft>
+                <a:spcPts val="800"/>
+              </a:spcAft>
             </a:pPr>
             <a:r>
-              <a:rPr sz="1000" b="0" i="0">
-                <a:solidFill>
-                  <a:srgbClr val="666666"/>
-                </a:solidFill>
-                <a:latin typeface="Calibri"/>
-              </a:rPr>
-              <a:t>Justificacion</a:t>
-            </a:r>
-          </a:p>
-        </p:txBody>
-      </p:sp>
-      <p:sp>
-        <p:nvSpPr>
-          <p:cNvPr id="21" name="TextBox 20"/>
+              <a:rPr sz="1300" b="0" i="0">
+                <a:solidFill>
+                  <a:srgbClr val="333333"/>
+                </a:solidFill>
+                <a:latin typeface="Calibri"/>
+              </a:rPr>
+              <a:t>–   </a:t>
+            </a:r>
+            <a:r>
+              <a:rPr sz="1300" b="1" i="0">
+                <a:solidFill>
+                  <a:srgbClr val="333333"/>
+                </a:solidFill>
+                <a:latin typeface="Calibri"/>
+              </a:rPr>
+              <a:t>«COUNT(c.id_cita)», nunca «COUNT(*)».</a:t>
+            </a:r>
+            <a:r>
+              <a:rPr sz="1300" b="0" i="0">
+                <a:solidFill>
+                  <a:srgbClr val="333333"/>
+                </a:solidFill>
+                <a:latin typeface="Calibri"/>
+              </a:rPr>
+              <a:t> El «LEFT JOIN» fabrica </a:t>
+            </a:r>
+            <a:r>
+              <a:rPr sz="1300" b="1" i="0">
+                <a:solidFill>
+                  <a:srgbClr val="333333"/>
+                </a:solidFill>
+                <a:latin typeface="Calibri"/>
+              </a:rPr>
+              <a:t>una fila llena de «NULL»</a:t>
+            </a:r>
+            <a:r>
+              <a:rPr sz="1300" b="0" i="0">
+                <a:solidFill>
+                  <a:srgbClr val="333333"/>
+                </a:solidFill>
+                <a:latin typeface="Calibri"/>
+              </a:rPr>
+              <a:t> por cada dueno sin citas. «COUNT(*)» cuenta filas y reporta </a:t>
+            </a:r>
+            <a:r>
+              <a:rPr sz="1300" b="1" i="0">
+                <a:solidFill>
+                  <a:srgbClr val="333333"/>
+                </a:solidFill>
+                <a:latin typeface="Calibri"/>
+              </a:rPr>
+              <a:t>1</a:t>
+            </a:r>
+            <a:r>
+              <a:rPr sz="1300" b="0" i="0">
+                <a:solidFill>
+                  <a:srgbClr val="333333"/>
+                </a:solidFill>
+                <a:latin typeface="Calibri"/>
+              </a:rPr>
+              <a:t>; «COUNT» de una columna ignora los «NULL» y reporta </a:t>
+            </a:r>
+            <a:r>
+              <a:rPr sz="1300" b="1" i="0">
+                <a:solidFill>
+                  <a:srgbClr val="333333"/>
+                </a:solidFill>
+                <a:latin typeface="Calibri"/>
+              </a:rPr>
+              <a:t>0</a:t>
+            </a:r>
+            <a:r>
+              <a:rPr sz="1300" b="0" i="0">
+                <a:solidFill>
+                  <a:srgbClr val="333333"/>
+                </a:solidFill>
+                <a:latin typeface="Calibri"/>
+              </a:rPr>
+              <a:t>. El sintoma es exacto: los duenos sin citas dicen 1 en vez de 0.</a:t>
+            </a:r>
+          </a:p>
+          <a:p>
+            <a:pPr>
+              <a:spcAft>
+                <a:spcPts val="800"/>
+              </a:spcAft>
+            </a:pPr>
+            <a:r>
+              <a:rPr sz="1300" b="0" i="0">
+                <a:solidFill>
+                  <a:srgbClr val="333333"/>
+                </a:solidFill>
+                <a:latin typeface="Calibri"/>
+              </a:rPr>
+              <a:t>–   </a:t>
+            </a:r>
+            <a:r>
+              <a:rPr sz="1300" b="1" i="0">
+                <a:solidFill>
+                  <a:srgbClr val="333333"/>
+                </a:solidFill>
+                <a:latin typeface="Calibri"/>
+              </a:rPr>
+              <a:t>Y «LEFT», no «INNER».</a:t>
+            </a:r>
+            <a:r>
+              <a:rPr sz="1300" b="0" i="0">
+                <a:solidFill>
+                  <a:srgbClr val="333333"/>
+                </a:solidFill>
+                <a:latin typeface="Calibri"/>
+              </a:rPr>
+              <a:t> Un «INNER JOIN» es mas rapido y esta </a:t>
+            </a:r>
+            <a:r>
+              <a:rPr sz="1300" b="1" i="0">
+                <a:solidFill>
+                  <a:srgbClr val="333333"/>
+                </a:solidFill>
+                <a:latin typeface="Calibri"/>
+              </a:rPr>
+              <a:t>mal</a:t>
+            </a:r>
+            <a:r>
+              <a:rPr sz="1300" b="0" i="0">
+                <a:solidFill>
+                  <a:srgbClr val="333333"/>
+                </a:solidFill>
+                <a:latin typeface="Calibri"/>
+              </a:rPr>
+              <a:t>: borra del reporte a los duenos sin mascotas, y el ranking deja de cuadrar con el total de clientes de la clinica. Mas rapido devolviendo otra cosa no es optimizar.</a:t>
+            </a:r>
+          </a:p>
+        </p:txBody>
+      </p:sp>
+      <p:sp>
+        <p:nvSpPr>
+          <p:cNvPr id="7" name="TextBox 6"/>
           <p:cNvSpPr txBox="1"/>
           <p:nvPr/>
         </p:nvSpPr>
@@ -9614,7 +12647,7 @@
         <p:spPr>
           <a:xfrm>
             <a:off x="0" y="0"/>
-            <a:ext cx="12191695" cy="960120"/>
+            <a:ext cx="12191695" cy="1170432"/>
           </a:xfrm>
           <a:prstGeom prst="rect">
             <a:avLst/>
@@ -9656,7 +12689,7 @@
         </p:nvSpPr>
         <p:spPr>
           <a:xfrm>
-            <a:off x="0" y="960120"/>
+            <a:off x="0" y="1170432"/>
             <a:ext cx="12191695" cy="41148"/>
           </a:xfrm>
           <a:prstGeom prst="rect">
@@ -9700,7 +12733,7 @@
         <p:spPr>
           <a:xfrm>
             <a:off x="457200" y="164592"/>
-            <a:ext cx="11277295" cy="502920"/>
+            <a:ext cx="11277295" cy="384048"/>
           </a:xfrm>
           <a:prstGeom prst="rect">
             <a:avLst/>
@@ -9720,7 +12753,7 @@
                 </a:solidFill>
                 <a:latin typeface="Calibri"/>
               </a:rPr>
-              <a:t>Taller PI VetCare — contexto / por que importa</a:t>
+              <a:t>Optimizar no cambia el resultado: como se prueba</a:t>
             </a:r>
           </a:p>
         </p:txBody>
@@ -9733,8 +12766,42 @@
         </p:nvSpPr>
         <p:spPr>
           <a:xfrm>
-            <a:off x="457200" y="1170432"/>
-            <a:ext cx="11277295" cy="5230368"/>
+            <a:off x="457200" y="566928"/>
+            <a:ext cx="11277295" cy="411480"/>
+          </a:xfrm>
+          <a:prstGeom prst="rect">
+            <a:avLst/>
+          </a:prstGeom>
+          <a:noFill/>
+        </p:spPr>
+        <p:txBody>
+          <a:bodyPr wrap="square">
+            <a:spAutoFit/>
+          </a:bodyPr>
+          <a:lstStyle/>
+          <a:p>
+            <a:r>
+              <a:rPr sz="1400" b="0" i="0">
+                <a:solidFill>
+                  <a:srgbClr val="B8D8EE"/>
+                </a:solidFill>
+                <a:latin typeface="Calibri"/>
+              </a:rPr>
+              <a:t>Vale puntos dos veces: los dos «COUNT(*)» de la pregunta 1 y el «EXCEPT» de la pregunta 3</a:t>
+            </a:r>
+          </a:p>
+        </p:txBody>
+      </p:sp>
+      <p:sp>
+        <p:nvSpPr>
+          <p:cNvPr id="6" name="TextBox 5"/>
+          <p:cNvSpPr txBox="1"/>
+          <p:nvPr/>
+        </p:nvSpPr>
+        <p:spPr>
+          <a:xfrm>
+            <a:off x="457200" y="1380744"/>
+            <a:ext cx="11277295" cy="5020056"/>
           </a:xfrm>
           <a:prstGeom prst="rect">
             <a:avLst/>
@@ -9753,7 +12820,7 @@
               </a:spcAft>
             </a:pPr>
             <a:r>
-              <a:rPr sz="1600" b="0" i="0">
+              <a:rPr sz="1300" b="0" i="0">
                 <a:solidFill>
                   <a:srgbClr val="333333"/>
                 </a:solidFill>
@@ -9762,22 +12829,58 @@
               <a:t>–   </a:t>
             </a:r>
             <a:r>
-              <a:rPr sz="1600" b="1" i="0">
-                <a:solidFill>
-                  <a:srgbClr val="333333"/>
-                </a:solidFill>
-                <a:latin typeface="Calibri"/>
-              </a:rPr>
-              <a:t>Por qué importa al PI:</a:t>
-            </a:r>
-            <a:r>
-              <a:rPr sz="1600" b="0" i="0">
-                <a:solidFill>
-                  <a:srgbClr val="333333"/>
-                </a:solidFill>
-                <a:latin typeface="Calibri"/>
-              </a:rPr>
-              <a:t> optimizar el propio DDL.</a:t>
+              <a:rPr sz="1300" b="1" i="0">
+                <a:solidFill>
+                  <a:srgbClr val="333333"/>
+                </a:solidFill>
+                <a:latin typeface="Calibri"/>
+              </a:rPr>
+              <a:t>La regla.</a:t>
+            </a:r>
+            <a:r>
+              <a:rPr sz="1300" b="0" i="0">
+                <a:solidFill>
+                  <a:srgbClr val="333333"/>
+                </a:solidFill>
+                <a:latin typeface="Calibri"/>
+              </a:rPr>
+              <a:t> Correccion y tiempo son ejes </a:t>
+            </a:r>
+            <a:r>
+              <a:rPr sz="1300" b="1" i="0">
+                <a:solidFill>
+                  <a:srgbClr val="333333"/>
+                </a:solidFill>
+                <a:latin typeface="Calibri"/>
+              </a:rPr>
+              <a:t>independientes</a:t>
+            </a:r>
+            <a:r>
+              <a:rPr sz="1300" b="0" i="0">
+                <a:solidFill>
+                  <a:srgbClr val="333333"/>
+                </a:solidFill>
+                <a:latin typeface="Calibri"/>
+              </a:rPr>
+              <a:t>. Si la version DESPUES devuelve algo distinto, no se optimizo nada: se rompio la consulta, y se rompio </a:t>
+            </a:r>
+            <a:r>
+              <a:rPr sz="1300" b="1" i="0">
+                <a:solidFill>
+                  <a:srgbClr val="333333"/>
+                </a:solidFill>
+                <a:latin typeface="Calibri"/>
+              </a:rPr>
+              <a:t>sin avisar</a:t>
+            </a:r>
+            <a:r>
+              <a:rPr sz="1300" b="0" i="0">
+                <a:solidFill>
+                  <a:srgbClr val="333333"/>
+                </a:solidFill>
+                <a:latin typeface="Calibri"/>
+              </a:rPr>
+              <a:t>, porque ningun motor va a lanzar un error por eso.</a:t>
             </a:r>
           </a:p>
           <a:p>
@@ -9787,20 +12890,230 @@
               </a:spcAft>
             </a:pPr>
             <a:r>
-              <a:rPr sz="1600" b="0" i="0">
-                <a:solidFill>
-                  <a:srgbClr val="333333"/>
-                </a:solidFill>
-                <a:latin typeface="Calibri"/>
-              </a:rPr>
-              <a:t>–   Reescribir y justificar, no solo decir lento.</a:t>
-            </a:r>
-          </a:p>
-        </p:txBody>
-      </p:sp>
-      <p:sp>
-        <p:nvSpPr>
-          <p:cNvPr id="6" name="TextBox 5"/>
+              <a:rPr sz="1300" b="0" i="0">
+                <a:solidFill>
+                  <a:srgbClr val="333333"/>
+                </a:solidFill>
+                <a:latin typeface="Calibri"/>
+              </a:rPr>
+              <a:t>–   </a:t>
+            </a:r>
+            <a:r>
+              <a:rPr sz="1300" b="1" i="0">
+                <a:solidFill>
+                  <a:srgbClr val="333333"/>
+                </a:solidFill>
+                <a:latin typeface="Calibri"/>
+              </a:rPr>
+              <a:t>Prueba 1, para una consulta con filtro: los dos «COUNT(*)».</a:t>
+            </a:r>
+            <a:r>
+              <a:rPr sz="1300" b="0" i="0">
+                <a:solidFill>
+                  <a:srgbClr val="333333"/>
+                </a:solidFill>
+                <a:latin typeface="Calibri"/>
+              </a:rPr>
+              <a:t> Se envuelve cada version y se comparan los conteos en la </a:t>
+            </a:r>
+            <a:r>
+              <a:rPr sz="1300" b="1" i="0">
+                <a:solidFill>
+                  <a:srgbClr val="333333"/>
+                </a:solidFill>
+                <a:latin typeface="Calibri"/>
+              </a:rPr>
+              <a:t>misma corrida</a:t>
+            </a:r>
+            <a:r>
+              <a:rPr sz="1300" b="0" i="0">
+                <a:solidFill>
+                  <a:srgbClr val="333333"/>
+                </a:solidFill>
+                <a:latin typeface="Calibri"/>
+              </a:rPr>
+              <a:t>. En la agenda del 2026-03-10 las dos tienen que decir </a:t>
+            </a:r>
+            <a:r>
+              <a:rPr sz="1300" b="1" i="0">
+                <a:solidFill>
+                  <a:srgbClr val="333333"/>
+                </a:solidFill>
+                <a:latin typeface="Calibri"/>
+              </a:rPr>
+              <a:t>91</a:t>
+            </a:r>
+            <a:r>
+              <a:rPr sz="1300" b="0" i="0">
+                <a:solidFill>
+                  <a:srgbClr val="333333"/>
+                </a:solidFill>
+                <a:latin typeface="Calibri"/>
+              </a:rPr>
+              <a:t>. Un conteo distinto es la respuesta equivocada, no una version mas rapida.</a:t>
+            </a:r>
+          </a:p>
+          <a:p>
+            <a:pPr>
+              <a:spcAft>
+                <a:spcPts val="800"/>
+              </a:spcAft>
+            </a:pPr>
+            <a:r>
+              <a:rPr sz="1300" b="0" i="0">
+                <a:solidFill>
+                  <a:srgbClr val="333333"/>
+                </a:solidFill>
+                <a:latin typeface="Calibri"/>
+              </a:rPr>
+              <a:t>–   </a:t>
+            </a:r>
+            <a:r>
+              <a:rPr sz="1300" b="1" i="0">
+                <a:solidFill>
+                  <a:srgbClr val="333333"/>
+                </a:solidFill>
+                <a:latin typeface="Calibri"/>
+              </a:rPr>
+              <a:t>Prueba 2, para conjuntos completos: «EXCEPT» en los DOS sentidos.</a:t>
+            </a:r>
+            <a:r>
+              <a:rPr sz="1300" b="0" i="0">
+                <a:solidFill>
+                  <a:srgbClr val="333333"/>
+                </a:solidFill>
+                <a:latin typeface="Calibri"/>
+              </a:rPr>
+              <a:t> «A EXCEPT B» devuelve lo que esta en A y no en B. Que salga vacio </a:t>
+            </a:r>
+            <a:r>
+              <a:rPr sz="1300" b="1" i="0">
+                <a:solidFill>
+                  <a:srgbClr val="333333"/>
+                </a:solidFill>
+                <a:latin typeface="Calibri"/>
+              </a:rPr>
+              <a:t>no</a:t>
+            </a:r>
+            <a:r>
+              <a:rPr sz="1300" b="0" i="0">
+                <a:solidFill>
+                  <a:srgbClr val="333333"/>
+                </a:solidFill>
+                <a:latin typeface="Calibri"/>
+              </a:rPr>
+              <a:t> prueba la igualdad: B puede tener filas de mas. Se corren las dos direcciones unidas con «UNION ALL» y se exige </a:t>
+            </a:r>
+            <a:r>
+              <a:rPr sz="1300" b="1" i="0">
+                <a:solidFill>
+                  <a:srgbClr val="333333"/>
+                </a:solidFill>
+                <a:latin typeface="Calibri"/>
+              </a:rPr>
+              <a:t>cero filas</a:t>
+            </a:r>
+            <a:r>
+              <a:rPr sz="1300" b="0" i="0">
+                <a:solidFill>
+                  <a:srgbClr val="333333"/>
+                </a:solidFill>
+                <a:latin typeface="Calibri"/>
+              </a:rPr>
+              <a:t>.</a:t>
+            </a:r>
+          </a:p>
+          <a:p>
+            <a:pPr>
+              <a:spcAft>
+                <a:spcPts val="800"/>
+              </a:spcAft>
+            </a:pPr>
+            <a:r>
+              <a:rPr sz="1300" b="0" i="0">
+                <a:solidFill>
+                  <a:srgbClr val="333333"/>
+                </a:solidFill>
+                <a:latin typeface="Calibri"/>
+              </a:rPr>
+              <a:t>–   </a:t>
+            </a:r>
+            <a:r>
+              <a:rPr sz="1300" b="1" i="0">
+                <a:solidFill>
+                  <a:srgbClr val="333333"/>
+                </a:solidFill>
+                <a:latin typeface="Calibri"/>
+              </a:rPr>
+              <a:t>Sin «LIMIT» en la prueba.</a:t>
+            </a:r>
+            <a:r>
+              <a:rPr sz="1300" b="0" i="0">
+                <a:solidFill>
+                  <a:srgbClr val="333333"/>
+                </a:solidFill>
+                <a:latin typeface="Calibri"/>
+              </a:rPr>
+              <a:t> Comparar solo las primeras 20 filas deja fuera justamente las que fallan — las de los duenos con cero citas, que es donde «COUNT(*)» miente. El «LIMIT» va en la consulta que se entrega, no en la que verifica.</a:t>
+            </a:r>
+          </a:p>
+          <a:p>
+            <a:pPr>
+              <a:spcAft>
+                <a:spcPts val="800"/>
+              </a:spcAft>
+            </a:pPr>
+            <a:r>
+              <a:rPr sz="1300" b="0" i="0">
+                <a:solidFill>
+                  <a:srgbClr val="333333"/>
+                </a:solidFill>
+                <a:latin typeface="Calibri"/>
+              </a:rPr>
+              <a:t>–   </a:t>
+            </a:r>
+            <a:r>
+              <a:rPr sz="1300" b="1" i="0">
+                <a:solidFill>
+                  <a:srgbClr val="333333"/>
+                </a:solidFill>
+                <a:latin typeface="Calibri"/>
+              </a:rPr>
+              <a:t>Que NO sirve como prueba.</a:t>
+            </a:r>
+            <a:r>
+              <a:rPr sz="1300" b="0" i="0">
+                <a:solidFill>
+                  <a:srgbClr val="333333"/>
+                </a:solidFill>
+                <a:latin typeface="Calibri"/>
+              </a:rPr>
+              <a:t> «Se ve igual», «trae mas o menos lo mismo» o mirar la primera pantalla de resultados. La equivalencia se afirma con una consulta cuyo resultado </a:t>
+            </a:r>
+            <a:r>
+              <a:rPr sz="1300" b="1" i="0">
+                <a:solidFill>
+                  <a:srgbClr val="333333"/>
+                </a:solidFill>
+                <a:latin typeface="Calibri"/>
+              </a:rPr>
+              <a:t>se conoce de antemano</a:t>
+            </a:r>
+            <a:r>
+              <a:rPr sz="1300" b="0" i="0">
+                <a:solidFill>
+                  <a:srgbClr val="333333"/>
+                </a:solidFill>
+                <a:latin typeface="Calibri"/>
+              </a:rPr>
+              <a:t>: un numero que coincide o un conjunto vacio.</a:t>
+            </a:r>
+          </a:p>
+        </p:txBody>
+      </p:sp>
+      <p:sp>
+        <p:nvSpPr>
+          <p:cNvPr id="7" name="TextBox 6"/>
           <p:cNvSpPr txBox="1"/>
           <p:nvPr/>
         </p:nvSpPr>
@@ -9974,7 +13287,7 @@
                 </a:solidFill>
                 <a:latin typeface="Calibri"/>
               </a:rPr>
-              <a:t>Taller PI VetCare — objetivo y criterios</a:t>
+              <a:t>Demo del dia</a:t>
             </a:r>
           </a:p>
         </p:txBody>
@@ -10007,7 +13320,7 @@
               </a:spcAft>
             </a:pPr>
             <a:r>
-              <a:rPr sz="1500" b="0" i="0">
+              <a:rPr sz="1600" b="0" i="0">
                 <a:solidFill>
                   <a:srgbClr val="333333"/>
                 </a:solidFill>
@@ -10016,22 +13329,22 @@
               <a:t>–   </a:t>
             </a:r>
             <a:r>
-              <a:rPr sz="1500" b="1" i="0">
-                <a:solidFill>
-                  <a:srgbClr val="333333"/>
-                </a:solidFill>
-                <a:latin typeface="Calibri"/>
-              </a:rPr>
-              <a:t>Objetivo:</a:t>
-            </a:r>
-            <a:r>
-              <a:rPr sz="1500" b="0" i="0">
-                <a:solidFill>
-                  <a:srgbClr val="333333"/>
-                </a:solidFill>
-                <a:latin typeface="Calibri"/>
-              </a:rPr>
-              <a:t> Pareja consultas antes/después + justificación.</a:t>
+              <a:rPr sz="1600" b="1" i="0">
+                <a:solidFill>
+                  <a:srgbClr val="333333"/>
+                </a:solidFill>
+                <a:latin typeface="Calibri"/>
+              </a:rPr>
+              <a:t>Herramienta:</a:t>
+            </a:r>
+            <a:r>
+              <a:rPr sz="1600" b="0" i="0">
+                <a:solidFill>
+                  <a:srgbClr val="333333"/>
+                </a:solidFill>
+                <a:latin typeface="Calibri"/>
+              </a:rPr>
+              <a:t> ExamLab (PostgreSQL) + Google Docs</a:t>
             </a:r>
           </a:p>
           <a:p>
@@ -10041,7 +13354,7 @@
               </a:spcAft>
             </a:pPr>
             <a:r>
-              <a:rPr sz="1500" b="0" i="0">
+              <a:rPr sz="1600" b="0" i="0">
                 <a:solidFill>
                   <a:srgbClr val="333333"/>
                 </a:solidFill>
@@ -10050,22 +13363,22 @@
               <a:t>–   </a:t>
             </a:r>
             <a:r>
-              <a:rPr sz="1500" b="1" i="0">
-                <a:solidFill>
-                  <a:srgbClr val="333333"/>
-                </a:solidFill>
-                <a:latin typeface="Calibri"/>
-              </a:rPr>
-              <a:t>Exito:</a:t>
-            </a:r>
-            <a:r>
-              <a:rPr sz="1500" b="0" i="0">
-                <a:solidFill>
-                  <a:srgbClr val="333333"/>
-                </a:solidFill>
-                <a:latin typeface="Calibri"/>
-              </a:rPr>
-              <a:t> Consulta real PI.</a:t>
+              <a:rPr sz="1600" b="1" i="0">
+                <a:solidFill>
+                  <a:srgbClr val="333333"/>
+                </a:solidFill>
+                <a:latin typeface="Calibri"/>
+              </a:rPr>
+              <a:t>Demo:</a:t>
+            </a:r>
+            <a:r>
+              <a:rPr sz="1600" b="0" i="0">
+                <a:solidFill>
+                  <a:srgbClr val="333333"/>
+                </a:solidFill>
+                <a:latin typeface="Calibri"/>
+              </a:rPr>
+              <a:t> Consulta pesada citas+mascotas+duenos -&gt; version filtrada y proyectada, con EXPLAIN ANALYZE antes y despues, en ExamLab.</a:t>
             </a:r>
           </a:p>
           <a:p>
@@ -10075,31 +13388,13 @@
               </a:spcAft>
             </a:pPr>
             <a:r>
-              <a:rPr sz="1500" b="0" i="0">
-                <a:solidFill>
-                  <a:srgbClr val="333333"/>
-                </a:solidFill>
-                <a:latin typeface="Calibri"/>
-              </a:rPr>
-              <a:t>–   </a:t>
-            </a:r>
-            <a:r>
-              <a:rPr sz="1500" b="1" i="0">
-                <a:solidFill>
-                  <a:srgbClr val="333333"/>
-                </a:solidFill>
-                <a:latin typeface="Calibri"/>
-              </a:rPr>
-              <a:t>Exito:</a:t>
-            </a:r>
-            <a:r>
-              <a:rPr sz="1500" b="0" i="0">
-                <a:solidFill>
-                  <a:srgbClr val="333333"/>
-                </a:solidFill>
-                <a:latin typeface="Calibri"/>
-              </a:rPr>
-              <a:t> Version después.</a:t>
+              <a:rPr sz="1600" b="0" i="0">
+                <a:solidFill>
+                  <a:srgbClr val="333333"/>
+                </a:solidFill>
+                <a:latin typeface="Calibri"/>
+              </a:rPr>
+              <a:t>–   Sigan el mismo dominio VetCare (no inventen otro caso).</a:t>
             </a:r>
           </a:p>
           <a:p>
@@ -10109,65 +13404,13 @@
               </a:spcAft>
             </a:pPr>
             <a:r>
-              <a:rPr sz="1500" b="0" i="0">
-                <a:solidFill>
-                  <a:srgbClr val="333333"/>
-                </a:solidFill>
-                <a:latin typeface="Calibri"/>
-              </a:rPr>
-              <a:t>–   </a:t>
-            </a:r>
-            <a:r>
-              <a:rPr sz="1500" b="1" i="0">
-                <a:solidFill>
-                  <a:srgbClr val="333333"/>
-                </a:solidFill>
-                <a:latin typeface="Calibri"/>
-              </a:rPr>
-              <a:t>Exito:</a:t>
-            </a:r>
-            <a:r>
-              <a:rPr sz="1500" b="0" i="0">
-                <a:solidFill>
-                  <a:srgbClr val="333333"/>
-                </a:solidFill>
-                <a:latin typeface="Calibri"/>
-              </a:rPr>
-              <a:t> 3 cambios.</a:t>
-            </a:r>
-          </a:p>
-          <a:p>
-            <a:pPr>
-              <a:spcAft>
-                <a:spcPts val="800"/>
-              </a:spcAft>
-            </a:pPr>
-            <a:r>
-              <a:rPr sz="1500" b="0" i="0">
-                <a:solidFill>
-                  <a:srgbClr val="333333"/>
-                </a:solidFill>
-                <a:latin typeface="Calibri"/>
-              </a:rPr>
-              <a:t>–   </a:t>
-            </a:r>
-            <a:r>
-              <a:rPr sz="1500" b="1" i="0">
-                <a:solidFill>
-                  <a:srgbClr val="333333"/>
-                </a:solidFill>
-                <a:latin typeface="Calibri"/>
-              </a:rPr>
-              <a:t>Exito:</a:t>
-            </a:r>
-            <a:r>
-              <a:rPr sz="1500" b="0" i="0">
-                <a:solidFill>
-                  <a:srgbClr val="333333"/>
-                </a:solidFill>
-                <a:latin typeface="Calibri"/>
-              </a:rPr>
-              <a:t> Archivos SQL.</a:t>
+              <a:rPr sz="1600" b="0" i="0">
+                <a:solidFill>
+                  <a:srgbClr val="333333"/>
+                </a:solidFill>
+                <a:latin typeface="Calibri"/>
+              </a:rPr>
+              <a:t>–   Al final de la demo: dejar enlace/script compartible al grupo.</a:t>
             </a:r>
           </a:p>
         </p:txBody>

--- a/Bases de Datos II/Clases/Clase 6 - Optimizacion de consultas/Presentacion.pptx
+++ b/Bases de Datos II/Clases/Clase 6 - Optimizacion de consultas/Presentacion.pptx
@@ -4279,7 +4279,7 @@
               </a:spcAft>
             </a:pPr>
             <a:r>
-              <a:rPr sz="1600" b="0" i="0">
+              <a:rPr sz="2000" b="0" i="0">
                 <a:solidFill>
                   <a:srgbClr val="333333"/>
                 </a:solidFill>
@@ -4288,7 +4288,7 @@
               <a:t>–   </a:t>
             </a:r>
             <a:r>
-              <a:rPr sz="1600" b="1" i="0">
+              <a:rPr sz="2000" b="1" i="0">
                 <a:solidFill>
                   <a:srgbClr val="333333"/>
                 </a:solidFill>
@@ -4297,7 +4297,7 @@
               <a:t>Por qué importa al PI:</a:t>
             </a:r>
             <a:r>
-              <a:rPr sz="1600" b="0" i="0">
+              <a:rPr sz="2000" b="0" i="0">
                 <a:solidFill>
                   <a:srgbClr val="333333"/>
                 </a:solidFill>
@@ -4306,7 +4306,7 @@
               <a:t> la rúbrica pide un análisis de plan de ejecución, y un análisis es un </a:t>
             </a:r>
             <a:r>
-              <a:rPr sz="1600" b="1" i="0">
+              <a:rPr sz="2000" b="1" i="0">
                 <a:solidFill>
                   <a:srgbClr val="333333"/>
                 </a:solidFill>
@@ -4315,7 +4315,7 @@
               <a:t>antes y un después medidos</a:t>
             </a:r>
             <a:r>
-              <a:rPr sz="1600" b="0" i="0">
+              <a:rPr sz="2000" b="0" i="0">
                 <a:solidFill>
                   <a:srgbClr val="333333"/>
                 </a:solidFill>
@@ -4331,7 +4331,7 @@
               </a:spcAft>
             </a:pPr>
             <a:r>
-              <a:rPr sz="1600" b="0" i="0">
+              <a:rPr sz="2000" b="0" i="0">
                 <a:solidFill>
                   <a:srgbClr val="333333"/>
                 </a:solidFill>
@@ -4340,7 +4340,7 @@
               <a:t>–   La pantalla de agenda de Huellitas se abre </a:t>
             </a:r>
             <a:r>
-              <a:rPr sz="1600" b="1" i="0">
+              <a:rPr sz="2000" b="1" i="0">
                 <a:solidFill>
                   <a:srgbClr val="333333"/>
                 </a:solidFill>
@@ -4349,7 +4349,7 @@
               <a:t>decenas de veces al día</a:t>
             </a:r>
             <a:r>
-              <a:rPr sz="1600" b="0" i="0">
+              <a:rPr sz="2000" b="0" i="0">
                 <a:solidFill>
                   <a:srgbClr val="333333"/>
                 </a:solidFill>
@@ -4365,7 +4365,7 @@
               </a:spcAft>
             </a:pPr>
             <a:r>
-              <a:rPr sz="1600" b="0" i="0">
+              <a:rPr sz="2000" b="0" i="0">
                 <a:solidFill>
                   <a:srgbClr val="333333"/>
                 </a:solidFill>
@@ -4374,7 +4374,7 @@
               <a:t>–   Optimizar y </a:t>
             </a:r>
             <a:r>
-              <a:rPr sz="1600" b="1" i="0">
+              <a:rPr sz="2000" b="1" i="0">
                 <a:solidFill>
                   <a:srgbClr val="333333"/>
                 </a:solidFill>
@@ -4383,7 +4383,7 @@
               <a:t>romper</a:t>
             </a:r>
             <a:r>
-              <a:rPr sz="1600" b="0" i="0">
+              <a:rPr sz="2000" b="0" i="0">
                 <a:solidFill>
                   <a:srgbClr val="333333"/>
                 </a:solidFill>
@@ -4392,7 +4392,7 @@
               <a:t> se parecen mucho: las dos versiones se ven bien y una devuelve otra cosa. Por eso hoy la </a:t>
             </a:r>
             <a:r>
-              <a:rPr sz="1600" b="1" i="0">
+              <a:rPr sz="2000" b="1" i="0">
                 <a:solidFill>
                   <a:srgbClr val="333333"/>
                 </a:solidFill>
@@ -4401,7 +4401,7 @@
               <a:t>prueba de equivalencia</a:t>
             </a:r>
             <a:r>
-              <a:rPr sz="1600" b="0" i="0">
+              <a:rPr sz="2000" b="0" i="0">
                 <a:solidFill>
                   <a:srgbClr val="333333"/>
                 </a:solidFill>
@@ -4621,7 +4621,7 @@
               </a:spcAft>
             </a:pPr>
             <a:r>
-              <a:rPr sz="1500" b="0" i="0">
+              <a:rPr sz="1900" b="0" i="0">
                 <a:solidFill>
                   <a:srgbClr val="333333"/>
                 </a:solidFill>
@@ -4630,7 +4630,7 @@
               <a:t>–   </a:t>
             </a:r>
             <a:r>
-              <a:rPr sz="1500" b="1" i="0">
+              <a:rPr sz="1900" b="1" i="0">
                 <a:solidFill>
                   <a:srgbClr val="333333"/>
                 </a:solidFill>
@@ -4639,7 +4639,7 @@
               <a:t>Objetivo:</a:t>
             </a:r>
             <a:r>
-              <a:rPr sz="1500" b="0" i="0">
+              <a:rPr sz="1900" b="0" i="0">
                 <a:solidFill>
                   <a:srgbClr val="333333"/>
                 </a:solidFill>
@@ -4655,7 +4655,7 @@
               </a:spcAft>
             </a:pPr>
             <a:r>
-              <a:rPr sz="1500" b="0" i="0">
+              <a:rPr sz="1900" b="0" i="0">
                 <a:solidFill>
                   <a:srgbClr val="333333"/>
                 </a:solidFill>
@@ -4664,7 +4664,7 @@
               <a:t>–   </a:t>
             </a:r>
             <a:r>
-              <a:rPr sz="1500" b="1" i="0">
+              <a:rPr sz="1900" b="1" i="0">
                 <a:solidFill>
                   <a:srgbClr val="333333"/>
                 </a:solidFill>
@@ -4673,7 +4673,7 @@
               <a:t>Exito:</a:t>
             </a:r>
             <a:r>
-              <a:rPr sz="1500" b="0" i="0">
+              <a:rPr sz="1900" b="0" i="0">
                 <a:solidFill>
                   <a:srgbClr val="333333"/>
                 </a:solidFill>
@@ -4682,7 +4682,7 @@
               <a:t> La agenda del día con sus </a:t>
             </a:r>
             <a:r>
-              <a:rPr sz="1500" b="1" i="0">
+              <a:rPr sz="1900" b="1" i="0">
                 <a:solidFill>
                   <a:srgbClr val="333333"/>
                 </a:solidFill>
@@ -4691,7 +4691,7 @@
               <a:t>4 antipatrones</a:t>
             </a:r>
             <a:r>
-              <a:rPr sz="1500" b="0" i="0">
+              <a:rPr sz="1900" b="0" i="0">
                 <a:solidFill>
                   <a:srgbClr val="333333"/>
                 </a:solidFill>
@@ -4707,7 +4707,7 @@
               </a:spcAft>
             </a:pPr>
             <a:r>
-              <a:rPr sz="1500" b="0" i="0">
+              <a:rPr sz="1900" b="0" i="0">
                 <a:solidFill>
                   <a:srgbClr val="333333"/>
                 </a:solidFill>
@@ -4716,7 +4716,7 @@
               <a:t>–   </a:t>
             </a:r>
             <a:r>
-              <a:rPr sz="1500" b="1" i="0">
+              <a:rPr sz="1900" b="1" i="0">
                 <a:solidFill>
                   <a:srgbClr val="333333"/>
                 </a:solidFill>
@@ -4725,7 +4725,7 @@
               <a:t>Exito:</a:t>
             </a:r>
             <a:r>
-              <a:rPr sz="1500" b="0" i="0">
+              <a:rPr sz="1900" b="0" i="0">
                 <a:solidFill>
                   <a:srgbClr val="333333"/>
                 </a:solidFill>
@@ -4734,7 +4734,7 @@
               <a:t> Las dos versiones devuelven las mismas </a:t>
             </a:r>
             <a:r>
-              <a:rPr sz="1500" b="1" i="0">
+              <a:rPr sz="1900" b="1" i="0">
                 <a:solidFill>
                   <a:srgbClr val="333333"/>
                 </a:solidFill>
@@ -4743,7 +4743,7 @@
               <a:t>91 filas</a:t>
             </a:r>
             <a:r>
-              <a:rPr sz="1500" b="0" i="0">
+              <a:rPr sz="1900" b="0" i="0">
                 <a:solidFill>
                   <a:srgbClr val="333333"/>
                 </a:solidFill>
@@ -4759,7 +4759,7 @@
               </a:spcAft>
             </a:pPr>
             <a:r>
-              <a:rPr sz="1500" b="0" i="0">
+              <a:rPr sz="1900" b="0" i="0">
                 <a:solidFill>
                   <a:srgbClr val="333333"/>
                 </a:solidFill>
@@ -4768,7 +4768,7 @@
               <a:t>–   </a:t>
             </a:r>
             <a:r>
-              <a:rPr sz="1500" b="1" i="0">
+              <a:rPr sz="1900" b="1" i="0">
                 <a:solidFill>
                   <a:srgbClr val="333333"/>
                 </a:solidFill>
@@ -4777,7 +4777,7 @@
               <a:t>Exito:</a:t>
             </a:r>
             <a:r>
-              <a:rPr sz="1500" b="0" i="0">
+              <a:rPr sz="1900" b="0" i="0">
                 <a:solidFill>
                   <a:srgbClr val="333333"/>
                 </a:solidFill>
@@ -4786,7 +4786,7 @@
               <a:t> Tres planes leídos: «EXPLAIN (ANALYZE, BUFFERS)» del antes y del después, y «EXPLAIN ANALYZE» del después con «LIMIT 50». Las </a:t>
             </a:r>
             <a:r>
-              <a:rPr sz="1500" b="1" i="0">
+              <a:rPr sz="1900" b="1" i="0">
                 <a:solidFill>
                   <a:srgbClr val="333333"/>
                 </a:solidFill>
@@ -4795,7 +4795,7 @@
               <a:t>tres</a:t>
             </a:r>
             <a:r>
-              <a:rPr sz="1500" b="0" i="0">
+              <a:rPr sz="1900" b="0" i="0">
                 <a:solidFill>
                   <a:srgbClr val="333333"/>
                 </a:solidFill>
@@ -4811,7 +4811,7 @@
               </a:spcAft>
             </a:pPr>
             <a:r>
-              <a:rPr sz="1500" b="0" i="0">
+              <a:rPr sz="1900" b="0" i="0">
                 <a:solidFill>
                   <a:srgbClr val="333333"/>
                 </a:solidFill>
@@ -4820,7 +4820,7 @@
               <a:t>–   </a:t>
             </a:r>
             <a:r>
-              <a:rPr sz="1500" b="1" i="0">
+              <a:rPr sz="1900" b="1" i="0">
                 <a:solidFill>
                   <a:srgbClr val="333333"/>
                 </a:solidFill>
@@ -4829,7 +4829,7 @@
               <a:t>Exito:</a:t>
             </a:r>
             <a:r>
-              <a:rPr sz="1500" b="0" i="0">
+              <a:rPr sz="1900" b="0" i="0">
                 <a:solidFill>
                   <a:srgbClr val="333333"/>
                 </a:solidFill>
@@ -4838,7 +4838,7 @@
               <a:t> La subconsulta correlacionada convertida en </a:t>
             </a:r>
             <a:r>
-              <a:rPr sz="1500" b="1" i="0">
+              <a:rPr sz="1900" b="1" i="0">
                 <a:solidFill>
                   <a:srgbClr val="333333"/>
                 </a:solidFill>
@@ -4847,7 +4847,7 @@
               <a:t>una sola pasada</a:t>
             </a:r>
             <a:r>
-              <a:rPr sz="1500" b="0" i="0">
+              <a:rPr sz="1900" b="0" i="0">
                 <a:solidFill>
                   <a:srgbClr val="333333"/>
                 </a:solidFill>
@@ -4856,7 +4856,7 @@
               <a:t>: «LEFT JOIN» + «GROUP BY» + </a:t>
             </a:r>
             <a:r>
-              <a:rPr sz="1500" b="1" i="0">
+              <a:rPr sz="1900" b="1" i="0">
                 <a:solidFill>
                   <a:srgbClr val="333333"/>
                 </a:solidFill>
@@ -4865,7 +4865,7 @@
               <a:t>«COUNT(c.id_cita)»</a:t>
             </a:r>
             <a:r>
-              <a:rPr sz="1500" b="0" i="0">
+              <a:rPr sz="1900" b="0" i="0">
                 <a:solidFill>
                   <a:srgbClr val="333333"/>
                 </a:solidFill>
@@ -4881,7 +4881,7 @@
               </a:spcAft>
             </a:pPr>
             <a:r>
-              <a:rPr sz="1500" b="0" i="0">
+              <a:rPr sz="1900" b="0" i="0">
                 <a:solidFill>
                   <a:srgbClr val="333333"/>
                 </a:solidFill>
@@ -4890,7 +4890,7 @@
               <a:t>–   </a:t>
             </a:r>
             <a:r>
-              <a:rPr sz="1500" b="1" i="0">
+              <a:rPr sz="1900" b="1" i="0">
                 <a:solidFill>
                   <a:srgbClr val="333333"/>
                 </a:solidFill>
@@ -4899,7 +4899,7 @@
               <a:t>Exito:</a:t>
             </a:r>
             <a:r>
-              <a:rPr sz="1500" b="0" i="0">
+              <a:rPr sz="1900" b="0" i="0">
                 <a:solidFill>
                   <a:srgbClr val="333333"/>
                 </a:solidFill>
@@ -4908,7 +4908,7 @@
               <a:t> La equivalencia del ranking probada con «EXCEPT» en los </a:t>
             </a:r>
             <a:r>
-              <a:rPr sz="1500" b="1" i="0">
+              <a:rPr sz="1900" b="1" i="0">
                 <a:solidFill>
                   <a:srgbClr val="333333"/>
                 </a:solidFill>
@@ -4917,7 +4917,7 @@
               <a:t>dos sentidos</a:t>
             </a:r>
             <a:r>
-              <a:rPr sz="1500" b="0" i="0">
+              <a:rPr sz="1900" b="0" i="0">
                 <a:solidFill>
                   <a:srgbClr val="333333"/>
                 </a:solidFill>
@@ -4933,7 +4933,7 @@
               </a:spcAft>
             </a:pPr>
             <a:r>
-              <a:rPr sz="1500" b="0" i="0">
+              <a:rPr sz="1900" b="0" i="0">
                 <a:solidFill>
                   <a:srgbClr val="333333"/>
                 </a:solidFill>
@@ -4942,7 +4942,7 @@
               <a:t>–   </a:t>
             </a:r>
             <a:r>
-              <a:rPr sz="1500" b="1" i="0">
+              <a:rPr sz="1900" b="1" i="0">
                 <a:solidFill>
                   <a:srgbClr val="333333"/>
                 </a:solidFill>
@@ -4951,7 +4951,7 @@
               <a:t>Exito:</a:t>
             </a:r>
             <a:r>
-              <a:rPr sz="1500" b="0" i="0">
+              <a:rPr sz="1900" b="0" i="0">
                 <a:solidFill>
                   <a:srgbClr val="333333"/>
                 </a:solidFill>
@@ -4967,7 +4967,7 @@
               </a:spcAft>
             </a:pPr>
             <a:r>
-              <a:rPr sz="1500" b="0" i="0">
+              <a:rPr sz="1900" b="0" i="0">
                 <a:solidFill>
                   <a:srgbClr val="333333"/>
                 </a:solidFill>
@@ -4976,7 +4976,7 @@
               <a:t>–   </a:t>
             </a:r>
             <a:r>
-              <a:rPr sz="1500" b="1" i="0">
+              <a:rPr sz="1900" b="1" i="0">
                 <a:solidFill>
                   <a:srgbClr val="333333"/>
                 </a:solidFill>
@@ -4985,7 +4985,7 @@
               <a:t>Exito:</a:t>
             </a:r>
             <a:r>
-              <a:rPr sz="1500" b="0" i="0">
+              <a:rPr sz="1900" b="0" i="0">
                 <a:solidFill>
                   <a:srgbClr val="333333"/>
                 </a:solidFill>
@@ -5205,7 +5205,7 @@
               </a:spcAft>
             </a:pPr>
             <a:r>
-              <a:rPr sz="1600" b="0" i="0">
+              <a:rPr sz="2000" b="0" i="0">
                 <a:solidFill>
                   <a:srgbClr val="333333"/>
                 </a:solidFill>
@@ -5214,7 +5214,7 @@
               <a:t>–   La base de este taller </a:t>
             </a:r>
             <a:r>
-              <a:rPr sz="1600" b="1" i="0">
+              <a:rPr sz="2000" b="1" i="0">
                 <a:solidFill>
                   <a:srgbClr val="333333"/>
                 </a:solidFill>
@@ -5223,7 +5223,7 @@
               <a:t>sí tiene volumen</a:t>
             </a:r>
             <a:r>
-              <a:rPr sz="1600" b="0" i="0">
+              <a:rPr sz="2000" b="0" i="0">
                 <a:solidFill>
                   <a:srgbClr val="333333"/>
                 </a:solidFill>
@@ -5232,7 +5232,7 @@
               <a:t>: 2.006 duenos, 5.008 mascotas, 16 veterinarios y </a:t>
             </a:r>
             <a:r>
-              <a:rPr sz="1600" b="1" i="0">
+              <a:rPr sz="2000" b="1" i="0">
                 <a:solidFill>
                   <a:srgbClr val="333333"/>
                 </a:solidFill>
@@ -5241,7 +5241,7 @@
               <a:t>30.010 citas</a:t>
             </a:r>
             <a:r>
-              <a:rPr sz="1600" b="0" i="0">
+              <a:rPr sz="2000" b="0" i="0">
                 <a:solidFill>
                   <a:srgbClr val="333333"/>
                 </a:solidFill>
@@ -5257,7 +5257,7 @@
               </a:spcAft>
             </a:pPr>
             <a:r>
-              <a:rPr sz="1600" b="0" i="0">
+              <a:rPr sz="2000" b="0" i="0">
                 <a:solidFill>
                   <a:srgbClr val="333333"/>
                 </a:solidFill>
@@ -5266,7 +5266,7 @@
               <a:t>–   «ANALYZE» ya está corrido y </a:t>
             </a:r>
             <a:r>
-              <a:rPr sz="1600" b="1" i="0">
+              <a:rPr sz="2000" b="1" i="0">
                 <a:solidFill>
                   <a:srgbClr val="333333"/>
                 </a:solidFill>
@@ -5275,7 +5275,7 @@
               <a:t>no hay ningún índice</a:t>
             </a:r>
             <a:r>
-              <a:rPr sz="1600" b="0" i="0">
+              <a:rPr sz="2000" b="0" i="0">
                 <a:solidFill>
                   <a:srgbClr val="333333"/>
                 </a:solidFill>
@@ -5291,7 +5291,7 @@
               </a:spcAft>
             </a:pPr>
             <a:r>
-              <a:rPr sz="1600" b="0" i="0">
+              <a:rPr sz="2000" b="0" i="0">
                 <a:solidFill>
                   <a:srgbClr val="333333"/>
                 </a:solidFill>
@@ -5300,7 +5300,7 @@
               <a:t>–   </a:t>
             </a:r>
             <a:r>
-              <a:rPr sz="1600" b="1" i="0">
+              <a:rPr sz="2000" b="1" i="0">
                 <a:solidFill>
                   <a:srgbClr val="333333"/>
                 </a:solidFill>
@@ -5309,7 +5309,7 @@
               <a:t>Motor:</a:t>
             </a:r>
             <a:r>
-              <a:rPr sz="1600" b="0" i="0">
+              <a:rPr sz="2000" b="0" i="0">
                 <a:solidFill>
                   <a:srgbClr val="333333"/>
                 </a:solidFill>
@@ -5325,7 +5325,7 @@
               </a:spcAft>
             </a:pPr>
             <a:r>
-              <a:rPr sz="1600" b="0" i="0">
+              <a:rPr sz="2000" b="0" i="0">
                 <a:solidFill>
                   <a:srgbClr val="333333"/>
                 </a:solidFill>
@@ -5334,7 +5334,7 @@
               <a:t>–   Los </a:t>
             </a:r>
             <a:r>
-              <a:rPr sz="1600" b="1" i="0">
+              <a:rPr sz="2000" b="1" i="0">
                 <a:solidFill>
                   <a:srgbClr val="333333"/>
                 </a:solidFill>
@@ -5343,7 +5343,7 @@
               <a:t>seis duenos con cero citas</a:t>
             </a:r>
             <a:r>
-              <a:rPr sz="1600" b="0" i="0">
+              <a:rPr sz="2000" b="0" i="0">
                 <a:solidFill>
                   <a:srgbClr val="333333"/>
                 </a:solidFill>
@@ -5359,7 +5359,7 @@
               </a:spcAft>
             </a:pPr>
             <a:r>
-              <a:rPr sz="1600" b="0" i="0">
+              <a:rPr sz="2000" b="0" i="0">
                 <a:solidFill>
                   <a:srgbClr val="333333"/>
                 </a:solidFill>
@@ -5368,7 +5368,7 @@
               <a:t>–   </a:t>
             </a:r>
             <a:r>
-              <a:rPr sz="1600" b="1" i="0">
+              <a:rPr sz="2000" b="1" i="0">
                 <a:solidFill>
                   <a:srgbClr val="333333"/>
                 </a:solidFill>
@@ -5377,7 +5377,7 @@
               <a:t>Aviso:</a:t>
             </a:r>
             <a:r>
-              <a:rPr sz="1600" b="0" i="0">
+              <a:rPr sz="2000" b="0" i="0">
                 <a:solidFill>
                   <a:srgbClr val="333333"/>
                 </a:solidFill>
@@ -5386,7 +5386,7 @@
               <a:t> la versión ANTES de la pregunta 3 se ejecuta 2.006 veces y puede tardar de varios segundos a más de un minuto. </a:t>
             </a:r>
             <a:r>
-              <a:rPr sz="1600" b="1" i="0">
+              <a:rPr sz="2000" b="1" i="0">
                 <a:solidFill>
                   <a:srgbClr val="333333"/>
                 </a:solidFill>
@@ -8261,7 +8261,7 @@
               </a:spcAft>
             </a:pPr>
             <a:r>
-              <a:rPr sz="1600" b="0" i="0">
+              <a:rPr sz="2000" b="0" i="0">
                 <a:solidFill>
                   <a:srgbClr val="333333"/>
                 </a:solidFill>
@@ -8270,7 +8270,7 @@
               <a:t>–   </a:t>
             </a:r>
             <a:r>
-              <a:rPr sz="1600" b="1" i="0">
+              <a:rPr sz="2000" b="1" i="0">
                 <a:solidFill>
                   <a:srgbClr val="333333"/>
                 </a:solidFill>
@@ -8279,7 +8279,7 @@
               <a:t>Entregable:</a:t>
             </a:r>
             <a:r>
-              <a:rPr sz="1600" b="0" i="0">
+              <a:rPr sz="2000" b="0" i="0">
                 <a:solidFill>
                   <a:srgbClr val="333333"/>
                 </a:solidFill>
@@ -8295,7 +8295,7 @@
               </a:spcAft>
             </a:pPr>
             <a:r>
-              <a:rPr sz="1600" b="0" i="0">
+              <a:rPr sz="2000" b="0" i="0">
                 <a:solidFill>
                   <a:srgbClr val="333333"/>
                 </a:solidFill>
@@ -8311,7 +8311,7 @@
               </a:spcAft>
             </a:pPr>
             <a:r>
-              <a:rPr sz="1600" b="0" i="0">
+              <a:rPr sz="2000" b="0" i="0">
                 <a:solidFill>
                   <a:srgbClr val="333333"/>
                 </a:solidFill>
@@ -8327,7 +8327,7 @@
               </a:spcAft>
             </a:pPr>
             <a:r>
-              <a:rPr sz="1600" b="0" i="0">
+              <a:rPr sz="2000" b="0" i="0">
                 <a:solidFill>
                   <a:srgbClr val="333333"/>
                 </a:solidFill>
@@ -8343,7 +8343,7 @@
               </a:spcAft>
             </a:pPr>
             <a:r>
-              <a:rPr sz="1600" b="0" i="0">
+              <a:rPr sz="2000" b="0" i="0">
                 <a:solidFill>
                   <a:srgbClr val="333333"/>
                 </a:solidFill>
@@ -8352,7 +8352,7 @@
               <a:t>–   </a:t>
             </a:r>
             <a:r>
-              <a:rPr sz="1600" b="1" i="0">
+              <a:rPr sz="2000" b="1" i="0">
                 <a:solidFill>
                   <a:srgbClr val="333333"/>
                 </a:solidFill>
@@ -8361,7 +8361,7 @@
               <a:t>Entrega en ExamLab</a:t>
             </a:r>
             <a:r>
-              <a:rPr sz="1600" b="0" i="0">
+              <a:rPr sz="2000" b="0" i="0">
                 <a:solidFill>
                   <a:srgbClr val="333333"/>
                 </a:solidFill>
@@ -9408,7 +9408,7 @@
               </a:spcAft>
             </a:pPr>
             <a:r>
-              <a:rPr sz="1600" b="0" i="0">
+              <a:rPr sz="2000" b="0" i="0">
                 <a:solidFill>
                   <a:srgbClr val="333333"/>
                 </a:solidFill>
@@ -9417,7 +9417,7 @@
               <a:t>–   </a:t>
             </a:r>
             <a:r>
-              <a:rPr sz="1600" b="1" i="0">
+              <a:rPr sz="2000" b="1" i="0">
                 <a:solidFill>
                   <a:srgbClr val="333333"/>
                 </a:solidFill>
@@ -9426,7 +9426,7 @@
               <a:t>Hoy avanzamos el PI en:</a:t>
             </a:r>
             <a:r>
-              <a:rPr sz="1600" b="0" i="0">
+              <a:rPr sz="2000" b="0" i="0">
                 <a:solidFill>
                   <a:srgbClr val="333333"/>
                 </a:solidFill>
@@ -9442,7 +9442,7 @@
               </a:spcAft>
             </a:pPr>
             <a:r>
-              <a:rPr sz="1600" b="0" i="0">
+              <a:rPr sz="2000" b="0" i="0">
                 <a:solidFill>
                   <a:srgbClr val="333333"/>
                 </a:solidFill>
@@ -9451,7 +9451,7 @@
               <a:t>–   Herramienta: </a:t>
             </a:r>
             <a:r>
-              <a:rPr sz="1600" b="1" i="0">
+              <a:rPr sz="2000" b="1" i="0">
                 <a:solidFill>
                   <a:srgbClr val="333333"/>
                 </a:solidFill>
@@ -9460,7 +9460,7 @@
               <a:t>ExamLab (PostgreSQL) + Google Docs</a:t>
             </a:r>
             <a:r>
-              <a:rPr sz="1600" b="0" i="0">
+              <a:rPr sz="2000" b="0" i="0">
                 <a:solidFill>
                   <a:srgbClr val="333333"/>
                 </a:solidFill>
@@ -9469,7 +9469,7 @@
               <a:t> · Bloque </a:t>
             </a:r>
             <a:r>
-              <a:rPr sz="1600" b="1" i="0">
+              <a:rPr sz="2000" b="1" i="0">
                 <a:solidFill>
                   <a:srgbClr val="333333"/>
                 </a:solidFill>
@@ -9478,7 +9478,7 @@
               <a:t>120 min</a:t>
             </a:r>
             <a:r>
-              <a:rPr sz="1600" b="0" i="0">
+              <a:rPr sz="2000" b="0" i="0">
                 <a:solidFill>
                   <a:srgbClr val="333333"/>
                 </a:solidFill>
@@ -9494,7 +9494,7 @@
               </a:spcAft>
             </a:pPr>
             <a:r>
-              <a:rPr sz="1600" b="0" i="0">
+              <a:rPr sz="2000" b="0" i="0">
                 <a:solidFill>
                   <a:srgbClr val="333333"/>
                 </a:solidFill>
@@ -9503,7 +9503,7 @@
               <a:t>–   </a:t>
             </a:r>
             <a:r>
-              <a:rPr sz="1600" b="1" i="0">
+              <a:rPr sz="2000" b="1" i="0">
                 <a:solidFill>
                   <a:srgbClr val="333333"/>
                 </a:solidFill>
@@ -9512,7 +9512,7 @@
               <a:t>Entregable de hoy:</a:t>
             </a:r>
             <a:r>
-              <a:rPr sz="1600" b="0" i="0">
+              <a:rPr sz="2000" b="0" i="0">
                 <a:solidFill>
                   <a:srgbClr val="333333"/>
                 </a:solidFill>
@@ -9528,7 +9528,7 @@
               </a:spcAft>
             </a:pPr>
             <a:r>
-              <a:rPr sz="1600" b="0" i="0">
+              <a:rPr sz="2000" b="0" i="0">
                 <a:solidFill>
                   <a:srgbClr val="333333"/>
                 </a:solidFill>
@@ -9544,7 +9544,7 @@
               </a:spcAft>
             </a:pPr>
             <a:r>
-              <a:rPr sz="1600" b="0" i="0">
+              <a:rPr sz="2000" b="0" i="0">
                 <a:solidFill>
                   <a:srgbClr val="333333"/>
                 </a:solidFill>
@@ -9560,7 +9560,7 @@
               </a:spcAft>
             </a:pPr>
             <a:r>
-              <a:rPr sz="1600" b="0" i="0">
+              <a:rPr sz="2000" b="0" i="0">
                 <a:solidFill>
                   <a:srgbClr val="333333"/>
                 </a:solidFill>
@@ -9884,7 +9884,7 @@
         <p:spPr>
           <a:xfrm>
             <a:off x="502920" y="2587752"/>
-            <a:ext cx="2164019" cy="2560320"/>
+            <a:ext cx="2164019" cy="3310128"/>
           </a:xfrm>
           <a:prstGeom prst="rect">
             <a:avLst/>
@@ -9999,7 +9999,7 @@
         <p:spPr>
           <a:xfrm>
             <a:off x="2758379" y="2587752"/>
-            <a:ext cx="2164019" cy="2560320"/>
+            <a:ext cx="2164019" cy="3310128"/>
           </a:xfrm>
           <a:prstGeom prst="rect">
             <a:avLst/>
@@ -10114,7 +10114,7 @@
         <p:spPr>
           <a:xfrm>
             <a:off x="5013838" y="2587752"/>
-            <a:ext cx="2164019" cy="2560320"/>
+            <a:ext cx="2164019" cy="3310128"/>
           </a:xfrm>
           <a:prstGeom prst="rect">
             <a:avLst/>
@@ -10229,7 +10229,7 @@
         <p:spPr>
           <a:xfrm>
             <a:off x="7269297" y="2587752"/>
-            <a:ext cx="2164019" cy="2560320"/>
+            <a:ext cx="2164019" cy="3310128"/>
           </a:xfrm>
           <a:prstGeom prst="rect">
             <a:avLst/>
@@ -10344,7 +10344,7 @@
         <p:spPr>
           <a:xfrm>
             <a:off x="9524756" y="2587752"/>
-            <a:ext cx="2164019" cy="2560320"/>
+            <a:ext cx="2164019" cy="3310128"/>
           </a:xfrm>
           <a:prstGeom prst="rect">
             <a:avLst/>
@@ -10378,8 +10378,8 @@
         </p:nvSpPr>
         <p:spPr>
           <a:xfrm>
-            <a:off x="457200" y="5943600"/>
-            <a:ext cx="11277295" cy="365760"/>
+            <a:off x="457200" y="5806440"/>
+            <a:ext cx="11277295" cy="640080"/>
           </a:xfrm>
           <a:prstGeom prst="rect">
             <a:avLst/>
@@ -10632,7 +10632,7 @@
               </a:spcAft>
             </a:pPr>
             <a:r>
-              <a:rPr sz="1500" b="0" i="0">
+              <a:rPr sz="2000" b="0" i="0">
                 <a:solidFill>
                   <a:srgbClr val="333333"/>
                 </a:solidFill>
@@ -10648,7 +10648,7 @@
               </a:spcAft>
             </a:pPr>
             <a:r>
-              <a:rPr sz="1500" b="0" i="0">
+              <a:rPr sz="2000" b="0" i="0">
                 <a:solidFill>
                   <a:srgbClr val="333333"/>
                 </a:solidFill>
@@ -10664,7 +10664,7 @@
               </a:spcAft>
             </a:pPr>
             <a:r>
-              <a:rPr sz="1500" b="0" i="0">
+              <a:rPr sz="2000" b="0" i="0">
                 <a:solidFill>
                   <a:srgbClr val="333333"/>
                 </a:solidFill>
@@ -10680,7 +10680,7 @@
               </a:spcAft>
             </a:pPr>
             <a:r>
-              <a:rPr sz="1500" b="0" i="0">
+              <a:rPr sz="2000" b="0" i="0">
                 <a:solidFill>
                   <a:srgbClr val="333333"/>
                 </a:solidFill>
@@ -10696,7 +10696,7 @@
               </a:spcAft>
             </a:pPr>
             <a:r>
-              <a:rPr sz="1500" b="0" i="0">
+              <a:rPr sz="2000" b="0" i="0">
                 <a:solidFill>
                   <a:srgbClr val="333333"/>
                 </a:solidFill>
@@ -11662,7 +11662,7 @@
               </a:spcAft>
             </a:pPr>
             <a:r>
-              <a:rPr sz="1300" b="0" i="0">
+              <a:rPr sz="1900" b="0" i="0">
                 <a:solidFill>
                   <a:srgbClr val="333333"/>
                 </a:solidFill>
@@ -11671,7 +11671,7 @@
               <a:t>–   </a:t>
             </a:r>
             <a:r>
-              <a:rPr sz="1300" b="1" i="0">
+              <a:rPr sz="1900" b="1" i="0">
                 <a:solidFill>
                   <a:srgbClr val="333333"/>
                 </a:solidFill>
@@ -11680,7 +11680,7 @@
               <a:t>El orden de lectura.</a:t>
             </a:r>
             <a:r>
-              <a:rPr sz="1300" b="0" i="0">
+              <a:rPr sz="1900" b="0" i="0">
                 <a:solidFill>
                   <a:srgbClr val="333333"/>
                 </a:solidFill>
@@ -11689,7 +11689,7 @@
               <a:t> El plan </a:t>
             </a:r>
             <a:r>
-              <a:rPr sz="1300" b="1" i="0">
+              <a:rPr sz="1900" b="1" i="0">
                 <a:solidFill>
                   <a:srgbClr val="333333"/>
                 </a:solidFill>
@@ -11698,7 +11698,7 @@
               <a:t>no</a:t>
             </a:r>
             <a:r>
-              <a:rPr sz="1300" b="0" i="0">
+              <a:rPr sz="1900" b="0" i="0">
                 <a:solidFill>
                   <a:srgbClr val="333333"/>
                 </a:solidFill>
@@ -11707,7 +11707,7 @@
               <a:t> es una lista de pasos de arriba hacia abajo: es un arbol. Los nodos </a:t>
             </a:r>
             <a:r>
-              <a:rPr sz="1300" b="1" i="0">
+              <a:rPr sz="1900" b="1" i="0">
                 <a:solidFill>
                   <a:srgbClr val="333333"/>
                 </a:solidFill>
@@ -11716,7 +11716,7 @@
               <a:t>mas indentados son las hojas</a:t>
             </a:r>
             <a:r>
-              <a:rPr sz="1300" b="0" i="0">
+              <a:rPr sz="1900" b="0" i="0">
                 <a:solidFill>
                   <a:srgbClr val="333333"/>
                 </a:solidFill>
@@ -11725,7 +11725,7 @@
               <a:t> y se ejecutan primero; cada nodo consume las filas de sus hijos. La </a:t>
             </a:r>
             <a:r>
-              <a:rPr sz="1300" b="1" i="0">
+              <a:rPr sz="1900" b="1" i="0">
                 <a:solidFill>
                   <a:srgbClr val="333333"/>
                 </a:solidFill>
@@ -11734,7 +11734,7 @@
               <a:t>primera linea impresa es la ULTIMA operacion</a:t>
             </a:r>
             <a:r>
-              <a:rPr sz="1300" b="0" i="0">
+              <a:rPr sz="1900" b="0" i="0">
                 <a:solidFill>
                   <a:srgbClr val="333333"/>
                 </a:solidFill>
@@ -11750,7 +11750,7 @@
               </a:spcAft>
             </a:pPr>
             <a:r>
-              <a:rPr sz="1300" b="0" i="0">
+              <a:rPr sz="1900" b="0" i="0">
                 <a:solidFill>
                   <a:srgbClr val="333333"/>
                 </a:solidFill>
@@ -11759,7 +11759,7 @@
               <a:t>–   </a:t>
             </a:r>
             <a:r>
-              <a:rPr sz="1300" b="1" i="0">
+              <a:rPr sz="1900" b="1" i="0">
                 <a:solidFill>
                   <a:srgbClr val="333333"/>
                 </a:solidFill>
@@ -11768,7 +11768,7 @@
               <a:t>Los cuatro campos.</a:t>
             </a:r>
             <a:r>
-              <a:rPr sz="1300" b="0" i="0">
+              <a:rPr sz="1900" b="0" i="0">
                 <a:solidFill>
                   <a:srgbClr val="333333"/>
                 </a:solidFill>
@@ -11777,7 +11777,7 @@
               <a:t> «cost=270.00..4821.50» son arranque y total en una unidad </a:t>
             </a:r>
             <a:r>
-              <a:rPr sz="1300" b="1" i="0">
+              <a:rPr sz="1900" b="1" i="0">
                 <a:solidFill>
                   <a:srgbClr val="333333"/>
                 </a:solidFill>
@@ -11786,7 +11786,7 @@
               <a:t>relativa</a:t>
             </a:r>
             <a:r>
-              <a:rPr sz="1300" b="0" i="0">
+              <a:rPr sz="1900" b="0" i="0">
                 <a:solidFill>
                   <a:srgbClr val="333333"/>
                 </a:solidFill>
@@ -11795,7 +11795,7 @@
               <a:t> (1.0 = leer una pagina de 8 KB), </a:t>
             </a:r>
             <a:r>
-              <a:rPr sz="1300" b="1" i="0">
+              <a:rPr sz="1900" b="1" i="0">
                 <a:solidFill>
                   <a:srgbClr val="333333"/>
                 </a:solidFill>
@@ -11804,7 +11804,7 @@
               <a:t>no</a:t>
             </a:r>
             <a:r>
-              <a:rPr sz="1300" b="0" i="0">
+              <a:rPr sz="1900" b="0" i="0">
                 <a:solidFill>
                   <a:srgbClr val="333333"/>
                 </a:solidFill>
@@ -11813,7 +11813,7 @@
               <a:t> milisegundos; «rows=» son las filas que el motor </a:t>
             </a:r>
             <a:r>
-              <a:rPr sz="1300" b="1" i="0">
+              <a:rPr sz="1900" b="1" i="0">
                 <a:solidFill>
                   <a:srgbClr val="333333"/>
                 </a:solidFill>
@@ -11822,7 +11822,7 @@
               <a:t>estima</a:t>
             </a:r>
             <a:r>
-              <a:rPr sz="1300" b="0" i="0">
+              <a:rPr sz="1900" b="0" i="0">
                 <a:solidFill>
                   <a:srgbClr val="333333"/>
                 </a:solidFill>
@@ -11831,7 +11831,7 @@
               <a:t>; «width=» el ancho de la fila en bytes; «loops=» cuantas </a:t>
             </a:r>
             <a:r>
-              <a:rPr sz="1300" b="1" i="0">
+              <a:rPr sz="1900" b="1" i="0">
                 <a:solidFill>
                   <a:srgbClr val="333333"/>
                 </a:solidFill>
@@ -11840,7 +11840,7 @@
               <a:t>veces se repitio</a:t>
             </a:r>
             <a:r>
-              <a:rPr sz="1300" b="0" i="0">
+              <a:rPr sz="1900" b="0" i="0">
                 <a:solidFill>
                   <a:srgbClr val="333333"/>
                 </a:solidFill>
@@ -11856,7 +11856,7 @@
               </a:spcAft>
             </a:pPr>
             <a:r>
-              <a:rPr sz="1300" b="0" i="0">
+              <a:rPr sz="1900" b="0" i="0">
                 <a:solidFill>
                   <a:srgbClr val="333333"/>
                 </a:solidFill>
@@ -11865,7 +11865,7 @@
               <a:t>–   </a:t>
             </a:r>
             <a:r>
-              <a:rPr sz="1300" b="1" i="0">
+              <a:rPr sz="1900" b="1" i="0">
                 <a:solidFill>
                   <a:srgbClr val="333333"/>
                 </a:solidFill>
@@ -11874,7 +11874,7 @@
               <a:t>«EXPLAIN» estima, «EXPLAIN ANALYZE» ejecuta.</a:t>
             </a:r>
             <a:r>
-              <a:rPr sz="1300" b="0" i="0">
+              <a:rPr sz="1900" b="0" i="0">
                 <a:solidFill>
                   <a:srgbClr val="333333"/>
                 </a:solidFill>
@@ -11883,7 +11883,7 @@
               <a:t> El segundo agrega «actual time=», «actual rows=» y el «Execution Time» final. Y ejecuta </a:t>
             </a:r>
             <a:r>
-              <a:rPr sz="1300" b="1" i="0">
+              <a:rPr sz="1900" b="1" i="0">
                 <a:solidFill>
                   <a:srgbClr val="333333"/>
                 </a:solidFill>
@@ -11892,7 +11892,7 @@
               <a:t>de verdad</a:t>
             </a:r>
             <a:r>
-              <a:rPr sz="1300" b="0" i="0">
+              <a:rPr sz="1900" b="0" i="0">
                 <a:solidFill>
                   <a:srgbClr val="333333"/>
                 </a:solidFill>
@@ -11908,7 +11908,7 @@
               </a:spcAft>
             </a:pPr>
             <a:r>
-              <a:rPr sz="1300" b="0" i="0">
+              <a:rPr sz="1900" b="0" i="0">
                 <a:solidFill>
                   <a:srgbClr val="333333"/>
                 </a:solidFill>
@@ -11917,7 +11917,7 @@
               <a:t>–   </a:t>
             </a:r>
             <a:r>
-              <a:rPr sz="1300" b="1" i="0">
+              <a:rPr sz="1900" b="1" i="0">
                 <a:solidFill>
                   <a:srgbClr val="333333"/>
                 </a:solidFill>
@@ -11926,7 +11926,7 @@
               <a:t>Estimado contra real: la senal.</a:t>
             </a:r>
             <a:r>
-              <a:rPr sz="1300" b="0" i="0">
+              <a:rPr sz="1900" b="0" i="0">
                 <a:solidFill>
                   <a:srgbClr val="333333"/>
                 </a:solidFill>
@@ -11935,7 +11935,7 @@
               <a:t> Una divergencia de 2 veces es normal; de </a:t>
             </a:r>
             <a:r>
-              <a:rPr sz="1300" b="1" i="0">
+              <a:rPr sz="1900" b="1" i="0">
                 <a:solidFill>
                   <a:srgbClr val="333333"/>
                 </a:solidFill>
@@ -11944,7 +11944,7 @@
               <a:t>10 veces o mas</a:t>
             </a:r>
             <a:r>
-              <a:rPr sz="1300" b="0" i="0">
+              <a:rPr sz="1900" b="0" i="0">
                 <a:solidFill>
                   <a:srgbClr val="333333"/>
                 </a:solidFill>
@@ -11960,7 +11960,7 @@
               </a:spcAft>
             </a:pPr>
             <a:r>
-              <a:rPr sz="1300" b="0" i="0">
+              <a:rPr sz="1900" b="0" i="0">
                 <a:solidFill>
                   <a:srgbClr val="333333"/>
                 </a:solidFill>
@@ -11969,7 +11969,7 @@
               <a:t>–   </a:t>
             </a:r>
             <a:r>
-              <a:rPr sz="1300" b="1" i="0">
+              <a:rPr sz="1900" b="1" i="0">
                 <a:solidFill>
                   <a:srgbClr val="333333"/>
                 </a:solidFill>
@@ -11978,7 +11978,7 @@
               <a:t>El nodo mas costoso, sin trampa.</a:t>
             </a:r>
             <a:r>
-              <a:rPr sz="1300" b="0" i="0">
+              <a:rPr sz="1900" b="0" i="0">
                 <a:solidFill>
                   <a:srgbClr val="333333"/>
                 </a:solidFill>
@@ -11987,7 +11987,7 @@
               <a:t> El tiempo de un nodo </a:t>
             </a:r>
             <a:r>
-              <a:rPr sz="1300" b="1" i="0">
+              <a:rPr sz="1900" b="1" i="0">
                 <a:solidFill>
                   <a:srgbClr val="333333"/>
                 </a:solidFill>
@@ -11996,7 +11996,7 @@
               <a:t>incluye el de sus hijos</a:t>
             </a:r>
             <a:r>
-              <a:rPr sz="1300" b="0" i="0">
+              <a:rPr sz="1900" b="0" i="0">
                 <a:solidFill>
                   <a:srgbClr val="333333"/>
                 </a:solidFill>
@@ -12005,7 +12005,7 @@
               <a:t>, y «actual time» es </a:t>
             </a:r>
             <a:r>
-              <a:rPr sz="1300" b="1" i="0">
+              <a:rPr sz="1900" b="1" i="0">
                 <a:solidFill>
                   <a:srgbClr val="333333"/>
                 </a:solidFill>
@@ -12014,7 +12014,7 @@
               <a:t>por vuelta</a:t>
             </a:r>
             <a:r>
-              <a:rPr sz="1300" b="0" i="0">
+              <a:rPr sz="1900" b="0" i="0">
                 <a:solidFill>
                   <a:srgbClr val="333333"/>
                 </a:solidFill>
@@ -12268,7 +12268,7 @@
               </a:spcAft>
             </a:pPr>
             <a:r>
-              <a:rPr sz="1300" b="0" i="0">
+              <a:rPr sz="1800" b="0" i="0">
                 <a:solidFill>
                   <a:srgbClr val="333333"/>
                 </a:solidFill>
@@ -12277,7 +12277,7 @@
               <a:t>–   </a:t>
             </a:r>
             <a:r>
-              <a:rPr sz="1300" b="1" i="0">
+              <a:rPr sz="1800" b="1" i="0">
                 <a:solidFill>
                   <a:srgbClr val="333333"/>
                 </a:solidFill>
@@ -12286,7 +12286,7 @@
               <a:t>Que la hace correlacionada.</a:t>
             </a:r>
             <a:r>
-              <a:rPr sz="1300" b="0" i="0">
+              <a:rPr sz="1800" b="0" i="0">
                 <a:solidFill>
                   <a:srgbClr val="333333"/>
                 </a:solidFill>
@@ -12295,7 +12295,7 @@
               <a:t> La subconsulta esta en la </a:t>
             </a:r>
             <a:r>
-              <a:rPr sz="1300" b="1" i="0">
+              <a:rPr sz="1800" b="1" i="0">
                 <a:solidFill>
                   <a:srgbClr val="333333"/>
                 </a:solidFill>
@@ -12304,7 +12304,7 @@
               <a:t>lista de columnas</a:t>
             </a:r>
             <a:r>
-              <a:rPr sz="1300" b="0" i="0">
+              <a:rPr sz="1800" b="0" i="0">
                 <a:solidFill>
                   <a:srgbClr val="333333"/>
                 </a:solidFill>
@@ -12313,7 +12313,7 @@
               <a:t> y menciona una columna del exterior («WHERE m.id_dueno = d.id_dueno»). No se puede calcular una vez y reusar: depende de la fila que se este mirando, asi que el motor </a:t>
             </a:r>
             <a:r>
-              <a:rPr sz="1300" b="1" i="0">
+              <a:rPr sz="1800" b="1" i="0">
                 <a:solidFill>
                   <a:srgbClr val="333333"/>
                 </a:solidFill>
@@ -12322,7 +12322,7 @@
               <a:t>la ejecuta una vez por fila</a:t>
             </a:r>
             <a:r>
-              <a:rPr sz="1300" b="0" i="0">
+              <a:rPr sz="1800" b="0" i="0">
                 <a:solidFill>
                   <a:srgbClr val="333333"/>
                 </a:solidFill>
@@ -12338,7 +12338,7 @@
               </a:spcAft>
             </a:pPr>
             <a:r>
-              <a:rPr sz="1300" b="0" i="0">
+              <a:rPr sz="1800" b="0" i="0">
                 <a:solidFill>
                   <a:srgbClr val="333333"/>
                 </a:solidFill>
@@ -12347,7 +12347,7 @@
               <a:t>–   </a:t>
             </a:r>
             <a:r>
-              <a:rPr sz="1300" b="1" i="0">
+              <a:rPr sz="1800" b="1" i="0">
                 <a:solidFill>
                   <a:srgbClr val="333333"/>
                 </a:solidFill>
@@ -12356,7 +12356,7 @@
               <a:t>El numero que lo delata en el plan.</a:t>
             </a:r>
             <a:r>
-              <a:rPr sz="1300" b="0" i="0">
+              <a:rPr sz="1800" b="0" i="0">
                 <a:solidFill>
                   <a:srgbClr val="333333"/>
                 </a:solidFill>
@@ -12365,7 +12365,7 @@
               <a:t> «EXPLAIN ANALYZE» muestra un nodo «SubPlan» con </a:t>
             </a:r>
             <a:r>
-              <a:rPr sz="1300" b="1" i="0">
+              <a:rPr sz="1800" b="1" i="0">
                 <a:solidFill>
                   <a:srgbClr val="333333"/>
                 </a:solidFill>
@@ -12374,7 +12374,7 @@
               <a:t>«loops=2006»</a:t>
             </a:r>
             <a:r>
-              <a:rPr sz="1300" b="0" i="0">
+              <a:rPr sz="1800" b="0" i="0">
                 <a:solidFill>
                   <a:srgbClr val="333333"/>
                 </a:solidFill>
@@ -12390,7 +12390,7 @@
               </a:spcAft>
             </a:pPr>
             <a:r>
-              <a:rPr sz="1300" b="0" i="0">
+              <a:rPr sz="1800" b="0" i="0">
                 <a:solidFill>
                   <a:srgbClr val="333333"/>
                 </a:solidFill>
@@ -12399,7 +12399,7 @@
               <a:t>–   </a:t>
             </a:r>
             <a:r>
-              <a:rPr sz="1300" b="1" i="0">
+              <a:rPr sz="1800" b="1" i="0">
                 <a:solidFill>
                   <a:srgbClr val="333333"/>
                 </a:solidFill>
@@ -12408,7 +12408,7 @@
               <a:t>La reescritura.</a:t>
             </a:r>
             <a:r>
-              <a:rPr sz="1300" b="0" i="0">
+              <a:rPr sz="1800" b="0" i="0">
                 <a:solidFill>
                   <a:srgbClr val="333333"/>
                 </a:solidFill>
@@ -12417,7 +12417,7 @@
               <a:t> «dueno LEFT JOIN mascota LEFT JOIN cita» + «GROUP BY d.id_dueno, d.nombre» + «COUNT(...)». El «SubPlan» desaparece y en su lugar queda un solo «HashAggregate»: </a:t>
             </a:r>
             <a:r>
-              <a:rPr sz="1300" b="1" i="0">
+              <a:rPr sz="1800" b="1" i="0">
                 <a:solidFill>
                   <a:srgbClr val="333333"/>
                 </a:solidFill>
@@ -12426,7 +12426,7 @@
               <a:t>una pasada</a:t>
             </a:r>
             <a:r>
-              <a:rPr sz="1300" b="0" i="0">
+              <a:rPr sz="1800" b="0" i="0">
                 <a:solidFill>
                   <a:srgbClr val="333333"/>
                 </a:solidFill>
@@ -12442,7 +12442,7 @@
               </a:spcAft>
             </a:pPr>
             <a:r>
-              <a:rPr sz="1300" b="0" i="0">
+              <a:rPr sz="1800" b="0" i="0">
                 <a:solidFill>
                   <a:srgbClr val="333333"/>
                 </a:solidFill>
@@ -12451,7 +12451,7 @@
               <a:t>–   </a:t>
             </a:r>
             <a:r>
-              <a:rPr sz="1300" b="1" i="0">
+              <a:rPr sz="1800" b="1" i="0">
                 <a:solidFill>
                   <a:srgbClr val="333333"/>
                 </a:solidFill>
@@ -12460,7 +12460,7 @@
               <a:t>«COUNT(c.id_cita)», nunca «COUNT(*)».</a:t>
             </a:r>
             <a:r>
-              <a:rPr sz="1300" b="0" i="0">
+              <a:rPr sz="1800" b="0" i="0">
                 <a:solidFill>
                   <a:srgbClr val="333333"/>
                 </a:solidFill>
@@ -12469,7 +12469,7 @@
               <a:t> El «LEFT JOIN» fabrica </a:t>
             </a:r>
             <a:r>
-              <a:rPr sz="1300" b="1" i="0">
+              <a:rPr sz="1800" b="1" i="0">
                 <a:solidFill>
                   <a:srgbClr val="333333"/>
                 </a:solidFill>
@@ -12478,7 +12478,7 @@
               <a:t>una fila llena de «NULL»</a:t>
             </a:r>
             <a:r>
-              <a:rPr sz="1300" b="0" i="0">
+              <a:rPr sz="1800" b="0" i="0">
                 <a:solidFill>
                   <a:srgbClr val="333333"/>
                 </a:solidFill>
@@ -12487,7 +12487,7 @@
               <a:t> por cada dueno sin citas. «COUNT(*)» cuenta filas y reporta </a:t>
             </a:r>
             <a:r>
-              <a:rPr sz="1300" b="1" i="0">
+              <a:rPr sz="1800" b="1" i="0">
                 <a:solidFill>
                   <a:srgbClr val="333333"/>
                 </a:solidFill>
@@ -12496,7 +12496,7 @@
               <a:t>1</a:t>
             </a:r>
             <a:r>
-              <a:rPr sz="1300" b="0" i="0">
+              <a:rPr sz="1800" b="0" i="0">
                 <a:solidFill>
                   <a:srgbClr val="333333"/>
                 </a:solidFill>
@@ -12505,7 +12505,7 @@
               <a:t>; «COUNT» de una columna ignora los «NULL» y reporta </a:t>
             </a:r>
             <a:r>
-              <a:rPr sz="1300" b="1" i="0">
+              <a:rPr sz="1800" b="1" i="0">
                 <a:solidFill>
                   <a:srgbClr val="333333"/>
                 </a:solidFill>
@@ -12514,7 +12514,7 @@
               <a:t>0</a:t>
             </a:r>
             <a:r>
-              <a:rPr sz="1300" b="0" i="0">
+              <a:rPr sz="1800" b="0" i="0">
                 <a:solidFill>
                   <a:srgbClr val="333333"/>
                 </a:solidFill>
@@ -12530,7 +12530,7 @@
               </a:spcAft>
             </a:pPr>
             <a:r>
-              <a:rPr sz="1300" b="0" i="0">
+              <a:rPr sz="1800" b="0" i="0">
                 <a:solidFill>
                   <a:srgbClr val="333333"/>
                 </a:solidFill>
@@ -12539,7 +12539,7 @@
               <a:t>–   </a:t>
             </a:r>
             <a:r>
-              <a:rPr sz="1300" b="1" i="0">
+              <a:rPr sz="1800" b="1" i="0">
                 <a:solidFill>
                   <a:srgbClr val="333333"/>
                 </a:solidFill>
@@ -12548,7 +12548,7 @@
               <a:t>Y «LEFT», no «INNER».</a:t>
             </a:r>
             <a:r>
-              <a:rPr sz="1300" b="0" i="0">
+              <a:rPr sz="1800" b="0" i="0">
                 <a:solidFill>
                   <a:srgbClr val="333333"/>
                 </a:solidFill>
@@ -12557,7 +12557,7 @@
               <a:t> Un «INNER JOIN» es mas rapido y esta </a:t>
             </a:r>
             <a:r>
-              <a:rPr sz="1300" b="1" i="0">
+              <a:rPr sz="1800" b="1" i="0">
                 <a:solidFill>
                   <a:srgbClr val="333333"/>
                 </a:solidFill>
@@ -12566,7 +12566,7 @@
               <a:t>mal</a:t>
             </a:r>
             <a:r>
-              <a:rPr sz="1300" b="0" i="0">
+              <a:rPr sz="1800" b="0" i="0">
                 <a:solidFill>
                   <a:srgbClr val="333333"/>
                 </a:solidFill>
@@ -12820,7 +12820,7 @@
               </a:spcAft>
             </a:pPr>
             <a:r>
-              <a:rPr sz="1300" b="0" i="0">
+              <a:rPr sz="1900" b="0" i="0">
                 <a:solidFill>
                   <a:srgbClr val="333333"/>
                 </a:solidFill>
@@ -12829,7 +12829,7 @@
               <a:t>–   </a:t>
             </a:r>
             <a:r>
-              <a:rPr sz="1300" b="1" i="0">
+              <a:rPr sz="1900" b="1" i="0">
                 <a:solidFill>
                   <a:srgbClr val="333333"/>
                 </a:solidFill>
@@ -12838,7 +12838,7 @@
               <a:t>La regla.</a:t>
             </a:r>
             <a:r>
-              <a:rPr sz="1300" b="0" i="0">
+              <a:rPr sz="1900" b="0" i="0">
                 <a:solidFill>
                   <a:srgbClr val="333333"/>
                 </a:solidFill>
@@ -12847,7 +12847,7 @@
               <a:t> Correccion y tiempo son ejes </a:t>
             </a:r>
             <a:r>
-              <a:rPr sz="1300" b="1" i="0">
+              <a:rPr sz="1900" b="1" i="0">
                 <a:solidFill>
                   <a:srgbClr val="333333"/>
                 </a:solidFill>
@@ -12856,7 +12856,7 @@
               <a:t>independientes</a:t>
             </a:r>
             <a:r>
-              <a:rPr sz="1300" b="0" i="0">
+              <a:rPr sz="1900" b="0" i="0">
                 <a:solidFill>
                   <a:srgbClr val="333333"/>
                 </a:solidFill>
@@ -12865,7 +12865,7 @@
               <a:t>. Si la version DESPUES devuelve algo distinto, no se optimizo nada: se rompio la consulta, y se rompio </a:t>
             </a:r>
             <a:r>
-              <a:rPr sz="1300" b="1" i="0">
+              <a:rPr sz="1900" b="1" i="0">
                 <a:solidFill>
                   <a:srgbClr val="333333"/>
                 </a:solidFill>
@@ -12874,7 +12874,7 @@
               <a:t>sin avisar</a:t>
             </a:r>
             <a:r>
-              <a:rPr sz="1300" b="0" i="0">
+              <a:rPr sz="1900" b="0" i="0">
                 <a:solidFill>
                   <a:srgbClr val="333333"/>
                 </a:solidFill>
@@ -12890,7 +12890,7 @@
               </a:spcAft>
             </a:pPr>
             <a:r>
-              <a:rPr sz="1300" b="0" i="0">
+              <a:rPr sz="1900" b="0" i="0">
                 <a:solidFill>
                   <a:srgbClr val="333333"/>
                 </a:solidFill>
@@ -12899,7 +12899,7 @@
               <a:t>–   </a:t>
             </a:r>
             <a:r>
-              <a:rPr sz="1300" b="1" i="0">
+              <a:rPr sz="1900" b="1" i="0">
                 <a:solidFill>
                   <a:srgbClr val="333333"/>
                 </a:solidFill>
@@ -12908,7 +12908,7 @@
               <a:t>Prueba 1, para una consulta con filtro: los dos «COUNT(*)».</a:t>
             </a:r>
             <a:r>
-              <a:rPr sz="1300" b="0" i="0">
+              <a:rPr sz="1900" b="0" i="0">
                 <a:solidFill>
                   <a:srgbClr val="333333"/>
                 </a:solidFill>
@@ -12917,7 +12917,7 @@
               <a:t> Se envuelve cada version y se comparan los conteos en la </a:t>
             </a:r>
             <a:r>
-              <a:rPr sz="1300" b="1" i="0">
+              <a:rPr sz="1900" b="1" i="0">
                 <a:solidFill>
                   <a:srgbClr val="333333"/>
                 </a:solidFill>
@@ -12926,7 +12926,7 @@
               <a:t>misma corrida</a:t>
             </a:r>
             <a:r>
-              <a:rPr sz="1300" b="0" i="0">
+              <a:rPr sz="1900" b="0" i="0">
                 <a:solidFill>
                   <a:srgbClr val="333333"/>
                 </a:solidFill>
@@ -12935,7 +12935,7 @@
               <a:t>. En la agenda del 2026-03-10 las dos tienen que decir </a:t>
             </a:r>
             <a:r>
-              <a:rPr sz="1300" b="1" i="0">
+              <a:rPr sz="1900" b="1" i="0">
                 <a:solidFill>
                   <a:srgbClr val="333333"/>
                 </a:solidFill>
@@ -12944,7 +12944,7 @@
               <a:t>91</a:t>
             </a:r>
             <a:r>
-              <a:rPr sz="1300" b="0" i="0">
+              <a:rPr sz="1900" b="0" i="0">
                 <a:solidFill>
                   <a:srgbClr val="333333"/>
                 </a:solidFill>
@@ -12960,7 +12960,7 @@
               </a:spcAft>
             </a:pPr>
             <a:r>
-              <a:rPr sz="1300" b="0" i="0">
+              <a:rPr sz="1900" b="0" i="0">
                 <a:solidFill>
                   <a:srgbClr val="333333"/>
                 </a:solidFill>
@@ -12969,7 +12969,7 @@
               <a:t>–   </a:t>
             </a:r>
             <a:r>
-              <a:rPr sz="1300" b="1" i="0">
+              <a:rPr sz="1900" b="1" i="0">
                 <a:solidFill>
                   <a:srgbClr val="333333"/>
                 </a:solidFill>
@@ -12978,7 +12978,7 @@
               <a:t>Prueba 2, para conjuntos completos: «EXCEPT» en los DOS sentidos.</a:t>
             </a:r>
             <a:r>
-              <a:rPr sz="1300" b="0" i="0">
+              <a:rPr sz="1900" b="0" i="0">
                 <a:solidFill>
                   <a:srgbClr val="333333"/>
                 </a:solidFill>
@@ -12987,7 +12987,7 @@
               <a:t> «A EXCEPT B» devuelve lo que esta en A y no en B. Que salga vacio </a:t>
             </a:r>
             <a:r>
-              <a:rPr sz="1300" b="1" i="0">
+              <a:rPr sz="1900" b="1" i="0">
                 <a:solidFill>
                   <a:srgbClr val="333333"/>
                 </a:solidFill>
@@ -12996,7 +12996,7 @@
               <a:t>no</a:t>
             </a:r>
             <a:r>
-              <a:rPr sz="1300" b="0" i="0">
+              <a:rPr sz="1900" b="0" i="0">
                 <a:solidFill>
                   <a:srgbClr val="333333"/>
                 </a:solidFill>
@@ -13005,7 +13005,7 @@
               <a:t> prueba la igualdad: B puede tener filas de mas. Se corren las dos direcciones unidas con «UNION ALL» y se exige </a:t>
             </a:r>
             <a:r>
-              <a:rPr sz="1300" b="1" i="0">
+              <a:rPr sz="1900" b="1" i="0">
                 <a:solidFill>
                   <a:srgbClr val="333333"/>
                 </a:solidFill>
@@ -13014,7 +13014,7 @@
               <a:t>cero filas</a:t>
             </a:r>
             <a:r>
-              <a:rPr sz="1300" b="0" i="0">
+              <a:rPr sz="1900" b="0" i="0">
                 <a:solidFill>
                   <a:srgbClr val="333333"/>
                 </a:solidFill>
@@ -13030,7 +13030,7 @@
               </a:spcAft>
             </a:pPr>
             <a:r>
-              <a:rPr sz="1300" b="0" i="0">
+              <a:rPr sz="1900" b="0" i="0">
                 <a:solidFill>
                   <a:srgbClr val="333333"/>
                 </a:solidFill>
@@ -13039,7 +13039,7 @@
               <a:t>–   </a:t>
             </a:r>
             <a:r>
-              <a:rPr sz="1300" b="1" i="0">
+              <a:rPr sz="1900" b="1" i="0">
                 <a:solidFill>
                   <a:srgbClr val="333333"/>
                 </a:solidFill>
@@ -13048,7 +13048,7 @@
               <a:t>Sin «LIMIT» en la prueba.</a:t>
             </a:r>
             <a:r>
-              <a:rPr sz="1300" b="0" i="0">
+              <a:rPr sz="1900" b="0" i="0">
                 <a:solidFill>
                   <a:srgbClr val="333333"/>
                 </a:solidFill>
@@ -13064,7 +13064,7 @@
               </a:spcAft>
             </a:pPr>
             <a:r>
-              <a:rPr sz="1300" b="0" i="0">
+              <a:rPr sz="1900" b="0" i="0">
                 <a:solidFill>
                   <a:srgbClr val="333333"/>
                 </a:solidFill>
@@ -13073,7 +13073,7 @@
               <a:t>–   </a:t>
             </a:r>
             <a:r>
-              <a:rPr sz="1300" b="1" i="0">
+              <a:rPr sz="1900" b="1" i="0">
                 <a:solidFill>
                   <a:srgbClr val="333333"/>
                 </a:solidFill>
@@ -13082,7 +13082,7 @@
               <a:t>Que NO sirve como prueba.</a:t>
             </a:r>
             <a:r>
-              <a:rPr sz="1300" b="0" i="0">
+              <a:rPr sz="1900" b="0" i="0">
                 <a:solidFill>
                   <a:srgbClr val="333333"/>
                 </a:solidFill>
@@ -13091,7 +13091,7 @@
               <a:t> «Se ve igual», «trae mas o menos lo mismo» o mirar la primera pantalla de resultados. La equivalencia se afirma con una consulta cuyo resultado </a:t>
             </a:r>
             <a:r>
-              <a:rPr sz="1300" b="1" i="0">
+              <a:rPr sz="1900" b="1" i="0">
                 <a:solidFill>
                   <a:srgbClr val="333333"/>
                 </a:solidFill>
@@ -13100,7 +13100,7 @@
               <a:t>se conoce de antemano</a:t>
             </a:r>
             <a:r>
-              <a:rPr sz="1300" b="0" i="0">
+              <a:rPr sz="1900" b="0" i="0">
                 <a:solidFill>
                   <a:srgbClr val="333333"/>
                 </a:solidFill>
@@ -13320,7 +13320,7 @@
               </a:spcAft>
             </a:pPr>
             <a:r>
-              <a:rPr sz="1600" b="0" i="0">
+              <a:rPr sz="2000" b="0" i="0">
                 <a:solidFill>
                   <a:srgbClr val="333333"/>
                 </a:solidFill>
@@ -13329,7 +13329,7 @@
               <a:t>–   </a:t>
             </a:r>
             <a:r>
-              <a:rPr sz="1600" b="1" i="0">
+              <a:rPr sz="2000" b="1" i="0">
                 <a:solidFill>
                   <a:srgbClr val="333333"/>
                 </a:solidFill>
@@ -13338,7 +13338,7 @@
               <a:t>Herramienta:</a:t>
             </a:r>
             <a:r>
-              <a:rPr sz="1600" b="0" i="0">
+              <a:rPr sz="2000" b="0" i="0">
                 <a:solidFill>
                   <a:srgbClr val="333333"/>
                 </a:solidFill>
@@ -13354,7 +13354,7 @@
               </a:spcAft>
             </a:pPr>
             <a:r>
-              <a:rPr sz="1600" b="0" i="0">
+              <a:rPr sz="2000" b="0" i="0">
                 <a:solidFill>
                   <a:srgbClr val="333333"/>
                 </a:solidFill>
@@ -13363,7 +13363,7 @@
               <a:t>–   </a:t>
             </a:r>
             <a:r>
-              <a:rPr sz="1600" b="1" i="0">
+              <a:rPr sz="2000" b="1" i="0">
                 <a:solidFill>
                   <a:srgbClr val="333333"/>
                 </a:solidFill>
@@ -13372,7 +13372,7 @@
               <a:t>Demo:</a:t>
             </a:r>
             <a:r>
-              <a:rPr sz="1600" b="0" i="0">
+              <a:rPr sz="2000" b="0" i="0">
                 <a:solidFill>
                   <a:srgbClr val="333333"/>
                 </a:solidFill>
@@ -13388,7 +13388,7 @@
               </a:spcAft>
             </a:pPr>
             <a:r>
-              <a:rPr sz="1600" b="0" i="0">
+              <a:rPr sz="2000" b="0" i="0">
                 <a:solidFill>
                   <a:srgbClr val="333333"/>
                 </a:solidFill>
@@ -13404,7 +13404,7 @@
               </a:spcAft>
             </a:pPr>
             <a:r>
-              <a:rPr sz="1600" b="0" i="0">
+              <a:rPr sz="2000" b="0" i="0">
                 <a:solidFill>
                   <a:srgbClr val="333333"/>
                 </a:solidFill>

--- a/Bases de Datos II/Clases/Clase 6 - Optimizacion de consultas/Presentacion.pptx
+++ b/Bases de Datos II/Clases/Clase 6 - Optimizacion de consultas/Presentacion.pptx
@@ -3845,7 +3845,7 @@
                 </a:solidFill>
                 <a:latin typeface="Calibri"/>
               </a:rPr>
-              <a:t>ExamLab</a:t>
+              <a:t>la plataforma del curso</a:t>
             </a:r>
           </a:p>
           <a:p>
@@ -4991,7 +4991,7 @@
                 </a:solidFill>
                 <a:latin typeface="Calibri"/>
               </a:rPr>
-              <a:t> Entrega domingo 23:59.</a:t>
+              <a:t> Entrega en la fecha que indique el docente.</a:t>
             </a:r>
           </a:p>
         </p:txBody>
@@ -5315,7 +5315,7 @@
                 </a:solidFill>
                 <a:latin typeface="Calibri"/>
               </a:rPr>
-              <a:t> PostgreSQL dentro de ExamLab, en el navegador. «EXPLAIN», «EXPLAIN ANALYZE» y la opción «BUFFERS» corren de verdad; ahí se califica.</a:t>
+              <a:t> PostgreSQL dentro de la plataforma del curso, en el navegador. «EXPLAIN», «EXPLAIN ANALYZE» y la opción «BUFFERS» corren de verdad; ahí se califica.</a:t>
             </a:r>
           </a:p>
           <a:p>
@@ -8301,7 +8301,7 @@
                 </a:solidFill>
                 <a:latin typeface="Calibri"/>
               </a:rPr>
-              <a:t>–   Evidencia: el SQL y su salida quedan guardados en cada pregunta de ExamLab.</a:t>
+              <a:t>–   Evidencia: el SQL y su salida quedan guardados en cada pregunta de la plataforma del curso.</a:t>
             </a:r>
           </a:p>
           <a:p>
@@ -8358,7 +8358,7 @@
                 </a:solidFill>
                 <a:latin typeface="Calibri"/>
               </a:rPr>
-              <a:t>Entrega en ExamLab</a:t>
+              <a:t>Entrega en la plataforma del curso</a:t>
             </a:r>
             <a:r>
               <a:rPr sz="2000" b="0" i="0">
@@ -8367,7 +8367,7 @@
                 </a:solidFill>
                 <a:latin typeface="Calibri"/>
               </a:rPr>
-              <a:t> (https://uniaj.examlab.workers.dev/) — domingo 23:59 cuando aplique taller.</a:t>
+              <a:t> — en la fecha que indique el docente.</a:t>
             </a:r>
           </a:p>
         </p:txBody>
@@ -8962,7 +8962,7 @@
                 </a:solidFill>
                 <a:latin typeface="Calibri"/>
               </a:rPr>
-              <a:t>Taller de la semana en ExamLab (https://uniaj.examlab.workers.dev/): domingo 23:59 (regla del Acuerdo) cuando aplique.</a:t>
+              <a:t>Si el docente asigna taller esta semana, él indica el canal y la fecha.</a:t>
             </a:r>
           </a:p>
         </p:txBody>
@@ -9457,7 +9457,7 @@
                 </a:solidFill>
                 <a:latin typeface="Calibri"/>
               </a:rPr>
-              <a:t>ExamLab (PostgreSQL) + Google Docs</a:t>
+              <a:t>PostgreSQL en el navegador + Google Docs</a:t>
             </a:r>
             <a:r>
               <a:rPr sz="2000" b="0" i="0">
@@ -13344,7 +13344,7 @@
                 </a:solidFill>
                 <a:latin typeface="Calibri"/>
               </a:rPr>
-              <a:t> ExamLab (PostgreSQL) + Google Docs</a:t>
+              <a:t> PostgreSQL en el navegador + Google Docs</a:t>
             </a:r>
           </a:p>
           <a:p>
@@ -13378,7 +13378,7 @@
                 </a:solidFill>
                 <a:latin typeface="Calibri"/>
               </a:rPr>
-              <a:t> Consulta pesada citas+mascotas+duenos -&gt; version filtrada y proyectada, con EXPLAIN ANALYZE antes y despues, en ExamLab.</a:t>
+              <a:t> Consulta pesada citas+mascotas+duenos -&gt; version filtrada y proyectada, con EXPLAIN ANALYZE antes y despues, en la plataforma del curso.</a:t>
             </a:r>
           </a:p>
           <a:p>
